--- a/docs/ativo/material_qualificacao_2026-10-05.pptx
+++ b/docs/ativo/material_qualificacao_2026-10-05.pptx
@@ -3513,7 +3513,7 @@
               </a:defRPr>
             </a:pPr>
             <a:r>
-              <a:t>Seis baselines de mitigação (comparação sistemática planejada)</a:t>
+              <a:t>Baselines de mitigação para comparação sistemática</a:t>
             </a:r>
           </a:p>
         </p:txBody>
@@ -4001,7 +4001,7 @@
               </a:defRPr>
             </a:pPr>
             <a:r>
-              <a:t>Qualificação · Marcello Ozzetti · Prof. Marcos Quiles · UNIFESP/ICT</a:t>
+              <a:t>Exame de Qualificação · Marcello Ozzetti · Orientação: Prof. Dr. Marcos G. Quiles · PPG-CC UNIFESP/ICT</a:t>
             </a:r>
           </a:p>
         </p:txBody>
@@ -4089,7 +4089,7 @@
               </a:defRPr>
             </a:pPr>
             <a:r>
-              <a:t>Cinco lacunas científicas identificadas na literatura</a:t>
+              <a:t>Lacunas científicas identificadas na literatura</a:t>
             </a:r>
           </a:p>
         </p:txBody>
@@ -4524,7 +4524,7 @@
               </a:defRPr>
             </a:pPr>
             <a:r>
-              <a:t>Qualificação · Marcello Ozzetti · Prof. Marcos Quiles · UNIFESP/ICT</a:t>
+              <a:t>Exame de Qualificação · Marcello Ozzetti · Orientação: Prof. Dr. Marcos G. Quiles · PPG-CC UNIFESP/ICT</a:t>
             </a:r>
           </a:p>
         </p:txBody>
@@ -4612,7 +4612,7 @@
               </a:defRPr>
             </a:pPr>
             <a:r>
-              <a:t>Pipeline em 6 etapas</a:t>
+              <a:t>Pipeline experimental em seis etapas</a:t>
             </a:r>
           </a:p>
         </p:txBody>
@@ -4714,7 +4714,7 @@
               </a:defRPr>
             </a:pPr>
             <a:r>
-              <a:t>Fluxo top-down organizado em 3 fases: diagnóstico (etapas 1-2), método proposto (etapa 3) e validação/síntese (etapas 4-6).</a:t>
+              <a:t>Fluxo top-down organizado em três fases: diagnóstico (etapas 1 e 2), método proposto (etapa 3) e validação e síntese (etapas 4 a 6).</a:t>
             </a:r>
           </a:p>
         </p:txBody>
@@ -4749,7 +4749,7 @@
               </a:defRPr>
             </a:pPr>
             <a:r>
-              <a:t>Qualificação · Marcello Ozzetti · Prof. Marcos Quiles · UNIFESP/ICT</a:t>
+              <a:t>Exame de Qualificação · Marcello Ozzetti · Orientação: Prof. Dr. Marcos G. Quiles · PPG-CC UNIFESP/ICT</a:t>
             </a:r>
           </a:p>
         </p:txBody>
@@ -4837,7 +4837,7 @@
               </a:defRPr>
             </a:pPr>
             <a:r>
-              <a:t>Etapa 1 — Classificador de tom de pele (próprio)</a:t>
+              <a:t>Etapa 1: classificador MST treinado internamente</a:t>
             </a:r>
           </a:p>
         </p:txBody>
@@ -4926,7 +4926,7 @@
                   <a:srgbClr val="3D424E"/>
                 </a:solidFill>
               </a:rPr>
-              <a:t>recebe uma foto de rosto e devolve as 10 probabilidades da escala Monk.</a:t>
+              <a:t>produz, para cada imagem facial, o vetor softmax sobre os dez tons da escala Monk.</a:t>
             </a:r>
           </a:p>
           <a:p>
@@ -4949,7 +4949,7 @@
                   <a:srgbClr val="3D424E"/>
                 </a:solidFill>
               </a:rPr>
-              <a:t>treinar nosso próprio classificador — não depender do SkinToneNet (Matias 2026), cujos pesos e dataset STW ainda não foram liberados.</a:t>
+              <a:t>adotar treinamento interno do classificador, reduzindo dependência do release do SkinToneNet (Matias, 2026), cujos pesos e dataset STW ainda não foram divulgados publicamente.</a:t>
             </a:r>
           </a:p>
           <a:p>
@@ -4972,7 +4972,7 @@
                   <a:srgbClr val="3D424E"/>
                 </a:solidFill>
               </a:rPr>
-              <a:t>MSTE — Monk Skin Tone Examples (Monk, 2019, Google) e Casual Conversations v2 (Porgali et al., 2023, Meta).</a:t>
+              <a:t>Monk Skin Tone Examples (Monk, 2019) e Casual Conversations v2 (Porgali et al., 2023).</a:t>
             </a:r>
           </a:p>
           <a:p>
@@ -4995,7 +4995,7 @@
                   <a:srgbClr val="3D424E"/>
                 </a:solidFill>
               </a:rPr>
-              <a:t>detecta o rosto (MTCNN, Zhang et al. 2016), alinha, corta e classifica — funciona em qualquer dataset, até os que não têm anotação.</a:t>
+              <a:t>detecção facial (MTCNN, Zhang et al., 2016), alinhamento, recorte e classificação — viabiliza inferência em datasets sem anotação MST.</a:t>
             </a:r>
           </a:p>
           <a:p>
@@ -5018,7 +5018,7 @@
                   <a:srgbClr val="3D424E"/>
                 </a:solidFill>
               </a:rPr>
-              <a:t>protocolo humano interno (~250 imagens do FairFace) + sensitivity analysis com 2 a 3 classificadores alternativos.</a:t>
+              <a:t>protocolo humano interno (aproximadamente 250 imagens do FairFace) e sensitivity analysis com dois a três classificadores alternativos.</a:t>
             </a:r>
           </a:p>
         </p:txBody>
@@ -5053,7 +5053,7 @@
               </a:defRPr>
             </a:pPr>
             <a:r>
-              <a:t>Qualificação · Marcello Ozzetti · Prof. Marcos Quiles · UNIFESP/ICT</a:t>
+              <a:t>Exame de Qualificação · Marcello Ozzetti · Orientação: Prof. Dr. Marcos G. Quiles · PPG-CC UNIFESP/ICT</a:t>
             </a:r>
           </a:p>
         </p:txBody>
@@ -5141,7 +5141,7 @@
               </a:defRPr>
             </a:pPr>
             <a:r>
-              <a:t>Por que ConvNeXt-T (Liu et al., 2022)?</a:t>
+              <a:t>Racional da escolha do backbone: ConvNeXt-T (Liu et al., 2022)</a:t>
             </a:r>
           </a:p>
         </p:txBody>
@@ -5357,7 +5357,7 @@
               </a:defRPr>
             </a:pPr>
             <a:r>
-              <a:t>Qualificação · Marcello Ozzetti · Prof. Marcos Quiles · UNIFESP/ICT</a:t>
+              <a:t>Exame de Qualificação · Marcello Ozzetti · Orientação: Prof. Dr. Marcos G. Quiles · PPG-CC UNIFESP/ICT</a:t>
             </a:r>
           </a:p>
         </p:txBody>
@@ -5445,7 +5445,7 @@
               </a:defRPr>
             </a:pPr>
             <a:r>
-              <a:t>Por que FiLM (Perez et al., 2018)?</a:t>
+              <a:t>Racional do mecanismo de condicionamento: FiLM (Perez et al., 2018)</a:t>
             </a:r>
           </a:p>
         </p:txBody>
@@ -5684,7 +5684,7 @@
               </a:defRPr>
             </a:pPr>
             <a:r>
-              <a:t>Qualificação · Marcello Ozzetti · Prof. Marcos Quiles · UNIFESP/ICT</a:t>
+              <a:t>Exame de Qualificação · Marcello Ozzetti · Orientação: Prof. Dr. Marcos G. Quiles · PPG-CC UNIFESP/ICT</a:t>
             </a:r>
           </a:p>
         </p:txBody>
@@ -5772,7 +5772,7 @@
               </a:defRPr>
             </a:pPr>
             <a:r>
-              <a:t>Mecanismo FiLM — como o tom entra como contexto</a:t>
+              <a:t>Mecanismo FiLM: modulação de features condicionada ao tom de pele</a:t>
             </a:r>
           </a:p>
         </p:txBody>
@@ -5874,7 +5874,7 @@
               </a:defRPr>
             </a:pPr>
             <a:r>
-              <a:t>FiLM (Perez et al., 2018) modula as features intermediárias do ConvNeXt-T canal a canal, condicionadas ao vetor MST. Overhead: ~1,3 % do backbone.</a:t>
+              <a:t>FiLM (Perez et al., 2018) modula as features intermediárias do ConvNeXt-T canal a canal, condicionadas ao vetor MST. Overhead paramétrico: aproximadamente 1,3 % do backbone.</a:t>
             </a:r>
           </a:p>
         </p:txBody>
@@ -5909,7 +5909,7 @@
               </a:defRPr>
             </a:pPr>
             <a:r>
-              <a:t>Qualificação · Marcello Ozzetti · Prof. Marcos Quiles · UNIFESP/ICT</a:t>
+              <a:t>Exame de Qualificação · Marcello Ozzetti · Orientação: Prof. Dr. Marcos G. Quiles · PPG-CC UNIFESP/ICT</a:t>
             </a:r>
           </a:p>
         </p:txBody>
@@ -5997,7 +5997,7 @@
               </a:defRPr>
             </a:pPr>
             <a:r>
-              <a:t>Três configurações comparadas no estudo de ablation</a:t>
+              <a:t>Configurações do estudo de ablation arquitetural</a:t>
             </a:r>
           </a:p>
         </p:txBody>
@@ -6338,7 +6338,7 @@
               </a:defRPr>
             </a:pPr>
             <a:r>
-              <a:t>Qualificação · Marcello Ozzetti · Prof. Marcos Quiles · UNIFESP/ICT</a:t>
+              <a:t>Exame de Qualificação · Marcello Ozzetti · Orientação: Prof. Dr. Marcos G. Quiles · PPG-CC UNIFESP/ICT</a:t>
             </a:r>
           </a:p>
         </p:txBody>
@@ -6426,7 +6426,7 @@
               </a:defRPr>
             </a:pPr>
             <a:r>
-              <a:t>Como validamos — cenários e norma</a:t>
+              <a:t>Protocolo de validação: cenários e norma</a:t>
             </a:r>
           </a:p>
         </p:txBody>
@@ -6515,7 +6515,7 @@
                   <a:srgbClr val="3D424E"/>
                 </a:solidFill>
               </a:rPr>
-              <a:t>métricas por classe racial (7 classes do FairFace).</a:t>
+              <a:t>reporte estratificado por classe racial (sete classes do FairFace).</a:t>
             </a:r>
           </a:p>
           <a:p>
@@ -6538,7 +6538,7 @@
                   <a:srgbClr val="3D424E"/>
                 </a:solidFill>
               </a:rPr>
-              <a:t>análise interseccional (8 subgrupos, seguindo Gender Shades — Buolamwini &amp; Gebru, 2018).</a:t>
+              <a:t>análise interseccional (oito subgrupos), conforme protocolo estabelecido por Gender Shades (Buolamwini &amp; Gebru, 2018).</a:t>
             </a:r>
           </a:p>
           <a:p>
@@ -6561,7 +6561,7 @@
                   <a:srgbClr val="3D424E"/>
                 </a:solidFill>
               </a:rPr>
-              <a:t>ISO/IEC 19795-10:2024 — padrão internacional para reporte de desempenho biométrico entre grupos.</a:t>
+              <a:t>ISO/IEC 19795-10:2024, padrão internacional para reporte de desempenho biométrico estratificado entre grupos demográficos.</a:t>
             </a:r>
           </a:p>
           <a:p>
@@ -6584,7 +6584,7 @@
                   <a:srgbClr val="3D424E"/>
                 </a:solidFill>
               </a:rPr>
-              <a:t>3 sementes independentes por experimento (42, 1, 2), comparação pareada, intervalo de confiança 95 % via bootstrap.</a:t>
+              <a:t>três sementes independentes por experimento (42, 1, 2), comparação pareada e intervalo de confiança de 95 % via bootstrap não paramétrico.</a:t>
             </a:r>
           </a:p>
           <a:p>
@@ -6607,7 +6607,7 @@
                   <a:srgbClr val="3D424E"/>
                 </a:solidFill>
               </a:rPr>
-              <a:t>RFW (Wang et al., 2019) e BFW (Robinson et al., 2020) — pares oficiais 1:1.</a:t>
+              <a:t>RFW (Wang et al., 2019) e BFW (Robinson et al., 2020), com pares oficiais de verificação 1:1.</a:t>
             </a:r>
           </a:p>
         </p:txBody>
@@ -6642,7 +6642,7 @@
               </a:defRPr>
             </a:pPr>
             <a:r>
-              <a:t>Qualificação · Marcello Ozzetti · Prof. Marcos Quiles · UNIFESP/ICT</a:t>
+              <a:t>Exame de Qualificação · Marcello Ozzetti · Orientação: Prof. Dr. Marcos G. Quiles · PPG-CC UNIFESP/ICT</a:t>
             </a:r>
           </a:p>
         </p:txBody>
@@ -6730,7 +6730,7 @@
               </a:defRPr>
             </a:pPr>
             <a:r>
-              <a:t>Triangulação de métricas — nenhuma métrica isolada basta</a:t>
+              <a:t>Triangulação de métricas de equidade</a:t>
             </a:r>
           </a:p>
         </p:txBody>
@@ -6819,7 +6819,7 @@
                   <a:srgbClr val="3D424E"/>
                 </a:solidFill>
               </a:rPr>
-              <a:t>Teorema da Impossibilidade — não existe métrica única de equidade que satisfaça todos os critérios simultaneamente.</a:t>
+              <a:t>Teorema da Impossibilidade — demonstra a impossibilidade formal de satisfação simultânea de múltiplas definições de equidade quando as prevalências diferem entre grupos.</a:t>
             </a:r>
           </a:p>
           <a:p>
@@ -6842,7 +6842,7 @@
                   <a:srgbClr val="3D424E"/>
                 </a:solidFill>
               </a:rPr>
-              <a:t>razão entre pior e melhor F1. Mede o quão desigual é o desempenho entre grupos.</a:t>
+              <a:t>razão entre F1 mínimo e máximo entre grupos; mensura a desigualdade de desempenho.</a:t>
             </a:r>
           </a:p>
           <a:p>
@@ -6865,7 +6865,7 @@
                   <a:srgbClr val="3D424E"/>
                 </a:solidFill>
               </a:rPr>
-              <a:t>protege o grupo mais fraco — garante que a melhoria não vem só no meio.</a:t>
+              <a:t>protege o grupo sub-representado; evita ganhos concentrados apenas na média agregada.</a:t>
             </a:r>
           </a:p>
           <a:p>
@@ -6888,7 +6888,7 @@
                   <a:srgbClr val="3D424E"/>
                 </a:solidFill>
               </a:rPr>
-              <a:t>iguala a taxa de acerto entre grupos, condicionada ao rótulo verdadeiro.</a:t>
+              <a:t>requer igualdade de taxa de verdadeiro positivo (TPR) condicionada ao rótulo verdadeiro.</a:t>
             </a:r>
           </a:p>
           <a:p>
@@ -6911,7 +6911,7 @@
                   <a:srgbClr val="3D424E"/>
                 </a:solidFill>
               </a:rPr>
-              <a:t>vai além — iguala acerto e erro entre grupos.</a:t>
+              <a:t>requisito estrito: igualdade simultânea de TPR e FPR entre grupos.</a:t>
             </a:r>
           </a:p>
           <a:p>
@@ -6934,7 +6934,7 @@
                   <a:srgbClr val="3D424E"/>
                 </a:solidFill>
               </a:rPr>
-              <a:t>para cada modelo, plotamos acurácia × disparidade — vemos quem está na fronteira.</a:t>
+              <a:t>identificação da fronteira Pareto no trade-off acurácia agregada × disparidade demográfica.</a:t>
             </a:r>
           </a:p>
         </p:txBody>
@@ -6969,7 +6969,7 @@
               </a:defRPr>
             </a:pPr>
             <a:r>
-              <a:t>Qualificação · Marcello Ozzetti · Prof. Marcos Quiles · UNIFESP/ICT</a:t>
+              <a:t>Exame de Qualificação · Marcello Ozzetti · Orientação: Prof. Dr. Marcos G. Quiles · PPG-CC UNIFESP/ICT</a:t>
             </a:r>
           </a:p>
         </p:txBody>
@@ -7057,7 +7057,7 @@
               </a:defRPr>
             </a:pPr>
             <a:r>
-              <a:t>Reconhecimento facial já é infraestrutura social</a:t>
+              <a:t>Reconhecimento facial: adoção sociotécnica em larga escala</a:t>
             </a:r>
           </a:p>
         </p:txBody>
@@ -7721,7 +7721,7 @@
               </a:defRPr>
             </a:pPr>
             <a:r>
-              <a:t>diferença na taxa de</a:t>
+              <a:t>disparidade na taxa de</a:t>
             </a:r>
             <a:br/>
             <a:r>
@@ -7729,7 +7729,7 @@
             </a:r>
             <a:br/>
             <a:r>
-              <a:t>grupos raciais</a:t>
+              <a:t>grupos demográficos</a:t>
             </a:r>
           </a:p>
         </p:txBody>
@@ -7821,7 +7821,7 @@
                   <a:srgbClr val="3D424E"/>
                 </a:solidFill>
               </a:rPr>
-              <a:t>a tecnologia funciona bem para a maioria, mas não funciona igualmente bem para todos.</a:t>
+              <a:t>desempenho agregado favorável coexiste com disparidade sistemática entre subgrupos demográficos.</a:t>
             </a:r>
           </a:p>
         </p:txBody>
@@ -7856,7 +7856,7 @@
               </a:defRPr>
             </a:pPr>
             <a:r>
-              <a:t>Qualificação · Marcello Ozzetti · Prof. Marcos Quiles · UNIFESP/ICT</a:t>
+              <a:t>Exame de Qualificação · Marcello Ozzetti · Orientação: Prof. Dr. Marcos G. Quiles · PPG-CC UNIFESP/ICT</a:t>
             </a:r>
           </a:p>
         </p:txBody>
@@ -7944,7 +7944,7 @@
               </a:defRPr>
             </a:pPr>
             <a:r>
-              <a:t>Contribuições esperadas — 3 eixos, 7 contribuições</a:t>
+              <a:t>Contribuições esperadas</a:t>
             </a:r>
           </a:p>
         </p:txBody>
@@ -8273,7 +8273,7 @@
               </a:defRPr>
             </a:pPr>
             <a:r>
-              <a:t>Qualificação · Marcello Ozzetti · Prof. Marcos Quiles · UNIFESP/ICT</a:t>
+              <a:t>Exame de Qualificação · Marcello Ozzetti · Orientação: Prof. Dr. Marcos G. Quiles · PPG-CC UNIFESP/ICT</a:t>
             </a:r>
           </a:p>
         </p:txBody>
@@ -8991,7 +8991,7 @@
               </a:defRPr>
             </a:pPr>
             <a:r>
-              <a:t>Qualificação · Marcello Ozzetti · Prof. Marcos Quiles · UNIFESP/ICT</a:t>
+              <a:t>Exame de Qualificação · Marcello Ozzetti · Orientação: Prof. Dr. Marcos G. Quiles · PPG-CC UNIFESP/ICT</a:t>
             </a:r>
           </a:p>
         </p:txBody>
@@ -9079,7 +9079,7 @@
               </a:defRPr>
             </a:pPr>
             <a:r>
-              <a:t>Riscos identificados e mitigações</a:t>
+              <a:t>Riscos identificados e estratégias de mitigação</a:t>
             </a:r>
           </a:p>
         </p:txBody>
@@ -9473,7 +9473,7 @@
               </a:defRPr>
             </a:pPr>
             <a:r>
-              <a:t>Qualificação · Marcello Ozzetti · Prof. Marcos Quiles · UNIFESP/ICT</a:t>
+              <a:t>Exame de Qualificação · Marcello Ozzetti · Orientação: Prof. Dr. Marcos G. Quiles · PPG-CC UNIFESP/ICT</a:t>
             </a:r>
           </a:p>
         </p:txBody>
@@ -9561,7 +9561,7 @@
               </a:defRPr>
             </a:pPr>
             <a:r>
-              <a:t>Estado atual — adiantados no cronograma</a:t>
+              <a:t>Estado atual do trabalho</a:t>
             </a:r>
           </a:p>
         </p:txBody>
@@ -10083,7 +10083,7 @@
               </a:defRPr>
             </a:pPr>
             <a:r>
-              <a:t>Entregas concretas até 28/09/2026</a:t>
+              <a:t>Estado das entregas em 28/09/2026</a:t>
             </a:r>
           </a:p>
         </p:txBody>
@@ -10129,7 +10129,7 @@
                   <a:srgbClr val="3D424E"/>
                 </a:solidFill>
               </a:rPr>
-              <a:t>classificador MST próprio, camada auto-suficiente, matriz MST × raça, teste da H2.</a:t>
+              <a:t>classificador MST treinado internamente, camada de preprocessamento auto-suficiente, matriz MST × raça, teste formal de H2.</a:t>
             </a:r>
           </a:p>
           <a:p>
@@ -10152,7 +10152,7 @@
                   <a:srgbClr val="3D424E"/>
                 </a:solidFill>
               </a:rPr>
-              <a:t>camada FiLM + wrapper ConvNeXt-T + ensembler CLIP-text + pipeline de treino das 3 configs.</a:t>
+              <a:t>camada FiLM, wrapper ConvNeXt-T, ensembler CLIP-text e pipeline de treinamento das três configurações.</a:t>
             </a:r>
           </a:p>
           <a:p>
@@ -10175,7 +10175,7 @@
                   <a:srgbClr val="3D424E"/>
                 </a:solidFill>
               </a:rPr>
-              <a:t>métricas de fairness + 4 baselines + Pareto + verificação RFW/BFW + decomposição ANOVA/R².</a:t>
+              <a:t>métricas de equidade, quatro baselines, análise Pareto, verificação em RFW/BFW e decomposição ANOVA/R².</a:t>
             </a:r>
           </a:p>
           <a:p>
@@ -10198,7 +10198,7 @@
                   <a:srgbClr val="3D424E"/>
                 </a:solidFill>
               </a:rPr>
-              <a:t>5 capítulos consolidados, 3 passadas de revisão de estilo, 104 fichas bibliográficas.</a:t>
+              <a:t>cinco capítulos consolidados, três passadas de revisão de estilo e 104 fichas bibliográficas.</a:t>
             </a:r>
           </a:p>
         </p:txBody>
@@ -10233,7 +10233,7 @@
               </a:defRPr>
             </a:pPr>
             <a:r>
-              <a:t>Qualificação · Marcello Ozzetti · Prof. Marcos Quiles · UNIFESP/ICT</a:t>
+              <a:t>Exame de Qualificação · Marcello Ozzetti · Orientação: Prof. Dr. Marcos G. Quiles · PPG-CC UNIFESP/ICT</a:t>
             </a:r>
           </a:p>
         </p:txBody>
@@ -10464,7 +10464,7 @@
               </a:defRPr>
             </a:pPr>
             <a:r>
-              <a:t>O tema virou obrigação regulatória</a:t>
+              <a:t>Regulação formal em vigor: European AI Act (2024)</a:t>
             </a:r>
           </a:p>
         </p:txBody>
@@ -11000,7 +11000,7 @@
               </a:defRPr>
             </a:pPr>
             <a:r>
-              <a:t>Auditoria de equidade vira REQUISITO FORMAL para sistemas biométricos.</a:t>
+              <a:t>Auditoria de equidade torna-se requisito formal para sistemas biométricos.</a:t>
             </a:r>
           </a:p>
         </p:txBody>
@@ -11228,7 +11228,7 @@
               </a:defRPr>
             </a:pPr>
             <a:r>
-              <a:t>A pergunta científica mudou. Já não é “existe viés?” — está provado. É “como mitigar de forma defensável e auditável?”</a:t>
+              <a:t>A questão científica desloca-se da constatação do viés — empiricamente estabelecida — para o desenvolvimento de mecanismos de mitigação defensáveis e auditáveis.</a:t>
             </a:r>
           </a:p>
         </p:txBody>
@@ -11263,7 +11263,7 @@
               </a:defRPr>
             </a:pPr>
             <a:r>
-              <a:t>Qualificação · Marcello Ozzetti · Prof. Marcos Quiles · UNIFESP/ICT</a:t>
+              <a:t>Exame de Qualificação · Marcello Ozzetti · Orientação: Prof. Dr. Marcos G. Quiles · PPG-CC UNIFESP/ICT</a:t>
             </a:r>
           </a:p>
         </p:txBody>
@@ -11351,7 +11351,7 @@
               </a:defRPr>
             </a:pPr>
             <a:r>
-              <a:t>Disparidade estável de ~30 pontos entre grupos raciais</a:t>
+              <a:t>Disparidade sistemática de aproximadamente 30 pontos percentuais entre grupos raciais</a:t>
             </a:r>
           </a:p>
         </p:txBody>
@@ -11453,7 +11453,7 @@
               </a:defRPr>
             </a:pPr>
             <a:r>
-              <a:t>FaceScanPaliGemma (AlDahoul et al., 2024) sobre o dataset FairFace (Kärkkäinen &amp; Joo, 2021). Diferença entre Black e Latinx = 30 pontos percentuais.</a:t>
+              <a:t>FaceScanPaliGemma (AlDahoul et al., 2024) avaliado sobre o dataset FairFace (Kärkkäinen &amp; Joo, 2021). Diferencial entre Black e Latinx: 30 pontos percentuais em F1.</a:t>
             </a:r>
           </a:p>
         </p:txBody>
@@ -11488,7 +11488,7 @@
               </a:defRPr>
             </a:pPr>
             <a:r>
-              <a:t>Qualificação · Marcello Ozzetti · Prof. Marcos Quiles · UNIFESP/ICT</a:t>
+              <a:t>Exame de Qualificação · Marcello Ozzetti · Orientação: Prof. Dr. Marcos G. Quiles · PPG-CC UNIFESP/ICT</a:t>
             </a:r>
           </a:p>
         </p:txBody>
@@ -11576,7 +11576,7 @@
               </a:defRPr>
             </a:pPr>
             <a:r>
-              <a:t>Por que “Latinx” é a classe mais difícil?</a:t>
+              <a:t>Heterogeneidade fenotípica intra-categorial: o caso Latinx</a:t>
             </a:r>
           </a:p>
         </p:txBody>
@@ -11724,7 +11724,7 @@
                   <a:srgbClr val="3D424E"/>
                 </a:solidFill>
               </a:rPr>
-              <a:t>a categoria agrupa fenótipos muito diferentes em uma única etiqueta.</a:t>
+              <a:t>a rotulagem monolítica agrega fenótipos heterogêneos sob única categoria discreta.</a:t>
             </a:r>
           </a:p>
           <a:p>
@@ -11747,7 +11747,7 @@
                   <a:srgbClr val="3D424E"/>
                 </a:solidFill>
               </a:rPr>
-              <a:t>10 tons — sucessora moderna da escala Fitzpatrick, que sub-representa tons escuros.</a:t>
+              <a:t>escala de 10 tons — sucessora moderna da escala Fitzpatrick, que sub-representa tons escuros.</a:t>
             </a:r>
           </a:p>
           <a:p>
@@ -11770,7 +11770,7 @@
                   <a:srgbClr val="3D424E"/>
                 </a:solidFill>
               </a:rPr>
-              <a:t>consolida a MST como padrão moderno de auditoria em fairness facial.</a:t>
+              <a:t>consolida a MST como padrão moderno de auditoria de equidade em análise facial.</a:t>
             </a:r>
           </a:p>
           <a:p>
@@ -11793,7 +11793,7 @@
                   <a:srgbClr val="3D424E"/>
                 </a:solidFill>
               </a:rPr>
-              <a:t>a rotulagem monolítica de raça esconde essa diversidade e prejudica o modelo em grupos heterogêneos como Latinx.</a:t>
+              <a:t>a rotulagem monolítica compromete a acurácia condicional em grupos com maior variabilidade fenotípica, como Latinx.</a:t>
             </a:r>
           </a:p>
         </p:txBody>
@@ -11828,7 +11828,7 @@
               </a:defRPr>
             </a:pPr>
             <a:r>
-              <a:t>Qualificação · Marcello Ozzetti · Prof. Marcos Quiles · UNIFESP/ICT</a:t>
+              <a:t>Exame de Qualificação · Marcello Ozzetti · Orientação: Prof. Dr. Marcos G. Quiles · PPG-CC UNIFESP/ICT</a:t>
             </a:r>
           </a:p>
         </p:txBody>
@@ -11916,7 +11916,7 @@
               </a:defRPr>
             </a:pPr>
             <a:r>
-              <a:t>Contra-argumento: e se o problema não for “raça”?</a:t>
+              <a:t>Refutação concorrente: tom de pele como principal fator (Pangelinan, 2023)</a:t>
             </a:r>
           </a:p>
         </p:txBody>
@@ -12128,7 +12128,7 @@
                   <a:srgbClr val="3D424E"/>
                 </a:solidFill>
               </a:rPr>
-              <a:t>o gap racial em face recognition é primariamente explicado pela FRAÇÃO DE FACE ÚTIL na imagem, não pelo rótulo de raça.</a:t>
+              <a:t>a disparidade racial em face recognition é primariamente explicada pela fração de área facial útil na imagem (pixel information), não pelo rótulo racial.</a:t>
             </a:r>
           </a:p>
           <a:p>
@@ -12151,7 +12151,7 @@
                   <a:srgbClr val="3D424E"/>
                 </a:solidFill>
               </a:rPr>
-              <a:t>publica o SkinToneNet e reforça o tom de pele como dimensão auditável — pressiona a comunidade a abandonar rótulos nominais.</a:t>
+              <a:t>publica o SkinToneNet e reforça o tom de pele como dimensão auditável, tensionando o uso de rótulos nominais.</a:t>
             </a:r>
           </a:p>
           <a:p>
@@ -12174,7 +12174,7 @@
                   <a:srgbClr val="3D424E"/>
                 </a:solidFill>
               </a:rPr>
-              <a:t>se a refutação vale, condicionar por raça é injustificável — o sinal correto seria puramente fenotípico.</a:t>
+              <a:t>se a refutação se sustenta, o condicionamento por rótulo racial nominal perde sustentação teórica em favor do sinal fenotípico direto.</a:t>
             </a:r>
           </a:p>
         </p:txBody>
@@ -12335,7 +12335,7 @@
                   <a:srgbClr val="1F2A4E"/>
                 </a:solidFill>
               </a:rPr>
-              <a:t>Tom de pele COMPLEMENTA a raça:  </a:t>
+              <a:t>O tom de pele complementa o rótulo racial:  </a:t>
             </a:r>
             <a:r>
               <a:rPr sz="1600">
@@ -12343,7 +12343,7 @@
                   <a:srgbClr val="3D424E"/>
                 </a:solidFill>
               </a:rPr>
-              <a:t>usamos MST como contexto — o rótulo racial continua sendo o alvo de predição.</a:t>
+              <a:t>o vetor MST atua como sinal condicionante; o rótulo racial permanece como alvo de predição.</a:t>
             </a:r>
           </a:p>
           <a:p>
@@ -12366,7 +12366,7 @@
                   <a:srgbClr val="3D424E"/>
                 </a:solidFill>
               </a:rPr>
-              <a:t>H6 testa diretamente a tese de Pangelinan (R² ≥ 70 % explicado por pixel information).</a:t>
+              <a:t>a hipótese H6 testa diretamente a tese de Pangelinan (R² ≥ 70 % explicado por pixel information).</a:t>
             </a:r>
           </a:p>
           <a:p>
@@ -12381,7 +12381,7 @@
                   <a:srgbClr val="1F2A4E"/>
                 </a:solidFill>
               </a:rPr>
-              <a:t>Refutação vira contribuição:  </a:t>
+              <a:t>Refutação convertida em contribuição:  </a:t>
             </a:r>
             <a:r>
               <a:rPr sz="1600">
@@ -12389,7 +12389,7 @@
                   <a:srgbClr val="3D424E"/>
                 </a:solidFill>
               </a:rPr>
-              <a:t>se a crítica vencer, entregamos decomposição quantitativa do erro — resultado científico válido.</a:t>
+              <a:t>eventual confirmação da refutação produz decomposição quantitativa do erro, resultado científico válido em si.</a:t>
             </a:r>
           </a:p>
         </p:txBody>
@@ -12424,7 +12424,7 @@
               </a:defRPr>
             </a:pPr>
             <a:r>
-              <a:t>Qualificação · Marcello Ozzetti · Prof. Marcos Quiles · UNIFESP/ICT</a:t>
+              <a:t>Exame de Qualificação · Marcello Ozzetti · Orientação: Prof. Dr. Marcos G. Quiles · PPG-CC UNIFESP/ICT</a:t>
             </a:r>
           </a:p>
         </p:txBody>
@@ -12703,7 +12703,7 @@
               </a:defRPr>
             </a:pPr>
             <a:r>
-              <a:t>Qualificação · Marcello Ozzetti · Prof. Marcos Quiles · UNIFESP/ICT</a:t>
+              <a:t>Exame de Qualificação · Marcello Ozzetti · Orientação: Prof. Dr. Marcos G. Quiles · PPG-CC UNIFESP/ICT</a:t>
             </a:r>
           </a:p>
         </p:txBody>
@@ -13395,7 +13395,7 @@
               </a:defRPr>
             </a:pPr>
             <a:r>
-              <a:t>Qualificação · Marcello Ozzetti · Prof. Marcos Quiles · UNIFESP/ICT</a:t>
+              <a:t>Exame de Qualificação · Marcello Ozzetti · Orientação: Prof. Dr. Marcos G. Quiles · PPG-CC UNIFESP/ICT</a:t>
             </a:r>
           </a:p>
         </p:txBody>
@@ -13483,7 +13483,7 @@
               </a:defRPr>
             </a:pPr>
             <a:r>
-              <a:t>Timeline das principais respostas ao problema (2018–2026)</a:t>
+              <a:t>Linha do tempo das principais respostas ao problema (2018–2026)</a:t>
             </a:r>
           </a:p>
         </p:txBody>
@@ -13620,7 +13620,7 @@
               </a:defRPr>
             </a:pPr>
             <a:r>
-              <a:t>Qualificação · Marcello Ozzetti · Prof. Marcos Quiles · UNIFESP/ICT</a:t>
+              <a:t>Exame de Qualificação · Marcello Ozzetti · Orientação: Prof. Dr. Marcos G. Quiles · PPG-CC UNIFESP/ICT</a:t>
             </a:r>
           </a:p>
         </p:txBody>

--- a/docs/ativo/material_qualificacao_2026-10-05.pptx
+++ b/docs/ativo/material_qualificacao_2026-10-05.pptx
@@ -29,6 +29,10 @@
     <p:sldId id="277" r:id="rId28"/>
     <p:sldId id="278" r:id="rId29"/>
     <p:sldId id="279" r:id="rId30"/>
+    <p:sldId id="280" r:id="rId31"/>
+    <p:sldId id="281" r:id="rId32"/>
+    <p:sldId id="282" r:id="rId33"/>
+    <p:sldId id="283" r:id="rId34"/>
   </p:sldIdLst>
   <p:sldSz cx="12188952" cy="6858000" type="screen4x3"/>
   <p:notesSz cx="6858000" cy="9144000"/>
@@ -4036,7 +4040,7 @@
               </a:defRPr>
             </a:pPr>
             <a:r>
-              <a:t>10 / 24</a:t>
+              <a:t>10 / 28</a:t>
             </a:r>
           </a:p>
         </p:txBody>
@@ -4559,7 +4563,7 @@
               </a:defRPr>
             </a:pPr>
             <a:r>
-              <a:t>11 / 24</a:t>
+              <a:t>11 / 28</a:t>
             </a:r>
           </a:p>
         </p:txBody>
@@ -4784,7 +4788,7 @@
               </a:defRPr>
             </a:pPr>
             <a:r>
-              <a:t>12 / 24</a:t>
+              <a:t>12 / 28</a:t>
             </a:r>
           </a:p>
         </p:txBody>
@@ -4837,7 +4841,7 @@
               </a:defRPr>
             </a:pPr>
             <a:r>
-              <a:t>Etapa 1: classificador MST treinado internamente</a:t>
+              <a:t>Evolução do pipeline experimental — estado em 04/10/2026</a:t>
             </a:r>
           </a:p>
         </p:txBody>
@@ -4885,144 +4889,30 @@
           </a:p>
         </p:txBody>
       </p:sp>
-      <p:sp>
-        <p:nvSpPr>
-          <p:cNvPr id="4" name="TextBox 3"/>
-          <p:cNvSpPr txBox="1"/>
-          <p:nvPr/>
-        </p:nvSpPr>
-        <p:spPr>
-          <a:xfrm>
-            <a:off x="457200" y="1417320"/>
-            <a:ext cx="11430000" cy="4937760"/>
-          </a:xfrm>
-          <a:prstGeom prst="rect">
-            <a:avLst/>
-          </a:prstGeom>
-          <a:noFill/>
-        </p:spPr>
-        <p:txBody>
-          <a:bodyPr wrap="square">
-            <a:spAutoFit/>
-          </a:bodyPr>
-          <a:lstStyle/>
-          <a:p>
-            <a:pPr>
-              <a:spcAft>
-                <a:spcPts val="1000"/>
-              </a:spcAft>
-            </a:pPr>
-            <a:r>
-              <a:rPr sz="1800" b="1">
-                <a:solidFill>
-                  <a:srgbClr val="1F2A4E"/>
-                </a:solidFill>
-              </a:rPr>
-              <a:t>O que faz:  </a:t>
-            </a:r>
-            <a:r>
-              <a:rPr sz="1800">
-                <a:solidFill>
-                  <a:srgbClr val="3D424E"/>
-                </a:solidFill>
-              </a:rPr>
-              <a:t>produz, para cada imagem facial, o vetor softmax sobre os dez tons da escala Monk.</a:t>
-            </a:r>
-          </a:p>
-          <a:p>
-            <a:pPr>
-              <a:spcAft>
-                <a:spcPts val="1000"/>
-              </a:spcAft>
-            </a:pPr>
-            <a:r>
-              <a:rPr sz="1800" b="1">
-                <a:solidFill>
-                  <a:srgbClr val="1F2A4E"/>
-                </a:solidFill>
-              </a:rPr>
-              <a:t>Decisão pós-reunião Ago/2026:  </a:t>
-            </a:r>
-            <a:r>
-              <a:rPr sz="1800">
-                <a:solidFill>
-                  <a:srgbClr val="3D424E"/>
-                </a:solidFill>
-              </a:rPr>
-              <a:t>adotar treinamento interno do classificador, reduzindo dependência do release do SkinToneNet (Matias, 2026), cujos pesos e dataset STW ainda não foram divulgados publicamente.</a:t>
-            </a:r>
-          </a:p>
-          <a:p>
-            <a:pPr>
-              <a:spcAft>
-                <a:spcPts val="1000"/>
-              </a:spcAft>
-            </a:pPr>
-            <a:r>
-              <a:rPr sz="1800" b="1">
-                <a:solidFill>
-                  <a:srgbClr val="1F2A4E"/>
-                </a:solidFill>
-              </a:rPr>
-              <a:t>Datasets de treino:  </a:t>
-            </a:r>
-            <a:r>
-              <a:rPr sz="1800">
-                <a:solidFill>
-                  <a:srgbClr val="3D424E"/>
-                </a:solidFill>
-              </a:rPr>
-              <a:t>Monk Skin Tone Examples (Monk, 2019) e Casual Conversations v2 (Porgali et al., 2023).</a:t>
-            </a:r>
-          </a:p>
-          <a:p>
-            <a:pPr>
-              <a:spcAft>
-                <a:spcPts val="1000"/>
-              </a:spcAft>
-            </a:pPr>
-            <a:r>
-              <a:rPr sz="1800" b="1">
-                <a:solidFill>
-                  <a:srgbClr val="1F2A4E"/>
-                </a:solidFill>
-              </a:rPr>
-              <a:t>Camada auto-suficiente:  </a:t>
-            </a:r>
-            <a:r>
-              <a:rPr sz="1800">
-                <a:solidFill>
-                  <a:srgbClr val="3D424E"/>
-                </a:solidFill>
-              </a:rPr>
-              <a:t>detecção facial (MTCNN, Zhang et al., 2016), alinhamento, recorte e classificação — viabiliza inferência em datasets sem anotação MST.</a:t>
-            </a:r>
-          </a:p>
-          <a:p>
-            <a:pPr>
-              <a:spcAft>
-                <a:spcPts val="1000"/>
-              </a:spcAft>
-            </a:pPr>
-            <a:r>
-              <a:rPr sz="1800" b="1">
-                <a:solidFill>
-                  <a:srgbClr val="1F2A4E"/>
-                </a:solidFill>
-              </a:rPr>
-              <a:t>Validação:  </a:t>
-            </a:r>
-            <a:r>
-              <a:rPr sz="1800">
-                <a:solidFill>
-                  <a:srgbClr val="3D424E"/>
-                </a:solidFill>
-              </a:rPr>
-              <a:t>protocolo humano interno (aproximadamente 250 imagens do FairFace) e sensitivity analysis com dois a três classificadores alternativos.</a:t>
-            </a:r>
-          </a:p>
-        </p:txBody>
-      </p:sp>
+      <p:pic>
+        <p:nvPicPr>
+          <p:cNvPr id="4" name="Picture 3" descr="fig_pipeline_evolucao.png"/>
+          <p:cNvPicPr>
+            <a:picLocks noChangeAspect="1"/>
+          </p:cNvPicPr>
+          <p:nvPr/>
+        </p:nvPicPr>
+        <p:blipFill>
+          <a:blip r:embed="rId2"/>
+          <a:stretch>
+            <a:fillRect/>
+          </a:stretch>
+        </p:blipFill>
+        <p:spPr>
+          <a:xfrm>
+            <a:off x="-17339" y="1371600"/>
+            <a:ext cx="12223630" cy="4572000"/>
+          </a:xfrm>
+          <a:prstGeom prst="rect">
+            <a:avLst/>
+          </a:prstGeom>
+        </p:spPr>
+      </p:pic>
       <p:sp>
         <p:nvSpPr>
           <p:cNvPr id="5" name="TextBox 4"/>
@@ -5031,8 +4921,8 @@
         </p:nvSpPr>
         <p:spPr>
           <a:xfrm>
-            <a:off x="457200" y="6446520"/>
-            <a:ext cx="10515600" cy="365760"/>
+            <a:off x="457200" y="5989320"/>
+            <a:ext cx="11430000" cy="365760"/>
           </a:xfrm>
           <a:prstGeom prst="rect">
             <a:avLst/>
@@ -5045,15 +4935,15 @@
           </a:bodyPr>
           <a:lstStyle/>
           <a:p>
-            <a:pPr>
-              <a:defRPr sz="900" i="1">
+            <a:pPr algn="ctr">
+              <a:defRPr sz="1400" i="1">
                 <a:solidFill>
                   <a:srgbClr val="707682"/>
                 </a:solidFill>
               </a:defRPr>
             </a:pPr>
             <a:r>
-              <a:t>Exame de Qualificação · Marcello Ozzetti · Orientação: Prof. Dr. Marcos G. Quiles · PPG-CC UNIFESP/ICT</a:t>
+              <a:t>Etapas 1 a 3 em execução (código implementado, validação preliminar em curso); etapas 4 a 6 planejadas conforme cronograma. Marco de qualificação assegurado.</a:t>
             </a:r>
           </a:p>
         </p:txBody>
@@ -5066,8 +4956,8 @@
         </p:nvSpPr>
         <p:spPr>
           <a:xfrm>
-            <a:off x="11521440" y="6446520"/>
-            <a:ext cx="640080" cy="365760"/>
+            <a:off x="457200" y="6446520"/>
+            <a:ext cx="10515600" cy="365760"/>
           </a:xfrm>
           <a:prstGeom prst="rect">
             <a:avLst/>
@@ -5088,7 +4978,42 @@
               </a:defRPr>
             </a:pPr>
             <a:r>
-              <a:t>13 / 24</a:t>
+              <a:t>Exame de Qualificação · Marcello Ozzetti · Orientação: Prof. Dr. Marcos G. Quiles · PPG-CC UNIFESP/ICT</a:t>
+            </a:r>
+          </a:p>
+        </p:txBody>
+      </p:sp>
+      <p:sp>
+        <p:nvSpPr>
+          <p:cNvPr id="7" name="TextBox 6"/>
+          <p:cNvSpPr txBox="1"/>
+          <p:nvPr/>
+        </p:nvSpPr>
+        <p:spPr>
+          <a:xfrm>
+            <a:off x="11521440" y="6446520"/>
+            <a:ext cx="640080" cy="365760"/>
+          </a:xfrm>
+          <a:prstGeom prst="rect">
+            <a:avLst/>
+          </a:prstGeom>
+          <a:noFill/>
+        </p:spPr>
+        <p:txBody>
+          <a:bodyPr wrap="none">
+            <a:spAutoFit/>
+          </a:bodyPr>
+          <a:lstStyle/>
+          <a:p>
+            <a:pPr>
+              <a:defRPr sz="900" i="1">
+                <a:solidFill>
+                  <a:srgbClr val="707682"/>
+                </a:solidFill>
+              </a:defRPr>
+            </a:pPr>
+            <a:r>
+              <a:t>13 / 28</a:t>
             </a:r>
           </a:p>
         </p:txBody>
@@ -5141,7 +5066,7 @@
               </a:defRPr>
             </a:pPr>
             <a:r>
-              <a:t>Racional da escolha do backbone: ConvNeXt-T (Liu et al., 2022)</a:t>
+              <a:t>Etapa 1: classificador MST treinado internamente</a:t>
             </a:r>
           </a:p>
         </p:txBody>
@@ -5222,7 +5147,7 @@
                   <a:srgbClr val="1F2A4E"/>
                 </a:solidFill>
               </a:rPr>
-              <a:t>Paridade com ViTs a custo convolucional:  </a:t>
+              <a:t>O que faz:  </a:t>
             </a:r>
             <a:r>
               <a:rPr sz="1800">
@@ -5230,7 +5155,7 @@
                   <a:srgbClr val="3D424E"/>
                 </a:solidFill>
               </a:rPr>
-              <a:t>82 % top-1 ImageNet, comparável a Swin-T, ~1/3 dos params.</a:t>
+              <a:t>produz, para cada imagem facial, o vetor softmax sobre os dez tons da escala Monk.</a:t>
             </a:r>
           </a:p>
           <a:p>
@@ -5245,7 +5170,7 @@
                   <a:srgbClr val="1F2A4E"/>
                 </a:solidFill>
               </a:rPr>
-              <a:t>Estável em fine-tuning:  </a:t>
+              <a:t>Decisão pós-reunião Ago/2026:  </a:t>
             </a:r>
             <a:r>
               <a:rPr sz="1800">
@@ -5253,7 +5178,7 @@
                   <a:srgbClr val="3D424E"/>
                 </a:solidFill>
               </a:rPr>
-              <a:t>LayerNorm (não BatchNorm) — robusto a batch pequeno, essencial para 3 sementes.</a:t>
+              <a:t>adotar treinamento interno do classificador, reduzindo dependência do release do SkinToneNet (Matias, 2026), cujos pesos e dataset STW ainda não foram divulgados publicamente.</a:t>
             </a:r>
           </a:p>
           <a:p>
@@ -5268,7 +5193,7 @@
                   <a:srgbClr val="1F2A4E"/>
                 </a:solidFill>
               </a:rPr>
-              <a:t>Inserção natural de FiLM:  </a:t>
+              <a:t>Datasets de treino:  </a:t>
             </a:r>
             <a:r>
               <a:rPr sz="1800">
@@ -5276,7 +5201,7 @@
                   <a:srgbClr val="3D424E"/>
                 </a:solidFill>
               </a:rPr>
-              <a:t>4 estágios hierárquicos oferecem 4 pontos de inserção sem modificar blocos internos.</a:t>
+              <a:t>Monk Skin Tone Examples (Monk, 2019) e Casual Conversations v2 (Porgali et al., 2023).</a:t>
             </a:r>
           </a:p>
           <a:p>
@@ -5291,7 +5216,7 @@
                   <a:srgbClr val="1F2A4E"/>
                 </a:solidFill>
               </a:rPr>
-              <a:t>Comparável ao baseline canônico:  </a:t>
+              <a:t>Camada auto-suficiente:  </a:t>
             </a:r>
             <a:r>
               <a:rPr sz="1800">
@@ -5299,7 +5224,7 @@
                   <a:srgbClr val="3D424E"/>
                 </a:solidFill>
               </a:rPr>
-              <a:t>ResNet-34 do FairFace serve como âncora — ConvNeXt-T isola o efeito do condicionamento.</a:t>
+              <a:t>detecção facial (MTCNN, Zhang et al., 2016), alinhamento, recorte e classificação — viabiliza inferência em datasets sem anotação MST.</a:t>
             </a:r>
           </a:p>
           <a:p>
@@ -5314,7 +5239,7 @@
                   <a:srgbClr val="1F2A4E"/>
                 </a:solidFill>
               </a:rPr>
-              <a:t>Viável computacionalmente:  </a:t>
+              <a:t>Validação:  </a:t>
             </a:r>
             <a:r>
               <a:rPr sz="1800">
@@ -5322,7 +5247,7 @@
                   <a:srgbClr val="3D424E"/>
                 </a:solidFill>
               </a:rPr>
-              <a:t>28 M params permitem 3 sementes × 3 configs em GPU comum (~300 h total).</a:t>
+              <a:t>protocolo humano interno (aproximadamente 250 imagens do FairFace) e sensitivity analysis com dois a três classificadores alternativos.</a:t>
             </a:r>
           </a:p>
         </p:txBody>
@@ -5392,7 +5317,7 @@
               </a:defRPr>
             </a:pPr>
             <a:r>
-              <a:t>14 / 24</a:t>
+              <a:t>14 / 28</a:t>
             </a:r>
           </a:p>
         </p:txBody>
@@ -5445,7 +5370,7 @@
               </a:defRPr>
             </a:pPr>
             <a:r>
-              <a:t>Racional do mecanismo de condicionamento: FiLM (Perez et al., 2018)</a:t>
+              <a:t>Classificador MST em validação: detalhe técnico do backend</a:t>
             </a:r>
           </a:p>
         </p:txBody>
@@ -5493,167 +5418,30 @@
           </a:p>
         </p:txBody>
       </p:sp>
-      <p:sp>
-        <p:nvSpPr>
-          <p:cNvPr id="4" name="TextBox 3"/>
-          <p:cNvSpPr txBox="1"/>
-          <p:nvPr/>
-        </p:nvSpPr>
-        <p:spPr>
-          <a:xfrm>
-            <a:off x="457200" y="1417320"/>
-            <a:ext cx="11430000" cy="4937760"/>
-          </a:xfrm>
-          <a:prstGeom prst="rect">
-            <a:avLst/>
-          </a:prstGeom>
-          <a:noFill/>
-        </p:spPr>
-        <p:txBody>
-          <a:bodyPr wrap="square">
-            <a:spAutoFit/>
-          </a:bodyPr>
-          <a:lstStyle/>
-          <a:p>
-            <a:pPr>
-              <a:spcAft>
-                <a:spcPts val="1000"/>
-              </a:spcAft>
-            </a:pPr>
-            <a:r>
-              <a:rPr sz="1800" b="1">
-                <a:solidFill>
-                  <a:srgbClr val="1F2A4E"/>
-                </a:solidFill>
-              </a:rPr>
-              <a:t>Adequação dimensional ao sinal MST:  </a:t>
-            </a:r>
-            <a:r>
-              <a:rPr sz="1800">
-                <a:solidFill>
-                  <a:srgbClr val="3D424E"/>
-                </a:solidFill>
-              </a:rPr>
-              <a:t>sinal 10-dim casa naturalmente com γ, β — sem explosão paramétrica.</a:t>
-            </a:r>
-          </a:p>
-          <a:p>
-            <a:pPr>
-              <a:spcAft>
-                <a:spcPts val="1000"/>
-              </a:spcAft>
-            </a:pPr>
-            <a:r>
-              <a:rPr sz="1800" b="1">
-                <a:solidFill>
-                  <a:srgbClr val="1F2A4E"/>
-                </a:solidFill>
-              </a:rPr>
-              <a:t>Eficiência:  </a:t>
-            </a:r>
-            <a:r>
-              <a:rPr sz="1800">
-                <a:solidFill>
-                  <a:srgbClr val="3D424E"/>
-                </a:solidFill>
-              </a:rPr>
-              <a:t>~380 k parâmetros (~1,3 % do backbone) — muito abaixo de cross-attention (~3×).</a:t>
-            </a:r>
-          </a:p>
-          <a:p>
-            <a:pPr>
-              <a:spcAft>
-                <a:spcPts val="1000"/>
-              </a:spcAft>
-            </a:pPr>
-            <a:r>
-              <a:rPr sz="1800" b="1">
-                <a:solidFill>
-                  <a:srgbClr val="1F2A4E"/>
-                </a:solidFill>
-              </a:rPr>
-              <a:t>Interpretabilidade direta:  </a:t>
-            </a:r>
-            <a:r>
-              <a:rPr sz="1800">
-                <a:solidFill>
-                  <a:srgbClr val="3D424E"/>
-                </a:solidFill>
-              </a:rPr>
-              <a:t>γ e β por canal permitem inspecionar como cada tom modula as features.</a:t>
-            </a:r>
-          </a:p>
-          <a:p>
-            <a:pPr>
-              <a:spcAft>
-                <a:spcPts val="1000"/>
-              </a:spcAft>
-            </a:pPr>
-            <a:r>
-              <a:rPr sz="1800" b="1">
-                <a:solidFill>
-                  <a:srgbClr val="1F2A4E"/>
-                </a:solidFill>
-              </a:rPr>
-              <a:t>Compatibilidade nativa:  </a:t>
-            </a:r>
-            <a:r>
-              <a:rPr sz="1800">
-                <a:solidFill>
-                  <a:srgbClr val="3D424E"/>
-                </a:solidFill>
-              </a:rPr>
-              <a:t>opera bem com LayerNorm do ConvNeXt-T; init identidade preserva backbone.</a:t>
-            </a:r>
-          </a:p>
-          <a:p>
-            <a:pPr>
-              <a:spcAft>
-                <a:spcPts val="1000"/>
-              </a:spcAft>
-            </a:pPr>
-            <a:r>
-              <a:rPr sz="1800" b="1">
-                <a:solidFill>
-                  <a:srgbClr val="1F2A4E"/>
-                </a:solidFill>
-              </a:rPr>
-              <a:t>Lacuna documentada:  </a:t>
-            </a:r>
-            <a:r>
-              <a:rPr sz="1800">
-                <a:solidFill>
-                  <a:srgbClr val="3D424E"/>
-                </a:solidFill>
-              </a:rPr>
-              <a:t>sem aplicação prévia em fairness facial multi-classe — Contribuição 3 desta pesquisa.</a:t>
-            </a:r>
-          </a:p>
-          <a:p>
-            <a:pPr>
-              <a:spcAft>
-                <a:spcPts val="1000"/>
-              </a:spcAft>
-            </a:pPr>
-            <a:r>
-              <a:rPr sz="1800" b="1">
-                <a:solidFill>
-                  <a:srgbClr val="1F2A4E"/>
-                </a:solidFill>
-              </a:rPr>
-              <a:t>Descartadas com justificativa formal (Cap 2):  </a:t>
-            </a:r>
-            <a:r>
-              <a:rPr sz="1800">
-                <a:solidFill>
-                  <a:srgbClr val="3D424E"/>
-                </a:solidFill>
-              </a:rPr>
-              <a:t>Concatenação, CBN, Cross-attention, AdaIN, SPADE, HyperNetworks, LoRA/Adaptadores.</a:t>
-            </a:r>
-          </a:p>
-        </p:txBody>
-      </p:sp>
+      <p:pic>
+        <p:nvPicPr>
+          <p:cNvPr id="4" name="Picture 3" descr="fig_mst_detalhe_tecnico.png"/>
+          <p:cNvPicPr>
+            <a:picLocks noChangeAspect="1"/>
+          </p:cNvPicPr>
+          <p:nvPr/>
+        </p:nvPicPr>
+        <p:blipFill>
+          <a:blip r:embed="rId2"/>
+          <a:stretch>
+            <a:fillRect/>
+          </a:stretch>
+        </p:blipFill>
+        <p:spPr>
+          <a:xfrm>
+            <a:off x="372818" y="1371600"/>
+            <a:ext cx="11443315" cy="4206240"/>
+          </a:xfrm>
+          <a:prstGeom prst="rect">
+            <a:avLst/>
+          </a:prstGeom>
+        </p:spPr>
+      </p:pic>
       <p:sp>
         <p:nvSpPr>
           <p:cNvPr id="5" name="TextBox 4"/>
@@ -5662,8 +5450,8 @@
         </p:nvSpPr>
         <p:spPr>
           <a:xfrm>
-            <a:off x="457200" y="6446520"/>
-            <a:ext cx="10515600" cy="365760"/>
+            <a:off x="457200" y="5989320"/>
+            <a:ext cx="11430000" cy="365760"/>
           </a:xfrm>
           <a:prstGeom prst="rect">
             <a:avLst/>
@@ -5676,15 +5464,15 @@
           </a:bodyPr>
           <a:lstStyle/>
           <a:p>
-            <a:pPr>
-              <a:defRPr sz="900" i="1">
+            <a:pPr algn="ctr">
+              <a:defRPr sz="1400" i="1">
                 <a:solidFill>
                   <a:srgbClr val="707682"/>
                 </a:solidFill>
               </a:defRPr>
             </a:pPr>
             <a:r>
-              <a:t>Exame de Qualificação · Marcello Ozzetti · Orientação: Prof. Dr. Marcos G. Quiles · PPG-CC UNIFESP/ICT</a:t>
+              <a:t>Pipeline técnico em cinco etapas: detecção MTCNN → alinhamento por landmarks → segmentação de pele → cor dominante via k-means em CIELab → distância euclidiana à paleta Monk. Backend operacional durante a fase de validação (sensitivity analysis — Cap. 4 §4.2).</a:t>
             </a:r>
           </a:p>
         </p:txBody>
@@ -5697,8 +5485,8 @@
         </p:nvSpPr>
         <p:spPr>
           <a:xfrm>
-            <a:off x="11521440" y="6446520"/>
-            <a:ext cx="640080" cy="365760"/>
+            <a:off x="457200" y="6446520"/>
+            <a:ext cx="10515600" cy="365760"/>
           </a:xfrm>
           <a:prstGeom prst="rect">
             <a:avLst/>
@@ -5719,7 +5507,42 @@
               </a:defRPr>
             </a:pPr>
             <a:r>
-              <a:t>15 / 24</a:t>
+              <a:t>Exame de Qualificação · Marcello Ozzetti · Orientação: Prof. Dr. Marcos G. Quiles · PPG-CC UNIFESP/ICT</a:t>
+            </a:r>
+          </a:p>
+        </p:txBody>
+      </p:sp>
+      <p:sp>
+        <p:nvSpPr>
+          <p:cNvPr id="7" name="TextBox 6"/>
+          <p:cNvSpPr txBox="1"/>
+          <p:nvPr/>
+        </p:nvSpPr>
+        <p:spPr>
+          <a:xfrm>
+            <a:off x="11521440" y="6446520"/>
+            <a:ext cx="640080" cy="365760"/>
+          </a:xfrm>
+          <a:prstGeom prst="rect">
+            <a:avLst/>
+          </a:prstGeom>
+          <a:noFill/>
+        </p:spPr>
+        <p:txBody>
+          <a:bodyPr wrap="none">
+            <a:spAutoFit/>
+          </a:bodyPr>
+          <a:lstStyle/>
+          <a:p>
+            <a:pPr>
+              <a:defRPr sz="900" i="1">
+                <a:solidFill>
+                  <a:srgbClr val="707682"/>
+                </a:solidFill>
+              </a:defRPr>
+            </a:pPr>
+            <a:r>
+              <a:t>15 / 28</a:t>
             </a:r>
           </a:p>
         </p:txBody>
@@ -5772,7 +5595,7 @@
               </a:defRPr>
             </a:pPr>
             <a:r>
-              <a:t>Mecanismo FiLM: modulação de features condicionada ao tom de pele</a:t>
+              <a:t>Classificador MST em validação: amostras FairFace val (qualitativo)</a:t>
             </a:r>
           </a:p>
         </p:txBody>
@@ -5822,7 +5645,7 @@
       </p:sp>
       <p:pic>
         <p:nvPicPr>
-          <p:cNvPr id="4" name="Picture 3" descr="film_pipeline.png"/>
+          <p:cNvPr id="4" name="Picture 3" descr="fig_mst_demo_faces.png"/>
           <p:cNvPicPr>
             <a:picLocks noChangeAspect="1"/>
           </p:cNvPicPr>
@@ -5836,8 +5659,8 @@
         </p:blipFill>
         <p:spPr>
           <a:xfrm>
-            <a:off x="2291864" y="1371600"/>
-            <a:ext cx="7605222" cy="4206240"/>
+            <a:off x="1253795" y="1371600"/>
+            <a:ext cx="9681361" cy="4846320"/>
           </a:xfrm>
           <a:prstGeom prst="rect">
             <a:avLst/>
@@ -5874,7 +5697,7 @@
               </a:defRPr>
             </a:pPr>
             <a:r>
-              <a:t>FiLM (Perez et al., 2018) modula as features intermediárias do ConvNeXt-T canal a canal, condicionadas ao vetor MST. Overhead paramétrico: aproximadamente 1,3 % do backbone.</a:t>
+              <a:t>Para cada raça FairFace: face com tom MST mais claro (acima) e mais escuro (abaixo) preditos sobre amostra estratificada de 350 imagens. Evidência visual direta de H1 — heterogeneidade fenotípica intra-categorial.</a:t>
             </a:r>
           </a:p>
         </p:txBody>
@@ -5944,7 +5767,7 @@
               </a:defRPr>
             </a:pPr>
             <a:r>
-              <a:t>16 / 24</a:t>
+              <a:t>16 / 28</a:t>
             </a:r>
           </a:p>
         </p:txBody>
@@ -5958,6 +5781,1974 @@
 </file>
 
 <file path=ppt/slides/slide17.xml><?xml version="1.0" encoding="utf-8"?>
+<p:sld xmlns:a="http://schemas.openxmlformats.org/drawingml/2006/main" xmlns:p="http://schemas.openxmlformats.org/presentationml/2006/main" xmlns:r="http://schemas.openxmlformats.org/officeDocument/2006/relationships">
+  <p:cSld>
+    <p:spTree>
+      <p:nvGrpSpPr>
+        <p:cNvPr id="1" name=""/>
+        <p:cNvGrpSpPr/>
+        <p:nvPr/>
+      </p:nvGrpSpPr>
+      <p:grpSpPr/>
+      <p:sp>
+        <p:nvSpPr>
+          <p:cNvPr id="2" name="TextBox 1"/>
+          <p:cNvSpPr txBox="1"/>
+          <p:nvPr/>
+        </p:nvSpPr>
+        <p:spPr>
+          <a:xfrm>
+            <a:off x="457200" y="274320"/>
+            <a:ext cx="11430000" cy="914400"/>
+          </a:xfrm>
+          <a:prstGeom prst="rect">
+            <a:avLst/>
+          </a:prstGeom>
+          <a:noFill/>
+        </p:spPr>
+        <p:txBody>
+          <a:bodyPr wrap="square">
+            <a:spAutoFit/>
+          </a:bodyPr>
+          <a:lstStyle/>
+          <a:p>
+            <a:pPr>
+              <a:defRPr sz="2800" b="1">
+                <a:solidFill>
+                  <a:srgbClr val="1F2A4E"/>
+                </a:solidFill>
+              </a:defRPr>
+            </a:pPr>
+            <a:r>
+              <a:t>Classificador MST em validação: distribuição MST × raça (quantitativo)</a:t>
+            </a:r>
+          </a:p>
+        </p:txBody>
+      </p:sp>
+      <p:sp>
+        <p:nvSpPr>
+          <p:cNvPr id="3" name="Rectangle 2"/>
+          <p:cNvSpPr/>
+          <p:nvPr/>
+        </p:nvSpPr>
+        <p:spPr>
+          <a:xfrm>
+            <a:off x="457200" y="1097280"/>
+            <a:ext cx="11430000" cy="36576"/>
+          </a:xfrm>
+          <a:prstGeom prst="rect">
+            <a:avLst/>
+          </a:prstGeom>
+          <a:solidFill>
+            <a:srgbClr val="1F2A4E"/>
+          </a:solidFill>
+          <a:ln>
+            <a:noFill/>
+          </a:ln>
+        </p:spPr>
+        <p:style>
+          <a:lnRef idx="1">
+            <a:schemeClr val="accent1"/>
+          </a:lnRef>
+          <a:fillRef idx="3">
+            <a:schemeClr val="accent1"/>
+          </a:fillRef>
+          <a:effectRef idx="2">
+            <a:schemeClr val="accent1"/>
+          </a:effectRef>
+          <a:fontRef idx="minor">
+            <a:schemeClr val="lt1"/>
+          </a:fontRef>
+        </p:style>
+        <p:txBody>
+          <a:bodyPr rtlCol="0" anchor="ctr"/>
+          <a:lstStyle/>
+          <a:p>
+            <a:pPr algn="ctr"/>
+          </a:p>
+        </p:txBody>
+      </p:sp>
+      <p:pic>
+        <p:nvPicPr>
+          <p:cNvPr id="4" name="Picture 3" descr="fig_mst_demo_distribuicao.png"/>
+          <p:cNvPicPr>
+            <a:picLocks noChangeAspect="1"/>
+          </p:cNvPicPr>
+          <p:nvPr/>
+        </p:nvPicPr>
+        <p:blipFill>
+          <a:blip r:embed="rId2"/>
+          <a:stretch>
+            <a:fillRect/>
+          </a:stretch>
+        </p:blipFill>
+        <p:spPr>
+          <a:xfrm>
+            <a:off x="683499" y="1371600"/>
+            <a:ext cx="10821954" cy="4389120"/>
+          </a:xfrm>
+          <a:prstGeom prst="rect">
+            <a:avLst/>
+          </a:prstGeom>
+        </p:spPr>
+      </p:pic>
+      <p:sp>
+        <p:nvSpPr>
+          <p:cNvPr id="5" name="TextBox 4"/>
+          <p:cNvSpPr txBox="1"/>
+          <p:nvPr/>
+        </p:nvSpPr>
+        <p:spPr>
+          <a:xfrm>
+            <a:off x="457200" y="5989320"/>
+            <a:ext cx="11430000" cy="365760"/>
+          </a:xfrm>
+          <a:prstGeom prst="rect">
+            <a:avLst/>
+          </a:prstGeom>
+          <a:noFill/>
+        </p:spPr>
+        <p:txBody>
+          <a:bodyPr wrap="none">
+            <a:spAutoFit/>
+          </a:bodyPr>
+          <a:lstStyle/>
+          <a:p>
+            <a:pPr algn="ctr">
+              <a:defRPr sz="1400" i="1">
+                <a:solidFill>
+                  <a:srgbClr val="707682"/>
+                </a:solidFill>
+              </a:defRPr>
+            </a:pPr>
+            <a:r>
+              <a:t>Distribuição percentual (dentro de cada raça) sobre amostra estratificada (n = 350, 50 por raça). Nenhuma raça colapsa em um único tom Monk — evidência preliminar que sustenta a formalização de H1.</a:t>
+            </a:r>
+          </a:p>
+        </p:txBody>
+      </p:sp>
+      <p:sp>
+        <p:nvSpPr>
+          <p:cNvPr id="6" name="TextBox 5"/>
+          <p:cNvSpPr txBox="1"/>
+          <p:nvPr/>
+        </p:nvSpPr>
+        <p:spPr>
+          <a:xfrm>
+            <a:off x="457200" y="6446520"/>
+            <a:ext cx="10515600" cy="365760"/>
+          </a:xfrm>
+          <a:prstGeom prst="rect">
+            <a:avLst/>
+          </a:prstGeom>
+          <a:noFill/>
+        </p:spPr>
+        <p:txBody>
+          <a:bodyPr wrap="none">
+            <a:spAutoFit/>
+          </a:bodyPr>
+          <a:lstStyle/>
+          <a:p>
+            <a:pPr>
+              <a:defRPr sz="900" i="1">
+                <a:solidFill>
+                  <a:srgbClr val="707682"/>
+                </a:solidFill>
+              </a:defRPr>
+            </a:pPr>
+            <a:r>
+              <a:t>Exame de Qualificação · Marcello Ozzetti · Orientação: Prof. Dr. Marcos G. Quiles · PPG-CC UNIFESP/ICT</a:t>
+            </a:r>
+          </a:p>
+        </p:txBody>
+      </p:sp>
+      <p:sp>
+        <p:nvSpPr>
+          <p:cNvPr id="7" name="TextBox 6"/>
+          <p:cNvSpPr txBox="1"/>
+          <p:nvPr/>
+        </p:nvSpPr>
+        <p:spPr>
+          <a:xfrm>
+            <a:off x="11521440" y="6446520"/>
+            <a:ext cx="640080" cy="365760"/>
+          </a:xfrm>
+          <a:prstGeom prst="rect">
+            <a:avLst/>
+          </a:prstGeom>
+          <a:noFill/>
+        </p:spPr>
+        <p:txBody>
+          <a:bodyPr wrap="none">
+            <a:spAutoFit/>
+          </a:bodyPr>
+          <a:lstStyle/>
+          <a:p>
+            <a:pPr>
+              <a:defRPr sz="900" i="1">
+                <a:solidFill>
+                  <a:srgbClr val="707682"/>
+                </a:solidFill>
+              </a:defRPr>
+            </a:pPr>
+            <a:r>
+              <a:t>17 / 28</a:t>
+            </a:r>
+          </a:p>
+        </p:txBody>
+      </p:sp>
+    </p:spTree>
+  </p:cSld>
+  <p:clrMapOvr>
+    <a:masterClrMapping/>
+  </p:clrMapOvr>
+</p:sld>
+</file>
+
+<file path=ppt/slides/slide18.xml><?xml version="1.0" encoding="utf-8"?>
+<p:sld xmlns:a="http://schemas.openxmlformats.org/drawingml/2006/main" xmlns:p="http://schemas.openxmlformats.org/presentationml/2006/main" xmlns:r="http://schemas.openxmlformats.org/officeDocument/2006/relationships">
+  <p:cSld>
+    <p:spTree>
+      <p:nvGrpSpPr>
+        <p:cNvPr id="1" name=""/>
+        <p:cNvGrpSpPr/>
+        <p:nvPr/>
+      </p:nvGrpSpPr>
+      <p:grpSpPr/>
+      <p:sp>
+        <p:nvSpPr>
+          <p:cNvPr id="2" name="TextBox 1"/>
+          <p:cNvSpPr txBox="1"/>
+          <p:nvPr/>
+        </p:nvSpPr>
+        <p:spPr>
+          <a:xfrm>
+            <a:off x="457200" y="274320"/>
+            <a:ext cx="11430000" cy="914400"/>
+          </a:xfrm>
+          <a:prstGeom prst="rect">
+            <a:avLst/>
+          </a:prstGeom>
+          <a:noFill/>
+        </p:spPr>
+        <p:txBody>
+          <a:bodyPr wrap="square">
+            <a:spAutoFit/>
+          </a:bodyPr>
+          <a:lstStyle/>
+          <a:p>
+            <a:pPr>
+              <a:defRPr sz="2800" b="1">
+                <a:solidFill>
+                  <a:srgbClr val="1F2A4E"/>
+                </a:solidFill>
+              </a:defRPr>
+            </a:pPr>
+            <a:r>
+              <a:t>Racional da escolha do backbone: ConvNeXt-T (Liu et al., 2022)</a:t>
+            </a:r>
+          </a:p>
+        </p:txBody>
+      </p:sp>
+      <p:sp>
+        <p:nvSpPr>
+          <p:cNvPr id="3" name="Rectangle 2"/>
+          <p:cNvSpPr/>
+          <p:nvPr/>
+        </p:nvSpPr>
+        <p:spPr>
+          <a:xfrm>
+            <a:off x="457200" y="1097280"/>
+            <a:ext cx="11430000" cy="36576"/>
+          </a:xfrm>
+          <a:prstGeom prst="rect">
+            <a:avLst/>
+          </a:prstGeom>
+          <a:solidFill>
+            <a:srgbClr val="1F2A4E"/>
+          </a:solidFill>
+          <a:ln>
+            <a:noFill/>
+          </a:ln>
+        </p:spPr>
+        <p:style>
+          <a:lnRef idx="1">
+            <a:schemeClr val="accent1"/>
+          </a:lnRef>
+          <a:fillRef idx="3">
+            <a:schemeClr val="accent1"/>
+          </a:fillRef>
+          <a:effectRef idx="2">
+            <a:schemeClr val="accent1"/>
+          </a:effectRef>
+          <a:fontRef idx="minor">
+            <a:schemeClr val="lt1"/>
+          </a:fontRef>
+        </p:style>
+        <p:txBody>
+          <a:bodyPr rtlCol="0" anchor="ctr"/>
+          <a:lstStyle/>
+          <a:p>
+            <a:pPr algn="ctr"/>
+          </a:p>
+        </p:txBody>
+      </p:sp>
+      <p:sp>
+        <p:nvSpPr>
+          <p:cNvPr id="4" name="TextBox 3"/>
+          <p:cNvSpPr txBox="1"/>
+          <p:nvPr/>
+        </p:nvSpPr>
+        <p:spPr>
+          <a:xfrm>
+            <a:off x="457200" y="1417320"/>
+            <a:ext cx="11430000" cy="4937760"/>
+          </a:xfrm>
+          <a:prstGeom prst="rect">
+            <a:avLst/>
+          </a:prstGeom>
+          <a:noFill/>
+        </p:spPr>
+        <p:txBody>
+          <a:bodyPr wrap="square">
+            <a:spAutoFit/>
+          </a:bodyPr>
+          <a:lstStyle/>
+          <a:p>
+            <a:pPr>
+              <a:spcAft>
+                <a:spcPts val="1000"/>
+              </a:spcAft>
+            </a:pPr>
+            <a:r>
+              <a:rPr sz="1800" b="1">
+                <a:solidFill>
+                  <a:srgbClr val="1F2A4E"/>
+                </a:solidFill>
+              </a:rPr>
+              <a:t>Paridade com ViTs a custo convolucional:  </a:t>
+            </a:r>
+            <a:r>
+              <a:rPr sz="1800">
+                <a:solidFill>
+                  <a:srgbClr val="3D424E"/>
+                </a:solidFill>
+              </a:rPr>
+              <a:t>82 % top-1 ImageNet, comparável a Swin-T, ~1/3 dos params.</a:t>
+            </a:r>
+          </a:p>
+          <a:p>
+            <a:pPr>
+              <a:spcAft>
+                <a:spcPts val="1000"/>
+              </a:spcAft>
+            </a:pPr>
+            <a:r>
+              <a:rPr sz="1800" b="1">
+                <a:solidFill>
+                  <a:srgbClr val="1F2A4E"/>
+                </a:solidFill>
+              </a:rPr>
+              <a:t>Estável em fine-tuning:  </a:t>
+            </a:r>
+            <a:r>
+              <a:rPr sz="1800">
+                <a:solidFill>
+                  <a:srgbClr val="3D424E"/>
+                </a:solidFill>
+              </a:rPr>
+              <a:t>LayerNorm (não BatchNorm) — robusto a batch pequeno, essencial para 3 sementes.</a:t>
+            </a:r>
+          </a:p>
+          <a:p>
+            <a:pPr>
+              <a:spcAft>
+                <a:spcPts val="1000"/>
+              </a:spcAft>
+            </a:pPr>
+            <a:r>
+              <a:rPr sz="1800" b="1">
+                <a:solidFill>
+                  <a:srgbClr val="1F2A4E"/>
+                </a:solidFill>
+              </a:rPr>
+              <a:t>Inserção natural de FiLM:  </a:t>
+            </a:r>
+            <a:r>
+              <a:rPr sz="1800">
+                <a:solidFill>
+                  <a:srgbClr val="3D424E"/>
+                </a:solidFill>
+              </a:rPr>
+              <a:t>4 estágios hierárquicos oferecem 4 pontos de inserção sem modificar blocos internos.</a:t>
+            </a:r>
+          </a:p>
+          <a:p>
+            <a:pPr>
+              <a:spcAft>
+                <a:spcPts val="1000"/>
+              </a:spcAft>
+            </a:pPr>
+            <a:r>
+              <a:rPr sz="1800" b="1">
+                <a:solidFill>
+                  <a:srgbClr val="1F2A4E"/>
+                </a:solidFill>
+              </a:rPr>
+              <a:t>Comparável ao baseline canônico:  </a:t>
+            </a:r>
+            <a:r>
+              <a:rPr sz="1800">
+                <a:solidFill>
+                  <a:srgbClr val="3D424E"/>
+                </a:solidFill>
+              </a:rPr>
+              <a:t>ResNet-34 do FairFace serve como âncora — ConvNeXt-T isola o efeito do condicionamento.</a:t>
+            </a:r>
+          </a:p>
+          <a:p>
+            <a:pPr>
+              <a:spcAft>
+                <a:spcPts val="1000"/>
+              </a:spcAft>
+            </a:pPr>
+            <a:r>
+              <a:rPr sz="1800" b="1">
+                <a:solidFill>
+                  <a:srgbClr val="1F2A4E"/>
+                </a:solidFill>
+              </a:rPr>
+              <a:t>Viável computacionalmente:  </a:t>
+            </a:r>
+            <a:r>
+              <a:rPr sz="1800">
+                <a:solidFill>
+                  <a:srgbClr val="3D424E"/>
+                </a:solidFill>
+              </a:rPr>
+              <a:t>28 M params permitem 3 sementes × 3 configs em GPU comum (~300 h total).</a:t>
+            </a:r>
+          </a:p>
+        </p:txBody>
+      </p:sp>
+      <p:sp>
+        <p:nvSpPr>
+          <p:cNvPr id="5" name="TextBox 4"/>
+          <p:cNvSpPr txBox="1"/>
+          <p:nvPr/>
+        </p:nvSpPr>
+        <p:spPr>
+          <a:xfrm>
+            <a:off x="457200" y="6446520"/>
+            <a:ext cx="10515600" cy="365760"/>
+          </a:xfrm>
+          <a:prstGeom prst="rect">
+            <a:avLst/>
+          </a:prstGeom>
+          <a:noFill/>
+        </p:spPr>
+        <p:txBody>
+          <a:bodyPr wrap="none">
+            <a:spAutoFit/>
+          </a:bodyPr>
+          <a:lstStyle/>
+          <a:p>
+            <a:pPr>
+              <a:defRPr sz="900" i="1">
+                <a:solidFill>
+                  <a:srgbClr val="707682"/>
+                </a:solidFill>
+              </a:defRPr>
+            </a:pPr>
+            <a:r>
+              <a:t>Exame de Qualificação · Marcello Ozzetti · Orientação: Prof. Dr. Marcos G. Quiles · PPG-CC UNIFESP/ICT</a:t>
+            </a:r>
+          </a:p>
+        </p:txBody>
+      </p:sp>
+      <p:sp>
+        <p:nvSpPr>
+          <p:cNvPr id="6" name="TextBox 5"/>
+          <p:cNvSpPr txBox="1"/>
+          <p:nvPr/>
+        </p:nvSpPr>
+        <p:spPr>
+          <a:xfrm>
+            <a:off x="11521440" y="6446520"/>
+            <a:ext cx="640080" cy="365760"/>
+          </a:xfrm>
+          <a:prstGeom prst="rect">
+            <a:avLst/>
+          </a:prstGeom>
+          <a:noFill/>
+        </p:spPr>
+        <p:txBody>
+          <a:bodyPr wrap="none">
+            <a:spAutoFit/>
+          </a:bodyPr>
+          <a:lstStyle/>
+          <a:p>
+            <a:pPr>
+              <a:defRPr sz="900" i="1">
+                <a:solidFill>
+                  <a:srgbClr val="707682"/>
+                </a:solidFill>
+              </a:defRPr>
+            </a:pPr>
+            <a:r>
+              <a:t>18 / 28</a:t>
+            </a:r>
+          </a:p>
+        </p:txBody>
+      </p:sp>
+    </p:spTree>
+  </p:cSld>
+  <p:clrMapOvr>
+    <a:masterClrMapping/>
+  </p:clrMapOvr>
+</p:sld>
+</file>
+
+<file path=ppt/slides/slide19.xml><?xml version="1.0" encoding="utf-8"?>
+<p:sld xmlns:a="http://schemas.openxmlformats.org/drawingml/2006/main" xmlns:p="http://schemas.openxmlformats.org/presentationml/2006/main" xmlns:r="http://schemas.openxmlformats.org/officeDocument/2006/relationships">
+  <p:cSld>
+    <p:spTree>
+      <p:nvGrpSpPr>
+        <p:cNvPr id="1" name=""/>
+        <p:cNvGrpSpPr/>
+        <p:nvPr/>
+      </p:nvGrpSpPr>
+      <p:grpSpPr/>
+      <p:sp>
+        <p:nvSpPr>
+          <p:cNvPr id="2" name="TextBox 1"/>
+          <p:cNvSpPr txBox="1"/>
+          <p:nvPr/>
+        </p:nvSpPr>
+        <p:spPr>
+          <a:xfrm>
+            <a:off x="457200" y="274320"/>
+            <a:ext cx="11430000" cy="914400"/>
+          </a:xfrm>
+          <a:prstGeom prst="rect">
+            <a:avLst/>
+          </a:prstGeom>
+          <a:noFill/>
+        </p:spPr>
+        <p:txBody>
+          <a:bodyPr wrap="square">
+            <a:spAutoFit/>
+          </a:bodyPr>
+          <a:lstStyle/>
+          <a:p>
+            <a:pPr>
+              <a:defRPr sz="2800" b="1">
+                <a:solidFill>
+                  <a:srgbClr val="1F2A4E"/>
+                </a:solidFill>
+              </a:defRPr>
+            </a:pPr>
+            <a:r>
+              <a:t>Racional do mecanismo de condicionamento: FiLM (Perez et al., 2018)</a:t>
+            </a:r>
+          </a:p>
+        </p:txBody>
+      </p:sp>
+      <p:sp>
+        <p:nvSpPr>
+          <p:cNvPr id="3" name="Rectangle 2"/>
+          <p:cNvSpPr/>
+          <p:nvPr/>
+        </p:nvSpPr>
+        <p:spPr>
+          <a:xfrm>
+            <a:off x="457200" y="1097280"/>
+            <a:ext cx="11430000" cy="36576"/>
+          </a:xfrm>
+          <a:prstGeom prst="rect">
+            <a:avLst/>
+          </a:prstGeom>
+          <a:solidFill>
+            <a:srgbClr val="1F2A4E"/>
+          </a:solidFill>
+          <a:ln>
+            <a:noFill/>
+          </a:ln>
+        </p:spPr>
+        <p:style>
+          <a:lnRef idx="1">
+            <a:schemeClr val="accent1"/>
+          </a:lnRef>
+          <a:fillRef idx="3">
+            <a:schemeClr val="accent1"/>
+          </a:fillRef>
+          <a:effectRef idx="2">
+            <a:schemeClr val="accent1"/>
+          </a:effectRef>
+          <a:fontRef idx="minor">
+            <a:schemeClr val="lt1"/>
+          </a:fontRef>
+        </p:style>
+        <p:txBody>
+          <a:bodyPr rtlCol="0" anchor="ctr"/>
+          <a:lstStyle/>
+          <a:p>
+            <a:pPr algn="ctr"/>
+          </a:p>
+        </p:txBody>
+      </p:sp>
+      <p:sp>
+        <p:nvSpPr>
+          <p:cNvPr id="4" name="TextBox 3"/>
+          <p:cNvSpPr txBox="1"/>
+          <p:nvPr/>
+        </p:nvSpPr>
+        <p:spPr>
+          <a:xfrm>
+            <a:off x="457200" y="1417320"/>
+            <a:ext cx="11430000" cy="4937760"/>
+          </a:xfrm>
+          <a:prstGeom prst="rect">
+            <a:avLst/>
+          </a:prstGeom>
+          <a:noFill/>
+        </p:spPr>
+        <p:txBody>
+          <a:bodyPr wrap="square">
+            <a:spAutoFit/>
+          </a:bodyPr>
+          <a:lstStyle/>
+          <a:p>
+            <a:pPr>
+              <a:spcAft>
+                <a:spcPts val="1000"/>
+              </a:spcAft>
+            </a:pPr>
+            <a:r>
+              <a:rPr sz="1800" b="1">
+                <a:solidFill>
+                  <a:srgbClr val="1F2A4E"/>
+                </a:solidFill>
+              </a:rPr>
+              <a:t>Adequação dimensional ao sinal MST:  </a:t>
+            </a:r>
+            <a:r>
+              <a:rPr sz="1800">
+                <a:solidFill>
+                  <a:srgbClr val="3D424E"/>
+                </a:solidFill>
+              </a:rPr>
+              <a:t>sinal 10-dim casa naturalmente com γ, β — sem explosão paramétrica.</a:t>
+            </a:r>
+          </a:p>
+          <a:p>
+            <a:pPr>
+              <a:spcAft>
+                <a:spcPts val="1000"/>
+              </a:spcAft>
+            </a:pPr>
+            <a:r>
+              <a:rPr sz="1800" b="1">
+                <a:solidFill>
+                  <a:srgbClr val="1F2A4E"/>
+                </a:solidFill>
+              </a:rPr>
+              <a:t>Eficiência:  </a:t>
+            </a:r>
+            <a:r>
+              <a:rPr sz="1800">
+                <a:solidFill>
+                  <a:srgbClr val="3D424E"/>
+                </a:solidFill>
+              </a:rPr>
+              <a:t>~380 k parâmetros (~1,3 % do backbone) — muito abaixo de cross-attention (~3×).</a:t>
+            </a:r>
+          </a:p>
+          <a:p>
+            <a:pPr>
+              <a:spcAft>
+                <a:spcPts val="1000"/>
+              </a:spcAft>
+            </a:pPr>
+            <a:r>
+              <a:rPr sz="1800" b="1">
+                <a:solidFill>
+                  <a:srgbClr val="1F2A4E"/>
+                </a:solidFill>
+              </a:rPr>
+              <a:t>Interpretabilidade direta:  </a:t>
+            </a:r>
+            <a:r>
+              <a:rPr sz="1800">
+                <a:solidFill>
+                  <a:srgbClr val="3D424E"/>
+                </a:solidFill>
+              </a:rPr>
+              <a:t>γ e β por canal permitem inspecionar como cada tom modula as features.</a:t>
+            </a:r>
+          </a:p>
+          <a:p>
+            <a:pPr>
+              <a:spcAft>
+                <a:spcPts val="1000"/>
+              </a:spcAft>
+            </a:pPr>
+            <a:r>
+              <a:rPr sz="1800" b="1">
+                <a:solidFill>
+                  <a:srgbClr val="1F2A4E"/>
+                </a:solidFill>
+              </a:rPr>
+              <a:t>Compatibilidade nativa:  </a:t>
+            </a:r>
+            <a:r>
+              <a:rPr sz="1800">
+                <a:solidFill>
+                  <a:srgbClr val="3D424E"/>
+                </a:solidFill>
+              </a:rPr>
+              <a:t>opera bem com LayerNorm do ConvNeXt-T; init identidade preserva backbone.</a:t>
+            </a:r>
+          </a:p>
+          <a:p>
+            <a:pPr>
+              <a:spcAft>
+                <a:spcPts val="1000"/>
+              </a:spcAft>
+            </a:pPr>
+            <a:r>
+              <a:rPr sz="1800" b="1">
+                <a:solidFill>
+                  <a:srgbClr val="1F2A4E"/>
+                </a:solidFill>
+              </a:rPr>
+              <a:t>Lacuna documentada:  </a:t>
+            </a:r>
+            <a:r>
+              <a:rPr sz="1800">
+                <a:solidFill>
+                  <a:srgbClr val="3D424E"/>
+                </a:solidFill>
+              </a:rPr>
+              <a:t>sem aplicação prévia em fairness facial multi-classe — Contribuição 3 desta pesquisa.</a:t>
+            </a:r>
+          </a:p>
+          <a:p>
+            <a:pPr>
+              <a:spcAft>
+                <a:spcPts val="1000"/>
+              </a:spcAft>
+            </a:pPr>
+            <a:r>
+              <a:rPr sz="1800" b="1">
+                <a:solidFill>
+                  <a:srgbClr val="1F2A4E"/>
+                </a:solidFill>
+              </a:rPr>
+              <a:t>Descartadas com justificativa formal (Cap 2):  </a:t>
+            </a:r>
+            <a:r>
+              <a:rPr sz="1800">
+                <a:solidFill>
+                  <a:srgbClr val="3D424E"/>
+                </a:solidFill>
+              </a:rPr>
+              <a:t>Concatenação, CBN, Cross-attention, AdaIN, SPADE, HyperNetworks, LoRA/Adaptadores.</a:t>
+            </a:r>
+          </a:p>
+        </p:txBody>
+      </p:sp>
+      <p:sp>
+        <p:nvSpPr>
+          <p:cNvPr id="5" name="TextBox 4"/>
+          <p:cNvSpPr txBox="1"/>
+          <p:nvPr/>
+        </p:nvSpPr>
+        <p:spPr>
+          <a:xfrm>
+            <a:off x="457200" y="6446520"/>
+            <a:ext cx="10515600" cy="365760"/>
+          </a:xfrm>
+          <a:prstGeom prst="rect">
+            <a:avLst/>
+          </a:prstGeom>
+          <a:noFill/>
+        </p:spPr>
+        <p:txBody>
+          <a:bodyPr wrap="none">
+            <a:spAutoFit/>
+          </a:bodyPr>
+          <a:lstStyle/>
+          <a:p>
+            <a:pPr>
+              <a:defRPr sz="900" i="1">
+                <a:solidFill>
+                  <a:srgbClr val="707682"/>
+                </a:solidFill>
+              </a:defRPr>
+            </a:pPr>
+            <a:r>
+              <a:t>Exame de Qualificação · Marcello Ozzetti · Orientação: Prof. Dr. Marcos G. Quiles · PPG-CC UNIFESP/ICT</a:t>
+            </a:r>
+          </a:p>
+        </p:txBody>
+      </p:sp>
+      <p:sp>
+        <p:nvSpPr>
+          <p:cNvPr id="6" name="TextBox 5"/>
+          <p:cNvSpPr txBox="1"/>
+          <p:nvPr/>
+        </p:nvSpPr>
+        <p:spPr>
+          <a:xfrm>
+            <a:off x="11521440" y="6446520"/>
+            <a:ext cx="640080" cy="365760"/>
+          </a:xfrm>
+          <a:prstGeom prst="rect">
+            <a:avLst/>
+          </a:prstGeom>
+          <a:noFill/>
+        </p:spPr>
+        <p:txBody>
+          <a:bodyPr wrap="none">
+            <a:spAutoFit/>
+          </a:bodyPr>
+          <a:lstStyle/>
+          <a:p>
+            <a:pPr>
+              <a:defRPr sz="900" i="1">
+                <a:solidFill>
+                  <a:srgbClr val="707682"/>
+                </a:solidFill>
+              </a:defRPr>
+            </a:pPr>
+            <a:r>
+              <a:t>19 / 28</a:t>
+            </a:r>
+          </a:p>
+        </p:txBody>
+      </p:sp>
+    </p:spTree>
+  </p:cSld>
+  <p:clrMapOvr>
+    <a:masterClrMapping/>
+  </p:clrMapOvr>
+</p:sld>
+</file>
+
+<file path=ppt/slides/slide2.xml><?xml version="1.0" encoding="utf-8"?>
+<p:sld xmlns:a="http://schemas.openxmlformats.org/drawingml/2006/main" xmlns:p="http://schemas.openxmlformats.org/presentationml/2006/main" xmlns:r="http://schemas.openxmlformats.org/officeDocument/2006/relationships">
+  <p:cSld>
+    <p:spTree>
+      <p:nvGrpSpPr>
+        <p:cNvPr id="1" name=""/>
+        <p:cNvGrpSpPr/>
+        <p:nvPr/>
+      </p:nvGrpSpPr>
+      <p:grpSpPr/>
+      <p:sp>
+        <p:nvSpPr>
+          <p:cNvPr id="2" name="TextBox 1"/>
+          <p:cNvSpPr txBox="1"/>
+          <p:nvPr/>
+        </p:nvSpPr>
+        <p:spPr>
+          <a:xfrm>
+            <a:off x="457200" y="274320"/>
+            <a:ext cx="11430000" cy="914400"/>
+          </a:xfrm>
+          <a:prstGeom prst="rect">
+            <a:avLst/>
+          </a:prstGeom>
+          <a:noFill/>
+        </p:spPr>
+        <p:txBody>
+          <a:bodyPr wrap="square">
+            <a:spAutoFit/>
+          </a:bodyPr>
+          <a:lstStyle/>
+          <a:p>
+            <a:pPr>
+              <a:defRPr sz="2800" b="1">
+                <a:solidFill>
+                  <a:srgbClr val="1F2A4E"/>
+                </a:solidFill>
+              </a:defRPr>
+            </a:pPr>
+            <a:r>
+              <a:t>Reconhecimento facial: adoção sociotécnica em larga escala</a:t>
+            </a:r>
+          </a:p>
+        </p:txBody>
+      </p:sp>
+      <p:sp>
+        <p:nvSpPr>
+          <p:cNvPr id="3" name="Rectangle 2"/>
+          <p:cNvSpPr/>
+          <p:nvPr/>
+        </p:nvSpPr>
+        <p:spPr>
+          <a:xfrm>
+            <a:off x="457200" y="1097280"/>
+            <a:ext cx="11430000" cy="36576"/>
+          </a:xfrm>
+          <a:prstGeom prst="rect">
+            <a:avLst/>
+          </a:prstGeom>
+          <a:solidFill>
+            <a:srgbClr val="1F2A4E"/>
+          </a:solidFill>
+          <a:ln>
+            <a:noFill/>
+          </a:ln>
+        </p:spPr>
+        <p:style>
+          <a:lnRef idx="1">
+            <a:schemeClr val="accent1"/>
+          </a:lnRef>
+          <a:fillRef idx="3">
+            <a:schemeClr val="accent1"/>
+          </a:fillRef>
+          <a:effectRef idx="2">
+            <a:schemeClr val="accent1"/>
+          </a:effectRef>
+          <a:fontRef idx="minor">
+            <a:schemeClr val="lt1"/>
+          </a:fontRef>
+        </p:style>
+        <p:txBody>
+          <a:bodyPr rtlCol="0" anchor="ctr"/>
+          <a:lstStyle/>
+          <a:p>
+            <a:pPr algn="ctr"/>
+          </a:p>
+        </p:txBody>
+      </p:sp>
+      <p:sp>
+        <p:nvSpPr>
+          <p:cNvPr id="4" name="Rounded Rectangle 3"/>
+          <p:cNvSpPr/>
+          <p:nvPr/>
+        </p:nvSpPr>
+        <p:spPr>
+          <a:xfrm>
+            <a:off x="996695" y="1463040"/>
+            <a:ext cx="2377440" cy="1645920"/>
+          </a:xfrm>
+          <a:prstGeom prst="roundRect">
+            <a:avLst/>
+          </a:prstGeom>
+          <a:solidFill>
+            <a:srgbClr val="E8EAED"/>
+          </a:solidFill>
+          <a:ln>
+            <a:solidFill>
+              <a:srgbClr val="E8EAED"/>
+            </a:solidFill>
+          </a:ln>
+        </p:spPr>
+        <p:style>
+          <a:lnRef idx="1">
+            <a:schemeClr val="accent1"/>
+          </a:lnRef>
+          <a:fillRef idx="3">
+            <a:schemeClr val="accent1"/>
+          </a:fillRef>
+          <a:effectRef idx="2">
+            <a:schemeClr val="accent1"/>
+          </a:effectRef>
+          <a:fontRef idx="minor">
+            <a:schemeClr val="lt1"/>
+          </a:fontRef>
+        </p:style>
+        <p:txBody>
+          <a:bodyPr rtlCol="0" anchor="ctr"/>
+          <a:lstStyle/>
+          <a:p>
+            <a:pPr algn="ctr"/>
+          </a:p>
+        </p:txBody>
+      </p:sp>
+      <p:sp>
+        <p:nvSpPr>
+          <p:cNvPr id="5" name="TextBox 4"/>
+          <p:cNvSpPr txBox="1"/>
+          <p:nvPr/>
+        </p:nvSpPr>
+        <p:spPr>
+          <a:xfrm>
+            <a:off x="996695" y="1691640"/>
+            <a:ext cx="2377440" cy="365760"/>
+          </a:xfrm>
+          <a:prstGeom prst="rect">
+            <a:avLst/>
+          </a:prstGeom>
+          <a:noFill/>
+        </p:spPr>
+        <p:txBody>
+          <a:bodyPr wrap="none">
+            <a:spAutoFit/>
+          </a:bodyPr>
+          <a:lstStyle/>
+          <a:p>
+            <a:pPr algn="ctr">
+              <a:defRPr sz="1300" b="1">
+                <a:solidFill>
+                  <a:srgbClr val="C0392B"/>
+                </a:solidFill>
+              </a:defRPr>
+            </a:pPr>
+            <a:r>
+              <a:t>DISPOSITIVOS</a:t>
+            </a:r>
+          </a:p>
+        </p:txBody>
+      </p:sp>
+      <p:sp>
+        <p:nvSpPr>
+          <p:cNvPr id="6" name="TextBox 5"/>
+          <p:cNvSpPr txBox="1"/>
+          <p:nvPr/>
+        </p:nvSpPr>
+        <p:spPr>
+          <a:xfrm>
+            <a:off x="1088136" y="2148840"/>
+            <a:ext cx="2194560" cy="822960"/>
+          </a:xfrm>
+          <a:prstGeom prst="rect">
+            <a:avLst/>
+          </a:prstGeom>
+          <a:noFill/>
+        </p:spPr>
+        <p:txBody>
+          <a:bodyPr wrap="square">
+            <a:spAutoFit/>
+          </a:bodyPr>
+          <a:lstStyle/>
+          <a:p>
+            <a:pPr algn="ctr">
+              <a:defRPr sz="1600" b="1">
+                <a:solidFill>
+                  <a:srgbClr val="1F2A4E"/>
+                </a:solidFill>
+              </a:defRPr>
+            </a:pPr>
+            <a:r>
+              <a:t>Desbloqueio</a:t>
+            </a:r>
+          </a:p>
+          <a:p>
+            <a:pPr algn="ctr">
+              <a:defRPr sz="1600" b="1">
+                <a:solidFill>
+                  <a:srgbClr val="1F2A4E"/>
+                </a:solidFill>
+              </a:defRPr>
+            </a:pPr>
+            <a:r>
+              <a:t>de celular</a:t>
+            </a:r>
+          </a:p>
+        </p:txBody>
+      </p:sp>
+      <p:sp>
+        <p:nvSpPr>
+          <p:cNvPr id="7" name="Rounded Rectangle 6"/>
+          <p:cNvSpPr/>
+          <p:nvPr/>
+        </p:nvSpPr>
+        <p:spPr>
+          <a:xfrm>
+            <a:off x="3602736" y="1463040"/>
+            <a:ext cx="2377440" cy="1645920"/>
+          </a:xfrm>
+          <a:prstGeom prst="roundRect">
+            <a:avLst/>
+          </a:prstGeom>
+          <a:solidFill>
+            <a:srgbClr val="E8EAED"/>
+          </a:solidFill>
+          <a:ln>
+            <a:solidFill>
+              <a:srgbClr val="E8EAED"/>
+            </a:solidFill>
+          </a:ln>
+        </p:spPr>
+        <p:style>
+          <a:lnRef idx="1">
+            <a:schemeClr val="accent1"/>
+          </a:lnRef>
+          <a:fillRef idx="3">
+            <a:schemeClr val="accent1"/>
+          </a:fillRef>
+          <a:effectRef idx="2">
+            <a:schemeClr val="accent1"/>
+          </a:effectRef>
+          <a:fontRef idx="minor">
+            <a:schemeClr val="lt1"/>
+          </a:fontRef>
+        </p:style>
+        <p:txBody>
+          <a:bodyPr rtlCol="0" anchor="ctr"/>
+          <a:lstStyle/>
+          <a:p>
+            <a:pPr algn="ctr"/>
+          </a:p>
+        </p:txBody>
+      </p:sp>
+      <p:sp>
+        <p:nvSpPr>
+          <p:cNvPr id="8" name="TextBox 7"/>
+          <p:cNvSpPr txBox="1"/>
+          <p:nvPr/>
+        </p:nvSpPr>
+        <p:spPr>
+          <a:xfrm>
+            <a:off x="3602736" y="1691640"/>
+            <a:ext cx="2377440" cy="365760"/>
+          </a:xfrm>
+          <a:prstGeom prst="rect">
+            <a:avLst/>
+          </a:prstGeom>
+          <a:noFill/>
+        </p:spPr>
+        <p:txBody>
+          <a:bodyPr wrap="none">
+            <a:spAutoFit/>
+          </a:bodyPr>
+          <a:lstStyle/>
+          <a:p>
+            <a:pPr algn="ctr">
+              <a:defRPr sz="1300" b="1">
+                <a:solidFill>
+                  <a:srgbClr val="C0392B"/>
+                </a:solidFill>
+              </a:defRPr>
+            </a:pPr>
+            <a:r>
+              <a:t>BANCOS</a:t>
+            </a:r>
+          </a:p>
+        </p:txBody>
+      </p:sp>
+      <p:sp>
+        <p:nvSpPr>
+          <p:cNvPr id="9" name="TextBox 8"/>
+          <p:cNvSpPr txBox="1"/>
+          <p:nvPr/>
+        </p:nvSpPr>
+        <p:spPr>
+          <a:xfrm>
+            <a:off x="3694176" y="2148840"/>
+            <a:ext cx="2194560" cy="822960"/>
+          </a:xfrm>
+          <a:prstGeom prst="rect">
+            <a:avLst/>
+          </a:prstGeom>
+          <a:noFill/>
+        </p:spPr>
+        <p:txBody>
+          <a:bodyPr wrap="square">
+            <a:spAutoFit/>
+          </a:bodyPr>
+          <a:lstStyle/>
+          <a:p>
+            <a:pPr algn="ctr">
+              <a:defRPr sz="1600" b="1">
+                <a:solidFill>
+                  <a:srgbClr val="1F2A4E"/>
+                </a:solidFill>
+              </a:defRPr>
+            </a:pPr>
+            <a:r>
+              <a:t>Autenticação</a:t>
+            </a:r>
+          </a:p>
+          <a:p>
+            <a:pPr algn="ctr">
+              <a:defRPr sz="1600" b="1">
+                <a:solidFill>
+                  <a:srgbClr val="1F2A4E"/>
+                </a:solidFill>
+              </a:defRPr>
+            </a:pPr>
+            <a:r>
+              <a:t>financeira</a:t>
+            </a:r>
+          </a:p>
+        </p:txBody>
+      </p:sp>
+      <p:sp>
+        <p:nvSpPr>
+          <p:cNvPr id="10" name="Rounded Rectangle 9"/>
+          <p:cNvSpPr/>
+          <p:nvPr/>
+        </p:nvSpPr>
+        <p:spPr>
+          <a:xfrm>
+            <a:off x="6208776" y="1463040"/>
+            <a:ext cx="2377440" cy="1645920"/>
+          </a:xfrm>
+          <a:prstGeom prst="roundRect">
+            <a:avLst/>
+          </a:prstGeom>
+          <a:solidFill>
+            <a:srgbClr val="E8EAED"/>
+          </a:solidFill>
+          <a:ln>
+            <a:solidFill>
+              <a:srgbClr val="E8EAED"/>
+            </a:solidFill>
+          </a:ln>
+        </p:spPr>
+        <p:style>
+          <a:lnRef idx="1">
+            <a:schemeClr val="accent1"/>
+          </a:lnRef>
+          <a:fillRef idx="3">
+            <a:schemeClr val="accent1"/>
+          </a:fillRef>
+          <a:effectRef idx="2">
+            <a:schemeClr val="accent1"/>
+          </a:effectRef>
+          <a:fontRef idx="minor">
+            <a:schemeClr val="lt1"/>
+          </a:fontRef>
+        </p:style>
+        <p:txBody>
+          <a:bodyPr rtlCol="0" anchor="ctr"/>
+          <a:lstStyle/>
+          <a:p>
+            <a:pPr algn="ctr"/>
+          </a:p>
+        </p:txBody>
+      </p:sp>
+      <p:sp>
+        <p:nvSpPr>
+          <p:cNvPr id="11" name="TextBox 10"/>
+          <p:cNvSpPr txBox="1"/>
+          <p:nvPr/>
+        </p:nvSpPr>
+        <p:spPr>
+          <a:xfrm>
+            <a:off x="6208776" y="1691640"/>
+            <a:ext cx="2377440" cy="365760"/>
+          </a:xfrm>
+          <a:prstGeom prst="rect">
+            <a:avLst/>
+          </a:prstGeom>
+          <a:noFill/>
+        </p:spPr>
+        <p:txBody>
+          <a:bodyPr wrap="none">
+            <a:spAutoFit/>
+          </a:bodyPr>
+          <a:lstStyle/>
+          <a:p>
+            <a:pPr algn="ctr">
+              <a:defRPr sz="1300" b="1">
+                <a:solidFill>
+                  <a:srgbClr val="C0392B"/>
+                </a:solidFill>
+              </a:defRPr>
+            </a:pPr>
+            <a:r>
+              <a:t>FRONTEIRAS</a:t>
+            </a:r>
+          </a:p>
+        </p:txBody>
+      </p:sp>
+      <p:sp>
+        <p:nvSpPr>
+          <p:cNvPr id="12" name="TextBox 11"/>
+          <p:cNvSpPr txBox="1"/>
+          <p:nvPr/>
+        </p:nvSpPr>
+        <p:spPr>
+          <a:xfrm>
+            <a:off x="6300216" y="2148840"/>
+            <a:ext cx="2194560" cy="822960"/>
+          </a:xfrm>
+          <a:prstGeom prst="rect">
+            <a:avLst/>
+          </a:prstGeom>
+          <a:noFill/>
+        </p:spPr>
+        <p:txBody>
+          <a:bodyPr wrap="square">
+            <a:spAutoFit/>
+          </a:bodyPr>
+          <a:lstStyle/>
+          <a:p>
+            <a:pPr algn="ctr">
+              <a:defRPr sz="1600" b="1">
+                <a:solidFill>
+                  <a:srgbClr val="1F2A4E"/>
+                </a:solidFill>
+              </a:defRPr>
+            </a:pPr>
+            <a:r>
+              <a:t>Controle</a:t>
+            </a:r>
+          </a:p>
+          <a:p>
+            <a:pPr algn="ctr">
+              <a:defRPr sz="1600" b="1">
+                <a:solidFill>
+                  <a:srgbClr val="1F2A4E"/>
+                </a:solidFill>
+              </a:defRPr>
+            </a:pPr>
+            <a:r>
+              <a:t>migratório</a:t>
+            </a:r>
+          </a:p>
+        </p:txBody>
+      </p:sp>
+      <p:sp>
+        <p:nvSpPr>
+          <p:cNvPr id="13" name="Rounded Rectangle 12"/>
+          <p:cNvSpPr/>
+          <p:nvPr/>
+        </p:nvSpPr>
+        <p:spPr>
+          <a:xfrm>
+            <a:off x="8814816" y="1463040"/>
+            <a:ext cx="2377440" cy="1645920"/>
+          </a:xfrm>
+          <a:prstGeom prst="roundRect">
+            <a:avLst/>
+          </a:prstGeom>
+          <a:solidFill>
+            <a:srgbClr val="E8EAED"/>
+          </a:solidFill>
+          <a:ln>
+            <a:solidFill>
+              <a:srgbClr val="E8EAED"/>
+            </a:solidFill>
+          </a:ln>
+        </p:spPr>
+        <p:style>
+          <a:lnRef idx="1">
+            <a:schemeClr val="accent1"/>
+          </a:lnRef>
+          <a:fillRef idx="3">
+            <a:schemeClr val="accent1"/>
+          </a:fillRef>
+          <a:effectRef idx="2">
+            <a:schemeClr val="accent1"/>
+          </a:effectRef>
+          <a:fontRef idx="minor">
+            <a:schemeClr val="lt1"/>
+          </a:fontRef>
+        </p:style>
+        <p:txBody>
+          <a:bodyPr rtlCol="0" anchor="ctr"/>
+          <a:lstStyle/>
+          <a:p>
+            <a:pPr algn="ctr"/>
+          </a:p>
+        </p:txBody>
+      </p:sp>
+      <p:sp>
+        <p:nvSpPr>
+          <p:cNvPr id="14" name="TextBox 13"/>
+          <p:cNvSpPr txBox="1"/>
+          <p:nvPr/>
+        </p:nvSpPr>
+        <p:spPr>
+          <a:xfrm>
+            <a:off x="8814816" y="1691640"/>
+            <a:ext cx="2377440" cy="365760"/>
+          </a:xfrm>
+          <a:prstGeom prst="rect">
+            <a:avLst/>
+          </a:prstGeom>
+          <a:noFill/>
+        </p:spPr>
+        <p:txBody>
+          <a:bodyPr wrap="none">
+            <a:spAutoFit/>
+          </a:bodyPr>
+          <a:lstStyle/>
+          <a:p>
+            <a:pPr algn="ctr">
+              <a:defRPr sz="1300" b="1">
+                <a:solidFill>
+                  <a:srgbClr val="C0392B"/>
+                </a:solidFill>
+              </a:defRPr>
+            </a:pPr>
+            <a:r>
+              <a:t>SEGURANÇA</a:t>
+            </a:r>
+          </a:p>
+        </p:txBody>
+      </p:sp>
+      <p:sp>
+        <p:nvSpPr>
+          <p:cNvPr id="15" name="TextBox 14"/>
+          <p:cNvSpPr txBox="1"/>
+          <p:nvPr/>
+        </p:nvSpPr>
+        <p:spPr>
+          <a:xfrm>
+            <a:off x="8906256" y="2148840"/>
+            <a:ext cx="2194560" cy="822960"/>
+          </a:xfrm>
+          <a:prstGeom prst="rect">
+            <a:avLst/>
+          </a:prstGeom>
+          <a:noFill/>
+        </p:spPr>
+        <p:txBody>
+          <a:bodyPr wrap="square">
+            <a:spAutoFit/>
+          </a:bodyPr>
+          <a:lstStyle/>
+          <a:p>
+            <a:pPr algn="ctr">
+              <a:defRPr sz="1600" b="1">
+                <a:solidFill>
+                  <a:srgbClr val="1F2A4E"/>
+                </a:solidFill>
+              </a:defRPr>
+            </a:pPr>
+            <a:r>
+              <a:t>Identificação</a:t>
+            </a:r>
+          </a:p>
+          <a:p>
+            <a:pPr algn="ctr">
+              <a:defRPr sz="1600" b="1">
+                <a:solidFill>
+                  <a:srgbClr val="1F2A4E"/>
+                </a:solidFill>
+              </a:defRPr>
+            </a:pPr>
+            <a:r>
+              <a:t>policial</a:t>
+            </a:r>
+          </a:p>
+        </p:txBody>
+      </p:sp>
+      <p:sp>
+        <p:nvSpPr>
+          <p:cNvPr id="16" name="Rounded Rectangle 15"/>
+          <p:cNvSpPr/>
+          <p:nvPr/>
+        </p:nvSpPr>
+        <p:spPr>
+          <a:xfrm>
+            <a:off x="640080" y="3566160"/>
+            <a:ext cx="4114800" cy="2377440"/>
+          </a:xfrm>
+          <a:prstGeom prst="roundRect">
+            <a:avLst/>
+          </a:prstGeom>
+          <a:solidFill>
+            <a:srgbClr val="1F2A4E"/>
+          </a:solidFill>
+          <a:ln>
+            <a:noFill/>
+          </a:ln>
+        </p:spPr>
+        <p:style>
+          <a:lnRef idx="1">
+            <a:schemeClr val="accent1"/>
+          </a:lnRef>
+          <a:fillRef idx="3">
+            <a:schemeClr val="accent1"/>
+          </a:fillRef>
+          <a:effectRef idx="2">
+            <a:schemeClr val="accent1"/>
+          </a:effectRef>
+          <a:fontRef idx="minor">
+            <a:schemeClr val="lt1"/>
+          </a:fontRef>
+        </p:style>
+        <p:txBody>
+          <a:bodyPr rtlCol="0" anchor="ctr"/>
+          <a:lstStyle/>
+          <a:p>
+            <a:pPr algn="ctr"/>
+          </a:p>
+        </p:txBody>
+      </p:sp>
+      <p:sp>
+        <p:nvSpPr>
+          <p:cNvPr id="17" name="TextBox 16"/>
+          <p:cNvSpPr txBox="1"/>
+          <p:nvPr/>
+        </p:nvSpPr>
+        <p:spPr>
+          <a:xfrm>
+            <a:off x="640080" y="3794760"/>
+            <a:ext cx="4114800" cy="1005840"/>
+          </a:xfrm>
+          <a:prstGeom prst="rect">
+            <a:avLst/>
+          </a:prstGeom>
+          <a:noFill/>
+        </p:spPr>
+        <p:txBody>
+          <a:bodyPr wrap="none">
+            <a:spAutoFit/>
+          </a:bodyPr>
+          <a:lstStyle/>
+          <a:p>
+            <a:pPr algn="ctr">
+              <a:defRPr sz="4600" b="1">
+                <a:solidFill>
+                  <a:srgbClr val="FFFFFF"/>
+                </a:solidFill>
+              </a:defRPr>
+            </a:pPr>
+            <a:r>
+              <a:t>10 – 100 ×</a:t>
+            </a:r>
+          </a:p>
+        </p:txBody>
+      </p:sp>
+      <p:sp>
+        <p:nvSpPr>
+          <p:cNvPr id="18" name="TextBox 17"/>
+          <p:cNvSpPr txBox="1"/>
+          <p:nvPr/>
+        </p:nvSpPr>
+        <p:spPr>
+          <a:xfrm>
+            <a:off x="822960" y="4937760"/>
+            <a:ext cx="3749039" cy="914400"/>
+          </a:xfrm>
+          <a:prstGeom prst="rect">
+            <a:avLst/>
+          </a:prstGeom>
+          <a:noFill/>
+        </p:spPr>
+        <p:txBody>
+          <a:bodyPr wrap="square">
+            <a:spAutoFit/>
+          </a:bodyPr>
+          <a:lstStyle/>
+          <a:p>
+            <a:pPr algn="ctr">
+              <a:defRPr sz="1400">
+                <a:solidFill>
+                  <a:srgbClr val="B4C4E8"/>
+                </a:solidFill>
+              </a:defRPr>
+            </a:pPr>
+            <a:r>
+              <a:t>disparidade na taxa de</a:t>
+            </a:r>
+            <a:br/>
+            <a:r>
+              <a:t>falso positivo entre</a:t>
+            </a:r>
+            <a:br/>
+            <a:r>
+              <a:t>grupos demográficos</a:t>
+            </a:r>
+          </a:p>
+        </p:txBody>
+      </p:sp>
+      <p:sp>
+        <p:nvSpPr>
+          <p:cNvPr id="19" name="TextBox 18"/>
+          <p:cNvSpPr txBox="1"/>
+          <p:nvPr/>
+        </p:nvSpPr>
+        <p:spPr>
+          <a:xfrm>
+            <a:off x="5029200" y="3566160"/>
+            <a:ext cx="6766560" cy="2377440"/>
+          </a:xfrm>
+          <a:prstGeom prst="rect">
+            <a:avLst/>
+          </a:prstGeom>
+          <a:noFill/>
+        </p:spPr>
+        <p:txBody>
+          <a:bodyPr wrap="square">
+            <a:spAutoFit/>
+          </a:bodyPr>
+          <a:lstStyle/>
+          <a:p>
+            <a:pPr>
+              <a:spcAft>
+                <a:spcPts val="700"/>
+              </a:spcAft>
+            </a:pPr>
+            <a:r>
+              <a:rPr sz="1600" b="1">
+                <a:solidFill>
+                  <a:srgbClr val="1F2A4E"/>
+                </a:solidFill>
+              </a:rPr>
+              <a:t>NIST 2019 (Grother et al.): </a:t>
+            </a:r>
+            <a:r>
+              <a:rPr sz="1600">
+                <a:solidFill>
+                  <a:srgbClr val="3D424E"/>
+                </a:solidFill>
+              </a:rPr>
+              <a:t>maior auditoria pública já feita em biometria facial — 189 algoritmos comerciais avaliados sobre 18 milhões de imagens.</a:t>
+            </a:r>
+          </a:p>
+          <a:p>
+            <a:pPr>
+              <a:spcAft>
+                <a:spcPts val="700"/>
+              </a:spcAft>
+            </a:pPr>
+            <a:r>
+              <a:rPr sz="1600" b="1">
+                <a:solidFill>
+                  <a:srgbClr val="1F2A4E"/>
+                </a:solidFill>
+              </a:rPr>
+              <a:t>Gender Shades (Buolamwini &amp; Gebru, 2018): </a:t>
+            </a:r>
+            <a:r>
+              <a:rPr sz="1600">
+                <a:solidFill>
+                  <a:srgbClr val="3D424E"/>
+                </a:solidFill>
+              </a:rPr>
+              <a:t>estudo fundacional que colocou o viés racial-de-gênero na agenda pública.</a:t>
+            </a:r>
+          </a:p>
+          <a:p>
+            <a:pPr>
+              <a:spcAft>
+                <a:spcPts val="700"/>
+              </a:spcAft>
+            </a:pPr>
+            <a:r>
+              <a:rPr sz="1600" b="1">
+                <a:solidFill>
+                  <a:srgbClr val="1F2A4E"/>
+                </a:solidFill>
+              </a:rPr>
+              <a:t>Conclusão: </a:t>
+            </a:r>
+            <a:r>
+              <a:rPr sz="1600">
+                <a:solidFill>
+                  <a:srgbClr val="3D424E"/>
+                </a:solidFill>
+              </a:rPr>
+              <a:t>desempenho agregado favorável coexiste com disparidade sistemática entre subgrupos demográficos.</a:t>
+            </a:r>
+          </a:p>
+        </p:txBody>
+      </p:sp>
+      <p:sp>
+        <p:nvSpPr>
+          <p:cNvPr id="20" name="TextBox 19"/>
+          <p:cNvSpPr txBox="1"/>
+          <p:nvPr/>
+        </p:nvSpPr>
+        <p:spPr>
+          <a:xfrm>
+            <a:off x="457200" y="6446520"/>
+            <a:ext cx="10515600" cy="365760"/>
+          </a:xfrm>
+          <a:prstGeom prst="rect">
+            <a:avLst/>
+          </a:prstGeom>
+          <a:noFill/>
+        </p:spPr>
+        <p:txBody>
+          <a:bodyPr wrap="none">
+            <a:spAutoFit/>
+          </a:bodyPr>
+          <a:lstStyle/>
+          <a:p>
+            <a:pPr>
+              <a:defRPr sz="900" i="1">
+                <a:solidFill>
+                  <a:srgbClr val="707682"/>
+                </a:solidFill>
+              </a:defRPr>
+            </a:pPr>
+            <a:r>
+              <a:t>Exame de Qualificação · Marcello Ozzetti · Orientação: Prof. Dr. Marcos G. Quiles · PPG-CC UNIFESP/ICT</a:t>
+            </a:r>
+          </a:p>
+        </p:txBody>
+      </p:sp>
+      <p:sp>
+        <p:nvSpPr>
+          <p:cNvPr id="21" name="TextBox 20"/>
+          <p:cNvSpPr txBox="1"/>
+          <p:nvPr/>
+        </p:nvSpPr>
+        <p:spPr>
+          <a:xfrm>
+            <a:off x="11521440" y="6446520"/>
+            <a:ext cx="640080" cy="365760"/>
+          </a:xfrm>
+          <a:prstGeom prst="rect">
+            <a:avLst/>
+          </a:prstGeom>
+          <a:noFill/>
+        </p:spPr>
+        <p:txBody>
+          <a:bodyPr wrap="none">
+            <a:spAutoFit/>
+          </a:bodyPr>
+          <a:lstStyle/>
+          <a:p>
+            <a:pPr>
+              <a:defRPr sz="900" i="1">
+                <a:solidFill>
+                  <a:srgbClr val="707682"/>
+                </a:solidFill>
+              </a:defRPr>
+            </a:pPr>
+            <a:r>
+              <a:t>2 / 28</a:t>
+            </a:r>
+          </a:p>
+        </p:txBody>
+      </p:sp>
+    </p:spTree>
+  </p:cSld>
+  <p:clrMapOvr>
+    <a:masterClrMapping/>
+  </p:clrMapOvr>
+</p:sld>
+</file>
+
+<file path=ppt/slides/slide20.xml><?xml version="1.0" encoding="utf-8"?>
+<p:sld xmlns:a="http://schemas.openxmlformats.org/drawingml/2006/main" xmlns:p="http://schemas.openxmlformats.org/presentationml/2006/main" xmlns:r="http://schemas.openxmlformats.org/officeDocument/2006/relationships">
+  <p:cSld>
+    <p:spTree>
+      <p:nvGrpSpPr>
+        <p:cNvPr id="1" name=""/>
+        <p:cNvGrpSpPr/>
+        <p:nvPr/>
+      </p:nvGrpSpPr>
+      <p:grpSpPr/>
+      <p:sp>
+        <p:nvSpPr>
+          <p:cNvPr id="2" name="TextBox 1"/>
+          <p:cNvSpPr txBox="1"/>
+          <p:nvPr/>
+        </p:nvSpPr>
+        <p:spPr>
+          <a:xfrm>
+            <a:off x="457200" y="274320"/>
+            <a:ext cx="11430000" cy="914400"/>
+          </a:xfrm>
+          <a:prstGeom prst="rect">
+            <a:avLst/>
+          </a:prstGeom>
+          <a:noFill/>
+        </p:spPr>
+        <p:txBody>
+          <a:bodyPr wrap="square">
+            <a:spAutoFit/>
+          </a:bodyPr>
+          <a:lstStyle/>
+          <a:p>
+            <a:pPr>
+              <a:defRPr sz="2800" b="1">
+                <a:solidFill>
+                  <a:srgbClr val="1F2A4E"/>
+                </a:solidFill>
+              </a:defRPr>
+            </a:pPr>
+            <a:r>
+              <a:t>Mecanismo FiLM: modulação de features condicionada ao tom de pele</a:t>
+            </a:r>
+          </a:p>
+        </p:txBody>
+      </p:sp>
+      <p:sp>
+        <p:nvSpPr>
+          <p:cNvPr id="3" name="Rectangle 2"/>
+          <p:cNvSpPr/>
+          <p:nvPr/>
+        </p:nvSpPr>
+        <p:spPr>
+          <a:xfrm>
+            <a:off x="457200" y="1097280"/>
+            <a:ext cx="11430000" cy="36576"/>
+          </a:xfrm>
+          <a:prstGeom prst="rect">
+            <a:avLst/>
+          </a:prstGeom>
+          <a:solidFill>
+            <a:srgbClr val="1F2A4E"/>
+          </a:solidFill>
+          <a:ln>
+            <a:noFill/>
+          </a:ln>
+        </p:spPr>
+        <p:style>
+          <a:lnRef idx="1">
+            <a:schemeClr val="accent1"/>
+          </a:lnRef>
+          <a:fillRef idx="3">
+            <a:schemeClr val="accent1"/>
+          </a:fillRef>
+          <a:effectRef idx="2">
+            <a:schemeClr val="accent1"/>
+          </a:effectRef>
+          <a:fontRef idx="minor">
+            <a:schemeClr val="lt1"/>
+          </a:fontRef>
+        </p:style>
+        <p:txBody>
+          <a:bodyPr rtlCol="0" anchor="ctr"/>
+          <a:lstStyle/>
+          <a:p>
+            <a:pPr algn="ctr"/>
+          </a:p>
+        </p:txBody>
+      </p:sp>
+      <p:pic>
+        <p:nvPicPr>
+          <p:cNvPr id="4" name="Picture 3" descr="film_pipeline.png"/>
+          <p:cNvPicPr>
+            <a:picLocks noChangeAspect="1"/>
+          </p:cNvPicPr>
+          <p:nvPr/>
+        </p:nvPicPr>
+        <p:blipFill>
+          <a:blip r:embed="rId2"/>
+          <a:stretch>
+            <a:fillRect/>
+          </a:stretch>
+        </p:blipFill>
+        <p:spPr>
+          <a:xfrm>
+            <a:off x="2291864" y="1371600"/>
+            <a:ext cx="7605222" cy="4206240"/>
+          </a:xfrm>
+          <a:prstGeom prst="rect">
+            <a:avLst/>
+          </a:prstGeom>
+        </p:spPr>
+      </p:pic>
+      <p:sp>
+        <p:nvSpPr>
+          <p:cNvPr id="5" name="TextBox 4"/>
+          <p:cNvSpPr txBox="1"/>
+          <p:nvPr/>
+        </p:nvSpPr>
+        <p:spPr>
+          <a:xfrm>
+            <a:off x="457200" y="5989320"/>
+            <a:ext cx="11430000" cy="365760"/>
+          </a:xfrm>
+          <a:prstGeom prst="rect">
+            <a:avLst/>
+          </a:prstGeom>
+          <a:noFill/>
+        </p:spPr>
+        <p:txBody>
+          <a:bodyPr wrap="none">
+            <a:spAutoFit/>
+          </a:bodyPr>
+          <a:lstStyle/>
+          <a:p>
+            <a:pPr algn="ctr">
+              <a:defRPr sz="1400" i="1">
+                <a:solidFill>
+                  <a:srgbClr val="707682"/>
+                </a:solidFill>
+              </a:defRPr>
+            </a:pPr>
+            <a:r>
+              <a:t>FiLM (Perez et al., 2018) modula as features intermediárias do ConvNeXt-T canal a canal, condicionadas ao vetor MST. Overhead paramétrico: aproximadamente 1,3 % do backbone.</a:t>
+            </a:r>
+          </a:p>
+        </p:txBody>
+      </p:sp>
+      <p:sp>
+        <p:nvSpPr>
+          <p:cNvPr id="6" name="TextBox 5"/>
+          <p:cNvSpPr txBox="1"/>
+          <p:nvPr/>
+        </p:nvSpPr>
+        <p:spPr>
+          <a:xfrm>
+            <a:off x="457200" y="6446520"/>
+            <a:ext cx="10515600" cy="365760"/>
+          </a:xfrm>
+          <a:prstGeom prst="rect">
+            <a:avLst/>
+          </a:prstGeom>
+          <a:noFill/>
+        </p:spPr>
+        <p:txBody>
+          <a:bodyPr wrap="none">
+            <a:spAutoFit/>
+          </a:bodyPr>
+          <a:lstStyle/>
+          <a:p>
+            <a:pPr>
+              <a:defRPr sz="900" i="1">
+                <a:solidFill>
+                  <a:srgbClr val="707682"/>
+                </a:solidFill>
+              </a:defRPr>
+            </a:pPr>
+            <a:r>
+              <a:t>Exame de Qualificação · Marcello Ozzetti · Orientação: Prof. Dr. Marcos G. Quiles · PPG-CC UNIFESP/ICT</a:t>
+            </a:r>
+          </a:p>
+        </p:txBody>
+      </p:sp>
+      <p:sp>
+        <p:nvSpPr>
+          <p:cNvPr id="7" name="TextBox 6"/>
+          <p:cNvSpPr txBox="1"/>
+          <p:nvPr/>
+        </p:nvSpPr>
+        <p:spPr>
+          <a:xfrm>
+            <a:off x="11521440" y="6446520"/>
+            <a:ext cx="640080" cy="365760"/>
+          </a:xfrm>
+          <a:prstGeom prst="rect">
+            <a:avLst/>
+          </a:prstGeom>
+          <a:noFill/>
+        </p:spPr>
+        <p:txBody>
+          <a:bodyPr wrap="none">
+            <a:spAutoFit/>
+          </a:bodyPr>
+          <a:lstStyle/>
+          <a:p>
+            <a:pPr>
+              <a:defRPr sz="900" i="1">
+                <a:solidFill>
+                  <a:srgbClr val="707682"/>
+                </a:solidFill>
+              </a:defRPr>
+            </a:pPr>
+            <a:r>
+              <a:t>20 / 28</a:t>
+            </a:r>
+          </a:p>
+        </p:txBody>
+      </p:sp>
+    </p:spTree>
+  </p:cSld>
+  <p:clrMapOvr>
+    <a:masterClrMapping/>
+  </p:clrMapOvr>
+</p:sld>
+</file>
+
+<file path=ppt/slides/slide21.xml><?xml version="1.0" encoding="utf-8"?>
 <p:sld xmlns:a="http://schemas.openxmlformats.org/drawingml/2006/main" xmlns:p="http://schemas.openxmlformats.org/presentationml/2006/main" xmlns:r="http://schemas.openxmlformats.org/officeDocument/2006/relationships">
   <p:cSld>
     <p:spTree>
@@ -6373,7 +8164,7 @@
               </a:defRPr>
             </a:pPr>
             <a:r>
-              <a:t>17 / 24</a:t>
+              <a:t>21 / 28</a:t>
             </a:r>
           </a:p>
         </p:txBody>
@@ -6386,7 +8177,7 @@
 </p:sld>
 </file>
 
-<file path=ppt/slides/slide18.xml><?xml version="1.0" encoding="utf-8"?>
+<file path=ppt/slides/slide22.xml><?xml version="1.0" encoding="utf-8"?>
 <p:sld xmlns:a="http://schemas.openxmlformats.org/drawingml/2006/main" xmlns:p="http://schemas.openxmlformats.org/presentationml/2006/main" xmlns:r="http://schemas.openxmlformats.org/officeDocument/2006/relationships">
   <p:cSld>
     <p:spTree>
@@ -6677,7 +8468,7 @@
               </a:defRPr>
             </a:pPr>
             <a:r>
-              <a:t>18 / 24</a:t>
+              <a:t>22 / 28</a:t>
             </a:r>
           </a:p>
         </p:txBody>
@@ -6690,7 +8481,7 @@
 </p:sld>
 </file>
 
-<file path=ppt/slides/slide19.xml><?xml version="1.0" encoding="utf-8"?>
+<file path=ppt/slides/slide23.xml><?xml version="1.0" encoding="utf-8"?>
 <p:sld xmlns:a="http://schemas.openxmlformats.org/drawingml/2006/main" xmlns:p="http://schemas.openxmlformats.org/presentationml/2006/main" xmlns:r="http://schemas.openxmlformats.org/officeDocument/2006/relationships">
   <p:cSld>
     <p:spTree>
@@ -7004,7 +8795,7 @@
               </a:defRPr>
             </a:pPr>
             <a:r>
-              <a:t>19 / 24</a:t>
+              <a:t>23 / 28</a:t>
             </a:r>
           </a:p>
         </p:txBody>
@@ -7017,894 +8808,7 @@
 </p:sld>
 </file>
 
-<file path=ppt/slides/slide2.xml><?xml version="1.0" encoding="utf-8"?>
-<p:sld xmlns:a="http://schemas.openxmlformats.org/drawingml/2006/main" xmlns:p="http://schemas.openxmlformats.org/presentationml/2006/main" xmlns:r="http://schemas.openxmlformats.org/officeDocument/2006/relationships">
-  <p:cSld>
-    <p:spTree>
-      <p:nvGrpSpPr>
-        <p:cNvPr id="1" name=""/>
-        <p:cNvGrpSpPr/>
-        <p:nvPr/>
-      </p:nvGrpSpPr>
-      <p:grpSpPr/>
-      <p:sp>
-        <p:nvSpPr>
-          <p:cNvPr id="2" name="TextBox 1"/>
-          <p:cNvSpPr txBox="1"/>
-          <p:nvPr/>
-        </p:nvSpPr>
-        <p:spPr>
-          <a:xfrm>
-            <a:off x="457200" y="274320"/>
-            <a:ext cx="11430000" cy="914400"/>
-          </a:xfrm>
-          <a:prstGeom prst="rect">
-            <a:avLst/>
-          </a:prstGeom>
-          <a:noFill/>
-        </p:spPr>
-        <p:txBody>
-          <a:bodyPr wrap="square">
-            <a:spAutoFit/>
-          </a:bodyPr>
-          <a:lstStyle/>
-          <a:p>
-            <a:pPr>
-              <a:defRPr sz="2800" b="1">
-                <a:solidFill>
-                  <a:srgbClr val="1F2A4E"/>
-                </a:solidFill>
-              </a:defRPr>
-            </a:pPr>
-            <a:r>
-              <a:t>Reconhecimento facial: adoção sociotécnica em larga escala</a:t>
-            </a:r>
-          </a:p>
-        </p:txBody>
-      </p:sp>
-      <p:sp>
-        <p:nvSpPr>
-          <p:cNvPr id="3" name="Rectangle 2"/>
-          <p:cNvSpPr/>
-          <p:nvPr/>
-        </p:nvSpPr>
-        <p:spPr>
-          <a:xfrm>
-            <a:off x="457200" y="1097280"/>
-            <a:ext cx="11430000" cy="36576"/>
-          </a:xfrm>
-          <a:prstGeom prst="rect">
-            <a:avLst/>
-          </a:prstGeom>
-          <a:solidFill>
-            <a:srgbClr val="1F2A4E"/>
-          </a:solidFill>
-          <a:ln>
-            <a:noFill/>
-          </a:ln>
-        </p:spPr>
-        <p:style>
-          <a:lnRef idx="1">
-            <a:schemeClr val="accent1"/>
-          </a:lnRef>
-          <a:fillRef idx="3">
-            <a:schemeClr val="accent1"/>
-          </a:fillRef>
-          <a:effectRef idx="2">
-            <a:schemeClr val="accent1"/>
-          </a:effectRef>
-          <a:fontRef idx="minor">
-            <a:schemeClr val="lt1"/>
-          </a:fontRef>
-        </p:style>
-        <p:txBody>
-          <a:bodyPr rtlCol="0" anchor="ctr"/>
-          <a:lstStyle/>
-          <a:p>
-            <a:pPr algn="ctr"/>
-          </a:p>
-        </p:txBody>
-      </p:sp>
-      <p:sp>
-        <p:nvSpPr>
-          <p:cNvPr id="4" name="Rounded Rectangle 3"/>
-          <p:cNvSpPr/>
-          <p:nvPr/>
-        </p:nvSpPr>
-        <p:spPr>
-          <a:xfrm>
-            <a:off x="996695" y="1463040"/>
-            <a:ext cx="2377440" cy="1645920"/>
-          </a:xfrm>
-          <a:prstGeom prst="roundRect">
-            <a:avLst/>
-          </a:prstGeom>
-          <a:solidFill>
-            <a:srgbClr val="E8EAED"/>
-          </a:solidFill>
-          <a:ln>
-            <a:solidFill>
-              <a:srgbClr val="E8EAED"/>
-            </a:solidFill>
-          </a:ln>
-        </p:spPr>
-        <p:style>
-          <a:lnRef idx="1">
-            <a:schemeClr val="accent1"/>
-          </a:lnRef>
-          <a:fillRef idx="3">
-            <a:schemeClr val="accent1"/>
-          </a:fillRef>
-          <a:effectRef idx="2">
-            <a:schemeClr val="accent1"/>
-          </a:effectRef>
-          <a:fontRef idx="minor">
-            <a:schemeClr val="lt1"/>
-          </a:fontRef>
-        </p:style>
-        <p:txBody>
-          <a:bodyPr rtlCol="0" anchor="ctr"/>
-          <a:lstStyle/>
-          <a:p>
-            <a:pPr algn="ctr"/>
-          </a:p>
-        </p:txBody>
-      </p:sp>
-      <p:sp>
-        <p:nvSpPr>
-          <p:cNvPr id="5" name="TextBox 4"/>
-          <p:cNvSpPr txBox="1"/>
-          <p:nvPr/>
-        </p:nvSpPr>
-        <p:spPr>
-          <a:xfrm>
-            <a:off x="996695" y="1691640"/>
-            <a:ext cx="2377440" cy="365760"/>
-          </a:xfrm>
-          <a:prstGeom prst="rect">
-            <a:avLst/>
-          </a:prstGeom>
-          <a:noFill/>
-        </p:spPr>
-        <p:txBody>
-          <a:bodyPr wrap="none">
-            <a:spAutoFit/>
-          </a:bodyPr>
-          <a:lstStyle/>
-          <a:p>
-            <a:pPr algn="ctr">
-              <a:defRPr sz="1300" b="1">
-                <a:solidFill>
-                  <a:srgbClr val="C0392B"/>
-                </a:solidFill>
-              </a:defRPr>
-            </a:pPr>
-            <a:r>
-              <a:t>DISPOSITIVOS</a:t>
-            </a:r>
-          </a:p>
-        </p:txBody>
-      </p:sp>
-      <p:sp>
-        <p:nvSpPr>
-          <p:cNvPr id="6" name="TextBox 5"/>
-          <p:cNvSpPr txBox="1"/>
-          <p:nvPr/>
-        </p:nvSpPr>
-        <p:spPr>
-          <a:xfrm>
-            <a:off x="1088136" y="2148840"/>
-            <a:ext cx="2194560" cy="822960"/>
-          </a:xfrm>
-          <a:prstGeom prst="rect">
-            <a:avLst/>
-          </a:prstGeom>
-          <a:noFill/>
-        </p:spPr>
-        <p:txBody>
-          <a:bodyPr wrap="square">
-            <a:spAutoFit/>
-          </a:bodyPr>
-          <a:lstStyle/>
-          <a:p>
-            <a:pPr algn="ctr">
-              <a:defRPr sz="1600" b="1">
-                <a:solidFill>
-                  <a:srgbClr val="1F2A4E"/>
-                </a:solidFill>
-              </a:defRPr>
-            </a:pPr>
-            <a:r>
-              <a:t>Desbloqueio</a:t>
-            </a:r>
-          </a:p>
-          <a:p>
-            <a:pPr algn="ctr">
-              <a:defRPr sz="1600" b="1">
-                <a:solidFill>
-                  <a:srgbClr val="1F2A4E"/>
-                </a:solidFill>
-              </a:defRPr>
-            </a:pPr>
-            <a:r>
-              <a:t>de celular</a:t>
-            </a:r>
-          </a:p>
-        </p:txBody>
-      </p:sp>
-      <p:sp>
-        <p:nvSpPr>
-          <p:cNvPr id="7" name="Rounded Rectangle 6"/>
-          <p:cNvSpPr/>
-          <p:nvPr/>
-        </p:nvSpPr>
-        <p:spPr>
-          <a:xfrm>
-            <a:off x="3602736" y="1463040"/>
-            <a:ext cx="2377440" cy="1645920"/>
-          </a:xfrm>
-          <a:prstGeom prst="roundRect">
-            <a:avLst/>
-          </a:prstGeom>
-          <a:solidFill>
-            <a:srgbClr val="E8EAED"/>
-          </a:solidFill>
-          <a:ln>
-            <a:solidFill>
-              <a:srgbClr val="E8EAED"/>
-            </a:solidFill>
-          </a:ln>
-        </p:spPr>
-        <p:style>
-          <a:lnRef idx="1">
-            <a:schemeClr val="accent1"/>
-          </a:lnRef>
-          <a:fillRef idx="3">
-            <a:schemeClr val="accent1"/>
-          </a:fillRef>
-          <a:effectRef idx="2">
-            <a:schemeClr val="accent1"/>
-          </a:effectRef>
-          <a:fontRef idx="minor">
-            <a:schemeClr val="lt1"/>
-          </a:fontRef>
-        </p:style>
-        <p:txBody>
-          <a:bodyPr rtlCol="0" anchor="ctr"/>
-          <a:lstStyle/>
-          <a:p>
-            <a:pPr algn="ctr"/>
-          </a:p>
-        </p:txBody>
-      </p:sp>
-      <p:sp>
-        <p:nvSpPr>
-          <p:cNvPr id="8" name="TextBox 7"/>
-          <p:cNvSpPr txBox="1"/>
-          <p:nvPr/>
-        </p:nvSpPr>
-        <p:spPr>
-          <a:xfrm>
-            <a:off x="3602736" y="1691640"/>
-            <a:ext cx="2377440" cy="365760"/>
-          </a:xfrm>
-          <a:prstGeom prst="rect">
-            <a:avLst/>
-          </a:prstGeom>
-          <a:noFill/>
-        </p:spPr>
-        <p:txBody>
-          <a:bodyPr wrap="none">
-            <a:spAutoFit/>
-          </a:bodyPr>
-          <a:lstStyle/>
-          <a:p>
-            <a:pPr algn="ctr">
-              <a:defRPr sz="1300" b="1">
-                <a:solidFill>
-                  <a:srgbClr val="C0392B"/>
-                </a:solidFill>
-              </a:defRPr>
-            </a:pPr>
-            <a:r>
-              <a:t>BANCOS</a:t>
-            </a:r>
-          </a:p>
-        </p:txBody>
-      </p:sp>
-      <p:sp>
-        <p:nvSpPr>
-          <p:cNvPr id="9" name="TextBox 8"/>
-          <p:cNvSpPr txBox="1"/>
-          <p:nvPr/>
-        </p:nvSpPr>
-        <p:spPr>
-          <a:xfrm>
-            <a:off x="3694176" y="2148840"/>
-            <a:ext cx="2194560" cy="822960"/>
-          </a:xfrm>
-          <a:prstGeom prst="rect">
-            <a:avLst/>
-          </a:prstGeom>
-          <a:noFill/>
-        </p:spPr>
-        <p:txBody>
-          <a:bodyPr wrap="square">
-            <a:spAutoFit/>
-          </a:bodyPr>
-          <a:lstStyle/>
-          <a:p>
-            <a:pPr algn="ctr">
-              <a:defRPr sz="1600" b="1">
-                <a:solidFill>
-                  <a:srgbClr val="1F2A4E"/>
-                </a:solidFill>
-              </a:defRPr>
-            </a:pPr>
-            <a:r>
-              <a:t>Autenticação</a:t>
-            </a:r>
-          </a:p>
-          <a:p>
-            <a:pPr algn="ctr">
-              <a:defRPr sz="1600" b="1">
-                <a:solidFill>
-                  <a:srgbClr val="1F2A4E"/>
-                </a:solidFill>
-              </a:defRPr>
-            </a:pPr>
-            <a:r>
-              <a:t>financeira</a:t>
-            </a:r>
-          </a:p>
-        </p:txBody>
-      </p:sp>
-      <p:sp>
-        <p:nvSpPr>
-          <p:cNvPr id="10" name="Rounded Rectangle 9"/>
-          <p:cNvSpPr/>
-          <p:nvPr/>
-        </p:nvSpPr>
-        <p:spPr>
-          <a:xfrm>
-            <a:off x="6208776" y="1463040"/>
-            <a:ext cx="2377440" cy="1645920"/>
-          </a:xfrm>
-          <a:prstGeom prst="roundRect">
-            <a:avLst/>
-          </a:prstGeom>
-          <a:solidFill>
-            <a:srgbClr val="E8EAED"/>
-          </a:solidFill>
-          <a:ln>
-            <a:solidFill>
-              <a:srgbClr val="E8EAED"/>
-            </a:solidFill>
-          </a:ln>
-        </p:spPr>
-        <p:style>
-          <a:lnRef idx="1">
-            <a:schemeClr val="accent1"/>
-          </a:lnRef>
-          <a:fillRef idx="3">
-            <a:schemeClr val="accent1"/>
-          </a:fillRef>
-          <a:effectRef idx="2">
-            <a:schemeClr val="accent1"/>
-          </a:effectRef>
-          <a:fontRef idx="minor">
-            <a:schemeClr val="lt1"/>
-          </a:fontRef>
-        </p:style>
-        <p:txBody>
-          <a:bodyPr rtlCol="0" anchor="ctr"/>
-          <a:lstStyle/>
-          <a:p>
-            <a:pPr algn="ctr"/>
-          </a:p>
-        </p:txBody>
-      </p:sp>
-      <p:sp>
-        <p:nvSpPr>
-          <p:cNvPr id="11" name="TextBox 10"/>
-          <p:cNvSpPr txBox="1"/>
-          <p:nvPr/>
-        </p:nvSpPr>
-        <p:spPr>
-          <a:xfrm>
-            <a:off x="6208776" y="1691640"/>
-            <a:ext cx="2377440" cy="365760"/>
-          </a:xfrm>
-          <a:prstGeom prst="rect">
-            <a:avLst/>
-          </a:prstGeom>
-          <a:noFill/>
-        </p:spPr>
-        <p:txBody>
-          <a:bodyPr wrap="none">
-            <a:spAutoFit/>
-          </a:bodyPr>
-          <a:lstStyle/>
-          <a:p>
-            <a:pPr algn="ctr">
-              <a:defRPr sz="1300" b="1">
-                <a:solidFill>
-                  <a:srgbClr val="C0392B"/>
-                </a:solidFill>
-              </a:defRPr>
-            </a:pPr>
-            <a:r>
-              <a:t>FRONTEIRAS</a:t>
-            </a:r>
-          </a:p>
-        </p:txBody>
-      </p:sp>
-      <p:sp>
-        <p:nvSpPr>
-          <p:cNvPr id="12" name="TextBox 11"/>
-          <p:cNvSpPr txBox="1"/>
-          <p:nvPr/>
-        </p:nvSpPr>
-        <p:spPr>
-          <a:xfrm>
-            <a:off x="6300216" y="2148840"/>
-            <a:ext cx="2194560" cy="822960"/>
-          </a:xfrm>
-          <a:prstGeom prst="rect">
-            <a:avLst/>
-          </a:prstGeom>
-          <a:noFill/>
-        </p:spPr>
-        <p:txBody>
-          <a:bodyPr wrap="square">
-            <a:spAutoFit/>
-          </a:bodyPr>
-          <a:lstStyle/>
-          <a:p>
-            <a:pPr algn="ctr">
-              <a:defRPr sz="1600" b="1">
-                <a:solidFill>
-                  <a:srgbClr val="1F2A4E"/>
-                </a:solidFill>
-              </a:defRPr>
-            </a:pPr>
-            <a:r>
-              <a:t>Controle</a:t>
-            </a:r>
-          </a:p>
-          <a:p>
-            <a:pPr algn="ctr">
-              <a:defRPr sz="1600" b="1">
-                <a:solidFill>
-                  <a:srgbClr val="1F2A4E"/>
-                </a:solidFill>
-              </a:defRPr>
-            </a:pPr>
-            <a:r>
-              <a:t>migratório</a:t>
-            </a:r>
-          </a:p>
-        </p:txBody>
-      </p:sp>
-      <p:sp>
-        <p:nvSpPr>
-          <p:cNvPr id="13" name="Rounded Rectangle 12"/>
-          <p:cNvSpPr/>
-          <p:nvPr/>
-        </p:nvSpPr>
-        <p:spPr>
-          <a:xfrm>
-            <a:off x="8814816" y="1463040"/>
-            <a:ext cx="2377440" cy="1645920"/>
-          </a:xfrm>
-          <a:prstGeom prst="roundRect">
-            <a:avLst/>
-          </a:prstGeom>
-          <a:solidFill>
-            <a:srgbClr val="E8EAED"/>
-          </a:solidFill>
-          <a:ln>
-            <a:solidFill>
-              <a:srgbClr val="E8EAED"/>
-            </a:solidFill>
-          </a:ln>
-        </p:spPr>
-        <p:style>
-          <a:lnRef idx="1">
-            <a:schemeClr val="accent1"/>
-          </a:lnRef>
-          <a:fillRef idx="3">
-            <a:schemeClr val="accent1"/>
-          </a:fillRef>
-          <a:effectRef idx="2">
-            <a:schemeClr val="accent1"/>
-          </a:effectRef>
-          <a:fontRef idx="minor">
-            <a:schemeClr val="lt1"/>
-          </a:fontRef>
-        </p:style>
-        <p:txBody>
-          <a:bodyPr rtlCol="0" anchor="ctr"/>
-          <a:lstStyle/>
-          <a:p>
-            <a:pPr algn="ctr"/>
-          </a:p>
-        </p:txBody>
-      </p:sp>
-      <p:sp>
-        <p:nvSpPr>
-          <p:cNvPr id="14" name="TextBox 13"/>
-          <p:cNvSpPr txBox="1"/>
-          <p:nvPr/>
-        </p:nvSpPr>
-        <p:spPr>
-          <a:xfrm>
-            <a:off x="8814816" y="1691640"/>
-            <a:ext cx="2377440" cy="365760"/>
-          </a:xfrm>
-          <a:prstGeom prst="rect">
-            <a:avLst/>
-          </a:prstGeom>
-          <a:noFill/>
-        </p:spPr>
-        <p:txBody>
-          <a:bodyPr wrap="none">
-            <a:spAutoFit/>
-          </a:bodyPr>
-          <a:lstStyle/>
-          <a:p>
-            <a:pPr algn="ctr">
-              <a:defRPr sz="1300" b="1">
-                <a:solidFill>
-                  <a:srgbClr val="C0392B"/>
-                </a:solidFill>
-              </a:defRPr>
-            </a:pPr>
-            <a:r>
-              <a:t>SEGURANÇA</a:t>
-            </a:r>
-          </a:p>
-        </p:txBody>
-      </p:sp>
-      <p:sp>
-        <p:nvSpPr>
-          <p:cNvPr id="15" name="TextBox 14"/>
-          <p:cNvSpPr txBox="1"/>
-          <p:nvPr/>
-        </p:nvSpPr>
-        <p:spPr>
-          <a:xfrm>
-            <a:off x="8906256" y="2148840"/>
-            <a:ext cx="2194560" cy="822960"/>
-          </a:xfrm>
-          <a:prstGeom prst="rect">
-            <a:avLst/>
-          </a:prstGeom>
-          <a:noFill/>
-        </p:spPr>
-        <p:txBody>
-          <a:bodyPr wrap="square">
-            <a:spAutoFit/>
-          </a:bodyPr>
-          <a:lstStyle/>
-          <a:p>
-            <a:pPr algn="ctr">
-              <a:defRPr sz="1600" b="1">
-                <a:solidFill>
-                  <a:srgbClr val="1F2A4E"/>
-                </a:solidFill>
-              </a:defRPr>
-            </a:pPr>
-            <a:r>
-              <a:t>Identificação</a:t>
-            </a:r>
-          </a:p>
-          <a:p>
-            <a:pPr algn="ctr">
-              <a:defRPr sz="1600" b="1">
-                <a:solidFill>
-                  <a:srgbClr val="1F2A4E"/>
-                </a:solidFill>
-              </a:defRPr>
-            </a:pPr>
-            <a:r>
-              <a:t>policial</a:t>
-            </a:r>
-          </a:p>
-        </p:txBody>
-      </p:sp>
-      <p:sp>
-        <p:nvSpPr>
-          <p:cNvPr id="16" name="Rounded Rectangle 15"/>
-          <p:cNvSpPr/>
-          <p:nvPr/>
-        </p:nvSpPr>
-        <p:spPr>
-          <a:xfrm>
-            <a:off x="640080" y="3566160"/>
-            <a:ext cx="4114800" cy="2377440"/>
-          </a:xfrm>
-          <a:prstGeom prst="roundRect">
-            <a:avLst/>
-          </a:prstGeom>
-          <a:solidFill>
-            <a:srgbClr val="1F2A4E"/>
-          </a:solidFill>
-          <a:ln>
-            <a:noFill/>
-          </a:ln>
-        </p:spPr>
-        <p:style>
-          <a:lnRef idx="1">
-            <a:schemeClr val="accent1"/>
-          </a:lnRef>
-          <a:fillRef idx="3">
-            <a:schemeClr val="accent1"/>
-          </a:fillRef>
-          <a:effectRef idx="2">
-            <a:schemeClr val="accent1"/>
-          </a:effectRef>
-          <a:fontRef idx="minor">
-            <a:schemeClr val="lt1"/>
-          </a:fontRef>
-        </p:style>
-        <p:txBody>
-          <a:bodyPr rtlCol="0" anchor="ctr"/>
-          <a:lstStyle/>
-          <a:p>
-            <a:pPr algn="ctr"/>
-          </a:p>
-        </p:txBody>
-      </p:sp>
-      <p:sp>
-        <p:nvSpPr>
-          <p:cNvPr id="17" name="TextBox 16"/>
-          <p:cNvSpPr txBox="1"/>
-          <p:nvPr/>
-        </p:nvSpPr>
-        <p:spPr>
-          <a:xfrm>
-            <a:off x="640080" y="3794760"/>
-            <a:ext cx="4114800" cy="1005840"/>
-          </a:xfrm>
-          <a:prstGeom prst="rect">
-            <a:avLst/>
-          </a:prstGeom>
-          <a:noFill/>
-        </p:spPr>
-        <p:txBody>
-          <a:bodyPr wrap="none">
-            <a:spAutoFit/>
-          </a:bodyPr>
-          <a:lstStyle/>
-          <a:p>
-            <a:pPr algn="ctr">
-              <a:defRPr sz="4600" b="1">
-                <a:solidFill>
-                  <a:srgbClr val="FFFFFF"/>
-                </a:solidFill>
-              </a:defRPr>
-            </a:pPr>
-            <a:r>
-              <a:t>10 – 100 ×</a:t>
-            </a:r>
-          </a:p>
-        </p:txBody>
-      </p:sp>
-      <p:sp>
-        <p:nvSpPr>
-          <p:cNvPr id="18" name="TextBox 17"/>
-          <p:cNvSpPr txBox="1"/>
-          <p:nvPr/>
-        </p:nvSpPr>
-        <p:spPr>
-          <a:xfrm>
-            <a:off x="822960" y="4937760"/>
-            <a:ext cx="3749039" cy="914400"/>
-          </a:xfrm>
-          <a:prstGeom prst="rect">
-            <a:avLst/>
-          </a:prstGeom>
-          <a:noFill/>
-        </p:spPr>
-        <p:txBody>
-          <a:bodyPr wrap="square">
-            <a:spAutoFit/>
-          </a:bodyPr>
-          <a:lstStyle/>
-          <a:p>
-            <a:pPr algn="ctr">
-              <a:defRPr sz="1400">
-                <a:solidFill>
-                  <a:srgbClr val="B4C4E8"/>
-                </a:solidFill>
-              </a:defRPr>
-            </a:pPr>
-            <a:r>
-              <a:t>disparidade na taxa de</a:t>
-            </a:r>
-            <a:br/>
-            <a:r>
-              <a:t>falso positivo entre</a:t>
-            </a:r>
-            <a:br/>
-            <a:r>
-              <a:t>grupos demográficos</a:t>
-            </a:r>
-          </a:p>
-        </p:txBody>
-      </p:sp>
-      <p:sp>
-        <p:nvSpPr>
-          <p:cNvPr id="19" name="TextBox 18"/>
-          <p:cNvSpPr txBox="1"/>
-          <p:nvPr/>
-        </p:nvSpPr>
-        <p:spPr>
-          <a:xfrm>
-            <a:off x="5029200" y="3566160"/>
-            <a:ext cx="6766560" cy="2377440"/>
-          </a:xfrm>
-          <a:prstGeom prst="rect">
-            <a:avLst/>
-          </a:prstGeom>
-          <a:noFill/>
-        </p:spPr>
-        <p:txBody>
-          <a:bodyPr wrap="square">
-            <a:spAutoFit/>
-          </a:bodyPr>
-          <a:lstStyle/>
-          <a:p>
-            <a:pPr>
-              <a:spcAft>
-                <a:spcPts val="700"/>
-              </a:spcAft>
-            </a:pPr>
-            <a:r>
-              <a:rPr sz="1600" b="1">
-                <a:solidFill>
-                  <a:srgbClr val="1F2A4E"/>
-                </a:solidFill>
-              </a:rPr>
-              <a:t>NIST 2019 (Grother et al.): </a:t>
-            </a:r>
-            <a:r>
-              <a:rPr sz="1600">
-                <a:solidFill>
-                  <a:srgbClr val="3D424E"/>
-                </a:solidFill>
-              </a:rPr>
-              <a:t>maior auditoria pública já feita em biometria facial — 189 algoritmos comerciais avaliados sobre 18 milhões de imagens.</a:t>
-            </a:r>
-          </a:p>
-          <a:p>
-            <a:pPr>
-              <a:spcAft>
-                <a:spcPts val="700"/>
-              </a:spcAft>
-            </a:pPr>
-            <a:r>
-              <a:rPr sz="1600" b="1">
-                <a:solidFill>
-                  <a:srgbClr val="1F2A4E"/>
-                </a:solidFill>
-              </a:rPr>
-              <a:t>Gender Shades (Buolamwini &amp; Gebru, 2018): </a:t>
-            </a:r>
-            <a:r>
-              <a:rPr sz="1600">
-                <a:solidFill>
-                  <a:srgbClr val="3D424E"/>
-                </a:solidFill>
-              </a:rPr>
-              <a:t>estudo fundacional que colocou o viés racial-de-gênero na agenda pública.</a:t>
-            </a:r>
-          </a:p>
-          <a:p>
-            <a:pPr>
-              <a:spcAft>
-                <a:spcPts val="700"/>
-              </a:spcAft>
-            </a:pPr>
-            <a:r>
-              <a:rPr sz="1600" b="1">
-                <a:solidFill>
-                  <a:srgbClr val="1F2A4E"/>
-                </a:solidFill>
-              </a:rPr>
-              <a:t>Conclusão: </a:t>
-            </a:r>
-            <a:r>
-              <a:rPr sz="1600">
-                <a:solidFill>
-                  <a:srgbClr val="3D424E"/>
-                </a:solidFill>
-              </a:rPr>
-              <a:t>desempenho agregado favorável coexiste com disparidade sistemática entre subgrupos demográficos.</a:t>
-            </a:r>
-          </a:p>
-        </p:txBody>
-      </p:sp>
-      <p:sp>
-        <p:nvSpPr>
-          <p:cNvPr id="20" name="TextBox 19"/>
-          <p:cNvSpPr txBox="1"/>
-          <p:nvPr/>
-        </p:nvSpPr>
-        <p:spPr>
-          <a:xfrm>
-            <a:off x="457200" y="6446520"/>
-            <a:ext cx="10515600" cy="365760"/>
-          </a:xfrm>
-          <a:prstGeom prst="rect">
-            <a:avLst/>
-          </a:prstGeom>
-          <a:noFill/>
-        </p:spPr>
-        <p:txBody>
-          <a:bodyPr wrap="none">
-            <a:spAutoFit/>
-          </a:bodyPr>
-          <a:lstStyle/>
-          <a:p>
-            <a:pPr>
-              <a:defRPr sz="900" i="1">
-                <a:solidFill>
-                  <a:srgbClr val="707682"/>
-                </a:solidFill>
-              </a:defRPr>
-            </a:pPr>
-            <a:r>
-              <a:t>Exame de Qualificação · Marcello Ozzetti · Orientação: Prof. Dr. Marcos G. Quiles · PPG-CC UNIFESP/ICT</a:t>
-            </a:r>
-          </a:p>
-        </p:txBody>
-      </p:sp>
-      <p:sp>
-        <p:nvSpPr>
-          <p:cNvPr id="21" name="TextBox 20"/>
-          <p:cNvSpPr txBox="1"/>
-          <p:nvPr/>
-        </p:nvSpPr>
-        <p:spPr>
-          <a:xfrm>
-            <a:off x="11521440" y="6446520"/>
-            <a:ext cx="640080" cy="365760"/>
-          </a:xfrm>
-          <a:prstGeom prst="rect">
-            <a:avLst/>
-          </a:prstGeom>
-          <a:noFill/>
-        </p:spPr>
-        <p:txBody>
-          <a:bodyPr wrap="none">
-            <a:spAutoFit/>
-          </a:bodyPr>
-          <a:lstStyle/>
-          <a:p>
-            <a:pPr>
-              <a:defRPr sz="900" i="1">
-                <a:solidFill>
-                  <a:srgbClr val="707682"/>
-                </a:solidFill>
-              </a:defRPr>
-            </a:pPr>
-            <a:r>
-              <a:t>2 / 24</a:t>
-            </a:r>
-          </a:p>
-        </p:txBody>
-      </p:sp>
-    </p:spTree>
-  </p:cSld>
-  <p:clrMapOvr>
-    <a:masterClrMapping/>
-  </p:clrMapOvr>
-</p:sld>
-</file>
-
-<file path=ppt/slides/slide20.xml><?xml version="1.0" encoding="utf-8"?>
+<file path=ppt/slides/slide24.xml><?xml version="1.0" encoding="utf-8"?>
 <p:sld xmlns:a="http://schemas.openxmlformats.org/drawingml/2006/main" xmlns:p="http://schemas.openxmlformats.org/presentationml/2006/main" xmlns:r="http://schemas.openxmlformats.org/officeDocument/2006/relationships">
   <p:cSld>
     <p:spTree>
@@ -8308,7 +9212,7 @@
               </a:defRPr>
             </a:pPr>
             <a:r>
-              <a:t>20 / 24</a:t>
+              <a:t>24 / 28</a:t>
             </a:r>
           </a:p>
         </p:txBody>
@@ -8321,7 +9225,7 @@
 </p:sld>
 </file>
 
-<file path=ppt/slides/slide21.xml><?xml version="1.0" encoding="utf-8"?>
+<file path=ppt/slides/slide25.xml><?xml version="1.0" encoding="utf-8"?>
 <p:sld xmlns:a="http://schemas.openxmlformats.org/drawingml/2006/main" xmlns:p="http://schemas.openxmlformats.org/presentationml/2006/main" xmlns:r="http://schemas.openxmlformats.org/officeDocument/2006/relationships">
   <p:cSld>
     <p:spTree>
@@ -9026,7 +9930,7 @@
               </a:defRPr>
             </a:pPr>
             <a:r>
-              <a:t>21 / 24</a:t>
+              <a:t>25 / 28</a:t>
             </a:r>
           </a:p>
         </p:txBody>
@@ -9039,7 +9943,7 @@
 </p:sld>
 </file>
 
-<file path=ppt/slides/slide22.xml><?xml version="1.0" encoding="utf-8"?>
+<file path=ppt/slides/slide26.xml><?xml version="1.0" encoding="utf-8"?>
 <p:sld xmlns:a="http://schemas.openxmlformats.org/drawingml/2006/main" xmlns:p="http://schemas.openxmlformats.org/presentationml/2006/main" xmlns:r="http://schemas.openxmlformats.org/officeDocument/2006/relationships">
   <p:cSld>
     <p:spTree>
@@ -9508,7 +10412,7 @@
               </a:defRPr>
             </a:pPr>
             <a:r>
-              <a:t>22 / 24</a:t>
+              <a:t>26 / 28</a:t>
             </a:r>
           </a:p>
         </p:txBody>
@@ -9521,7 +10425,7 @@
 </p:sld>
 </file>
 
-<file path=ppt/slides/slide23.xml><?xml version="1.0" encoding="utf-8"?>
+<file path=ppt/slides/slide27.xml><?xml version="1.0" encoding="utf-8"?>
 <p:sld xmlns:a="http://schemas.openxmlformats.org/drawingml/2006/main" xmlns:p="http://schemas.openxmlformats.org/presentationml/2006/main" xmlns:r="http://schemas.openxmlformats.org/officeDocument/2006/relationships">
   <p:cSld>
     <p:spTree>
@@ -10268,7 +11172,7 @@
               </a:defRPr>
             </a:pPr>
             <a:r>
-              <a:t>23 / 24</a:t>
+              <a:t>27 / 28</a:t>
             </a:r>
           </a:p>
         </p:txBody>
@@ -10281,7 +11185,7 @@
 </p:sld>
 </file>
 
-<file path=ppt/slides/slide24.xml><?xml version="1.0" encoding="utf-8"?>
+<file path=ppt/slides/slide28.xml><?xml version="1.0" encoding="utf-8"?>
 <p:sld xmlns:a="http://schemas.openxmlformats.org/drawingml/2006/main" xmlns:p="http://schemas.openxmlformats.org/presentationml/2006/main" xmlns:r="http://schemas.openxmlformats.org/officeDocument/2006/relationships">
   <p:cSld>
     <p:spTree>
@@ -11298,7 +12202,7 @@
               </a:defRPr>
             </a:pPr>
             <a:r>
-              <a:t>3 / 24</a:t>
+              <a:t>3 / 28</a:t>
             </a:r>
           </a:p>
         </p:txBody>
@@ -11523,7 +12427,7 @@
               </a:defRPr>
             </a:pPr>
             <a:r>
-              <a:t>4 / 24</a:t>
+              <a:t>4 / 28</a:t>
             </a:r>
           </a:p>
         </p:txBody>
@@ -11863,7 +12767,7 @@
               </a:defRPr>
             </a:pPr>
             <a:r>
-              <a:t>5 / 24</a:t>
+              <a:t>5 / 28</a:t>
             </a:r>
           </a:p>
         </p:txBody>
@@ -12459,7 +13363,7 @@
               </a:defRPr>
             </a:pPr>
             <a:r>
-              <a:t>6 / 24</a:t>
+              <a:t>6 / 28</a:t>
             </a:r>
           </a:p>
         </p:txBody>
@@ -12738,7 +13642,7 @@
               </a:defRPr>
             </a:pPr>
             <a:r>
-              <a:t>7 / 24</a:t>
+              <a:t>7 / 28</a:t>
             </a:r>
           </a:p>
         </p:txBody>
@@ -13430,7 +14334,7 @@
               </a:defRPr>
             </a:pPr>
             <a:r>
-              <a:t>6 / 24</a:t>
+              <a:t>8 / 28</a:t>
             </a:r>
           </a:p>
         </p:txBody>
@@ -13655,7 +14559,7 @@
               </a:defRPr>
             </a:pPr>
             <a:r>
-              <a:t>9 / 24</a:t>
+              <a:t>9 / 28</a:t>
             </a:r>
           </a:p>
         </p:txBody>

--- a/docs/ativo/material_qualificacao_2026-10-05.pptx
+++ b/docs/ativo/material_qualificacao_2026-10-05.pptx
@@ -33,6 +33,7 @@
     <p:sldId id="281" r:id="rId32"/>
     <p:sldId id="282" r:id="rId33"/>
     <p:sldId id="283" r:id="rId34"/>
+    <p:sldId id="284" r:id="rId35"/>
   </p:sldIdLst>
   <p:sldSz cx="12188952" cy="6858000" type="screen4x3"/>
   <p:notesSz cx="6858000" cy="9144000"/>
@@ -3478,6 +3479,231 @@
 </file>
 
 <file path=ppt/slides/slide10.xml><?xml version="1.0" encoding="utf-8"?>
+<p:sld xmlns:a="http://schemas.openxmlformats.org/drawingml/2006/main" xmlns:p="http://schemas.openxmlformats.org/presentationml/2006/main" xmlns:r="http://schemas.openxmlformats.org/officeDocument/2006/relationships">
+  <p:cSld>
+    <p:spTree>
+      <p:nvGrpSpPr>
+        <p:cNvPr id="1" name=""/>
+        <p:cNvGrpSpPr/>
+        <p:nvPr/>
+      </p:nvGrpSpPr>
+      <p:grpSpPr/>
+      <p:sp>
+        <p:nvSpPr>
+          <p:cNvPr id="2" name="TextBox 1"/>
+          <p:cNvSpPr txBox="1"/>
+          <p:nvPr/>
+        </p:nvSpPr>
+        <p:spPr>
+          <a:xfrm>
+            <a:off x="457200" y="274320"/>
+            <a:ext cx="11430000" cy="914400"/>
+          </a:xfrm>
+          <a:prstGeom prst="rect">
+            <a:avLst/>
+          </a:prstGeom>
+          <a:noFill/>
+        </p:spPr>
+        <p:txBody>
+          <a:bodyPr wrap="square">
+            <a:spAutoFit/>
+          </a:bodyPr>
+          <a:lstStyle/>
+          <a:p>
+            <a:pPr>
+              <a:defRPr sz="2800" b="1">
+                <a:solidFill>
+                  <a:srgbClr val="1F2A4E"/>
+                </a:solidFill>
+              </a:defRPr>
+            </a:pPr>
+            <a:r>
+              <a:t>Linha do tempo das principais respostas ao problema (2018–2026)</a:t>
+            </a:r>
+          </a:p>
+        </p:txBody>
+      </p:sp>
+      <p:sp>
+        <p:nvSpPr>
+          <p:cNvPr id="3" name="Rectangle 2"/>
+          <p:cNvSpPr/>
+          <p:nvPr/>
+        </p:nvSpPr>
+        <p:spPr>
+          <a:xfrm>
+            <a:off x="457200" y="1097280"/>
+            <a:ext cx="11430000" cy="36576"/>
+          </a:xfrm>
+          <a:prstGeom prst="rect">
+            <a:avLst/>
+          </a:prstGeom>
+          <a:solidFill>
+            <a:srgbClr val="1F2A4E"/>
+          </a:solidFill>
+          <a:ln>
+            <a:noFill/>
+          </a:ln>
+        </p:spPr>
+        <p:style>
+          <a:lnRef idx="1">
+            <a:schemeClr val="accent1"/>
+          </a:lnRef>
+          <a:fillRef idx="3">
+            <a:schemeClr val="accent1"/>
+          </a:fillRef>
+          <a:effectRef idx="2">
+            <a:schemeClr val="accent1"/>
+          </a:effectRef>
+          <a:fontRef idx="minor">
+            <a:schemeClr val="lt1"/>
+          </a:fontRef>
+        </p:style>
+        <p:txBody>
+          <a:bodyPr rtlCol="0" anchor="ctr"/>
+          <a:lstStyle/>
+          <a:p>
+            <a:pPr algn="ctr"/>
+          </a:p>
+        </p:txBody>
+      </p:sp>
+      <p:pic>
+        <p:nvPicPr>
+          <p:cNvPr id="4" name="Picture 3" descr="fig_timeline_mitigacoes.png"/>
+          <p:cNvPicPr>
+            <a:picLocks noChangeAspect="1"/>
+          </p:cNvPicPr>
+          <p:nvPr/>
+        </p:nvPicPr>
+        <p:blipFill>
+          <a:blip r:embed="rId2"/>
+          <a:stretch>
+            <a:fillRect/>
+          </a:stretch>
+        </p:blipFill>
+        <p:spPr>
+          <a:xfrm>
+            <a:off x="820882" y="1371600"/>
+            <a:ext cx="10547188" cy="4389120"/>
+          </a:xfrm>
+          <a:prstGeom prst="rect">
+            <a:avLst/>
+          </a:prstGeom>
+        </p:spPr>
+      </p:pic>
+      <p:sp>
+        <p:nvSpPr>
+          <p:cNvPr id="5" name="TextBox 4"/>
+          <p:cNvSpPr txBox="1"/>
+          <p:nvPr/>
+        </p:nvSpPr>
+        <p:spPr>
+          <a:xfrm>
+            <a:off x="457200" y="5989320"/>
+            <a:ext cx="11430000" cy="365760"/>
+          </a:xfrm>
+          <a:prstGeom prst="rect">
+            <a:avLst/>
+          </a:prstGeom>
+          <a:noFill/>
+        </p:spPr>
+        <p:txBody>
+          <a:bodyPr wrap="none">
+            <a:spAutoFit/>
+          </a:bodyPr>
+          <a:lstStyle/>
+          <a:p>
+            <a:pPr algn="ctr">
+              <a:defRPr sz="1400" i="1">
+                <a:solidFill>
+                  <a:srgbClr val="707682"/>
+                </a:solidFill>
+              </a:defRPr>
+            </a:pPr>
+            <a:r>
+              <a:t>Frentes cronológicas: dados balanceados → funções de perda → arquiteturas Pareto-eficientes → modelos vision-language → escalas MST → heterogeneidade fenotípica.</a:t>
+            </a:r>
+          </a:p>
+        </p:txBody>
+      </p:sp>
+      <p:sp>
+        <p:nvSpPr>
+          <p:cNvPr id="6" name="TextBox 5"/>
+          <p:cNvSpPr txBox="1"/>
+          <p:nvPr/>
+        </p:nvSpPr>
+        <p:spPr>
+          <a:xfrm>
+            <a:off x="457200" y="6446520"/>
+            <a:ext cx="10515600" cy="365760"/>
+          </a:xfrm>
+          <a:prstGeom prst="rect">
+            <a:avLst/>
+          </a:prstGeom>
+          <a:noFill/>
+        </p:spPr>
+        <p:txBody>
+          <a:bodyPr wrap="none">
+            <a:spAutoFit/>
+          </a:bodyPr>
+          <a:lstStyle/>
+          <a:p>
+            <a:pPr>
+              <a:defRPr sz="900" i="1">
+                <a:solidFill>
+                  <a:srgbClr val="707682"/>
+                </a:solidFill>
+              </a:defRPr>
+            </a:pPr>
+            <a:r>
+              <a:t>Exame de Qualificação · Marcello Ozzetti · Orientação: Prof. Dr. Marcos G. Quiles · PPG-CC UNIFESP/ICT</a:t>
+            </a:r>
+          </a:p>
+        </p:txBody>
+      </p:sp>
+      <p:sp>
+        <p:nvSpPr>
+          <p:cNvPr id="7" name="TextBox 6"/>
+          <p:cNvSpPr txBox="1"/>
+          <p:nvPr/>
+        </p:nvSpPr>
+        <p:spPr>
+          <a:xfrm>
+            <a:off x="11521440" y="6446520"/>
+            <a:ext cx="640080" cy="365760"/>
+          </a:xfrm>
+          <a:prstGeom prst="rect">
+            <a:avLst/>
+          </a:prstGeom>
+          <a:noFill/>
+        </p:spPr>
+        <p:txBody>
+          <a:bodyPr wrap="none">
+            <a:spAutoFit/>
+          </a:bodyPr>
+          <a:lstStyle/>
+          <a:p>
+            <a:pPr>
+              <a:defRPr sz="900" i="1">
+                <a:solidFill>
+                  <a:srgbClr val="707682"/>
+                </a:solidFill>
+              </a:defRPr>
+            </a:pPr>
+            <a:r>
+              <a:t>10 / 29</a:t>
+            </a:r>
+          </a:p>
+        </p:txBody>
+      </p:sp>
+    </p:spTree>
+  </p:cSld>
+  <p:clrMapOvr>
+    <a:masterClrMapping/>
+  </p:clrMapOvr>
+</p:sld>
+</file>
+
+<file path=ppt/slides/slide11.xml><?xml version="1.0" encoding="utf-8"?>
 <p:sld xmlns:a="http://schemas.openxmlformats.org/drawingml/2006/main" xmlns:p="http://schemas.openxmlformats.org/presentationml/2006/main" xmlns:r="http://schemas.openxmlformats.org/officeDocument/2006/relationships">
   <p:cSld>
     <p:spTree>
@@ -4040,7 +4266,7 @@
               </a:defRPr>
             </a:pPr>
             <a:r>
-              <a:t>10 / 28</a:t>
+              <a:t>11 / 29</a:t>
             </a:r>
           </a:p>
         </p:txBody>
@@ -4053,7 +4279,7 @@
 </p:sld>
 </file>
 
-<file path=ppt/slides/slide11.xml><?xml version="1.0" encoding="utf-8"?>
+<file path=ppt/slides/slide12.xml><?xml version="1.0" encoding="utf-8"?>
 <p:sld xmlns:a="http://schemas.openxmlformats.org/drawingml/2006/main" xmlns:p="http://schemas.openxmlformats.org/presentationml/2006/main" xmlns:r="http://schemas.openxmlformats.org/officeDocument/2006/relationships">
   <p:cSld>
     <p:spTree>
@@ -4563,232 +4789,7 @@
               </a:defRPr>
             </a:pPr>
             <a:r>
-              <a:t>11 / 28</a:t>
-            </a:r>
-          </a:p>
-        </p:txBody>
-      </p:sp>
-    </p:spTree>
-  </p:cSld>
-  <p:clrMapOvr>
-    <a:masterClrMapping/>
-  </p:clrMapOvr>
-</p:sld>
-</file>
-
-<file path=ppt/slides/slide12.xml><?xml version="1.0" encoding="utf-8"?>
-<p:sld xmlns:a="http://schemas.openxmlformats.org/drawingml/2006/main" xmlns:p="http://schemas.openxmlformats.org/presentationml/2006/main" xmlns:r="http://schemas.openxmlformats.org/officeDocument/2006/relationships">
-  <p:cSld>
-    <p:spTree>
-      <p:nvGrpSpPr>
-        <p:cNvPr id="1" name=""/>
-        <p:cNvGrpSpPr/>
-        <p:nvPr/>
-      </p:nvGrpSpPr>
-      <p:grpSpPr/>
-      <p:sp>
-        <p:nvSpPr>
-          <p:cNvPr id="2" name="TextBox 1"/>
-          <p:cNvSpPr txBox="1"/>
-          <p:nvPr/>
-        </p:nvSpPr>
-        <p:spPr>
-          <a:xfrm>
-            <a:off x="457200" y="274320"/>
-            <a:ext cx="11430000" cy="914400"/>
-          </a:xfrm>
-          <a:prstGeom prst="rect">
-            <a:avLst/>
-          </a:prstGeom>
-          <a:noFill/>
-        </p:spPr>
-        <p:txBody>
-          <a:bodyPr wrap="square">
-            <a:spAutoFit/>
-          </a:bodyPr>
-          <a:lstStyle/>
-          <a:p>
-            <a:pPr>
-              <a:defRPr sz="2800" b="1">
-                <a:solidFill>
-                  <a:srgbClr val="1F2A4E"/>
-                </a:solidFill>
-              </a:defRPr>
-            </a:pPr>
-            <a:r>
-              <a:t>Pipeline experimental em seis etapas</a:t>
-            </a:r>
-          </a:p>
-        </p:txBody>
-      </p:sp>
-      <p:sp>
-        <p:nvSpPr>
-          <p:cNvPr id="3" name="Rectangle 2"/>
-          <p:cNvSpPr/>
-          <p:nvPr/>
-        </p:nvSpPr>
-        <p:spPr>
-          <a:xfrm>
-            <a:off x="457200" y="1097280"/>
-            <a:ext cx="11430000" cy="36576"/>
-          </a:xfrm>
-          <a:prstGeom prst="rect">
-            <a:avLst/>
-          </a:prstGeom>
-          <a:solidFill>
-            <a:srgbClr val="1F2A4E"/>
-          </a:solidFill>
-          <a:ln>
-            <a:noFill/>
-          </a:ln>
-        </p:spPr>
-        <p:style>
-          <a:lnRef idx="1">
-            <a:schemeClr val="accent1"/>
-          </a:lnRef>
-          <a:fillRef idx="3">
-            <a:schemeClr val="accent1"/>
-          </a:fillRef>
-          <a:effectRef idx="2">
-            <a:schemeClr val="accent1"/>
-          </a:effectRef>
-          <a:fontRef idx="minor">
-            <a:schemeClr val="lt1"/>
-          </a:fontRef>
-        </p:style>
-        <p:txBody>
-          <a:bodyPr rtlCol="0" anchor="ctr"/>
-          <a:lstStyle/>
-          <a:p>
-            <a:pPr algn="ctr"/>
-          </a:p>
-        </p:txBody>
-      </p:sp>
-      <p:pic>
-        <p:nvPicPr>
-          <p:cNvPr id="4" name="Picture 3" descr="fig_pipeline_6etapas.png"/>
-          <p:cNvPicPr>
-            <a:picLocks noChangeAspect="1"/>
-          </p:cNvPicPr>
-          <p:nvPr/>
-        </p:nvPicPr>
-        <p:blipFill>
-          <a:blip r:embed="rId2"/>
-          <a:stretch>
-            <a:fillRect/>
-          </a:stretch>
-        </p:blipFill>
-        <p:spPr>
-          <a:xfrm>
-            <a:off x="4040534" y="1371600"/>
-            <a:ext cx="4107884" cy="4937760"/>
-          </a:xfrm>
-          <a:prstGeom prst="rect">
-            <a:avLst/>
-          </a:prstGeom>
-        </p:spPr>
-      </p:pic>
-      <p:sp>
-        <p:nvSpPr>
-          <p:cNvPr id="5" name="TextBox 4"/>
-          <p:cNvSpPr txBox="1"/>
-          <p:nvPr/>
-        </p:nvSpPr>
-        <p:spPr>
-          <a:xfrm>
-            <a:off x="457200" y="5989320"/>
-            <a:ext cx="11430000" cy="365760"/>
-          </a:xfrm>
-          <a:prstGeom prst="rect">
-            <a:avLst/>
-          </a:prstGeom>
-          <a:noFill/>
-        </p:spPr>
-        <p:txBody>
-          <a:bodyPr wrap="none">
-            <a:spAutoFit/>
-          </a:bodyPr>
-          <a:lstStyle/>
-          <a:p>
-            <a:pPr algn="ctr">
-              <a:defRPr sz="1400" i="1">
-                <a:solidFill>
-                  <a:srgbClr val="707682"/>
-                </a:solidFill>
-              </a:defRPr>
-            </a:pPr>
-            <a:r>
-              <a:t>Fluxo top-down organizado em três fases: diagnóstico (etapas 1 e 2), método proposto (etapa 3) e validação e síntese (etapas 4 a 6).</a:t>
-            </a:r>
-          </a:p>
-        </p:txBody>
-      </p:sp>
-      <p:sp>
-        <p:nvSpPr>
-          <p:cNvPr id="6" name="TextBox 5"/>
-          <p:cNvSpPr txBox="1"/>
-          <p:nvPr/>
-        </p:nvSpPr>
-        <p:spPr>
-          <a:xfrm>
-            <a:off x="457200" y="6446520"/>
-            <a:ext cx="10515600" cy="365760"/>
-          </a:xfrm>
-          <a:prstGeom prst="rect">
-            <a:avLst/>
-          </a:prstGeom>
-          <a:noFill/>
-        </p:spPr>
-        <p:txBody>
-          <a:bodyPr wrap="none">
-            <a:spAutoFit/>
-          </a:bodyPr>
-          <a:lstStyle/>
-          <a:p>
-            <a:pPr>
-              <a:defRPr sz="900" i="1">
-                <a:solidFill>
-                  <a:srgbClr val="707682"/>
-                </a:solidFill>
-              </a:defRPr>
-            </a:pPr>
-            <a:r>
-              <a:t>Exame de Qualificação · Marcello Ozzetti · Orientação: Prof. Dr. Marcos G. Quiles · PPG-CC UNIFESP/ICT</a:t>
-            </a:r>
-          </a:p>
-        </p:txBody>
-      </p:sp>
-      <p:sp>
-        <p:nvSpPr>
-          <p:cNvPr id="7" name="TextBox 6"/>
-          <p:cNvSpPr txBox="1"/>
-          <p:nvPr/>
-        </p:nvSpPr>
-        <p:spPr>
-          <a:xfrm>
-            <a:off x="11521440" y="6446520"/>
-            <a:ext cx="640080" cy="365760"/>
-          </a:xfrm>
-          <a:prstGeom prst="rect">
-            <a:avLst/>
-          </a:prstGeom>
-          <a:noFill/>
-        </p:spPr>
-        <p:txBody>
-          <a:bodyPr wrap="none">
-            <a:spAutoFit/>
-          </a:bodyPr>
-          <a:lstStyle/>
-          <a:p>
-            <a:pPr>
-              <a:defRPr sz="900" i="1">
-                <a:solidFill>
-                  <a:srgbClr val="707682"/>
-                </a:solidFill>
-              </a:defRPr>
-            </a:pPr>
-            <a:r>
-              <a:t>12 / 28</a:t>
+              <a:t>12 / 29</a:t>
             </a:r>
           </a:p>
         </p:txBody>
@@ -4841,7 +4842,7 @@
               </a:defRPr>
             </a:pPr>
             <a:r>
-              <a:t>Evolução do pipeline experimental — estado em 04/10/2026</a:t>
+              <a:t>Pipeline experimental em seis etapas</a:t>
             </a:r>
           </a:p>
         </p:txBody>
@@ -4891,7 +4892,7 @@
       </p:sp>
       <p:pic>
         <p:nvPicPr>
-          <p:cNvPr id="4" name="Picture 3" descr="fig_pipeline_evolucao.png"/>
+          <p:cNvPr id="4" name="Picture 3" descr="fig_pipeline_6etapas.png"/>
           <p:cNvPicPr>
             <a:picLocks noChangeAspect="1"/>
           </p:cNvPicPr>
@@ -4905,8 +4906,8 @@
         </p:blipFill>
         <p:spPr>
           <a:xfrm>
-            <a:off x="-17339" y="1371600"/>
-            <a:ext cx="12223630" cy="4572000"/>
+            <a:off x="4040534" y="1371600"/>
+            <a:ext cx="4107884" cy="4937760"/>
           </a:xfrm>
           <a:prstGeom prst="rect">
             <a:avLst/>
@@ -4943,7 +4944,7 @@
               </a:defRPr>
             </a:pPr>
             <a:r>
-              <a:t>Etapas 1 a 3 em execução (código implementado, validação preliminar em curso); etapas 4 a 6 planejadas conforme cronograma. Marco de qualificação assegurado.</a:t>
+              <a:t>Fluxo top-down organizado em três fases: diagnóstico (etapas 1 e 2), método proposto (etapa 3) e validação e síntese (etapas 4 a 6).</a:t>
             </a:r>
           </a:p>
         </p:txBody>
@@ -5013,7 +5014,7 @@
               </a:defRPr>
             </a:pPr>
             <a:r>
-              <a:t>13 / 28</a:t>
+              <a:t>13 / 29</a:t>
             </a:r>
           </a:p>
         </p:txBody>
@@ -5066,7 +5067,7 @@
               </a:defRPr>
             </a:pPr>
             <a:r>
-              <a:t>Etapa 1: classificador MST treinado internamente</a:t>
+              <a:t>Evolução do pipeline experimental — estado em 04/10/2026</a:t>
             </a:r>
           </a:p>
         </p:txBody>
@@ -5114,144 +5115,30 @@
           </a:p>
         </p:txBody>
       </p:sp>
-      <p:sp>
-        <p:nvSpPr>
-          <p:cNvPr id="4" name="TextBox 3"/>
-          <p:cNvSpPr txBox="1"/>
-          <p:nvPr/>
-        </p:nvSpPr>
-        <p:spPr>
-          <a:xfrm>
-            <a:off x="457200" y="1417320"/>
-            <a:ext cx="11430000" cy="4937760"/>
-          </a:xfrm>
-          <a:prstGeom prst="rect">
-            <a:avLst/>
-          </a:prstGeom>
-          <a:noFill/>
-        </p:spPr>
-        <p:txBody>
-          <a:bodyPr wrap="square">
-            <a:spAutoFit/>
-          </a:bodyPr>
-          <a:lstStyle/>
-          <a:p>
-            <a:pPr>
-              <a:spcAft>
-                <a:spcPts val="1000"/>
-              </a:spcAft>
-            </a:pPr>
-            <a:r>
-              <a:rPr sz="1800" b="1">
-                <a:solidFill>
-                  <a:srgbClr val="1F2A4E"/>
-                </a:solidFill>
-              </a:rPr>
-              <a:t>O que faz:  </a:t>
-            </a:r>
-            <a:r>
-              <a:rPr sz="1800">
-                <a:solidFill>
-                  <a:srgbClr val="3D424E"/>
-                </a:solidFill>
-              </a:rPr>
-              <a:t>produz, para cada imagem facial, o vetor softmax sobre os dez tons da escala Monk.</a:t>
-            </a:r>
-          </a:p>
-          <a:p>
-            <a:pPr>
-              <a:spcAft>
-                <a:spcPts val="1000"/>
-              </a:spcAft>
-            </a:pPr>
-            <a:r>
-              <a:rPr sz="1800" b="1">
-                <a:solidFill>
-                  <a:srgbClr val="1F2A4E"/>
-                </a:solidFill>
-              </a:rPr>
-              <a:t>Decisão pós-reunião Ago/2026:  </a:t>
-            </a:r>
-            <a:r>
-              <a:rPr sz="1800">
-                <a:solidFill>
-                  <a:srgbClr val="3D424E"/>
-                </a:solidFill>
-              </a:rPr>
-              <a:t>adotar treinamento interno do classificador, reduzindo dependência do release do SkinToneNet (Matias, 2026), cujos pesos e dataset STW ainda não foram divulgados publicamente.</a:t>
-            </a:r>
-          </a:p>
-          <a:p>
-            <a:pPr>
-              <a:spcAft>
-                <a:spcPts val="1000"/>
-              </a:spcAft>
-            </a:pPr>
-            <a:r>
-              <a:rPr sz="1800" b="1">
-                <a:solidFill>
-                  <a:srgbClr val="1F2A4E"/>
-                </a:solidFill>
-              </a:rPr>
-              <a:t>Datasets de treino:  </a:t>
-            </a:r>
-            <a:r>
-              <a:rPr sz="1800">
-                <a:solidFill>
-                  <a:srgbClr val="3D424E"/>
-                </a:solidFill>
-              </a:rPr>
-              <a:t>Monk Skin Tone Examples (Monk, 2019) e Casual Conversations v2 (Porgali et al., 2023).</a:t>
-            </a:r>
-          </a:p>
-          <a:p>
-            <a:pPr>
-              <a:spcAft>
-                <a:spcPts val="1000"/>
-              </a:spcAft>
-            </a:pPr>
-            <a:r>
-              <a:rPr sz="1800" b="1">
-                <a:solidFill>
-                  <a:srgbClr val="1F2A4E"/>
-                </a:solidFill>
-              </a:rPr>
-              <a:t>Camada auto-suficiente:  </a:t>
-            </a:r>
-            <a:r>
-              <a:rPr sz="1800">
-                <a:solidFill>
-                  <a:srgbClr val="3D424E"/>
-                </a:solidFill>
-              </a:rPr>
-              <a:t>detecção facial (MTCNN, Zhang et al., 2016), alinhamento, recorte e classificação — viabiliza inferência em datasets sem anotação MST.</a:t>
-            </a:r>
-          </a:p>
-          <a:p>
-            <a:pPr>
-              <a:spcAft>
-                <a:spcPts val="1000"/>
-              </a:spcAft>
-            </a:pPr>
-            <a:r>
-              <a:rPr sz="1800" b="1">
-                <a:solidFill>
-                  <a:srgbClr val="1F2A4E"/>
-                </a:solidFill>
-              </a:rPr>
-              <a:t>Validação:  </a:t>
-            </a:r>
-            <a:r>
-              <a:rPr sz="1800">
-                <a:solidFill>
-                  <a:srgbClr val="3D424E"/>
-                </a:solidFill>
-              </a:rPr>
-              <a:t>protocolo humano interno (aproximadamente 250 imagens do FairFace) e sensitivity analysis com dois a três classificadores alternativos.</a:t>
-            </a:r>
-          </a:p>
-        </p:txBody>
-      </p:sp>
+      <p:pic>
+        <p:nvPicPr>
+          <p:cNvPr id="4" name="Picture 3" descr="fig_pipeline_evolucao.png"/>
+          <p:cNvPicPr>
+            <a:picLocks noChangeAspect="1"/>
+          </p:cNvPicPr>
+          <p:nvPr/>
+        </p:nvPicPr>
+        <p:blipFill>
+          <a:blip r:embed="rId2"/>
+          <a:stretch>
+            <a:fillRect/>
+          </a:stretch>
+        </p:blipFill>
+        <p:spPr>
+          <a:xfrm>
+            <a:off x="-17339" y="1371600"/>
+            <a:ext cx="12223630" cy="4572000"/>
+          </a:xfrm>
+          <a:prstGeom prst="rect">
+            <a:avLst/>
+          </a:prstGeom>
+        </p:spPr>
+      </p:pic>
       <p:sp>
         <p:nvSpPr>
           <p:cNvPr id="5" name="TextBox 4"/>
@@ -5260,8 +5147,8 @@
         </p:nvSpPr>
         <p:spPr>
           <a:xfrm>
-            <a:off x="457200" y="6446520"/>
-            <a:ext cx="10515600" cy="365760"/>
+            <a:off x="457200" y="5989320"/>
+            <a:ext cx="11430000" cy="365760"/>
           </a:xfrm>
           <a:prstGeom prst="rect">
             <a:avLst/>
@@ -5274,15 +5161,15 @@
           </a:bodyPr>
           <a:lstStyle/>
           <a:p>
-            <a:pPr>
-              <a:defRPr sz="900" i="1">
+            <a:pPr algn="ctr">
+              <a:defRPr sz="1400" i="1">
                 <a:solidFill>
                   <a:srgbClr val="707682"/>
                 </a:solidFill>
               </a:defRPr>
             </a:pPr>
             <a:r>
-              <a:t>Exame de Qualificação · Marcello Ozzetti · Orientação: Prof. Dr. Marcos G. Quiles · PPG-CC UNIFESP/ICT</a:t>
+              <a:t>Etapas 1 a 3 em execução (código implementado, validação preliminar em curso); etapas 4 a 6 planejadas conforme cronograma. Marco de qualificação assegurado.</a:t>
             </a:r>
           </a:p>
         </p:txBody>
@@ -5295,8 +5182,8 @@
         </p:nvSpPr>
         <p:spPr>
           <a:xfrm>
-            <a:off x="11521440" y="6446520"/>
-            <a:ext cx="640080" cy="365760"/>
+            <a:off x="457200" y="6446520"/>
+            <a:ext cx="10515600" cy="365760"/>
           </a:xfrm>
           <a:prstGeom prst="rect">
             <a:avLst/>
@@ -5317,7 +5204,42 @@
               </a:defRPr>
             </a:pPr>
             <a:r>
-              <a:t>14 / 28</a:t>
+              <a:t>Exame de Qualificação · Marcello Ozzetti · Orientação: Prof. Dr. Marcos G. Quiles · PPG-CC UNIFESP/ICT</a:t>
+            </a:r>
+          </a:p>
+        </p:txBody>
+      </p:sp>
+      <p:sp>
+        <p:nvSpPr>
+          <p:cNvPr id="7" name="TextBox 6"/>
+          <p:cNvSpPr txBox="1"/>
+          <p:nvPr/>
+        </p:nvSpPr>
+        <p:spPr>
+          <a:xfrm>
+            <a:off x="11521440" y="6446520"/>
+            <a:ext cx="640080" cy="365760"/>
+          </a:xfrm>
+          <a:prstGeom prst="rect">
+            <a:avLst/>
+          </a:prstGeom>
+          <a:noFill/>
+        </p:spPr>
+        <p:txBody>
+          <a:bodyPr wrap="none">
+            <a:spAutoFit/>
+          </a:bodyPr>
+          <a:lstStyle/>
+          <a:p>
+            <a:pPr>
+              <a:defRPr sz="900" i="1">
+                <a:solidFill>
+                  <a:srgbClr val="707682"/>
+                </a:solidFill>
+              </a:defRPr>
+            </a:pPr>
+            <a:r>
+              <a:t>14 / 29</a:t>
             </a:r>
           </a:p>
         </p:txBody>
@@ -5370,7 +5292,7 @@
               </a:defRPr>
             </a:pPr>
             <a:r>
-              <a:t>Classificador MST em validação: detalhe técnico do backend</a:t>
+              <a:t>Etapa 1: classificador MST treinado internamente</a:t>
             </a:r>
           </a:p>
         </p:txBody>
@@ -5418,30 +5340,144 @@
           </a:p>
         </p:txBody>
       </p:sp>
-      <p:pic>
-        <p:nvPicPr>
-          <p:cNvPr id="4" name="Picture 3" descr="fig_mst_detalhe_tecnico.png"/>
-          <p:cNvPicPr>
-            <a:picLocks noChangeAspect="1"/>
-          </p:cNvPicPr>
-          <p:nvPr/>
-        </p:nvPicPr>
-        <p:blipFill>
-          <a:blip r:embed="rId2"/>
-          <a:stretch>
-            <a:fillRect/>
-          </a:stretch>
-        </p:blipFill>
-        <p:spPr>
-          <a:xfrm>
-            <a:off x="372818" y="1371600"/>
-            <a:ext cx="11443315" cy="4206240"/>
-          </a:xfrm>
-          <a:prstGeom prst="rect">
-            <a:avLst/>
-          </a:prstGeom>
-        </p:spPr>
-      </p:pic>
+      <p:sp>
+        <p:nvSpPr>
+          <p:cNvPr id="4" name="TextBox 3"/>
+          <p:cNvSpPr txBox="1"/>
+          <p:nvPr/>
+        </p:nvSpPr>
+        <p:spPr>
+          <a:xfrm>
+            <a:off x="457200" y="1417320"/>
+            <a:ext cx="11430000" cy="4937760"/>
+          </a:xfrm>
+          <a:prstGeom prst="rect">
+            <a:avLst/>
+          </a:prstGeom>
+          <a:noFill/>
+        </p:spPr>
+        <p:txBody>
+          <a:bodyPr wrap="square">
+            <a:spAutoFit/>
+          </a:bodyPr>
+          <a:lstStyle/>
+          <a:p>
+            <a:pPr>
+              <a:spcAft>
+                <a:spcPts val="1000"/>
+              </a:spcAft>
+            </a:pPr>
+            <a:r>
+              <a:rPr sz="1800" b="1">
+                <a:solidFill>
+                  <a:srgbClr val="1F2A4E"/>
+                </a:solidFill>
+              </a:rPr>
+              <a:t>O que faz:  </a:t>
+            </a:r>
+            <a:r>
+              <a:rPr sz="1800">
+                <a:solidFill>
+                  <a:srgbClr val="3D424E"/>
+                </a:solidFill>
+              </a:rPr>
+              <a:t>produz, para cada imagem facial, o vetor softmax sobre os dez tons da escala Monk.</a:t>
+            </a:r>
+          </a:p>
+          <a:p>
+            <a:pPr>
+              <a:spcAft>
+                <a:spcPts val="1000"/>
+              </a:spcAft>
+            </a:pPr>
+            <a:r>
+              <a:rPr sz="1800" b="1">
+                <a:solidFill>
+                  <a:srgbClr val="1F2A4E"/>
+                </a:solidFill>
+              </a:rPr>
+              <a:t>Decisão pós-reunião Ago/2026:  </a:t>
+            </a:r>
+            <a:r>
+              <a:rPr sz="1800">
+                <a:solidFill>
+                  <a:srgbClr val="3D424E"/>
+                </a:solidFill>
+              </a:rPr>
+              <a:t>adotar treinamento interno do classificador, reduzindo dependência do release do SkinToneNet (Matias, 2026), cujos pesos e dataset STW ainda não foram divulgados publicamente.</a:t>
+            </a:r>
+          </a:p>
+          <a:p>
+            <a:pPr>
+              <a:spcAft>
+                <a:spcPts val="1000"/>
+              </a:spcAft>
+            </a:pPr>
+            <a:r>
+              <a:rPr sz="1800" b="1">
+                <a:solidFill>
+                  <a:srgbClr val="1F2A4E"/>
+                </a:solidFill>
+              </a:rPr>
+              <a:t>Datasets de treino:  </a:t>
+            </a:r>
+            <a:r>
+              <a:rPr sz="1800">
+                <a:solidFill>
+                  <a:srgbClr val="3D424E"/>
+                </a:solidFill>
+              </a:rPr>
+              <a:t>Monk Skin Tone Examples (Monk, 2019) e Casual Conversations v2 (Porgali et al., 2023).</a:t>
+            </a:r>
+          </a:p>
+          <a:p>
+            <a:pPr>
+              <a:spcAft>
+                <a:spcPts val="1000"/>
+              </a:spcAft>
+            </a:pPr>
+            <a:r>
+              <a:rPr sz="1800" b="1">
+                <a:solidFill>
+                  <a:srgbClr val="1F2A4E"/>
+                </a:solidFill>
+              </a:rPr>
+              <a:t>Camada auto-suficiente:  </a:t>
+            </a:r>
+            <a:r>
+              <a:rPr sz="1800">
+                <a:solidFill>
+                  <a:srgbClr val="3D424E"/>
+                </a:solidFill>
+              </a:rPr>
+              <a:t>detecção facial (MTCNN, Zhang et al., 2016), alinhamento, recorte e classificação — viabiliza inferência em datasets sem anotação MST.</a:t>
+            </a:r>
+          </a:p>
+          <a:p>
+            <a:pPr>
+              <a:spcAft>
+                <a:spcPts val="1000"/>
+              </a:spcAft>
+            </a:pPr>
+            <a:r>
+              <a:rPr sz="1800" b="1">
+                <a:solidFill>
+                  <a:srgbClr val="1F2A4E"/>
+                </a:solidFill>
+              </a:rPr>
+              <a:t>Validação:  </a:t>
+            </a:r>
+            <a:r>
+              <a:rPr sz="1800">
+                <a:solidFill>
+                  <a:srgbClr val="3D424E"/>
+                </a:solidFill>
+              </a:rPr>
+              <a:t>protocolo humano interno (aproximadamente 250 imagens do FairFace) e sensitivity analysis com dois a três classificadores alternativos.</a:t>
+            </a:r>
+          </a:p>
+        </p:txBody>
+      </p:sp>
       <p:sp>
         <p:nvSpPr>
           <p:cNvPr id="5" name="TextBox 4"/>
@@ -5450,8 +5486,8 @@
         </p:nvSpPr>
         <p:spPr>
           <a:xfrm>
-            <a:off x="457200" y="5989320"/>
-            <a:ext cx="11430000" cy="365760"/>
+            <a:off x="457200" y="6446520"/>
+            <a:ext cx="10515600" cy="365760"/>
           </a:xfrm>
           <a:prstGeom prst="rect">
             <a:avLst/>
@@ -5464,15 +5500,15 @@
           </a:bodyPr>
           <a:lstStyle/>
           <a:p>
-            <a:pPr algn="ctr">
-              <a:defRPr sz="1400" i="1">
+            <a:pPr>
+              <a:defRPr sz="900" i="1">
                 <a:solidFill>
                   <a:srgbClr val="707682"/>
                 </a:solidFill>
               </a:defRPr>
             </a:pPr>
             <a:r>
-              <a:t>Pipeline técnico em cinco etapas: detecção MTCNN → alinhamento por landmarks → segmentação de pele → cor dominante via k-means em CIELab → distância euclidiana à paleta Monk. Backend operacional durante a fase de validação (sensitivity analysis — Cap. 4 §4.2).</a:t>
+              <a:t>Exame de Qualificação · Marcello Ozzetti · Orientação: Prof. Dr. Marcos G. Quiles · PPG-CC UNIFESP/ICT</a:t>
             </a:r>
           </a:p>
         </p:txBody>
@@ -5485,8 +5521,8 @@
         </p:nvSpPr>
         <p:spPr>
           <a:xfrm>
-            <a:off x="457200" y="6446520"/>
-            <a:ext cx="10515600" cy="365760"/>
+            <a:off x="11521440" y="6446520"/>
+            <a:ext cx="640080" cy="365760"/>
           </a:xfrm>
           <a:prstGeom prst="rect">
             <a:avLst/>
@@ -5507,42 +5543,7 @@
               </a:defRPr>
             </a:pPr>
             <a:r>
-              <a:t>Exame de Qualificação · Marcello Ozzetti · Orientação: Prof. Dr. Marcos G. Quiles · PPG-CC UNIFESP/ICT</a:t>
-            </a:r>
-          </a:p>
-        </p:txBody>
-      </p:sp>
-      <p:sp>
-        <p:nvSpPr>
-          <p:cNvPr id="7" name="TextBox 6"/>
-          <p:cNvSpPr txBox="1"/>
-          <p:nvPr/>
-        </p:nvSpPr>
-        <p:spPr>
-          <a:xfrm>
-            <a:off x="11521440" y="6446520"/>
-            <a:ext cx="640080" cy="365760"/>
-          </a:xfrm>
-          <a:prstGeom prst="rect">
-            <a:avLst/>
-          </a:prstGeom>
-          <a:noFill/>
-        </p:spPr>
-        <p:txBody>
-          <a:bodyPr wrap="none">
-            <a:spAutoFit/>
-          </a:bodyPr>
-          <a:lstStyle/>
-          <a:p>
-            <a:pPr>
-              <a:defRPr sz="900" i="1">
-                <a:solidFill>
-                  <a:srgbClr val="707682"/>
-                </a:solidFill>
-              </a:defRPr>
-            </a:pPr>
-            <a:r>
-              <a:t>15 / 28</a:t>
+              <a:t>15 / 29</a:t>
             </a:r>
           </a:p>
         </p:txBody>
@@ -5595,7 +5596,7 @@
               </a:defRPr>
             </a:pPr>
             <a:r>
-              <a:t>Classificador MST em validação: amostras FairFace val (qualitativo)</a:t>
+              <a:t>Classificador MST em validação: detalhe técnico do backend</a:t>
             </a:r>
           </a:p>
         </p:txBody>
@@ -5645,7 +5646,7 @@
       </p:sp>
       <p:pic>
         <p:nvPicPr>
-          <p:cNvPr id="4" name="Picture 3" descr="fig_mst_demo_faces.png"/>
+          <p:cNvPr id="4" name="Picture 3" descr="fig_mst_detalhe_tecnico.png"/>
           <p:cNvPicPr>
             <a:picLocks noChangeAspect="1"/>
           </p:cNvPicPr>
@@ -5659,8 +5660,8 @@
         </p:blipFill>
         <p:spPr>
           <a:xfrm>
-            <a:off x="1253795" y="1371600"/>
-            <a:ext cx="9681361" cy="4846320"/>
+            <a:off x="372818" y="1371600"/>
+            <a:ext cx="11443315" cy="4206240"/>
           </a:xfrm>
           <a:prstGeom prst="rect">
             <a:avLst/>
@@ -5697,7 +5698,7 @@
               </a:defRPr>
             </a:pPr>
             <a:r>
-              <a:t>Para cada raça FairFace: face com tom MST mais claro (acima) e mais escuro (abaixo) preditos sobre amostra estratificada de 350 imagens. Evidência visual direta de H1 — heterogeneidade fenotípica intra-categorial.</a:t>
+              <a:t>Pipeline técnico em cinco etapas: detecção MTCNN → alinhamento por landmarks → segmentação de pele → cor dominante via k-means em CIELab → distância euclidiana à paleta Monk. Backend operacional durante a fase de validação (sensitivity analysis — Cap. 4 §4.2).</a:t>
             </a:r>
           </a:p>
         </p:txBody>
@@ -5767,7 +5768,7 @@
               </a:defRPr>
             </a:pPr>
             <a:r>
-              <a:t>16 / 28</a:t>
+              <a:t>16 / 29</a:t>
             </a:r>
           </a:p>
         </p:txBody>
@@ -5820,7 +5821,7 @@
               </a:defRPr>
             </a:pPr>
             <a:r>
-              <a:t>Classificador MST em validação: distribuição MST × raça (quantitativo)</a:t>
+              <a:t>Classificador MST em validação: amostras FairFace val (qualitativo)</a:t>
             </a:r>
           </a:p>
         </p:txBody>
@@ -5870,7 +5871,7 @@
       </p:sp>
       <p:pic>
         <p:nvPicPr>
-          <p:cNvPr id="4" name="Picture 3" descr="fig_mst_demo_distribuicao.png"/>
+          <p:cNvPr id="4" name="Picture 3" descr="fig_mst_demo_faces.png"/>
           <p:cNvPicPr>
             <a:picLocks noChangeAspect="1"/>
           </p:cNvPicPr>
@@ -5884,8 +5885,8 @@
         </p:blipFill>
         <p:spPr>
           <a:xfrm>
-            <a:off x="683499" y="1371600"/>
-            <a:ext cx="10821954" cy="4389120"/>
+            <a:off x="1253795" y="1371600"/>
+            <a:ext cx="9681361" cy="4846320"/>
           </a:xfrm>
           <a:prstGeom prst="rect">
             <a:avLst/>
@@ -5922,7 +5923,7 @@
               </a:defRPr>
             </a:pPr>
             <a:r>
-              <a:t>Distribuição percentual (dentro de cada raça) sobre amostra estratificada (n = 350, 50 por raça). Nenhuma raça colapsa em um único tom Monk — evidência preliminar que sustenta a formalização de H1.</a:t>
+              <a:t>Para cada raça FairFace: face com tom MST mais claro (acima) e mais escuro (abaixo) preditos sobre amostra estratificada de 350 imagens. Evidência visual direta de H1 — heterogeneidade fenotípica intra-categorial.</a:t>
             </a:r>
           </a:p>
         </p:txBody>
@@ -5992,7 +5993,7 @@
               </a:defRPr>
             </a:pPr>
             <a:r>
-              <a:t>17 / 28</a:t>
+              <a:t>17 / 29</a:t>
             </a:r>
           </a:p>
         </p:txBody>
@@ -6045,7 +6046,7 @@
               </a:defRPr>
             </a:pPr>
             <a:r>
-              <a:t>Racional da escolha do backbone: ConvNeXt-T (Liu et al., 2022)</a:t>
+              <a:t>Classificador MST em validação: distribuição MST × raça (quantitativo)</a:t>
             </a:r>
           </a:p>
         </p:txBody>
@@ -6093,144 +6094,30 @@
           </a:p>
         </p:txBody>
       </p:sp>
-      <p:sp>
-        <p:nvSpPr>
-          <p:cNvPr id="4" name="TextBox 3"/>
-          <p:cNvSpPr txBox="1"/>
-          <p:nvPr/>
-        </p:nvSpPr>
-        <p:spPr>
-          <a:xfrm>
-            <a:off x="457200" y="1417320"/>
-            <a:ext cx="11430000" cy="4937760"/>
-          </a:xfrm>
-          <a:prstGeom prst="rect">
-            <a:avLst/>
-          </a:prstGeom>
-          <a:noFill/>
-        </p:spPr>
-        <p:txBody>
-          <a:bodyPr wrap="square">
-            <a:spAutoFit/>
-          </a:bodyPr>
-          <a:lstStyle/>
-          <a:p>
-            <a:pPr>
-              <a:spcAft>
-                <a:spcPts val="1000"/>
-              </a:spcAft>
-            </a:pPr>
-            <a:r>
-              <a:rPr sz="1800" b="1">
-                <a:solidFill>
-                  <a:srgbClr val="1F2A4E"/>
-                </a:solidFill>
-              </a:rPr>
-              <a:t>Paridade com ViTs a custo convolucional:  </a:t>
-            </a:r>
-            <a:r>
-              <a:rPr sz="1800">
-                <a:solidFill>
-                  <a:srgbClr val="3D424E"/>
-                </a:solidFill>
-              </a:rPr>
-              <a:t>82 % top-1 ImageNet, comparável a Swin-T, ~1/3 dos params.</a:t>
-            </a:r>
-          </a:p>
-          <a:p>
-            <a:pPr>
-              <a:spcAft>
-                <a:spcPts val="1000"/>
-              </a:spcAft>
-            </a:pPr>
-            <a:r>
-              <a:rPr sz="1800" b="1">
-                <a:solidFill>
-                  <a:srgbClr val="1F2A4E"/>
-                </a:solidFill>
-              </a:rPr>
-              <a:t>Estável em fine-tuning:  </a:t>
-            </a:r>
-            <a:r>
-              <a:rPr sz="1800">
-                <a:solidFill>
-                  <a:srgbClr val="3D424E"/>
-                </a:solidFill>
-              </a:rPr>
-              <a:t>LayerNorm (não BatchNorm) — robusto a batch pequeno, essencial para 3 sementes.</a:t>
-            </a:r>
-          </a:p>
-          <a:p>
-            <a:pPr>
-              <a:spcAft>
-                <a:spcPts val="1000"/>
-              </a:spcAft>
-            </a:pPr>
-            <a:r>
-              <a:rPr sz="1800" b="1">
-                <a:solidFill>
-                  <a:srgbClr val="1F2A4E"/>
-                </a:solidFill>
-              </a:rPr>
-              <a:t>Inserção natural de FiLM:  </a:t>
-            </a:r>
-            <a:r>
-              <a:rPr sz="1800">
-                <a:solidFill>
-                  <a:srgbClr val="3D424E"/>
-                </a:solidFill>
-              </a:rPr>
-              <a:t>4 estágios hierárquicos oferecem 4 pontos de inserção sem modificar blocos internos.</a:t>
-            </a:r>
-          </a:p>
-          <a:p>
-            <a:pPr>
-              <a:spcAft>
-                <a:spcPts val="1000"/>
-              </a:spcAft>
-            </a:pPr>
-            <a:r>
-              <a:rPr sz="1800" b="1">
-                <a:solidFill>
-                  <a:srgbClr val="1F2A4E"/>
-                </a:solidFill>
-              </a:rPr>
-              <a:t>Comparável ao baseline canônico:  </a:t>
-            </a:r>
-            <a:r>
-              <a:rPr sz="1800">
-                <a:solidFill>
-                  <a:srgbClr val="3D424E"/>
-                </a:solidFill>
-              </a:rPr>
-              <a:t>ResNet-34 do FairFace serve como âncora — ConvNeXt-T isola o efeito do condicionamento.</a:t>
-            </a:r>
-          </a:p>
-          <a:p>
-            <a:pPr>
-              <a:spcAft>
-                <a:spcPts val="1000"/>
-              </a:spcAft>
-            </a:pPr>
-            <a:r>
-              <a:rPr sz="1800" b="1">
-                <a:solidFill>
-                  <a:srgbClr val="1F2A4E"/>
-                </a:solidFill>
-              </a:rPr>
-              <a:t>Viável computacionalmente:  </a:t>
-            </a:r>
-            <a:r>
-              <a:rPr sz="1800">
-                <a:solidFill>
-                  <a:srgbClr val="3D424E"/>
-                </a:solidFill>
-              </a:rPr>
-              <a:t>28 M params permitem 3 sementes × 3 configs em GPU comum (~300 h total).</a:t>
-            </a:r>
-          </a:p>
-        </p:txBody>
-      </p:sp>
+      <p:pic>
+        <p:nvPicPr>
+          <p:cNvPr id="4" name="Picture 3" descr="fig_mst_demo_distribuicao.png"/>
+          <p:cNvPicPr>
+            <a:picLocks noChangeAspect="1"/>
+          </p:cNvPicPr>
+          <p:nvPr/>
+        </p:nvPicPr>
+        <p:blipFill>
+          <a:blip r:embed="rId2"/>
+          <a:stretch>
+            <a:fillRect/>
+          </a:stretch>
+        </p:blipFill>
+        <p:spPr>
+          <a:xfrm>
+            <a:off x="683499" y="1371600"/>
+            <a:ext cx="10821954" cy="4389120"/>
+          </a:xfrm>
+          <a:prstGeom prst="rect">
+            <a:avLst/>
+          </a:prstGeom>
+        </p:spPr>
+      </p:pic>
       <p:sp>
         <p:nvSpPr>
           <p:cNvPr id="5" name="TextBox 4"/>
@@ -6239,8 +6126,8 @@
         </p:nvSpPr>
         <p:spPr>
           <a:xfrm>
-            <a:off x="457200" y="6446520"/>
-            <a:ext cx="10515600" cy="365760"/>
+            <a:off x="457200" y="5989320"/>
+            <a:ext cx="11430000" cy="365760"/>
           </a:xfrm>
           <a:prstGeom prst="rect">
             <a:avLst/>
@@ -6253,15 +6140,15 @@
           </a:bodyPr>
           <a:lstStyle/>
           <a:p>
-            <a:pPr>
-              <a:defRPr sz="900" i="1">
+            <a:pPr algn="ctr">
+              <a:defRPr sz="1400" i="1">
                 <a:solidFill>
                   <a:srgbClr val="707682"/>
                 </a:solidFill>
               </a:defRPr>
             </a:pPr>
             <a:r>
-              <a:t>Exame de Qualificação · Marcello Ozzetti · Orientação: Prof. Dr. Marcos G. Quiles · PPG-CC UNIFESP/ICT</a:t>
+              <a:t>Distribuição percentual (dentro de cada raça) sobre amostra estratificada (n = 350, 50 por raça). Nenhuma raça colapsa em um único tom Monk — evidência preliminar que sustenta a formalização de H1.</a:t>
             </a:r>
           </a:p>
         </p:txBody>
@@ -6274,8 +6161,8 @@
         </p:nvSpPr>
         <p:spPr>
           <a:xfrm>
-            <a:off x="11521440" y="6446520"/>
-            <a:ext cx="640080" cy="365760"/>
+            <a:off x="457200" y="6446520"/>
+            <a:ext cx="10515600" cy="365760"/>
           </a:xfrm>
           <a:prstGeom prst="rect">
             <a:avLst/>
@@ -6296,7 +6183,42 @@
               </a:defRPr>
             </a:pPr>
             <a:r>
-              <a:t>18 / 28</a:t>
+              <a:t>Exame de Qualificação · Marcello Ozzetti · Orientação: Prof. Dr. Marcos G. Quiles · PPG-CC UNIFESP/ICT</a:t>
+            </a:r>
+          </a:p>
+        </p:txBody>
+      </p:sp>
+      <p:sp>
+        <p:nvSpPr>
+          <p:cNvPr id="7" name="TextBox 6"/>
+          <p:cNvSpPr txBox="1"/>
+          <p:nvPr/>
+        </p:nvSpPr>
+        <p:spPr>
+          <a:xfrm>
+            <a:off x="11521440" y="6446520"/>
+            <a:ext cx="640080" cy="365760"/>
+          </a:xfrm>
+          <a:prstGeom prst="rect">
+            <a:avLst/>
+          </a:prstGeom>
+          <a:noFill/>
+        </p:spPr>
+        <p:txBody>
+          <a:bodyPr wrap="none">
+            <a:spAutoFit/>
+          </a:bodyPr>
+          <a:lstStyle/>
+          <a:p>
+            <a:pPr>
+              <a:defRPr sz="900" i="1">
+                <a:solidFill>
+                  <a:srgbClr val="707682"/>
+                </a:solidFill>
+              </a:defRPr>
+            </a:pPr>
+            <a:r>
+              <a:t>18 / 29</a:t>
             </a:r>
           </a:p>
         </p:txBody>
@@ -6349,7 +6271,7 @@
               </a:defRPr>
             </a:pPr>
             <a:r>
-              <a:t>Racional do mecanismo de condicionamento: FiLM (Perez et al., 2018)</a:t>
+              <a:t>Racional da escolha do backbone: ConvNeXt-T (Liu et al., 2022)</a:t>
             </a:r>
           </a:p>
         </p:txBody>
@@ -6430,7 +6352,7 @@
                   <a:srgbClr val="1F2A4E"/>
                 </a:solidFill>
               </a:rPr>
-              <a:t>Adequação dimensional ao sinal MST:  </a:t>
+              <a:t>Paridade com ViTs a custo convolucional:  </a:t>
             </a:r>
             <a:r>
               <a:rPr sz="1800">
@@ -6438,7 +6360,7 @@
                   <a:srgbClr val="3D424E"/>
                 </a:solidFill>
               </a:rPr>
-              <a:t>sinal 10-dim casa naturalmente com γ, β — sem explosão paramétrica.</a:t>
+              <a:t>82 % top-1 ImageNet, comparável a Swin-T, ~1/3 dos params.</a:t>
             </a:r>
           </a:p>
           <a:p>
@@ -6453,7 +6375,7 @@
                   <a:srgbClr val="1F2A4E"/>
                 </a:solidFill>
               </a:rPr>
-              <a:t>Eficiência:  </a:t>
+              <a:t>Estável em fine-tuning:  </a:t>
             </a:r>
             <a:r>
               <a:rPr sz="1800">
@@ -6461,7 +6383,7 @@
                   <a:srgbClr val="3D424E"/>
                 </a:solidFill>
               </a:rPr>
-              <a:t>~380 k parâmetros (~1,3 % do backbone) — muito abaixo de cross-attention (~3×).</a:t>
+              <a:t>LayerNorm (não BatchNorm) — robusto a batch pequeno, essencial para 3 sementes.</a:t>
             </a:r>
           </a:p>
           <a:p>
@@ -6476,7 +6398,7 @@
                   <a:srgbClr val="1F2A4E"/>
                 </a:solidFill>
               </a:rPr>
-              <a:t>Interpretabilidade direta:  </a:t>
+              <a:t>Inserção natural de FiLM:  </a:t>
             </a:r>
             <a:r>
               <a:rPr sz="1800">
@@ -6484,7 +6406,7 @@
                   <a:srgbClr val="3D424E"/>
                 </a:solidFill>
               </a:rPr>
-              <a:t>γ e β por canal permitem inspecionar como cada tom modula as features.</a:t>
+              <a:t>4 estágios hierárquicos oferecem 4 pontos de inserção sem modificar blocos internos.</a:t>
             </a:r>
           </a:p>
           <a:p>
@@ -6499,7 +6421,7 @@
                   <a:srgbClr val="1F2A4E"/>
                 </a:solidFill>
               </a:rPr>
-              <a:t>Compatibilidade nativa:  </a:t>
+              <a:t>Comparável ao baseline canônico:  </a:t>
             </a:r>
             <a:r>
               <a:rPr sz="1800">
@@ -6507,7 +6429,7 @@
                   <a:srgbClr val="3D424E"/>
                 </a:solidFill>
               </a:rPr>
-              <a:t>opera bem com LayerNorm do ConvNeXt-T; init identidade preserva backbone.</a:t>
+              <a:t>ResNet-34 do FairFace serve como âncora — ConvNeXt-T isola o efeito do condicionamento.</a:t>
             </a:r>
           </a:p>
           <a:p>
@@ -6522,7 +6444,7 @@
                   <a:srgbClr val="1F2A4E"/>
                 </a:solidFill>
               </a:rPr>
-              <a:t>Lacuna documentada:  </a:t>
+              <a:t>Viável computacionalmente:  </a:t>
             </a:r>
             <a:r>
               <a:rPr sz="1800">
@@ -6530,30 +6452,7 @@
                   <a:srgbClr val="3D424E"/>
                 </a:solidFill>
               </a:rPr>
-              <a:t>sem aplicação prévia em fairness facial multi-classe — Contribuição 3 desta pesquisa.</a:t>
-            </a:r>
-          </a:p>
-          <a:p>
-            <a:pPr>
-              <a:spcAft>
-                <a:spcPts val="1000"/>
-              </a:spcAft>
-            </a:pPr>
-            <a:r>
-              <a:rPr sz="1800" b="1">
-                <a:solidFill>
-                  <a:srgbClr val="1F2A4E"/>
-                </a:solidFill>
-              </a:rPr>
-              <a:t>Descartadas com justificativa formal (Cap 2):  </a:t>
-            </a:r>
-            <a:r>
-              <a:rPr sz="1800">
-                <a:solidFill>
-                  <a:srgbClr val="3D424E"/>
-                </a:solidFill>
-              </a:rPr>
-              <a:t>Concatenação, CBN, Cross-attention, AdaIN, SPADE, HyperNetworks, LoRA/Adaptadores.</a:t>
+              <a:t>28 M params permitem 3 sementes × 3 configs em GPU comum (~300 h total).</a:t>
             </a:r>
           </a:p>
         </p:txBody>
@@ -6623,7 +6522,7 @@
               </a:defRPr>
             </a:pPr>
             <a:r>
-              <a:t>19 / 28</a:t>
+              <a:t>19 / 29</a:t>
             </a:r>
           </a:p>
         </p:txBody>
@@ -6676,7 +6575,7 @@
               </a:defRPr>
             </a:pPr>
             <a:r>
-              <a:t>Reconhecimento facial: adoção sociotécnica em larga escala</a:t>
+              <a:t>Motivação acadêmica: origem do problema de pesquisa</a:t>
             </a:r>
           </a:p>
         </p:txBody>
@@ -6726,25 +6625,23 @@
       </p:sp>
       <p:sp>
         <p:nvSpPr>
-          <p:cNvPr id="4" name="Rounded Rectangle 3"/>
+          <p:cNvPr id="4" name="Rectangle 3"/>
           <p:cNvSpPr/>
           <p:nvPr/>
         </p:nvSpPr>
         <p:spPr>
           <a:xfrm>
-            <a:off x="996695" y="1463040"/>
-            <a:ext cx="2377440" cy="1645920"/>
-          </a:xfrm>
-          <a:prstGeom prst="roundRect">
+            <a:off x="457200" y="1417320"/>
+            <a:ext cx="137160" cy="2834640"/>
+          </a:xfrm>
+          <a:prstGeom prst="rect">
             <a:avLst/>
           </a:prstGeom>
           <a:solidFill>
-            <a:srgbClr val="E8EAED"/>
+            <a:srgbClr val="1F2A4E"/>
           </a:solidFill>
           <a:ln>
-            <a:solidFill>
-              <a:srgbClr val="E8EAED"/>
-            </a:solidFill>
+            <a:noFill/>
           </a:ln>
         </p:spPr>
         <p:style>
@@ -6777,8 +6674,43 @@
         </p:nvSpPr>
         <p:spPr>
           <a:xfrm>
-            <a:off x="996695" y="1691640"/>
-            <a:ext cx="2377440" cy="365760"/>
+            <a:off x="868680" y="1463040"/>
+            <a:ext cx="10881360" cy="2377440"/>
+          </a:xfrm>
+          <a:prstGeom prst="rect">
+            <a:avLst/>
+          </a:prstGeom>
+          <a:noFill/>
+        </p:spPr>
+        <p:txBody>
+          <a:bodyPr wrap="square">
+            <a:spAutoFit/>
+          </a:bodyPr>
+          <a:lstStyle/>
+          <a:p>
+            <a:pPr>
+              <a:defRPr sz="1700" i="1">
+                <a:solidFill>
+                  <a:srgbClr val="1F2A4E"/>
+                </a:solidFill>
+              </a:defRPr>
+            </a:pPr>
+            <a:r>
+              <a:t>Em 2016, durante projeto acadêmico no MIT Media Lab, a então mestranda Joy Buolamwini constatou que sistemas comerciais de análise facial falhavam em detectar seu próprio rosto, enquanto detectavam, sem falha, interlocutores fenotipicamente mais claros. A conclusão do projeto exigiu o uso de uma máscara branca para que a face fosse reconhecida — episódio que converteu uma observação pessoal em programa de pesquisa.</a:t>
+            </a:r>
+          </a:p>
+        </p:txBody>
+      </p:sp>
+      <p:sp>
+        <p:nvSpPr>
+          <p:cNvPr id="6" name="TextBox 5"/>
+          <p:cNvSpPr txBox="1"/>
+          <p:nvPr/>
+        </p:nvSpPr>
+        <p:spPr>
+          <a:xfrm>
+            <a:off x="868680" y="3886200"/>
+            <a:ext cx="10881360" cy="365760"/>
           </a:xfrm>
           <a:prstGeom prst="rect">
             <a:avLst/>
@@ -6792,28 +6724,28 @@
           <a:lstStyle/>
           <a:p>
             <a:pPr algn="ctr">
-              <a:defRPr sz="1300" b="1">
-                <a:solidFill>
-                  <a:srgbClr val="C0392B"/>
-                </a:solidFill>
-              </a:defRPr>
-            </a:pPr>
-            <a:r>
-              <a:t>DISPOSITIVOS</a:t>
-            </a:r>
-          </a:p>
-        </p:txBody>
-      </p:sp>
-      <p:sp>
-        <p:nvSpPr>
-          <p:cNvPr id="6" name="TextBox 5"/>
+              <a:defRPr sz="1000" i="1">
+                <a:solidFill>
+                  <a:srgbClr val="707682"/>
+                </a:solidFill>
+              </a:defRPr>
+            </a:pPr>
+            <a:r>
+              <a:t>Reescritura acadêmica da narrativa relatada em Unmasking AI: My Mission to Protect What Is Human in a World of Machines (Buolamwini, 2023, W. W. Norton).</a:t>
+            </a:r>
+          </a:p>
+        </p:txBody>
+      </p:sp>
+      <p:sp>
+        <p:nvSpPr>
+          <p:cNvPr id="7" name="TextBox 6"/>
           <p:cNvSpPr txBox="1"/>
           <p:nvPr/>
         </p:nvSpPr>
         <p:spPr>
           <a:xfrm>
-            <a:off x="1088136" y="2148840"/>
-            <a:ext cx="2194560" cy="822960"/>
+            <a:off x="457200" y="4572000"/>
+            <a:ext cx="11247120" cy="1828800"/>
           </a:xfrm>
           <a:prstGeom prst="rect">
             <a:avLst/>
@@ -6826,73 +6758,50 @@
           </a:bodyPr>
           <a:lstStyle/>
           <a:p>
-            <a:pPr algn="ctr">
-              <a:defRPr sz="1600" b="1">
+            <a:pPr>
+              <a:spcAft>
+                <a:spcPts val="800"/>
+              </a:spcAft>
+            </a:pPr>
+            <a:r>
+              <a:rPr sz="1500" b="1">
                 <a:solidFill>
                   <a:srgbClr val="1F2A4E"/>
                 </a:solidFill>
-              </a:defRPr>
-            </a:pPr>
-            <a:r>
-              <a:t>Desbloqueio</a:t>
-            </a:r>
-          </a:p>
-          <a:p>
-            <a:pPr algn="ctr">
-              <a:defRPr sz="1600" b="1">
+              </a:rPr>
+              <a:t>Consolidação científica:  </a:t>
+            </a:r>
+            <a:r>
+              <a:rPr sz="1500">
+                <a:solidFill>
+                  <a:srgbClr val="3D424E"/>
+                </a:solidFill>
+              </a:rPr>
+              <a:t>a observação foi formalizada em Gender Shades (Buolamwini &amp; Gebru, 2018, PMLR), estudo seminal que quantificou disparidade de até 34,4 pontos percentuais em acurácia entre homens de pele clara e mulheres de pele escura em três APIs comerciais de análise facial.</a:t>
+            </a:r>
+          </a:p>
+          <a:p>
+            <a:pPr>
+              <a:spcAft>
+                <a:spcPts val="800"/>
+              </a:spcAft>
+            </a:pPr>
+            <a:r>
+              <a:rPr sz="1500" b="1">
                 <a:solidFill>
                   <a:srgbClr val="1F2A4E"/>
                 </a:solidFill>
-              </a:defRPr>
-            </a:pPr>
-            <a:r>
-              <a:t>de celular</a:t>
-            </a:r>
-          </a:p>
-        </p:txBody>
-      </p:sp>
-      <p:sp>
-        <p:nvSpPr>
-          <p:cNvPr id="7" name="Rounded Rectangle 6"/>
-          <p:cNvSpPr/>
-          <p:nvPr/>
-        </p:nvSpPr>
-        <p:spPr>
-          <a:xfrm>
-            <a:off x="3602736" y="1463040"/>
-            <a:ext cx="2377440" cy="1645920"/>
-          </a:xfrm>
-          <a:prstGeom prst="roundRect">
-            <a:avLst/>
-          </a:prstGeom>
-          <a:solidFill>
-            <a:srgbClr val="E8EAED"/>
-          </a:solidFill>
-          <a:ln>
-            <a:solidFill>
-              <a:srgbClr val="E8EAED"/>
-            </a:solidFill>
-          </a:ln>
-        </p:spPr>
-        <p:style>
-          <a:lnRef idx="1">
-            <a:schemeClr val="accent1"/>
-          </a:lnRef>
-          <a:fillRef idx="3">
-            <a:schemeClr val="accent1"/>
-          </a:fillRef>
-          <a:effectRef idx="2">
-            <a:schemeClr val="accent1"/>
-          </a:effectRef>
-          <a:fontRef idx="minor">
-            <a:schemeClr val="lt1"/>
-          </a:fontRef>
-        </p:style>
-        <p:txBody>
-          <a:bodyPr rtlCol="0" anchor="ctr"/>
-          <a:lstStyle/>
-          <a:p>
-            <a:pPr algn="ctr"/>
+              </a:rPr>
+              <a:t>Herança científica desta pesquisa:  </a:t>
+            </a:r>
+            <a:r>
+              <a:rPr sz="1500">
+                <a:solidFill>
+                  <a:srgbClr val="3D424E"/>
+                </a:solidFill>
+              </a:rPr>
+              <a:t>inscreve-se formalmente na mesma agenda — dissociar o desempenho de classificadores faciais do tom de pele —, deslocando a pergunta de "existe viés?" para "como mitigá-lo de forma defensável e auditável?".</a:t>
+            </a:r>
           </a:p>
         </p:txBody>
       </p:sp>
@@ -6904,8 +6813,8 @@
         </p:nvSpPr>
         <p:spPr>
           <a:xfrm>
-            <a:off x="3602736" y="1691640"/>
-            <a:ext cx="2377440" cy="365760"/>
+            <a:off x="457200" y="6446520"/>
+            <a:ext cx="10515600" cy="365760"/>
           </a:xfrm>
           <a:prstGeom prst="rect">
             <a:avLst/>
@@ -6918,15 +6827,15 @@
           </a:bodyPr>
           <a:lstStyle/>
           <a:p>
-            <a:pPr algn="ctr">
-              <a:defRPr sz="1300" b="1">
-                <a:solidFill>
-                  <a:srgbClr val="C0392B"/>
-                </a:solidFill>
-              </a:defRPr>
-            </a:pPr>
-            <a:r>
-              <a:t>BANCOS</a:t>
+            <a:pPr>
+              <a:defRPr sz="900" i="1">
+                <a:solidFill>
+                  <a:srgbClr val="707682"/>
+                </a:solidFill>
+              </a:defRPr>
+            </a:pPr>
+            <a:r>
+              <a:t>Exame de Qualificação · Marcello Ozzetti · Orientação: Prof. Dr. Marcos G. Quiles · PPG-CC UNIFESP/ICT</a:t>
             </a:r>
           </a:p>
         </p:txBody>
@@ -6939,100 +6848,8 @@
         </p:nvSpPr>
         <p:spPr>
           <a:xfrm>
-            <a:off x="3694176" y="2148840"/>
-            <a:ext cx="2194560" cy="822960"/>
-          </a:xfrm>
-          <a:prstGeom prst="rect">
-            <a:avLst/>
-          </a:prstGeom>
-          <a:noFill/>
-        </p:spPr>
-        <p:txBody>
-          <a:bodyPr wrap="square">
-            <a:spAutoFit/>
-          </a:bodyPr>
-          <a:lstStyle/>
-          <a:p>
-            <a:pPr algn="ctr">
-              <a:defRPr sz="1600" b="1">
-                <a:solidFill>
-                  <a:srgbClr val="1F2A4E"/>
-                </a:solidFill>
-              </a:defRPr>
-            </a:pPr>
-            <a:r>
-              <a:t>Autenticação</a:t>
-            </a:r>
-          </a:p>
-          <a:p>
-            <a:pPr algn="ctr">
-              <a:defRPr sz="1600" b="1">
-                <a:solidFill>
-                  <a:srgbClr val="1F2A4E"/>
-                </a:solidFill>
-              </a:defRPr>
-            </a:pPr>
-            <a:r>
-              <a:t>financeira</a:t>
-            </a:r>
-          </a:p>
-        </p:txBody>
-      </p:sp>
-      <p:sp>
-        <p:nvSpPr>
-          <p:cNvPr id="10" name="Rounded Rectangle 9"/>
-          <p:cNvSpPr/>
-          <p:nvPr/>
-        </p:nvSpPr>
-        <p:spPr>
-          <a:xfrm>
-            <a:off x="6208776" y="1463040"/>
-            <a:ext cx="2377440" cy="1645920"/>
-          </a:xfrm>
-          <a:prstGeom prst="roundRect">
-            <a:avLst/>
-          </a:prstGeom>
-          <a:solidFill>
-            <a:srgbClr val="E8EAED"/>
-          </a:solidFill>
-          <a:ln>
-            <a:solidFill>
-              <a:srgbClr val="E8EAED"/>
-            </a:solidFill>
-          </a:ln>
-        </p:spPr>
-        <p:style>
-          <a:lnRef idx="1">
-            <a:schemeClr val="accent1"/>
-          </a:lnRef>
-          <a:fillRef idx="3">
-            <a:schemeClr val="accent1"/>
-          </a:fillRef>
-          <a:effectRef idx="2">
-            <a:schemeClr val="accent1"/>
-          </a:effectRef>
-          <a:fontRef idx="minor">
-            <a:schemeClr val="lt1"/>
-          </a:fontRef>
-        </p:style>
-        <p:txBody>
-          <a:bodyPr rtlCol="0" anchor="ctr"/>
-          <a:lstStyle/>
-          <a:p>
-            <a:pPr algn="ctr"/>
-          </a:p>
-        </p:txBody>
-      </p:sp>
-      <p:sp>
-        <p:nvSpPr>
-          <p:cNvPr id="11" name="TextBox 10"/>
-          <p:cNvSpPr txBox="1"/>
-          <p:nvPr/>
-        </p:nvSpPr>
-        <p:spPr>
-          <a:xfrm>
-            <a:off x="6208776" y="1691640"/>
-            <a:ext cx="2377440" cy="365760"/>
+            <a:off x="11521440" y="6446520"/>
+            <a:ext cx="640080" cy="365760"/>
           </a:xfrm>
           <a:prstGeom prst="rect">
             <a:avLst/>
@@ -7045,428 +6862,6 @@
           </a:bodyPr>
           <a:lstStyle/>
           <a:p>
-            <a:pPr algn="ctr">
-              <a:defRPr sz="1300" b="1">
-                <a:solidFill>
-                  <a:srgbClr val="C0392B"/>
-                </a:solidFill>
-              </a:defRPr>
-            </a:pPr>
-            <a:r>
-              <a:t>FRONTEIRAS</a:t>
-            </a:r>
-          </a:p>
-        </p:txBody>
-      </p:sp>
-      <p:sp>
-        <p:nvSpPr>
-          <p:cNvPr id="12" name="TextBox 11"/>
-          <p:cNvSpPr txBox="1"/>
-          <p:nvPr/>
-        </p:nvSpPr>
-        <p:spPr>
-          <a:xfrm>
-            <a:off x="6300216" y="2148840"/>
-            <a:ext cx="2194560" cy="822960"/>
-          </a:xfrm>
-          <a:prstGeom prst="rect">
-            <a:avLst/>
-          </a:prstGeom>
-          <a:noFill/>
-        </p:spPr>
-        <p:txBody>
-          <a:bodyPr wrap="square">
-            <a:spAutoFit/>
-          </a:bodyPr>
-          <a:lstStyle/>
-          <a:p>
-            <a:pPr algn="ctr">
-              <a:defRPr sz="1600" b="1">
-                <a:solidFill>
-                  <a:srgbClr val="1F2A4E"/>
-                </a:solidFill>
-              </a:defRPr>
-            </a:pPr>
-            <a:r>
-              <a:t>Controle</a:t>
-            </a:r>
-          </a:p>
-          <a:p>
-            <a:pPr algn="ctr">
-              <a:defRPr sz="1600" b="1">
-                <a:solidFill>
-                  <a:srgbClr val="1F2A4E"/>
-                </a:solidFill>
-              </a:defRPr>
-            </a:pPr>
-            <a:r>
-              <a:t>migratório</a:t>
-            </a:r>
-          </a:p>
-        </p:txBody>
-      </p:sp>
-      <p:sp>
-        <p:nvSpPr>
-          <p:cNvPr id="13" name="Rounded Rectangle 12"/>
-          <p:cNvSpPr/>
-          <p:nvPr/>
-        </p:nvSpPr>
-        <p:spPr>
-          <a:xfrm>
-            <a:off x="8814816" y="1463040"/>
-            <a:ext cx="2377440" cy="1645920"/>
-          </a:xfrm>
-          <a:prstGeom prst="roundRect">
-            <a:avLst/>
-          </a:prstGeom>
-          <a:solidFill>
-            <a:srgbClr val="E8EAED"/>
-          </a:solidFill>
-          <a:ln>
-            <a:solidFill>
-              <a:srgbClr val="E8EAED"/>
-            </a:solidFill>
-          </a:ln>
-        </p:spPr>
-        <p:style>
-          <a:lnRef idx="1">
-            <a:schemeClr val="accent1"/>
-          </a:lnRef>
-          <a:fillRef idx="3">
-            <a:schemeClr val="accent1"/>
-          </a:fillRef>
-          <a:effectRef idx="2">
-            <a:schemeClr val="accent1"/>
-          </a:effectRef>
-          <a:fontRef idx="minor">
-            <a:schemeClr val="lt1"/>
-          </a:fontRef>
-        </p:style>
-        <p:txBody>
-          <a:bodyPr rtlCol="0" anchor="ctr"/>
-          <a:lstStyle/>
-          <a:p>
-            <a:pPr algn="ctr"/>
-          </a:p>
-        </p:txBody>
-      </p:sp>
-      <p:sp>
-        <p:nvSpPr>
-          <p:cNvPr id="14" name="TextBox 13"/>
-          <p:cNvSpPr txBox="1"/>
-          <p:nvPr/>
-        </p:nvSpPr>
-        <p:spPr>
-          <a:xfrm>
-            <a:off x="8814816" y="1691640"/>
-            <a:ext cx="2377440" cy="365760"/>
-          </a:xfrm>
-          <a:prstGeom prst="rect">
-            <a:avLst/>
-          </a:prstGeom>
-          <a:noFill/>
-        </p:spPr>
-        <p:txBody>
-          <a:bodyPr wrap="none">
-            <a:spAutoFit/>
-          </a:bodyPr>
-          <a:lstStyle/>
-          <a:p>
-            <a:pPr algn="ctr">
-              <a:defRPr sz="1300" b="1">
-                <a:solidFill>
-                  <a:srgbClr val="C0392B"/>
-                </a:solidFill>
-              </a:defRPr>
-            </a:pPr>
-            <a:r>
-              <a:t>SEGURANÇA</a:t>
-            </a:r>
-          </a:p>
-        </p:txBody>
-      </p:sp>
-      <p:sp>
-        <p:nvSpPr>
-          <p:cNvPr id="15" name="TextBox 14"/>
-          <p:cNvSpPr txBox="1"/>
-          <p:nvPr/>
-        </p:nvSpPr>
-        <p:spPr>
-          <a:xfrm>
-            <a:off x="8906256" y="2148840"/>
-            <a:ext cx="2194560" cy="822960"/>
-          </a:xfrm>
-          <a:prstGeom prst="rect">
-            <a:avLst/>
-          </a:prstGeom>
-          <a:noFill/>
-        </p:spPr>
-        <p:txBody>
-          <a:bodyPr wrap="square">
-            <a:spAutoFit/>
-          </a:bodyPr>
-          <a:lstStyle/>
-          <a:p>
-            <a:pPr algn="ctr">
-              <a:defRPr sz="1600" b="1">
-                <a:solidFill>
-                  <a:srgbClr val="1F2A4E"/>
-                </a:solidFill>
-              </a:defRPr>
-            </a:pPr>
-            <a:r>
-              <a:t>Identificação</a:t>
-            </a:r>
-          </a:p>
-          <a:p>
-            <a:pPr algn="ctr">
-              <a:defRPr sz="1600" b="1">
-                <a:solidFill>
-                  <a:srgbClr val="1F2A4E"/>
-                </a:solidFill>
-              </a:defRPr>
-            </a:pPr>
-            <a:r>
-              <a:t>policial</a:t>
-            </a:r>
-          </a:p>
-        </p:txBody>
-      </p:sp>
-      <p:sp>
-        <p:nvSpPr>
-          <p:cNvPr id="16" name="Rounded Rectangle 15"/>
-          <p:cNvSpPr/>
-          <p:nvPr/>
-        </p:nvSpPr>
-        <p:spPr>
-          <a:xfrm>
-            <a:off x="640080" y="3566160"/>
-            <a:ext cx="4114800" cy="2377440"/>
-          </a:xfrm>
-          <a:prstGeom prst="roundRect">
-            <a:avLst/>
-          </a:prstGeom>
-          <a:solidFill>
-            <a:srgbClr val="1F2A4E"/>
-          </a:solidFill>
-          <a:ln>
-            <a:noFill/>
-          </a:ln>
-        </p:spPr>
-        <p:style>
-          <a:lnRef idx="1">
-            <a:schemeClr val="accent1"/>
-          </a:lnRef>
-          <a:fillRef idx="3">
-            <a:schemeClr val="accent1"/>
-          </a:fillRef>
-          <a:effectRef idx="2">
-            <a:schemeClr val="accent1"/>
-          </a:effectRef>
-          <a:fontRef idx="minor">
-            <a:schemeClr val="lt1"/>
-          </a:fontRef>
-        </p:style>
-        <p:txBody>
-          <a:bodyPr rtlCol="0" anchor="ctr"/>
-          <a:lstStyle/>
-          <a:p>
-            <a:pPr algn="ctr"/>
-          </a:p>
-        </p:txBody>
-      </p:sp>
-      <p:sp>
-        <p:nvSpPr>
-          <p:cNvPr id="17" name="TextBox 16"/>
-          <p:cNvSpPr txBox="1"/>
-          <p:nvPr/>
-        </p:nvSpPr>
-        <p:spPr>
-          <a:xfrm>
-            <a:off x="640080" y="3794760"/>
-            <a:ext cx="4114800" cy="1005840"/>
-          </a:xfrm>
-          <a:prstGeom prst="rect">
-            <a:avLst/>
-          </a:prstGeom>
-          <a:noFill/>
-        </p:spPr>
-        <p:txBody>
-          <a:bodyPr wrap="none">
-            <a:spAutoFit/>
-          </a:bodyPr>
-          <a:lstStyle/>
-          <a:p>
-            <a:pPr algn="ctr">
-              <a:defRPr sz="4600" b="1">
-                <a:solidFill>
-                  <a:srgbClr val="FFFFFF"/>
-                </a:solidFill>
-              </a:defRPr>
-            </a:pPr>
-            <a:r>
-              <a:t>10 – 100 ×</a:t>
-            </a:r>
-          </a:p>
-        </p:txBody>
-      </p:sp>
-      <p:sp>
-        <p:nvSpPr>
-          <p:cNvPr id="18" name="TextBox 17"/>
-          <p:cNvSpPr txBox="1"/>
-          <p:nvPr/>
-        </p:nvSpPr>
-        <p:spPr>
-          <a:xfrm>
-            <a:off x="822960" y="4937760"/>
-            <a:ext cx="3749039" cy="914400"/>
-          </a:xfrm>
-          <a:prstGeom prst="rect">
-            <a:avLst/>
-          </a:prstGeom>
-          <a:noFill/>
-        </p:spPr>
-        <p:txBody>
-          <a:bodyPr wrap="square">
-            <a:spAutoFit/>
-          </a:bodyPr>
-          <a:lstStyle/>
-          <a:p>
-            <a:pPr algn="ctr">
-              <a:defRPr sz="1400">
-                <a:solidFill>
-                  <a:srgbClr val="B4C4E8"/>
-                </a:solidFill>
-              </a:defRPr>
-            </a:pPr>
-            <a:r>
-              <a:t>disparidade na taxa de</a:t>
-            </a:r>
-            <a:br/>
-            <a:r>
-              <a:t>falso positivo entre</a:t>
-            </a:r>
-            <a:br/>
-            <a:r>
-              <a:t>grupos demográficos</a:t>
-            </a:r>
-          </a:p>
-        </p:txBody>
-      </p:sp>
-      <p:sp>
-        <p:nvSpPr>
-          <p:cNvPr id="19" name="TextBox 18"/>
-          <p:cNvSpPr txBox="1"/>
-          <p:nvPr/>
-        </p:nvSpPr>
-        <p:spPr>
-          <a:xfrm>
-            <a:off x="5029200" y="3566160"/>
-            <a:ext cx="6766560" cy="2377440"/>
-          </a:xfrm>
-          <a:prstGeom prst="rect">
-            <a:avLst/>
-          </a:prstGeom>
-          <a:noFill/>
-        </p:spPr>
-        <p:txBody>
-          <a:bodyPr wrap="square">
-            <a:spAutoFit/>
-          </a:bodyPr>
-          <a:lstStyle/>
-          <a:p>
-            <a:pPr>
-              <a:spcAft>
-                <a:spcPts val="700"/>
-              </a:spcAft>
-            </a:pPr>
-            <a:r>
-              <a:rPr sz="1600" b="1">
-                <a:solidFill>
-                  <a:srgbClr val="1F2A4E"/>
-                </a:solidFill>
-              </a:rPr>
-              <a:t>NIST 2019 (Grother et al.): </a:t>
-            </a:r>
-            <a:r>
-              <a:rPr sz="1600">
-                <a:solidFill>
-                  <a:srgbClr val="3D424E"/>
-                </a:solidFill>
-              </a:rPr>
-              <a:t>maior auditoria pública já feita em biometria facial — 189 algoritmos comerciais avaliados sobre 18 milhões de imagens.</a:t>
-            </a:r>
-          </a:p>
-          <a:p>
-            <a:pPr>
-              <a:spcAft>
-                <a:spcPts val="700"/>
-              </a:spcAft>
-            </a:pPr>
-            <a:r>
-              <a:rPr sz="1600" b="1">
-                <a:solidFill>
-                  <a:srgbClr val="1F2A4E"/>
-                </a:solidFill>
-              </a:rPr>
-              <a:t>Gender Shades (Buolamwini &amp; Gebru, 2018): </a:t>
-            </a:r>
-            <a:r>
-              <a:rPr sz="1600">
-                <a:solidFill>
-                  <a:srgbClr val="3D424E"/>
-                </a:solidFill>
-              </a:rPr>
-              <a:t>estudo fundacional que colocou o viés racial-de-gênero na agenda pública.</a:t>
-            </a:r>
-          </a:p>
-          <a:p>
-            <a:pPr>
-              <a:spcAft>
-                <a:spcPts val="700"/>
-              </a:spcAft>
-            </a:pPr>
-            <a:r>
-              <a:rPr sz="1600" b="1">
-                <a:solidFill>
-                  <a:srgbClr val="1F2A4E"/>
-                </a:solidFill>
-              </a:rPr>
-              <a:t>Conclusão: </a:t>
-            </a:r>
-            <a:r>
-              <a:rPr sz="1600">
-                <a:solidFill>
-                  <a:srgbClr val="3D424E"/>
-                </a:solidFill>
-              </a:rPr>
-              <a:t>desempenho agregado favorável coexiste com disparidade sistemática entre subgrupos demográficos.</a:t>
-            </a:r>
-          </a:p>
-        </p:txBody>
-      </p:sp>
-      <p:sp>
-        <p:nvSpPr>
-          <p:cNvPr id="20" name="TextBox 19"/>
-          <p:cNvSpPr txBox="1"/>
-          <p:nvPr/>
-        </p:nvSpPr>
-        <p:spPr>
-          <a:xfrm>
-            <a:off x="457200" y="6446520"/>
-            <a:ext cx="10515600" cy="365760"/>
-          </a:xfrm>
-          <a:prstGeom prst="rect">
-            <a:avLst/>
-          </a:prstGeom>
-          <a:noFill/>
-        </p:spPr>
-        <p:txBody>
-          <a:bodyPr wrap="none">
-            <a:spAutoFit/>
-          </a:bodyPr>
-          <a:lstStyle/>
-          <a:p>
             <a:pPr>
               <a:defRPr sz="900" i="1">
                 <a:solidFill>
@@ -7475,42 +6870,7 @@
               </a:defRPr>
             </a:pPr>
             <a:r>
-              <a:t>Exame de Qualificação · Marcello Ozzetti · Orientação: Prof. Dr. Marcos G. Quiles · PPG-CC UNIFESP/ICT</a:t>
-            </a:r>
-          </a:p>
-        </p:txBody>
-      </p:sp>
-      <p:sp>
-        <p:nvSpPr>
-          <p:cNvPr id="21" name="TextBox 20"/>
-          <p:cNvSpPr txBox="1"/>
-          <p:nvPr/>
-        </p:nvSpPr>
-        <p:spPr>
-          <a:xfrm>
-            <a:off x="11521440" y="6446520"/>
-            <a:ext cx="640080" cy="365760"/>
-          </a:xfrm>
-          <a:prstGeom prst="rect">
-            <a:avLst/>
-          </a:prstGeom>
-          <a:noFill/>
-        </p:spPr>
-        <p:txBody>
-          <a:bodyPr wrap="none">
-            <a:spAutoFit/>
-          </a:bodyPr>
-          <a:lstStyle/>
-          <a:p>
-            <a:pPr>
-              <a:defRPr sz="900" i="1">
-                <a:solidFill>
-                  <a:srgbClr val="707682"/>
-                </a:solidFill>
-              </a:defRPr>
-            </a:pPr>
-            <a:r>
-              <a:t>2 / 28</a:t>
+              <a:t>2 / 29</a:t>
             </a:r>
           </a:p>
         </p:txBody>
@@ -7563,7 +6923,7 @@
               </a:defRPr>
             </a:pPr>
             <a:r>
-              <a:t>Mecanismo FiLM: modulação de features condicionada ao tom de pele</a:t>
+              <a:t>Racional do mecanismo de condicionamento: FiLM (Perez et al., 2018)</a:t>
             </a:r>
           </a:p>
         </p:txBody>
@@ -7611,30 +6971,167 @@
           </a:p>
         </p:txBody>
       </p:sp>
-      <p:pic>
-        <p:nvPicPr>
-          <p:cNvPr id="4" name="Picture 3" descr="film_pipeline.png"/>
-          <p:cNvPicPr>
-            <a:picLocks noChangeAspect="1"/>
-          </p:cNvPicPr>
-          <p:nvPr/>
-        </p:nvPicPr>
-        <p:blipFill>
-          <a:blip r:embed="rId2"/>
-          <a:stretch>
-            <a:fillRect/>
-          </a:stretch>
-        </p:blipFill>
-        <p:spPr>
-          <a:xfrm>
-            <a:off x="2291864" y="1371600"/>
-            <a:ext cx="7605222" cy="4206240"/>
-          </a:xfrm>
-          <a:prstGeom prst="rect">
-            <a:avLst/>
-          </a:prstGeom>
-        </p:spPr>
-      </p:pic>
+      <p:sp>
+        <p:nvSpPr>
+          <p:cNvPr id="4" name="TextBox 3"/>
+          <p:cNvSpPr txBox="1"/>
+          <p:nvPr/>
+        </p:nvSpPr>
+        <p:spPr>
+          <a:xfrm>
+            <a:off x="457200" y="1417320"/>
+            <a:ext cx="11430000" cy="4937760"/>
+          </a:xfrm>
+          <a:prstGeom prst="rect">
+            <a:avLst/>
+          </a:prstGeom>
+          <a:noFill/>
+        </p:spPr>
+        <p:txBody>
+          <a:bodyPr wrap="square">
+            <a:spAutoFit/>
+          </a:bodyPr>
+          <a:lstStyle/>
+          <a:p>
+            <a:pPr>
+              <a:spcAft>
+                <a:spcPts val="1000"/>
+              </a:spcAft>
+            </a:pPr>
+            <a:r>
+              <a:rPr sz="1800" b="1">
+                <a:solidFill>
+                  <a:srgbClr val="1F2A4E"/>
+                </a:solidFill>
+              </a:rPr>
+              <a:t>Adequação dimensional ao sinal MST:  </a:t>
+            </a:r>
+            <a:r>
+              <a:rPr sz="1800">
+                <a:solidFill>
+                  <a:srgbClr val="3D424E"/>
+                </a:solidFill>
+              </a:rPr>
+              <a:t>sinal 10-dim casa naturalmente com γ, β — sem explosão paramétrica.</a:t>
+            </a:r>
+          </a:p>
+          <a:p>
+            <a:pPr>
+              <a:spcAft>
+                <a:spcPts val="1000"/>
+              </a:spcAft>
+            </a:pPr>
+            <a:r>
+              <a:rPr sz="1800" b="1">
+                <a:solidFill>
+                  <a:srgbClr val="1F2A4E"/>
+                </a:solidFill>
+              </a:rPr>
+              <a:t>Eficiência:  </a:t>
+            </a:r>
+            <a:r>
+              <a:rPr sz="1800">
+                <a:solidFill>
+                  <a:srgbClr val="3D424E"/>
+                </a:solidFill>
+              </a:rPr>
+              <a:t>~380 k parâmetros (~1,3 % do backbone) — muito abaixo de cross-attention (~3×).</a:t>
+            </a:r>
+          </a:p>
+          <a:p>
+            <a:pPr>
+              <a:spcAft>
+                <a:spcPts val="1000"/>
+              </a:spcAft>
+            </a:pPr>
+            <a:r>
+              <a:rPr sz="1800" b="1">
+                <a:solidFill>
+                  <a:srgbClr val="1F2A4E"/>
+                </a:solidFill>
+              </a:rPr>
+              <a:t>Interpretabilidade direta:  </a:t>
+            </a:r>
+            <a:r>
+              <a:rPr sz="1800">
+                <a:solidFill>
+                  <a:srgbClr val="3D424E"/>
+                </a:solidFill>
+              </a:rPr>
+              <a:t>γ e β por canal permitem inspecionar como cada tom modula as features.</a:t>
+            </a:r>
+          </a:p>
+          <a:p>
+            <a:pPr>
+              <a:spcAft>
+                <a:spcPts val="1000"/>
+              </a:spcAft>
+            </a:pPr>
+            <a:r>
+              <a:rPr sz="1800" b="1">
+                <a:solidFill>
+                  <a:srgbClr val="1F2A4E"/>
+                </a:solidFill>
+              </a:rPr>
+              <a:t>Compatibilidade nativa:  </a:t>
+            </a:r>
+            <a:r>
+              <a:rPr sz="1800">
+                <a:solidFill>
+                  <a:srgbClr val="3D424E"/>
+                </a:solidFill>
+              </a:rPr>
+              <a:t>opera bem com LayerNorm do ConvNeXt-T; init identidade preserva backbone.</a:t>
+            </a:r>
+          </a:p>
+          <a:p>
+            <a:pPr>
+              <a:spcAft>
+                <a:spcPts val="1000"/>
+              </a:spcAft>
+            </a:pPr>
+            <a:r>
+              <a:rPr sz="1800" b="1">
+                <a:solidFill>
+                  <a:srgbClr val="1F2A4E"/>
+                </a:solidFill>
+              </a:rPr>
+              <a:t>Lacuna documentada:  </a:t>
+            </a:r>
+            <a:r>
+              <a:rPr sz="1800">
+                <a:solidFill>
+                  <a:srgbClr val="3D424E"/>
+                </a:solidFill>
+              </a:rPr>
+              <a:t>sem aplicação prévia em fairness facial multi-classe — Contribuição 3 desta pesquisa.</a:t>
+            </a:r>
+          </a:p>
+          <a:p>
+            <a:pPr>
+              <a:spcAft>
+                <a:spcPts val="1000"/>
+              </a:spcAft>
+            </a:pPr>
+            <a:r>
+              <a:rPr sz="1800" b="1">
+                <a:solidFill>
+                  <a:srgbClr val="1F2A4E"/>
+                </a:solidFill>
+              </a:rPr>
+              <a:t>Descartadas com justificativa formal (Cap 2):  </a:t>
+            </a:r>
+            <a:r>
+              <a:rPr sz="1800">
+                <a:solidFill>
+                  <a:srgbClr val="3D424E"/>
+                </a:solidFill>
+              </a:rPr>
+              <a:t>Concatenação, CBN, Cross-attention, AdaIN, SPADE, HyperNetworks, LoRA/Adaptadores.</a:t>
+            </a:r>
+          </a:p>
+        </p:txBody>
+      </p:sp>
       <p:sp>
         <p:nvSpPr>
           <p:cNvPr id="5" name="TextBox 4"/>
@@ -7643,8 +7140,8 @@
         </p:nvSpPr>
         <p:spPr>
           <a:xfrm>
-            <a:off x="457200" y="5989320"/>
-            <a:ext cx="11430000" cy="365760"/>
+            <a:off x="457200" y="6446520"/>
+            <a:ext cx="10515600" cy="365760"/>
           </a:xfrm>
           <a:prstGeom prst="rect">
             <a:avLst/>
@@ -7657,15 +7154,15 @@
           </a:bodyPr>
           <a:lstStyle/>
           <a:p>
-            <a:pPr algn="ctr">
-              <a:defRPr sz="1400" i="1">
+            <a:pPr>
+              <a:defRPr sz="900" i="1">
                 <a:solidFill>
                   <a:srgbClr val="707682"/>
                 </a:solidFill>
               </a:defRPr>
             </a:pPr>
             <a:r>
-              <a:t>FiLM (Perez et al., 2018) modula as features intermediárias do ConvNeXt-T canal a canal, condicionadas ao vetor MST. Overhead paramétrico: aproximadamente 1,3 % do backbone.</a:t>
+              <a:t>Exame de Qualificação · Marcello Ozzetti · Orientação: Prof. Dr. Marcos G. Quiles · PPG-CC UNIFESP/ICT</a:t>
             </a:r>
           </a:p>
         </p:txBody>
@@ -7678,8 +7175,8 @@
         </p:nvSpPr>
         <p:spPr>
           <a:xfrm>
-            <a:off x="457200" y="6446520"/>
-            <a:ext cx="10515600" cy="365760"/>
+            <a:off x="11521440" y="6446520"/>
+            <a:ext cx="640080" cy="365760"/>
           </a:xfrm>
           <a:prstGeom prst="rect">
             <a:avLst/>
@@ -7700,42 +7197,7 @@
               </a:defRPr>
             </a:pPr>
             <a:r>
-              <a:t>Exame de Qualificação · Marcello Ozzetti · Orientação: Prof. Dr. Marcos G. Quiles · PPG-CC UNIFESP/ICT</a:t>
-            </a:r>
-          </a:p>
-        </p:txBody>
-      </p:sp>
-      <p:sp>
-        <p:nvSpPr>
-          <p:cNvPr id="7" name="TextBox 6"/>
-          <p:cNvSpPr txBox="1"/>
-          <p:nvPr/>
-        </p:nvSpPr>
-        <p:spPr>
-          <a:xfrm>
-            <a:off x="11521440" y="6446520"/>
-            <a:ext cx="640080" cy="365760"/>
-          </a:xfrm>
-          <a:prstGeom prst="rect">
-            <a:avLst/>
-          </a:prstGeom>
-          <a:noFill/>
-        </p:spPr>
-        <p:txBody>
-          <a:bodyPr wrap="none">
-            <a:spAutoFit/>
-          </a:bodyPr>
-          <a:lstStyle/>
-          <a:p>
-            <a:pPr>
-              <a:defRPr sz="900" i="1">
-                <a:solidFill>
-                  <a:srgbClr val="707682"/>
-                </a:solidFill>
-              </a:defRPr>
-            </a:pPr>
-            <a:r>
-              <a:t>20 / 28</a:t>
+              <a:t>20 / 29</a:t>
             </a:r>
           </a:p>
         </p:txBody>
@@ -7749,6 +7211,231 @@
 </file>
 
 <file path=ppt/slides/slide21.xml><?xml version="1.0" encoding="utf-8"?>
+<p:sld xmlns:a="http://schemas.openxmlformats.org/drawingml/2006/main" xmlns:p="http://schemas.openxmlformats.org/presentationml/2006/main" xmlns:r="http://schemas.openxmlformats.org/officeDocument/2006/relationships">
+  <p:cSld>
+    <p:spTree>
+      <p:nvGrpSpPr>
+        <p:cNvPr id="1" name=""/>
+        <p:cNvGrpSpPr/>
+        <p:nvPr/>
+      </p:nvGrpSpPr>
+      <p:grpSpPr/>
+      <p:sp>
+        <p:nvSpPr>
+          <p:cNvPr id="2" name="TextBox 1"/>
+          <p:cNvSpPr txBox="1"/>
+          <p:nvPr/>
+        </p:nvSpPr>
+        <p:spPr>
+          <a:xfrm>
+            <a:off x="457200" y="274320"/>
+            <a:ext cx="11430000" cy="914400"/>
+          </a:xfrm>
+          <a:prstGeom prst="rect">
+            <a:avLst/>
+          </a:prstGeom>
+          <a:noFill/>
+        </p:spPr>
+        <p:txBody>
+          <a:bodyPr wrap="square">
+            <a:spAutoFit/>
+          </a:bodyPr>
+          <a:lstStyle/>
+          <a:p>
+            <a:pPr>
+              <a:defRPr sz="2800" b="1">
+                <a:solidFill>
+                  <a:srgbClr val="1F2A4E"/>
+                </a:solidFill>
+              </a:defRPr>
+            </a:pPr>
+            <a:r>
+              <a:t>Mecanismo FiLM: modulação de features condicionada ao tom de pele</a:t>
+            </a:r>
+          </a:p>
+        </p:txBody>
+      </p:sp>
+      <p:sp>
+        <p:nvSpPr>
+          <p:cNvPr id="3" name="Rectangle 2"/>
+          <p:cNvSpPr/>
+          <p:nvPr/>
+        </p:nvSpPr>
+        <p:spPr>
+          <a:xfrm>
+            <a:off x="457200" y="1097280"/>
+            <a:ext cx="11430000" cy="36576"/>
+          </a:xfrm>
+          <a:prstGeom prst="rect">
+            <a:avLst/>
+          </a:prstGeom>
+          <a:solidFill>
+            <a:srgbClr val="1F2A4E"/>
+          </a:solidFill>
+          <a:ln>
+            <a:noFill/>
+          </a:ln>
+        </p:spPr>
+        <p:style>
+          <a:lnRef idx="1">
+            <a:schemeClr val="accent1"/>
+          </a:lnRef>
+          <a:fillRef idx="3">
+            <a:schemeClr val="accent1"/>
+          </a:fillRef>
+          <a:effectRef idx="2">
+            <a:schemeClr val="accent1"/>
+          </a:effectRef>
+          <a:fontRef idx="minor">
+            <a:schemeClr val="lt1"/>
+          </a:fontRef>
+        </p:style>
+        <p:txBody>
+          <a:bodyPr rtlCol="0" anchor="ctr"/>
+          <a:lstStyle/>
+          <a:p>
+            <a:pPr algn="ctr"/>
+          </a:p>
+        </p:txBody>
+      </p:sp>
+      <p:pic>
+        <p:nvPicPr>
+          <p:cNvPr id="4" name="Picture 3" descr="film_pipeline.png"/>
+          <p:cNvPicPr>
+            <a:picLocks noChangeAspect="1"/>
+          </p:cNvPicPr>
+          <p:nvPr/>
+        </p:nvPicPr>
+        <p:blipFill>
+          <a:blip r:embed="rId2"/>
+          <a:stretch>
+            <a:fillRect/>
+          </a:stretch>
+        </p:blipFill>
+        <p:spPr>
+          <a:xfrm>
+            <a:off x="2291864" y="1371600"/>
+            <a:ext cx="7605222" cy="4206240"/>
+          </a:xfrm>
+          <a:prstGeom prst="rect">
+            <a:avLst/>
+          </a:prstGeom>
+        </p:spPr>
+      </p:pic>
+      <p:sp>
+        <p:nvSpPr>
+          <p:cNvPr id="5" name="TextBox 4"/>
+          <p:cNvSpPr txBox="1"/>
+          <p:nvPr/>
+        </p:nvSpPr>
+        <p:spPr>
+          <a:xfrm>
+            <a:off x="457200" y="5989320"/>
+            <a:ext cx="11430000" cy="365760"/>
+          </a:xfrm>
+          <a:prstGeom prst="rect">
+            <a:avLst/>
+          </a:prstGeom>
+          <a:noFill/>
+        </p:spPr>
+        <p:txBody>
+          <a:bodyPr wrap="none">
+            <a:spAutoFit/>
+          </a:bodyPr>
+          <a:lstStyle/>
+          <a:p>
+            <a:pPr algn="ctr">
+              <a:defRPr sz="1400" i="1">
+                <a:solidFill>
+                  <a:srgbClr val="707682"/>
+                </a:solidFill>
+              </a:defRPr>
+            </a:pPr>
+            <a:r>
+              <a:t>FiLM (Perez et al., 2018) modula as features intermediárias do ConvNeXt-T canal a canal, condicionadas ao vetor MST. Overhead paramétrico: aproximadamente 1,3 % do backbone.</a:t>
+            </a:r>
+          </a:p>
+        </p:txBody>
+      </p:sp>
+      <p:sp>
+        <p:nvSpPr>
+          <p:cNvPr id="6" name="TextBox 5"/>
+          <p:cNvSpPr txBox="1"/>
+          <p:nvPr/>
+        </p:nvSpPr>
+        <p:spPr>
+          <a:xfrm>
+            <a:off x="457200" y="6446520"/>
+            <a:ext cx="10515600" cy="365760"/>
+          </a:xfrm>
+          <a:prstGeom prst="rect">
+            <a:avLst/>
+          </a:prstGeom>
+          <a:noFill/>
+        </p:spPr>
+        <p:txBody>
+          <a:bodyPr wrap="none">
+            <a:spAutoFit/>
+          </a:bodyPr>
+          <a:lstStyle/>
+          <a:p>
+            <a:pPr>
+              <a:defRPr sz="900" i="1">
+                <a:solidFill>
+                  <a:srgbClr val="707682"/>
+                </a:solidFill>
+              </a:defRPr>
+            </a:pPr>
+            <a:r>
+              <a:t>Exame de Qualificação · Marcello Ozzetti · Orientação: Prof. Dr. Marcos G. Quiles · PPG-CC UNIFESP/ICT</a:t>
+            </a:r>
+          </a:p>
+        </p:txBody>
+      </p:sp>
+      <p:sp>
+        <p:nvSpPr>
+          <p:cNvPr id="7" name="TextBox 6"/>
+          <p:cNvSpPr txBox="1"/>
+          <p:nvPr/>
+        </p:nvSpPr>
+        <p:spPr>
+          <a:xfrm>
+            <a:off x="11521440" y="6446520"/>
+            <a:ext cx="640080" cy="365760"/>
+          </a:xfrm>
+          <a:prstGeom prst="rect">
+            <a:avLst/>
+          </a:prstGeom>
+          <a:noFill/>
+        </p:spPr>
+        <p:txBody>
+          <a:bodyPr wrap="none">
+            <a:spAutoFit/>
+          </a:bodyPr>
+          <a:lstStyle/>
+          <a:p>
+            <a:pPr>
+              <a:defRPr sz="900" i="1">
+                <a:solidFill>
+                  <a:srgbClr val="707682"/>
+                </a:solidFill>
+              </a:defRPr>
+            </a:pPr>
+            <a:r>
+              <a:t>21 / 29</a:t>
+            </a:r>
+          </a:p>
+        </p:txBody>
+      </p:sp>
+    </p:spTree>
+  </p:cSld>
+  <p:clrMapOvr>
+    <a:masterClrMapping/>
+  </p:clrMapOvr>
+</p:sld>
+</file>
+
+<file path=ppt/slides/slide22.xml><?xml version="1.0" encoding="utf-8"?>
 <p:sld xmlns:a="http://schemas.openxmlformats.org/drawingml/2006/main" xmlns:p="http://schemas.openxmlformats.org/presentationml/2006/main" xmlns:r="http://schemas.openxmlformats.org/officeDocument/2006/relationships">
   <p:cSld>
     <p:spTree>
@@ -8164,311 +7851,7 @@
               </a:defRPr>
             </a:pPr>
             <a:r>
-              <a:t>21 / 28</a:t>
-            </a:r>
-          </a:p>
-        </p:txBody>
-      </p:sp>
-    </p:spTree>
-  </p:cSld>
-  <p:clrMapOvr>
-    <a:masterClrMapping/>
-  </p:clrMapOvr>
-</p:sld>
-</file>
-
-<file path=ppt/slides/slide22.xml><?xml version="1.0" encoding="utf-8"?>
-<p:sld xmlns:a="http://schemas.openxmlformats.org/drawingml/2006/main" xmlns:p="http://schemas.openxmlformats.org/presentationml/2006/main" xmlns:r="http://schemas.openxmlformats.org/officeDocument/2006/relationships">
-  <p:cSld>
-    <p:spTree>
-      <p:nvGrpSpPr>
-        <p:cNvPr id="1" name=""/>
-        <p:cNvGrpSpPr/>
-        <p:nvPr/>
-      </p:nvGrpSpPr>
-      <p:grpSpPr/>
-      <p:sp>
-        <p:nvSpPr>
-          <p:cNvPr id="2" name="TextBox 1"/>
-          <p:cNvSpPr txBox="1"/>
-          <p:nvPr/>
-        </p:nvSpPr>
-        <p:spPr>
-          <a:xfrm>
-            <a:off x="457200" y="274320"/>
-            <a:ext cx="11430000" cy="914400"/>
-          </a:xfrm>
-          <a:prstGeom prst="rect">
-            <a:avLst/>
-          </a:prstGeom>
-          <a:noFill/>
-        </p:spPr>
-        <p:txBody>
-          <a:bodyPr wrap="square">
-            <a:spAutoFit/>
-          </a:bodyPr>
-          <a:lstStyle/>
-          <a:p>
-            <a:pPr>
-              <a:defRPr sz="2800" b="1">
-                <a:solidFill>
-                  <a:srgbClr val="1F2A4E"/>
-                </a:solidFill>
-              </a:defRPr>
-            </a:pPr>
-            <a:r>
-              <a:t>Protocolo de validação: cenários e norma</a:t>
-            </a:r>
-          </a:p>
-        </p:txBody>
-      </p:sp>
-      <p:sp>
-        <p:nvSpPr>
-          <p:cNvPr id="3" name="Rectangle 2"/>
-          <p:cNvSpPr/>
-          <p:nvPr/>
-        </p:nvSpPr>
-        <p:spPr>
-          <a:xfrm>
-            <a:off x="457200" y="1097280"/>
-            <a:ext cx="11430000" cy="36576"/>
-          </a:xfrm>
-          <a:prstGeom prst="rect">
-            <a:avLst/>
-          </a:prstGeom>
-          <a:solidFill>
-            <a:srgbClr val="1F2A4E"/>
-          </a:solidFill>
-          <a:ln>
-            <a:noFill/>
-          </a:ln>
-        </p:spPr>
-        <p:style>
-          <a:lnRef idx="1">
-            <a:schemeClr val="accent1"/>
-          </a:lnRef>
-          <a:fillRef idx="3">
-            <a:schemeClr val="accent1"/>
-          </a:fillRef>
-          <a:effectRef idx="2">
-            <a:schemeClr val="accent1"/>
-          </a:effectRef>
-          <a:fontRef idx="minor">
-            <a:schemeClr val="lt1"/>
-          </a:fontRef>
-        </p:style>
-        <p:txBody>
-          <a:bodyPr rtlCol="0" anchor="ctr"/>
-          <a:lstStyle/>
-          <a:p>
-            <a:pPr algn="ctr"/>
-          </a:p>
-        </p:txBody>
-      </p:sp>
-      <p:sp>
-        <p:nvSpPr>
-          <p:cNvPr id="4" name="TextBox 3"/>
-          <p:cNvSpPr txBox="1"/>
-          <p:nvPr/>
-        </p:nvSpPr>
-        <p:spPr>
-          <a:xfrm>
-            <a:off x="457200" y="1417320"/>
-            <a:ext cx="11430000" cy="4937760"/>
-          </a:xfrm>
-          <a:prstGeom prst="rect">
-            <a:avLst/>
-          </a:prstGeom>
-          <a:noFill/>
-        </p:spPr>
-        <p:txBody>
-          <a:bodyPr wrap="square">
-            <a:spAutoFit/>
-          </a:bodyPr>
-          <a:lstStyle/>
-          <a:p>
-            <a:pPr>
-              <a:spcAft>
-                <a:spcPts val="1000"/>
-              </a:spcAft>
-            </a:pPr>
-            <a:r>
-              <a:rPr sz="1800" b="1">
-                <a:solidFill>
-                  <a:srgbClr val="1F2A4E"/>
-                </a:solidFill>
-              </a:rPr>
-              <a:t>Cenário A — apenas raça:  </a:t>
-            </a:r>
-            <a:r>
-              <a:rPr sz="1800">
-                <a:solidFill>
-                  <a:srgbClr val="3D424E"/>
-                </a:solidFill>
-              </a:rPr>
-              <a:t>reporte estratificado por classe racial (sete classes do FairFace).</a:t>
-            </a:r>
-          </a:p>
-          <a:p>
-            <a:pPr>
-              <a:spcAft>
-                <a:spcPts val="1000"/>
-              </a:spcAft>
-            </a:pPr>
-            <a:r>
-              <a:rPr sz="1800" b="1">
-                <a:solidFill>
-                  <a:srgbClr val="1F2A4E"/>
-                </a:solidFill>
-              </a:rPr>
-              <a:t>Cenário B — raça × gênero:  </a:t>
-            </a:r>
-            <a:r>
-              <a:rPr sz="1800">
-                <a:solidFill>
-                  <a:srgbClr val="3D424E"/>
-                </a:solidFill>
-              </a:rPr>
-              <a:t>análise interseccional (oito subgrupos), conforme protocolo estabelecido por Gender Shades (Buolamwini &amp; Gebru, 2018).</a:t>
-            </a:r>
-          </a:p>
-          <a:p>
-            <a:pPr>
-              <a:spcAft>
-                <a:spcPts val="1000"/>
-              </a:spcAft>
-            </a:pPr>
-            <a:r>
-              <a:rPr sz="1800" b="1">
-                <a:solidFill>
-                  <a:srgbClr val="1F2A4E"/>
-                </a:solidFill>
-              </a:rPr>
-              <a:t>Norma seguida:  </a:t>
-            </a:r>
-            <a:r>
-              <a:rPr sz="1800">
-                <a:solidFill>
-                  <a:srgbClr val="3D424E"/>
-                </a:solidFill>
-              </a:rPr>
-              <a:t>ISO/IEC 19795-10:2024, padrão internacional para reporte de desempenho biométrico estratificado entre grupos demográficos.</a:t>
-            </a:r>
-          </a:p>
-          <a:p>
-            <a:pPr>
-              <a:spcAft>
-                <a:spcPts val="1000"/>
-              </a:spcAft>
-            </a:pPr>
-            <a:r>
-              <a:rPr sz="1800" b="1">
-                <a:solidFill>
-                  <a:srgbClr val="1F2A4E"/>
-                </a:solidFill>
-              </a:rPr>
-              <a:t>Rigor experimental:  </a:t>
-            </a:r>
-            <a:r>
-              <a:rPr sz="1800">
-                <a:solidFill>
-                  <a:srgbClr val="3D424E"/>
-                </a:solidFill>
-              </a:rPr>
-              <a:t>três sementes independentes por experimento (42, 1, 2), comparação pareada e intervalo de confiança de 95 % via bootstrap não paramétrico.</a:t>
-            </a:r>
-          </a:p>
-          <a:p>
-            <a:pPr>
-              <a:spcAft>
-                <a:spcPts val="1000"/>
-              </a:spcAft>
-            </a:pPr>
-            <a:r>
-              <a:rPr sz="1800" b="1">
-                <a:solidFill>
-                  <a:srgbClr val="1F2A4E"/>
-                </a:solidFill>
-              </a:rPr>
-              <a:t>Datasets de transferência (Etapa 5):  </a:t>
-            </a:r>
-            <a:r>
-              <a:rPr sz="1800">
-                <a:solidFill>
-                  <a:srgbClr val="3D424E"/>
-                </a:solidFill>
-              </a:rPr>
-              <a:t>RFW (Wang et al., 2019) e BFW (Robinson et al., 2020), com pares oficiais de verificação 1:1.</a:t>
-            </a:r>
-          </a:p>
-        </p:txBody>
-      </p:sp>
-      <p:sp>
-        <p:nvSpPr>
-          <p:cNvPr id="5" name="TextBox 4"/>
-          <p:cNvSpPr txBox="1"/>
-          <p:nvPr/>
-        </p:nvSpPr>
-        <p:spPr>
-          <a:xfrm>
-            <a:off x="457200" y="6446520"/>
-            <a:ext cx="10515600" cy="365760"/>
-          </a:xfrm>
-          <a:prstGeom prst="rect">
-            <a:avLst/>
-          </a:prstGeom>
-          <a:noFill/>
-        </p:spPr>
-        <p:txBody>
-          <a:bodyPr wrap="none">
-            <a:spAutoFit/>
-          </a:bodyPr>
-          <a:lstStyle/>
-          <a:p>
-            <a:pPr>
-              <a:defRPr sz="900" i="1">
-                <a:solidFill>
-                  <a:srgbClr val="707682"/>
-                </a:solidFill>
-              </a:defRPr>
-            </a:pPr>
-            <a:r>
-              <a:t>Exame de Qualificação · Marcello Ozzetti · Orientação: Prof. Dr. Marcos G. Quiles · PPG-CC UNIFESP/ICT</a:t>
-            </a:r>
-          </a:p>
-        </p:txBody>
-      </p:sp>
-      <p:sp>
-        <p:nvSpPr>
-          <p:cNvPr id="6" name="TextBox 5"/>
-          <p:cNvSpPr txBox="1"/>
-          <p:nvPr/>
-        </p:nvSpPr>
-        <p:spPr>
-          <a:xfrm>
-            <a:off x="11521440" y="6446520"/>
-            <a:ext cx="640080" cy="365760"/>
-          </a:xfrm>
-          <a:prstGeom prst="rect">
-            <a:avLst/>
-          </a:prstGeom>
-          <a:noFill/>
-        </p:spPr>
-        <p:txBody>
-          <a:bodyPr wrap="none">
-            <a:spAutoFit/>
-          </a:bodyPr>
-          <a:lstStyle/>
-          <a:p>
-            <a:pPr>
-              <a:defRPr sz="900" i="1">
-                <a:solidFill>
-                  <a:srgbClr val="707682"/>
-                </a:solidFill>
-              </a:defRPr>
-            </a:pPr>
-            <a:r>
-              <a:t>22 / 28</a:t>
+              <a:t>22 / 29</a:t>
             </a:r>
           </a:p>
         </p:txBody>
@@ -8521,7 +7904,7 @@
               </a:defRPr>
             </a:pPr>
             <a:r>
-              <a:t>Triangulação de métricas de equidade</a:t>
+              <a:t>Protocolo de validação: cenários e norma</a:t>
             </a:r>
           </a:p>
         </p:txBody>
@@ -8602,7 +7985,7 @@
                   <a:srgbClr val="1F2A4E"/>
                 </a:solidFill>
               </a:rPr>
-              <a:t>Por que triangular — Kleinberg et al. (2017):  </a:t>
+              <a:t>Cenário A — apenas raça:  </a:t>
             </a:r>
             <a:r>
               <a:rPr sz="1800">
@@ -8610,7 +7993,7 @@
                   <a:srgbClr val="3D424E"/>
                 </a:solidFill>
               </a:rPr>
-              <a:t>Teorema da Impossibilidade — demonstra a impossibilidade formal de satisfação simultânea de múltiplas definições de equidade quando as prevalências diferem entre grupos.</a:t>
+              <a:t>reporte estratificado por classe racial (sete classes do FairFace).</a:t>
             </a:r>
           </a:p>
           <a:p>
@@ -8625,7 +8008,7 @@
                   <a:srgbClr val="1F2A4E"/>
                 </a:solidFill>
               </a:rPr>
-              <a:t>Disparity Ratio:  </a:t>
+              <a:t>Cenário B — raça × gênero:  </a:t>
             </a:r>
             <a:r>
               <a:rPr sz="1800">
@@ -8633,7 +8016,7 @@
                   <a:srgbClr val="3D424E"/>
                 </a:solidFill>
               </a:rPr>
-              <a:t>razão entre F1 mínimo e máximo entre grupos; mensura a desigualdade de desempenho.</a:t>
+              <a:t>análise interseccional (oito subgrupos), conforme protocolo estabelecido por Gender Shades (Buolamwini &amp; Gebru, 2018).</a:t>
             </a:r>
           </a:p>
           <a:p>
@@ -8648,7 +8031,7 @@
                   <a:srgbClr val="1F2A4E"/>
                 </a:solidFill>
               </a:rPr>
-              <a:t>F1 da pior classe:  </a:t>
+              <a:t>Norma seguida:  </a:t>
             </a:r>
             <a:r>
               <a:rPr sz="1800">
@@ -8656,7 +8039,7 @@
                   <a:srgbClr val="3D424E"/>
                 </a:solidFill>
               </a:rPr>
-              <a:t>protege o grupo sub-representado; evita ganhos concentrados apenas na média agregada.</a:t>
+              <a:t>ISO/IEC 19795-10:2024, padrão internacional para reporte de desempenho biométrico estratificado entre grupos demográficos.</a:t>
             </a:r>
           </a:p>
           <a:p>
@@ -8671,7 +8054,7 @@
                   <a:srgbClr val="1F2A4E"/>
                 </a:solidFill>
               </a:rPr>
-              <a:t>Equal Opportunity — Hardt et al. (2016, NeurIPS):  </a:t>
+              <a:t>Rigor experimental:  </a:t>
             </a:r>
             <a:r>
               <a:rPr sz="1800">
@@ -8679,7 +8062,7 @@
                   <a:srgbClr val="3D424E"/>
                 </a:solidFill>
               </a:rPr>
-              <a:t>requer igualdade de taxa de verdadeiro positivo (TPR) condicionada ao rótulo verdadeiro.</a:t>
+              <a:t>três sementes independentes por experimento (42, 1, 2), comparação pareada e intervalo de confiança de 95 % via bootstrap não paramétrico.</a:t>
             </a:r>
           </a:p>
           <a:p>
@@ -8694,7 +8077,7 @@
                   <a:srgbClr val="1F2A4E"/>
                 </a:solidFill>
               </a:rPr>
-              <a:t>Equalized Odds — Hardt et al. (2016):  </a:t>
+              <a:t>Datasets de transferência (Etapa 5):  </a:t>
             </a:r>
             <a:r>
               <a:rPr sz="1800">
@@ -8702,30 +8085,7 @@
                   <a:srgbClr val="3D424E"/>
                 </a:solidFill>
               </a:rPr>
-              <a:t>requisito estrito: igualdade simultânea de TPR e FPR entre grupos.</a:t>
-            </a:r>
-          </a:p>
-          <a:p>
-            <a:pPr>
-              <a:spcAft>
-                <a:spcPts val="1000"/>
-              </a:spcAft>
-            </a:pPr>
-            <a:r>
-              <a:rPr sz="1800" b="1">
-                <a:solidFill>
-                  <a:srgbClr val="1F2A4E"/>
-                </a:solidFill>
-              </a:rPr>
-              <a:t>Visualização Pareto:  </a:t>
-            </a:r>
-            <a:r>
-              <a:rPr sz="1800">
-                <a:solidFill>
-                  <a:srgbClr val="3D424E"/>
-                </a:solidFill>
-              </a:rPr>
-              <a:t>identificação da fronteira Pareto no trade-off acurácia agregada × disparidade demográfica.</a:t>
+              <a:t>RFW (Wang et al., 2019) e BFW (Robinson et al., 2020), com pares oficiais de verificação 1:1.</a:t>
             </a:r>
           </a:p>
         </p:txBody>
@@ -8795,7 +8155,7 @@
               </a:defRPr>
             </a:pPr>
             <a:r>
-              <a:t>23 / 28</a:t>
+              <a:t>23 / 29</a:t>
             </a:r>
           </a:p>
         </p:txBody>
@@ -8809,6 +8169,333 @@
 </file>
 
 <file path=ppt/slides/slide24.xml><?xml version="1.0" encoding="utf-8"?>
+<p:sld xmlns:a="http://schemas.openxmlformats.org/drawingml/2006/main" xmlns:p="http://schemas.openxmlformats.org/presentationml/2006/main" xmlns:r="http://schemas.openxmlformats.org/officeDocument/2006/relationships">
+  <p:cSld>
+    <p:spTree>
+      <p:nvGrpSpPr>
+        <p:cNvPr id="1" name=""/>
+        <p:cNvGrpSpPr/>
+        <p:nvPr/>
+      </p:nvGrpSpPr>
+      <p:grpSpPr/>
+      <p:sp>
+        <p:nvSpPr>
+          <p:cNvPr id="2" name="TextBox 1"/>
+          <p:cNvSpPr txBox="1"/>
+          <p:nvPr/>
+        </p:nvSpPr>
+        <p:spPr>
+          <a:xfrm>
+            <a:off x="457200" y="274320"/>
+            <a:ext cx="11430000" cy="914400"/>
+          </a:xfrm>
+          <a:prstGeom prst="rect">
+            <a:avLst/>
+          </a:prstGeom>
+          <a:noFill/>
+        </p:spPr>
+        <p:txBody>
+          <a:bodyPr wrap="square">
+            <a:spAutoFit/>
+          </a:bodyPr>
+          <a:lstStyle/>
+          <a:p>
+            <a:pPr>
+              <a:defRPr sz="2800" b="1">
+                <a:solidFill>
+                  <a:srgbClr val="1F2A4E"/>
+                </a:solidFill>
+              </a:defRPr>
+            </a:pPr>
+            <a:r>
+              <a:t>Triangulação de métricas de equidade</a:t>
+            </a:r>
+          </a:p>
+        </p:txBody>
+      </p:sp>
+      <p:sp>
+        <p:nvSpPr>
+          <p:cNvPr id="3" name="Rectangle 2"/>
+          <p:cNvSpPr/>
+          <p:nvPr/>
+        </p:nvSpPr>
+        <p:spPr>
+          <a:xfrm>
+            <a:off x="457200" y="1097280"/>
+            <a:ext cx="11430000" cy="36576"/>
+          </a:xfrm>
+          <a:prstGeom prst="rect">
+            <a:avLst/>
+          </a:prstGeom>
+          <a:solidFill>
+            <a:srgbClr val="1F2A4E"/>
+          </a:solidFill>
+          <a:ln>
+            <a:noFill/>
+          </a:ln>
+        </p:spPr>
+        <p:style>
+          <a:lnRef idx="1">
+            <a:schemeClr val="accent1"/>
+          </a:lnRef>
+          <a:fillRef idx="3">
+            <a:schemeClr val="accent1"/>
+          </a:fillRef>
+          <a:effectRef idx="2">
+            <a:schemeClr val="accent1"/>
+          </a:effectRef>
+          <a:fontRef idx="minor">
+            <a:schemeClr val="lt1"/>
+          </a:fontRef>
+        </p:style>
+        <p:txBody>
+          <a:bodyPr rtlCol="0" anchor="ctr"/>
+          <a:lstStyle/>
+          <a:p>
+            <a:pPr algn="ctr"/>
+          </a:p>
+        </p:txBody>
+      </p:sp>
+      <p:sp>
+        <p:nvSpPr>
+          <p:cNvPr id="4" name="TextBox 3"/>
+          <p:cNvSpPr txBox="1"/>
+          <p:nvPr/>
+        </p:nvSpPr>
+        <p:spPr>
+          <a:xfrm>
+            <a:off x="457200" y="1417320"/>
+            <a:ext cx="11430000" cy="4937760"/>
+          </a:xfrm>
+          <a:prstGeom prst="rect">
+            <a:avLst/>
+          </a:prstGeom>
+          <a:noFill/>
+        </p:spPr>
+        <p:txBody>
+          <a:bodyPr wrap="square">
+            <a:spAutoFit/>
+          </a:bodyPr>
+          <a:lstStyle/>
+          <a:p>
+            <a:pPr>
+              <a:spcAft>
+                <a:spcPts val="1000"/>
+              </a:spcAft>
+            </a:pPr>
+            <a:r>
+              <a:rPr sz="1800" b="1">
+                <a:solidFill>
+                  <a:srgbClr val="1F2A4E"/>
+                </a:solidFill>
+              </a:rPr>
+              <a:t>Por que triangular — Kleinberg et al. (2017):  </a:t>
+            </a:r>
+            <a:r>
+              <a:rPr sz="1800">
+                <a:solidFill>
+                  <a:srgbClr val="3D424E"/>
+                </a:solidFill>
+              </a:rPr>
+              <a:t>Teorema da Impossibilidade — demonstra a impossibilidade formal de satisfação simultânea de múltiplas definições de equidade quando as prevalências diferem entre grupos.</a:t>
+            </a:r>
+          </a:p>
+          <a:p>
+            <a:pPr>
+              <a:spcAft>
+                <a:spcPts val="1000"/>
+              </a:spcAft>
+            </a:pPr>
+            <a:r>
+              <a:rPr sz="1800" b="1">
+                <a:solidFill>
+                  <a:srgbClr val="1F2A4E"/>
+                </a:solidFill>
+              </a:rPr>
+              <a:t>Disparity Ratio:  </a:t>
+            </a:r>
+            <a:r>
+              <a:rPr sz="1800">
+                <a:solidFill>
+                  <a:srgbClr val="3D424E"/>
+                </a:solidFill>
+              </a:rPr>
+              <a:t>razão entre F1 mínimo e máximo entre grupos; mensura a desigualdade de desempenho.</a:t>
+            </a:r>
+          </a:p>
+          <a:p>
+            <a:pPr>
+              <a:spcAft>
+                <a:spcPts val="1000"/>
+              </a:spcAft>
+            </a:pPr>
+            <a:r>
+              <a:rPr sz="1800" b="1">
+                <a:solidFill>
+                  <a:srgbClr val="1F2A4E"/>
+                </a:solidFill>
+              </a:rPr>
+              <a:t>F1 da pior classe:  </a:t>
+            </a:r>
+            <a:r>
+              <a:rPr sz="1800">
+                <a:solidFill>
+                  <a:srgbClr val="3D424E"/>
+                </a:solidFill>
+              </a:rPr>
+              <a:t>protege o grupo sub-representado; evita ganhos concentrados apenas na média agregada.</a:t>
+            </a:r>
+          </a:p>
+          <a:p>
+            <a:pPr>
+              <a:spcAft>
+                <a:spcPts val="1000"/>
+              </a:spcAft>
+            </a:pPr>
+            <a:r>
+              <a:rPr sz="1800" b="1">
+                <a:solidFill>
+                  <a:srgbClr val="1F2A4E"/>
+                </a:solidFill>
+              </a:rPr>
+              <a:t>Equal Opportunity — Hardt et al. (2016, NeurIPS):  </a:t>
+            </a:r>
+            <a:r>
+              <a:rPr sz="1800">
+                <a:solidFill>
+                  <a:srgbClr val="3D424E"/>
+                </a:solidFill>
+              </a:rPr>
+              <a:t>requer igualdade de taxa de verdadeiro positivo (TPR) condicionada ao rótulo verdadeiro.</a:t>
+            </a:r>
+          </a:p>
+          <a:p>
+            <a:pPr>
+              <a:spcAft>
+                <a:spcPts val="1000"/>
+              </a:spcAft>
+            </a:pPr>
+            <a:r>
+              <a:rPr sz="1800" b="1">
+                <a:solidFill>
+                  <a:srgbClr val="1F2A4E"/>
+                </a:solidFill>
+              </a:rPr>
+              <a:t>Equalized Odds — Hardt et al. (2016):  </a:t>
+            </a:r>
+            <a:r>
+              <a:rPr sz="1800">
+                <a:solidFill>
+                  <a:srgbClr val="3D424E"/>
+                </a:solidFill>
+              </a:rPr>
+              <a:t>requisito estrito: igualdade simultânea de TPR e FPR entre grupos.</a:t>
+            </a:r>
+          </a:p>
+          <a:p>
+            <a:pPr>
+              <a:spcAft>
+                <a:spcPts val="1000"/>
+              </a:spcAft>
+            </a:pPr>
+            <a:r>
+              <a:rPr sz="1800" b="1">
+                <a:solidFill>
+                  <a:srgbClr val="1F2A4E"/>
+                </a:solidFill>
+              </a:rPr>
+              <a:t>Visualização Pareto:  </a:t>
+            </a:r>
+            <a:r>
+              <a:rPr sz="1800">
+                <a:solidFill>
+                  <a:srgbClr val="3D424E"/>
+                </a:solidFill>
+              </a:rPr>
+              <a:t>identificação da fronteira Pareto no trade-off acurácia agregada × disparidade demográfica.</a:t>
+            </a:r>
+          </a:p>
+        </p:txBody>
+      </p:sp>
+      <p:sp>
+        <p:nvSpPr>
+          <p:cNvPr id="5" name="TextBox 4"/>
+          <p:cNvSpPr txBox="1"/>
+          <p:nvPr/>
+        </p:nvSpPr>
+        <p:spPr>
+          <a:xfrm>
+            <a:off x="457200" y="6446520"/>
+            <a:ext cx="10515600" cy="365760"/>
+          </a:xfrm>
+          <a:prstGeom prst="rect">
+            <a:avLst/>
+          </a:prstGeom>
+          <a:noFill/>
+        </p:spPr>
+        <p:txBody>
+          <a:bodyPr wrap="none">
+            <a:spAutoFit/>
+          </a:bodyPr>
+          <a:lstStyle/>
+          <a:p>
+            <a:pPr>
+              <a:defRPr sz="900" i="1">
+                <a:solidFill>
+                  <a:srgbClr val="707682"/>
+                </a:solidFill>
+              </a:defRPr>
+            </a:pPr>
+            <a:r>
+              <a:t>Exame de Qualificação · Marcello Ozzetti · Orientação: Prof. Dr. Marcos G. Quiles · PPG-CC UNIFESP/ICT</a:t>
+            </a:r>
+          </a:p>
+        </p:txBody>
+      </p:sp>
+      <p:sp>
+        <p:nvSpPr>
+          <p:cNvPr id="6" name="TextBox 5"/>
+          <p:cNvSpPr txBox="1"/>
+          <p:nvPr/>
+        </p:nvSpPr>
+        <p:spPr>
+          <a:xfrm>
+            <a:off x="11521440" y="6446520"/>
+            <a:ext cx="640080" cy="365760"/>
+          </a:xfrm>
+          <a:prstGeom prst="rect">
+            <a:avLst/>
+          </a:prstGeom>
+          <a:noFill/>
+        </p:spPr>
+        <p:txBody>
+          <a:bodyPr wrap="none">
+            <a:spAutoFit/>
+          </a:bodyPr>
+          <a:lstStyle/>
+          <a:p>
+            <a:pPr>
+              <a:defRPr sz="900" i="1">
+                <a:solidFill>
+                  <a:srgbClr val="707682"/>
+                </a:solidFill>
+              </a:defRPr>
+            </a:pPr>
+            <a:r>
+              <a:t>24 / 29</a:t>
+            </a:r>
+          </a:p>
+        </p:txBody>
+      </p:sp>
+    </p:spTree>
+  </p:cSld>
+  <p:clrMapOvr>
+    <a:masterClrMapping/>
+  </p:clrMapOvr>
+</p:sld>
+</file>
+
+<file path=ppt/slides/slide25.xml><?xml version="1.0" encoding="utf-8"?>
 <p:sld xmlns:a="http://schemas.openxmlformats.org/drawingml/2006/main" xmlns:p="http://schemas.openxmlformats.org/presentationml/2006/main" xmlns:r="http://schemas.openxmlformats.org/officeDocument/2006/relationships">
   <p:cSld>
     <p:spTree>
@@ -9212,7 +8899,7 @@
               </a:defRPr>
             </a:pPr>
             <a:r>
-              <a:t>24 / 28</a:t>
+              <a:t>25 / 29</a:t>
             </a:r>
           </a:p>
         </p:txBody>
@@ -9225,7 +8912,7 @@
 </p:sld>
 </file>
 
-<file path=ppt/slides/slide25.xml><?xml version="1.0" encoding="utf-8"?>
+<file path=ppt/slides/slide26.xml><?xml version="1.0" encoding="utf-8"?>
 <p:sld xmlns:a="http://schemas.openxmlformats.org/drawingml/2006/main" xmlns:p="http://schemas.openxmlformats.org/presentationml/2006/main" xmlns:r="http://schemas.openxmlformats.org/officeDocument/2006/relationships">
   <p:cSld>
     <p:spTree>
@@ -9930,7 +9617,7 @@
               </a:defRPr>
             </a:pPr>
             <a:r>
-              <a:t>25 / 28</a:t>
+              <a:t>26 / 29</a:t>
             </a:r>
           </a:p>
         </p:txBody>
@@ -9943,7 +9630,7 @@
 </p:sld>
 </file>
 
-<file path=ppt/slides/slide26.xml><?xml version="1.0" encoding="utf-8"?>
+<file path=ppt/slides/slide27.xml><?xml version="1.0" encoding="utf-8"?>
 <p:sld xmlns:a="http://schemas.openxmlformats.org/drawingml/2006/main" xmlns:p="http://schemas.openxmlformats.org/presentationml/2006/main" xmlns:r="http://schemas.openxmlformats.org/officeDocument/2006/relationships">
   <p:cSld>
     <p:spTree>
@@ -10412,767 +10099,7 @@
               </a:defRPr>
             </a:pPr>
             <a:r>
-              <a:t>26 / 28</a:t>
-            </a:r>
-          </a:p>
-        </p:txBody>
-      </p:sp>
-    </p:spTree>
-  </p:cSld>
-  <p:clrMapOvr>
-    <a:masterClrMapping/>
-  </p:clrMapOvr>
-</p:sld>
-</file>
-
-<file path=ppt/slides/slide27.xml><?xml version="1.0" encoding="utf-8"?>
-<p:sld xmlns:a="http://schemas.openxmlformats.org/drawingml/2006/main" xmlns:p="http://schemas.openxmlformats.org/presentationml/2006/main" xmlns:r="http://schemas.openxmlformats.org/officeDocument/2006/relationships">
-  <p:cSld>
-    <p:spTree>
-      <p:nvGrpSpPr>
-        <p:cNvPr id="1" name=""/>
-        <p:cNvGrpSpPr/>
-        <p:nvPr/>
-      </p:nvGrpSpPr>
-      <p:grpSpPr/>
-      <p:sp>
-        <p:nvSpPr>
-          <p:cNvPr id="2" name="TextBox 1"/>
-          <p:cNvSpPr txBox="1"/>
-          <p:nvPr/>
-        </p:nvSpPr>
-        <p:spPr>
-          <a:xfrm>
-            <a:off x="457200" y="274320"/>
-            <a:ext cx="11430000" cy="914400"/>
-          </a:xfrm>
-          <a:prstGeom prst="rect">
-            <a:avLst/>
-          </a:prstGeom>
-          <a:noFill/>
-        </p:spPr>
-        <p:txBody>
-          <a:bodyPr wrap="square">
-            <a:spAutoFit/>
-          </a:bodyPr>
-          <a:lstStyle/>
-          <a:p>
-            <a:pPr>
-              <a:defRPr sz="2800" b="1">
-                <a:solidFill>
-                  <a:srgbClr val="1F2A4E"/>
-                </a:solidFill>
-              </a:defRPr>
-            </a:pPr>
-            <a:r>
-              <a:t>Estado atual do trabalho</a:t>
-            </a:r>
-          </a:p>
-        </p:txBody>
-      </p:sp>
-      <p:sp>
-        <p:nvSpPr>
-          <p:cNvPr id="3" name="Rectangle 2"/>
-          <p:cNvSpPr/>
-          <p:nvPr/>
-        </p:nvSpPr>
-        <p:spPr>
-          <a:xfrm>
-            <a:off x="457200" y="1097280"/>
-            <a:ext cx="11430000" cy="36576"/>
-          </a:xfrm>
-          <a:prstGeom prst="rect">
-            <a:avLst/>
-          </a:prstGeom>
-          <a:solidFill>
-            <a:srgbClr val="1F2A4E"/>
-          </a:solidFill>
-          <a:ln>
-            <a:noFill/>
-          </a:ln>
-        </p:spPr>
-        <p:style>
-          <a:lnRef idx="1">
-            <a:schemeClr val="accent1"/>
-          </a:lnRef>
-          <a:fillRef idx="3">
-            <a:schemeClr val="accent1"/>
-          </a:fillRef>
-          <a:effectRef idx="2">
-            <a:schemeClr val="accent1"/>
-          </a:effectRef>
-          <a:fontRef idx="minor">
-            <a:schemeClr val="lt1"/>
-          </a:fontRef>
-        </p:style>
-        <p:txBody>
-          <a:bodyPr rtlCol="0" anchor="ctr"/>
-          <a:lstStyle/>
-          <a:p>
-            <a:pPr algn="ctr"/>
-          </a:p>
-        </p:txBody>
-      </p:sp>
-      <p:sp>
-        <p:nvSpPr>
-          <p:cNvPr id="4" name="Rounded Rectangle 3"/>
-          <p:cNvSpPr/>
-          <p:nvPr/>
-        </p:nvSpPr>
-        <p:spPr>
-          <a:xfrm>
-            <a:off x="379476" y="1463040"/>
-            <a:ext cx="3657600" cy="2011680"/>
-          </a:xfrm>
-          <a:prstGeom prst="roundRect">
-            <a:avLst/>
-          </a:prstGeom>
-          <a:solidFill>
-            <a:srgbClr val="1F2A4E"/>
-          </a:solidFill>
-          <a:ln>
-            <a:noFill/>
-          </a:ln>
-        </p:spPr>
-        <p:style>
-          <a:lnRef idx="1">
-            <a:schemeClr val="accent1"/>
-          </a:lnRef>
-          <a:fillRef idx="3">
-            <a:schemeClr val="accent1"/>
-          </a:fillRef>
-          <a:effectRef idx="2">
-            <a:schemeClr val="accent1"/>
-          </a:effectRef>
-          <a:fontRef idx="minor">
-            <a:schemeClr val="lt1"/>
-          </a:fontRef>
-        </p:style>
-        <p:txBody>
-          <a:bodyPr rtlCol="0" anchor="ctr"/>
-          <a:lstStyle/>
-          <a:p>
-            <a:pPr algn="ctr"/>
-          </a:p>
-        </p:txBody>
-      </p:sp>
-      <p:sp>
-        <p:nvSpPr>
-          <p:cNvPr id="5" name="TextBox 4"/>
-          <p:cNvSpPr txBox="1"/>
-          <p:nvPr/>
-        </p:nvSpPr>
-        <p:spPr>
-          <a:xfrm>
-            <a:off x="379476" y="1600200"/>
-            <a:ext cx="3657600" cy="822960"/>
-          </a:xfrm>
-          <a:prstGeom prst="rect">
-            <a:avLst/>
-          </a:prstGeom>
-          <a:noFill/>
-        </p:spPr>
-        <p:txBody>
-          <a:bodyPr wrap="none">
-            <a:spAutoFit/>
-          </a:bodyPr>
-          <a:lstStyle/>
-          <a:p>
-            <a:pPr algn="ctr">
-              <a:defRPr sz="4800" b="1">
-                <a:solidFill>
-                  <a:srgbClr val="FFFFFF"/>
-                </a:solidFill>
-              </a:defRPr>
-            </a:pPr>
-            <a:r>
-              <a:t>+3</a:t>
-            </a:r>
-          </a:p>
-        </p:txBody>
-      </p:sp>
-      <p:sp>
-        <p:nvSpPr>
-          <p:cNvPr id="6" name="TextBox 5"/>
-          <p:cNvSpPr txBox="1"/>
-          <p:nvPr/>
-        </p:nvSpPr>
-        <p:spPr>
-          <a:xfrm>
-            <a:off x="379476" y="2514600"/>
-            <a:ext cx="3657600" cy="457200"/>
-          </a:xfrm>
-          <a:prstGeom prst="rect">
-            <a:avLst/>
-          </a:prstGeom>
-          <a:noFill/>
-        </p:spPr>
-        <p:txBody>
-          <a:bodyPr wrap="none">
-            <a:spAutoFit/>
-          </a:bodyPr>
-          <a:lstStyle/>
-          <a:p>
-            <a:pPr algn="ctr">
-              <a:defRPr sz="1400" b="1">
-                <a:solidFill>
-                  <a:srgbClr val="FFFFFF"/>
-                </a:solidFill>
-              </a:defRPr>
-            </a:pPr>
-            <a:r>
-              <a:t>meses adiantados</a:t>
-            </a:r>
-          </a:p>
-        </p:txBody>
-      </p:sp>
-      <p:sp>
-        <p:nvSpPr>
-          <p:cNvPr id="7" name="TextBox 6"/>
-          <p:cNvSpPr txBox="1"/>
-          <p:nvPr/>
-        </p:nvSpPr>
-        <p:spPr>
-          <a:xfrm>
-            <a:off x="470916" y="2971800"/>
-            <a:ext cx="3474720" cy="548640"/>
-          </a:xfrm>
-          <a:prstGeom prst="rect">
-            <a:avLst/>
-          </a:prstGeom>
-          <a:noFill/>
-        </p:spPr>
-        <p:txBody>
-          <a:bodyPr wrap="square">
-            <a:spAutoFit/>
-          </a:bodyPr>
-          <a:lstStyle/>
-          <a:p>
-            <a:pPr algn="ctr">
-              <a:defRPr sz="1200" i="1">
-                <a:solidFill>
-                  <a:srgbClr val="B4C4E8"/>
-                </a:solidFill>
-              </a:defRPr>
-            </a:pPr>
-            <a:r>
-              <a:t>sobre o cronograma proposto na qualificação</a:t>
-            </a:r>
-          </a:p>
-        </p:txBody>
-      </p:sp>
-      <p:sp>
-        <p:nvSpPr>
-          <p:cNvPr id="8" name="Rounded Rectangle 7"/>
-          <p:cNvSpPr/>
-          <p:nvPr/>
-        </p:nvSpPr>
-        <p:spPr>
-          <a:xfrm>
-            <a:off x="4265676" y="1463040"/>
-            <a:ext cx="3657600" cy="2011680"/>
-          </a:xfrm>
-          <a:prstGeom prst="roundRect">
-            <a:avLst/>
-          </a:prstGeom>
-          <a:solidFill>
-            <a:srgbClr val="E8EAED"/>
-          </a:solidFill>
-          <a:ln>
-            <a:noFill/>
-          </a:ln>
-        </p:spPr>
-        <p:style>
-          <a:lnRef idx="1">
-            <a:schemeClr val="accent1"/>
-          </a:lnRef>
-          <a:fillRef idx="3">
-            <a:schemeClr val="accent1"/>
-          </a:fillRef>
-          <a:effectRef idx="2">
-            <a:schemeClr val="accent1"/>
-          </a:effectRef>
-          <a:fontRef idx="minor">
-            <a:schemeClr val="lt1"/>
-          </a:fontRef>
-        </p:style>
-        <p:txBody>
-          <a:bodyPr rtlCol="0" anchor="ctr"/>
-          <a:lstStyle/>
-          <a:p>
-            <a:pPr algn="ctr"/>
-          </a:p>
-        </p:txBody>
-      </p:sp>
-      <p:sp>
-        <p:nvSpPr>
-          <p:cNvPr id="9" name="TextBox 8"/>
-          <p:cNvSpPr txBox="1"/>
-          <p:nvPr/>
-        </p:nvSpPr>
-        <p:spPr>
-          <a:xfrm>
-            <a:off x="4265676" y="1600200"/>
-            <a:ext cx="3657600" cy="822960"/>
-          </a:xfrm>
-          <a:prstGeom prst="rect">
-            <a:avLst/>
-          </a:prstGeom>
-          <a:noFill/>
-        </p:spPr>
-        <p:txBody>
-          <a:bodyPr wrap="none">
-            <a:spAutoFit/>
-          </a:bodyPr>
-          <a:lstStyle/>
-          <a:p>
-            <a:pPr algn="ctr">
-              <a:defRPr sz="4800" b="1">
-                <a:solidFill>
-                  <a:srgbClr val="1F2A4E"/>
-                </a:solidFill>
-              </a:defRPr>
-            </a:pPr>
-            <a:r>
-              <a:t>6 de 6</a:t>
-            </a:r>
-          </a:p>
-        </p:txBody>
-      </p:sp>
-      <p:sp>
-        <p:nvSpPr>
-          <p:cNvPr id="10" name="TextBox 9"/>
-          <p:cNvSpPr txBox="1"/>
-          <p:nvPr/>
-        </p:nvSpPr>
-        <p:spPr>
-          <a:xfrm>
-            <a:off x="4265676" y="2514600"/>
-            <a:ext cx="3657600" cy="457200"/>
-          </a:xfrm>
-          <a:prstGeom prst="rect">
-            <a:avLst/>
-          </a:prstGeom>
-          <a:noFill/>
-        </p:spPr>
-        <p:txBody>
-          <a:bodyPr wrap="none">
-            <a:spAutoFit/>
-          </a:bodyPr>
-          <a:lstStyle/>
-          <a:p>
-            <a:pPr algn="ctr">
-              <a:defRPr sz="1400" b="1">
-                <a:solidFill>
-                  <a:srgbClr val="1F2A4E"/>
-                </a:solidFill>
-              </a:defRPr>
-            </a:pPr>
-            <a:r>
-              <a:t>etapas com código</a:t>
-            </a:r>
-          </a:p>
-        </p:txBody>
-      </p:sp>
-      <p:sp>
-        <p:nvSpPr>
-          <p:cNvPr id="11" name="TextBox 10"/>
-          <p:cNvSpPr txBox="1"/>
-          <p:nvPr/>
-        </p:nvSpPr>
-        <p:spPr>
-          <a:xfrm>
-            <a:off x="4357116" y="2971800"/>
-            <a:ext cx="3474720" cy="548640"/>
-          </a:xfrm>
-          <a:prstGeom prst="rect">
-            <a:avLst/>
-          </a:prstGeom>
-          <a:noFill/>
-        </p:spPr>
-        <p:txBody>
-          <a:bodyPr wrap="square">
-            <a:spAutoFit/>
-          </a:bodyPr>
-          <a:lstStyle/>
-          <a:p>
-            <a:pPr algn="ctr">
-              <a:defRPr sz="1200" i="1">
-                <a:solidFill>
-                  <a:srgbClr val="707682"/>
-                </a:solidFill>
-              </a:defRPr>
-            </a:pPr>
-            <a:r>
-              <a:t>estruturado, testado e pronto para execução</a:t>
-            </a:r>
-          </a:p>
-        </p:txBody>
-      </p:sp>
-      <p:sp>
-        <p:nvSpPr>
-          <p:cNvPr id="12" name="Rounded Rectangle 11"/>
-          <p:cNvSpPr/>
-          <p:nvPr/>
-        </p:nvSpPr>
-        <p:spPr>
-          <a:xfrm>
-            <a:off x="8151875" y="1463040"/>
-            <a:ext cx="3657600" cy="2011680"/>
-          </a:xfrm>
-          <a:prstGeom prst="roundRect">
-            <a:avLst/>
-          </a:prstGeom>
-          <a:solidFill>
-            <a:srgbClr val="E8EAED"/>
-          </a:solidFill>
-          <a:ln>
-            <a:noFill/>
-          </a:ln>
-        </p:spPr>
-        <p:style>
-          <a:lnRef idx="1">
-            <a:schemeClr val="accent1"/>
-          </a:lnRef>
-          <a:fillRef idx="3">
-            <a:schemeClr val="accent1"/>
-          </a:fillRef>
-          <a:effectRef idx="2">
-            <a:schemeClr val="accent1"/>
-          </a:effectRef>
-          <a:fontRef idx="minor">
-            <a:schemeClr val="lt1"/>
-          </a:fontRef>
-        </p:style>
-        <p:txBody>
-          <a:bodyPr rtlCol="0" anchor="ctr"/>
-          <a:lstStyle/>
-          <a:p>
-            <a:pPr algn="ctr"/>
-          </a:p>
-        </p:txBody>
-      </p:sp>
-      <p:sp>
-        <p:nvSpPr>
-          <p:cNvPr id="13" name="TextBox 12"/>
-          <p:cNvSpPr txBox="1"/>
-          <p:nvPr/>
-        </p:nvSpPr>
-        <p:spPr>
-          <a:xfrm>
-            <a:off x="8151875" y="1600200"/>
-            <a:ext cx="3657600" cy="822960"/>
-          </a:xfrm>
-          <a:prstGeom prst="rect">
-            <a:avLst/>
-          </a:prstGeom>
-          <a:noFill/>
-        </p:spPr>
-        <p:txBody>
-          <a:bodyPr wrap="none">
-            <a:spAutoFit/>
-          </a:bodyPr>
-          <a:lstStyle/>
-          <a:p>
-            <a:pPr algn="ctr">
-              <a:defRPr sz="4800" b="1">
-                <a:solidFill>
-                  <a:srgbClr val="1F2A4E"/>
-                </a:solidFill>
-              </a:defRPr>
-            </a:pPr>
-            <a:r>
-              <a:t>120</a:t>
-            </a:r>
-          </a:p>
-        </p:txBody>
-      </p:sp>
-      <p:sp>
-        <p:nvSpPr>
-          <p:cNvPr id="14" name="TextBox 13"/>
-          <p:cNvSpPr txBox="1"/>
-          <p:nvPr/>
-        </p:nvSpPr>
-        <p:spPr>
-          <a:xfrm>
-            <a:off x="8151875" y="2514600"/>
-            <a:ext cx="3657600" cy="457200"/>
-          </a:xfrm>
-          <a:prstGeom prst="rect">
-            <a:avLst/>
-          </a:prstGeom>
-          <a:noFill/>
-        </p:spPr>
-        <p:txBody>
-          <a:bodyPr wrap="none">
-            <a:spAutoFit/>
-          </a:bodyPr>
-          <a:lstStyle/>
-          <a:p>
-            <a:pPr algn="ctr">
-              <a:defRPr sz="1400" b="1">
-                <a:solidFill>
-                  <a:srgbClr val="1F2A4E"/>
-                </a:solidFill>
-              </a:defRPr>
-            </a:pPr>
-            <a:r>
-              <a:t>testes automatizados</a:t>
-            </a:r>
-          </a:p>
-        </p:txBody>
-      </p:sp>
-      <p:sp>
-        <p:nvSpPr>
-          <p:cNvPr id="15" name="TextBox 14"/>
-          <p:cNvSpPr txBox="1"/>
-          <p:nvPr/>
-        </p:nvSpPr>
-        <p:spPr>
-          <a:xfrm>
-            <a:off x="8243315" y="2971800"/>
-            <a:ext cx="3474720" cy="548640"/>
-          </a:xfrm>
-          <a:prstGeom prst="rect">
-            <a:avLst/>
-          </a:prstGeom>
-          <a:noFill/>
-        </p:spPr>
-        <p:txBody>
-          <a:bodyPr wrap="square">
-            <a:spAutoFit/>
-          </a:bodyPr>
-          <a:lstStyle/>
-          <a:p>
-            <a:pPr algn="ctr">
-              <a:defRPr sz="1200" i="1">
-                <a:solidFill>
-                  <a:srgbClr val="707682"/>
-                </a:solidFill>
-              </a:defRPr>
-            </a:pPr>
-            <a:r>
-              <a:t>todos passando (unit + smoke + integração)</a:t>
-            </a:r>
-          </a:p>
-        </p:txBody>
-      </p:sp>
-      <p:sp>
-        <p:nvSpPr>
-          <p:cNvPr id="16" name="TextBox 15"/>
-          <p:cNvSpPr txBox="1"/>
-          <p:nvPr/>
-        </p:nvSpPr>
-        <p:spPr>
-          <a:xfrm>
-            <a:off x="457200" y="3840480"/>
-            <a:ext cx="11430000" cy="365760"/>
-          </a:xfrm>
-          <a:prstGeom prst="rect">
-            <a:avLst/>
-          </a:prstGeom>
-          <a:noFill/>
-        </p:spPr>
-        <p:txBody>
-          <a:bodyPr wrap="none">
-            <a:spAutoFit/>
-          </a:bodyPr>
-          <a:lstStyle/>
-          <a:p>
-            <a:pPr>
-              <a:defRPr sz="1600" b="1">
-                <a:solidFill>
-                  <a:srgbClr val="1F2A4E"/>
-                </a:solidFill>
-              </a:defRPr>
-            </a:pPr>
-            <a:r>
-              <a:t>Estado das entregas em 28/09/2026</a:t>
-            </a:r>
-          </a:p>
-        </p:txBody>
-      </p:sp>
-      <p:sp>
-        <p:nvSpPr>
-          <p:cNvPr id="17" name="TextBox 16"/>
-          <p:cNvSpPr txBox="1"/>
-          <p:nvPr/>
-        </p:nvSpPr>
-        <p:spPr>
-          <a:xfrm>
-            <a:off x="457200" y="4297680"/>
-            <a:ext cx="11430000" cy="2011680"/>
-          </a:xfrm>
-          <a:prstGeom prst="rect">
-            <a:avLst/>
-          </a:prstGeom>
-          <a:noFill/>
-        </p:spPr>
-        <p:txBody>
-          <a:bodyPr wrap="square">
-            <a:spAutoFit/>
-          </a:bodyPr>
-          <a:lstStyle/>
-          <a:p>
-            <a:pPr>
-              <a:spcAft>
-                <a:spcPts val="600"/>
-              </a:spcAft>
-            </a:pPr>
-            <a:r>
-              <a:rPr sz="1600" b="1">
-                <a:solidFill>
-                  <a:srgbClr val="1F2A4E"/>
-                </a:solidFill>
-              </a:rPr>
-              <a:t>•  Etapas 1 e 2 (código completo):  </a:t>
-            </a:r>
-            <a:r>
-              <a:rPr sz="1600">
-                <a:solidFill>
-                  <a:srgbClr val="3D424E"/>
-                </a:solidFill>
-              </a:rPr>
-              <a:t>classificador MST treinado internamente, camada de preprocessamento auto-suficiente, matriz MST × raça, teste formal de H2.</a:t>
-            </a:r>
-          </a:p>
-          <a:p>
-            <a:pPr>
-              <a:spcAft>
-                <a:spcPts val="600"/>
-              </a:spcAft>
-            </a:pPr>
-            <a:r>
-              <a:rPr sz="1600" b="1">
-                <a:solidFill>
-                  <a:srgbClr val="1F2A4E"/>
-                </a:solidFill>
-              </a:rPr>
-              <a:t>•  Etapa 3 (FiLM):  </a:t>
-            </a:r>
-            <a:r>
-              <a:rPr sz="1600">
-                <a:solidFill>
-                  <a:srgbClr val="3D424E"/>
-                </a:solidFill>
-              </a:rPr>
-              <a:t>camada FiLM, wrapper ConvNeXt-T, ensembler CLIP-text e pipeline de treinamento das três configurações.</a:t>
-            </a:r>
-          </a:p>
-          <a:p>
-            <a:pPr>
-              <a:spcAft>
-                <a:spcPts val="600"/>
-              </a:spcAft>
-            </a:pPr>
-            <a:r>
-              <a:rPr sz="1600" b="1">
-                <a:solidFill>
-                  <a:srgbClr val="1F2A4E"/>
-                </a:solidFill>
-              </a:rPr>
-              <a:t>•  Etapas 4, 5 e 6:  </a:t>
-            </a:r>
-            <a:r>
-              <a:rPr sz="1600">
-                <a:solidFill>
-                  <a:srgbClr val="3D424E"/>
-                </a:solidFill>
-              </a:rPr>
-              <a:t>métricas de equidade, quatro baselines, análise Pareto, verificação em RFW/BFW e decomposição ANOVA/R².</a:t>
-            </a:r>
-          </a:p>
-          <a:p>
-            <a:pPr>
-              <a:spcAft>
-                <a:spcPts val="600"/>
-              </a:spcAft>
-            </a:pPr>
-            <a:r>
-              <a:rPr sz="1600" b="1">
-                <a:solidFill>
-                  <a:srgbClr val="1F2A4E"/>
-                </a:solidFill>
-              </a:rPr>
-              <a:t>•  Texto da dissertação:  </a:t>
-            </a:r>
-            <a:r>
-              <a:rPr sz="1600">
-                <a:solidFill>
-                  <a:srgbClr val="3D424E"/>
-                </a:solidFill>
-              </a:rPr>
-              <a:t>cinco capítulos consolidados, três passadas de revisão de estilo e 104 fichas bibliográficas.</a:t>
-            </a:r>
-          </a:p>
-        </p:txBody>
-      </p:sp>
-      <p:sp>
-        <p:nvSpPr>
-          <p:cNvPr id="18" name="TextBox 17"/>
-          <p:cNvSpPr txBox="1"/>
-          <p:nvPr/>
-        </p:nvSpPr>
-        <p:spPr>
-          <a:xfrm>
-            <a:off x="457200" y="6446520"/>
-            <a:ext cx="10515600" cy="365760"/>
-          </a:xfrm>
-          <a:prstGeom prst="rect">
-            <a:avLst/>
-          </a:prstGeom>
-          <a:noFill/>
-        </p:spPr>
-        <p:txBody>
-          <a:bodyPr wrap="none">
-            <a:spAutoFit/>
-          </a:bodyPr>
-          <a:lstStyle/>
-          <a:p>
-            <a:pPr>
-              <a:defRPr sz="900" i="1">
-                <a:solidFill>
-                  <a:srgbClr val="707682"/>
-                </a:solidFill>
-              </a:defRPr>
-            </a:pPr>
-            <a:r>
-              <a:t>Exame de Qualificação · Marcello Ozzetti · Orientação: Prof. Dr. Marcos G. Quiles · PPG-CC UNIFESP/ICT</a:t>
-            </a:r>
-          </a:p>
-        </p:txBody>
-      </p:sp>
-      <p:sp>
-        <p:nvSpPr>
-          <p:cNvPr id="19" name="TextBox 18"/>
-          <p:cNvSpPr txBox="1"/>
-          <p:nvPr/>
-        </p:nvSpPr>
-        <p:spPr>
-          <a:xfrm>
-            <a:off x="11521440" y="6446520"/>
-            <a:ext cx="640080" cy="365760"/>
-          </a:xfrm>
-          <a:prstGeom prst="rect">
-            <a:avLst/>
-          </a:prstGeom>
-          <a:noFill/>
-        </p:spPr>
-        <p:txBody>
-          <a:bodyPr wrap="none">
-            <a:spAutoFit/>
-          </a:bodyPr>
-          <a:lstStyle/>
-          <a:p>
-            <a:pPr>
-              <a:defRPr sz="900" i="1">
-                <a:solidFill>
-                  <a:srgbClr val="707682"/>
-                </a:solidFill>
-              </a:defRPr>
-            </a:pPr>
-            <a:r>
-              <a:t>27 / 28</a:t>
+              <a:t>27 / 29</a:t>
             </a:r>
           </a:p>
         </p:txBody>
@@ -11197,6 +10124,766 @@
       <p:grpSpPr/>
       <p:sp>
         <p:nvSpPr>
+          <p:cNvPr id="2" name="TextBox 1"/>
+          <p:cNvSpPr txBox="1"/>
+          <p:nvPr/>
+        </p:nvSpPr>
+        <p:spPr>
+          <a:xfrm>
+            <a:off x="457200" y="274320"/>
+            <a:ext cx="11430000" cy="914400"/>
+          </a:xfrm>
+          <a:prstGeom prst="rect">
+            <a:avLst/>
+          </a:prstGeom>
+          <a:noFill/>
+        </p:spPr>
+        <p:txBody>
+          <a:bodyPr wrap="square">
+            <a:spAutoFit/>
+          </a:bodyPr>
+          <a:lstStyle/>
+          <a:p>
+            <a:pPr>
+              <a:defRPr sz="2800" b="1">
+                <a:solidFill>
+                  <a:srgbClr val="1F2A4E"/>
+                </a:solidFill>
+              </a:defRPr>
+            </a:pPr>
+            <a:r>
+              <a:t>Estado atual do trabalho</a:t>
+            </a:r>
+          </a:p>
+        </p:txBody>
+      </p:sp>
+      <p:sp>
+        <p:nvSpPr>
+          <p:cNvPr id="3" name="Rectangle 2"/>
+          <p:cNvSpPr/>
+          <p:nvPr/>
+        </p:nvSpPr>
+        <p:spPr>
+          <a:xfrm>
+            <a:off x="457200" y="1097280"/>
+            <a:ext cx="11430000" cy="36576"/>
+          </a:xfrm>
+          <a:prstGeom prst="rect">
+            <a:avLst/>
+          </a:prstGeom>
+          <a:solidFill>
+            <a:srgbClr val="1F2A4E"/>
+          </a:solidFill>
+          <a:ln>
+            <a:noFill/>
+          </a:ln>
+        </p:spPr>
+        <p:style>
+          <a:lnRef idx="1">
+            <a:schemeClr val="accent1"/>
+          </a:lnRef>
+          <a:fillRef idx="3">
+            <a:schemeClr val="accent1"/>
+          </a:fillRef>
+          <a:effectRef idx="2">
+            <a:schemeClr val="accent1"/>
+          </a:effectRef>
+          <a:fontRef idx="minor">
+            <a:schemeClr val="lt1"/>
+          </a:fontRef>
+        </p:style>
+        <p:txBody>
+          <a:bodyPr rtlCol="0" anchor="ctr"/>
+          <a:lstStyle/>
+          <a:p>
+            <a:pPr algn="ctr"/>
+          </a:p>
+        </p:txBody>
+      </p:sp>
+      <p:sp>
+        <p:nvSpPr>
+          <p:cNvPr id="4" name="Rounded Rectangle 3"/>
+          <p:cNvSpPr/>
+          <p:nvPr/>
+        </p:nvSpPr>
+        <p:spPr>
+          <a:xfrm>
+            <a:off x="379476" y="1463040"/>
+            <a:ext cx="3657600" cy="2011680"/>
+          </a:xfrm>
+          <a:prstGeom prst="roundRect">
+            <a:avLst/>
+          </a:prstGeom>
+          <a:solidFill>
+            <a:srgbClr val="1F2A4E"/>
+          </a:solidFill>
+          <a:ln>
+            <a:noFill/>
+          </a:ln>
+        </p:spPr>
+        <p:style>
+          <a:lnRef idx="1">
+            <a:schemeClr val="accent1"/>
+          </a:lnRef>
+          <a:fillRef idx="3">
+            <a:schemeClr val="accent1"/>
+          </a:fillRef>
+          <a:effectRef idx="2">
+            <a:schemeClr val="accent1"/>
+          </a:effectRef>
+          <a:fontRef idx="minor">
+            <a:schemeClr val="lt1"/>
+          </a:fontRef>
+        </p:style>
+        <p:txBody>
+          <a:bodyPr rtlCol="0" anchor="ctr"/>
+          <a:lstStyle/>
+          <a:p>
+            <a:pPr algn="ctr"/>
+          </a:p>
+        </p:txBody>
+      </p:sp>
+      <p:sp>
+        <p:nvSpPr>
+          <p:cNvPr id="5" name="TextBox 4"/>
+          <p:cNvSpPr txBox="1"/>
+          <p:nvPr/>
+        </p:nvSpPr>
+        <p:spPr>
+          <a:xfrm>
+            <a:off x="379476" y="1600200"/>
+            <a:ext cx="3657600" cy="822960"/>
+          </a:xfrm>
+          <a:prstGeom prst="rect">
+            <a:avLst/>
+          </a:prstGeom>
+          <a:noFill/>
+        </p:spPr>
+        <p:txBody>
+          <a:bodyPr wrap="none">
+            <a:spAutoFit/>
+          </a:bodyPr>
+          <a:lstStyle/>
+          <a:p>
+            <a:pPr algn="ctr">
+              <a:defRPr sz="4800" b="1">
+                <a:solidFill>
+                  <a:srgbClr val="FFFFFF"/>
+                </a:solidFill>
+              </a:defRPr>
+            </a:pPr>
+            <a:r>
+              <a:t>+3</a:t>
+            </a:r>
+          </a:p>
+        </p:txBody>
+      </p:sp>
+      <p:sp>
+        <p:nvSpPr>
+          <p:cNvPr id="6" name="TextBox 5"/>
+          <p:cNvSpPr txBox="1"/>
+          <p:nvPr/>
+        </p:nvSpPr>
+        <p:spPr>
+          <a:xfrm>
+            <a:off x="379476" y="2514600"/>
+            <a:ext cx="3657600" cy="457200"/>
+          </a:xfrm>
+          <a:prstGeom prst="rect">
+            <a:avLst/>
+          </a:prstGeom>
+          <a:noFill/>
+        </p:spPr>
+        <p:txBody>
+          <a:bodyPr wrap="none">
+            <a:spAutoFit/>
+          </a:bodyPr>
+          <a:lstStyle/>
+          <a:p>
+            <a:pPr algn="ctr">
+              <a:defRPr sz="1400" b="1">
+                <a:solidFill>
+                  <a:srgbClr val="FFFFFF"/>
+                </a:solidFill>
+              </a:defRPr>
+            </a:pPr>
+            <a:r>
+              <a:t>meses adiantados</a:t>
+            </a:r>
+          </a:p>
+        </p:txBody>
+      </p:sp>
+      <p:sp>
+        <p:nvSpPr>
+          <p:cNvPr id="7" name="TextBox 6"/>
+          <p:cNvSpPr txBox="1"/>
+          <p:nvPr/>
+        </p:nvSpPr>
+        <p:spPr>
+          <a:xfrm>
+            <a:off x="470916" y="2971800"/>
+            <a:ext cx="3474720" cy="548640"/>
+          </a:xfrm>
+          <a:prstGeom prst="rect">
+            <a:avLst/>
+          </a:prstGeom>
+          <a:noFill/>
+        </p:spPr>
+        <p:txBody>
+          <a:bodyPr wrap="square">
+            <a:spAutoFit/>
+          </a:bodyPr>
+          <a:lstStyle/>
+          <a:p>
+            <a:pPr algn="ctr">
+              <a:defRPr sz="1200" i="1">
+                <a:solidFill>
+                  <a:srgbClr val="B4C4E8"/>
+                </a:solidFill>
+              </a:defRPr>
+            </a:pPr>
+            <a:r>
+              <a:t>sobre o cronograma proposto na qualificação</a:t>
+            </a:r>
+          </a:p>
+        </p:txBody>
+      </p:sp>
+      <p:sp>
+        <p:nvSpPr>
+          <p:cNvPr id="8" name="Rounded Rectangle 7"/>
+          <p:cNvSpPr/>
+          <p:nvPr/>
+        </p:nvSpPr>
+        <p:spPr>
+          <a:xfrm>
+            <a:off x="4265676" y="1463040"/>
+            <a:ext cx="3657600" cy="2011680"/>
+          </a:xfrm>
+          <a:prstGeom prst="roundRect">
+            <a:avLst/>
+          </a:prstGeom>
+          <a:solidFill>
+            <a:srgbClr val="E8EAED"/>
+          </a:solidFill>
+          <a:ln>
+            <a:noFill/>
+          </a:ln>
+        </p:spPr>
+        <p:style>
+          <a:lnRef idx="1">
+            <a:schemeClr val="accent1"/>
+          </a:lnRef>
+          <a:fillRef idx="3">
+            <a:schemeClr val="accent1"/>
+          </a:fillRef>
+          <a:effectRef idx="2">
+            <a:schemeClr val="accent1"/>
+          </a:effectRef>
+          <a:fontRef idx="minor">
+            <a:schemeClr val="lt1"/>
+          </a:fontRef>
+        </p:style>
+        <p:txBody>
+          <a:bodyPr rtlCol="0" anchor="ctr"/>
+          <a:lstStyle/>
+          <a:p>
+            <a:pPr algn="ctr"/>
+          </a:p>
+        </p:txBody>
+      </p:sp>
+      <p:sp>
+        <p:nvSpPr>
+          <p:cNvPr id="9" name="TextBox 8"/>
+          <p:cNvSpPr txBox="1"/>
+          <p:nvPr/>
+        </p:nvSpPr>
+        <p:spPr>
+          <a:xfrm>
+            <a:off x="4265676" y="1600200"/>
+            <a:ext cx="3657600" cy="822960"/>
+          </a:xfrm>
+          <a:prstGeom prst="rect">
+            <a:avLst/>
+          </a:prstGeom>
+          <a:noFill/>
+        </p:spPr>
+        <p:txBody>
+          <a:bodyPr wrap="none">
+            <a:spAutoFit/>
+          </a:bodyPr>
+          <a:lstStyle/>
+          <a:p>
+            <a:pPr algn="ctr">
+              <a:defRPr sz="4800" b="1">
+                <a:solidFill>
+                  <a:srgbClr val="1F2A4E"/>
+                </a:solidFill>
+              </a:defRPr>
+            </a:pPr>
+            <a:r>
+              <a:t>6 de 6</a:t>
+            </a:r>
+          </a:p>
+        </p:txBody>
+      </p:sp>
+      <p:sp>
+        <p:nvSpPr>
+          <p:cNvPr id="10" name="TextBox 9"/>
+          <p:cNvSpPr txBox="1"/>
+          <p:nvPr/>
+        </p:nvSpPr>
+        <p:spPr>
+          <a:xfrm>
+            <a:off x="4265676" y="2514600"/>
+            <a:ext cx="3657600" cy="457200"/>
+          </a:xfrm>
+          <a:prstGeom prst="rect">
+            <a:avLst/>
+          </a:prstGeom>
+          <a:noFill/>
+        </p:spPr>
+        <p:txBody>
+          <a:bodyPr wrap="none">
+            <a:spAutoFit/>
+          </a:bodyPr>
+          <a:lstStyle/>
+          <a:p>
+            <a:pPr algn="ctr">
+              <a:defRPr sz="1400" b="1">
+                <a:solidFill>
+                  <a:srgbClr val="1F2A4E"/>
+                </a:solidFill>
+              </a:defRPr>
+            </a:pPr>
+            <a:r>
+              <a:t>etapas com código</a:t>
+            </a:r>
+          </a:p>
+        </p:txBody>
+      </p:sp>
+      <p:sp>
+        <p:nvSpPr>
+          <p:cNvPr id="11" name="TextBox 10"/>
+          <p:cNvSpPr txBox="1"/>
+          <p:nvPr/>
+        </p:nvSpPr>
+        <p:spPr>
+          <a:xfrm>
+            <a:off x="4357116" y="2971800"/>
+            <a:ext cx="3474720" cy="548640"/>
+          </a:xfrm>
+          <a:prstGeom prst="rect">
+            <a:avLst/>
+          </a:prstGeom>
+          <a:noFill/>
+        </p:spPr>
+        <p:txBody>
+          <a:bodyPr wrap="square">
+            <a:spAutoFit/>
+          </a:bodyPr>
+          <a:lstStyle/>
+          <a:p>
+            <a:pPr algn="ctr">
+              <a:defRPr sz="1200" i="1">
+                <a:solidFill>
+                  <a:srgbClr val="707682"/>
+                </a:solidFill>
+              </a:defRPr>
+            </a:pPr>
+            <a:r>
+              <a:t>estruturado, testado e pronto para execução</a:t>
+            </a:r>
+          </a:p>
+        </p:txBody>
+      </p:sp>
+      <p:sp>
+        <p:nvSpPr>
+          <p:cNvPr id="12" name="Rounded Rectangle 11"/>
+          <p:cNvSpPr/>
+          <p:nvPr/>
+        </p:nvSpPr>
+        <p:spPr>
+          <a:xfrm>
+            <a:off x="8151875" y="1463040"/>
+            <a:ext cx="3657600" cy="2011680"/>
+          </a:xfrm>
+          <a:prstGeom prst="roundRect">
+            <a:avLst/>
+          </a:prstGeom>
+          <a:solidFill>
+            <a:srgbClr val="E8EAED"/>
+          </a:solidFill>
+          <a:ln>
+            <a:noFill/>
+          </a:ln>
+        </p:spPr>
+        <p:style>
+          <a:lnRef idx="1">
+            <a:schemeClr val="accent1"/>
+          </a:lnRef>
+          <a:fillRef idx="3">
+            <a:schemeClr val="accent1"/>
+          </a:fillRef>
+          <a:effectRef idx="2">
+            <a:schemeClr val="accent1"/>
+          </a:effectRef>
+          <a:fontRef idx="minor">
+            <a:schemeClr val="lt1"/>
+          </a:fontRef>
+        </p:style>
+        <p:txBody>
+          <a:bodyPr rtlCol="0" anchor="ctr"/>
+          <a:lstStyle/>
+          <a:p>
+            <a:pPr algn="ctr"/>
+          </a:p>
+        </p:txBody>
+      </p:sp>
+      <p:sp>
+        <p:nvSpPr>
+          <p:cNvPr id="13" name="TextBox 12"/>
+          <p:cNvSpPr txBox="1"/>
+          <p:nvPr/>
+        </p:nvSpPr>
+        <p:spPr>
+          <a:xfrm>
+            <a:off x="8151875" y="1600200"/>
+            <a:ext cx="3657600" cy="822960"/>
+          </a:xfrm>
+          <a:prstGeom prst="rect">
+            <a:avLst/>
+          </a:prstGeom>
+          <a:noFill/>
+        </p:spPr>
+        <p:txBody>
+          <a:bodyPr wrap="none">
+            <a:spAutoFit/>
+          </a:bodyPr>
+          <a:lstStyle/>
+          <a:p>
+            <a:pPr algn="ctr">
+              <a:defRPr sz="4800" b="1">
+                <a:solidFill>
+                  <a:srgbClr val="1F2A4E"/>
+                </a:solidFill>
+              </a:defRPr>
+            </a:pPr>
+            <a:r>
+              <a:t>120</a:t>
+            </a:r>
+          </a:p>
+        </p:txBody>
+      </p:sp>
+      <p:sp>
+        <p:nvSpPr>
+          <p:cNvPr id="14" name="TextBox 13"/>
+          <p:cNvSpPr txBox="1"/>
+          <p:nvPr/>
+        </p:nvSpPr>
+        <p:spPr>
+          <a:xfrm>
+            <a:off x="8151875" y="2514600"/>
+            <a:ext cx="3657600" cy="457200"/>
+          </a:xfrm>
+          <a:prstGeom prst="rect">
+            <a:avLst/>
+          </a:prstGeom>
+          <a:noFill/>
+        </p:spPr>
+        <p:txBody>
+          <a:bodyPr wrap="none">
+            <a:spAutoFit/>
+          </a:bodyPr>
+          <a:lstStyle/>
+          <a:p>
+            <a:pPr algn="ctr">
+              <a:defRPr sz="1400" b="1">
+                <a:solidFill>
+                  <a:srgbClr val="1F2A4E"/>
+                </a:solidFill>
+              </a:defRPr>
+            </a:pPr>
+            <a:r>
+              <a:t>testes automatizados</a:t>
+            </a:r>
+          </a:p>
+        </p:txBody>
+      </p:sp>
+      <p:sp>
+        <p:nvSpPr>
+          <p:cNvPr id="15" name="TextBox 14"/>
+          <p:cNvSpPr txBox="1"/>
+          <p:nvPr/>
+        </p:nvSpPr>
+        <p:spPr>
+          <a:xfrm>
+            <a:off x="8243315" y="2971800"/>
+            <a:ext cx="3474720" cy="548640"/>
+          </a:xfrm>
+          <a:prstGeom prst="rect">
+            <a:avLst/>
+          </a:prstGeom>
+          <a:noFill/>
+        </p:spPr>
+        <p:txBody>
+          <a:bodyPr wrap="square">
+            <a:spAutoFit/>
+          </a:bodyPr>
+          <a:lstStyle/>
+          <a:p>
+            <a:pPr algn="ctr">
+              <a:defRPr sz="1200" i="1">
+                <a:solidFill>
+                  <a:srgbClr val="707682"/>
+                </a:solidFill>
+              </a:defRPr>
+            </a:pPr>
+            <a:r>
+              <a:t>todos passando (unit + smoke + integração)</a:t>
+            </a:r>
+          </a:p>
+        </p:txBody>
+      </p:sp>
+      <p:sp>
+        <p:nvSpPr>
+          <p:cNvPr id="16" name="TextBox 15"/>
+          <p:cNvSpPr txBox="1"/>
+          <p:nvPr/>
+        </p:nvSpPr>
+        <p:spPr>
+          <a:xfrm>
+            <a:off x="457200" y="3840480"/>
+            <a:ext cx="11430000" cy="365760"/>
+          </a:xfrm>
+          <a:prstGeom prst="rect">
+            <a:avLst/>
+          </a:prstGeom>
+          <a:noFill/>
+        </p:spPr>
+        <p:txBody>
+          <a:bodyPr wrap="none">
+            <a:spAutoFit/>
+          </a:bodyPr>
+          <a:lstStyle/>
+          <a:p>
+            <a:pPr>
+              <a:defRPr sz="1600" b="1">
+                <a:solidFill>
+                  <a:srgbClr val="1F2A4E"/>
+                </a:solidFill>
+              </a:defRPr>
+            </a:pPr>
+            <a:r>
+              <a:t>Estado das entregas em 28/09/2026</a:t>
+            </a:r>
+          </a:p>
+        </p:txBody>
+      </p:sp>
+      <p:sp>
+        <p:nvSpPr>
+          <p:cNvPr id="17" name="TextBox 16"/>
+          <p:cNvSpPr txBox="1"/>
+          <p:nvPr/>
+        </p:nvSpPr>
+        <p:spPr>
+          <a:xfrm>
+            <a:off x="457200" y="4297680"/>
+            <a:ext cx="11430000" cy="2011680"/>
+          </a:xfrm>
+          <a:prstGeom prst="rect">
+            <a:avLst/>
+          </a:prstGeom>
+          <a:noFill/>
+        </p:spPr>
+        <p:txBody>
+          <a:bodyPr wrap="square">
+            <a:spAutoFit/>
+          </a:bodyPr>
+          <a:lstStyle/>
+          <a:p>
+            <a:pPr>
+              <a:spcAft>
+                <a:spcPts val="600"/>
+              </a:spcAft>
+            </a:pPr>
+            <a:r>
+              <a:rPr sz="1600" b="1">
+                <a:solidFill>
+                  <a:srgbClr val="1F2A4E"/>
+                </a:solidFill>
+              </a:rPr>
+              <a:t>•  Etapas 1 e 2 (código completo):  </a:t>
+            </a:r>
+            <a:r>
+              <a:rPr sz="1600">
+                <a:solidFill>
+                  <a:srgbClr val="3D424E"/>
+                </a:solidFill>
+              </a:rPr>
+              <a:t>classificador MST treinado internamente, camada de preprocessamento auto-suficiente, matriz MST × raça, teste formal de H2.</a:t>
+            </a:r>
+          </a:p>
+          <a:p>
+            <a:pPr>
+              <a:spcAft>
+                <a:spcPts val="600"/>
+              </a:spcAft>
+            </a:pPr>
+            <a:r>
+              <a:rPr sz="1600" b="1">
+                <a:solidFill>
+                  <a:srgbClr val="1F2A4E"/>
+                </a:solidFill>
+              </a:rPr>
+              <a:t>•  Etapa 3 (FiLM):  </a:t>
+            </a:r>
+            <a:r>
+              <a:rPr sz="1600">
+                <a:solidFill>
+                  <a:srgbClr val="3D424E"/>
+                </a:solidFill>
+              </a:rPr>
+              <a:t>camada FiLM, wrapper ConvNeXt-T, ensembler CLIP-text e pipeline de treinamento das três configurações.</a:t>
+            </a:r>
+          </a:p>
+          <a:p>
+            <a:pPr>
+              <a:spcAft>
+                <a:spcPts val="600"/>
+              </a:spcAft>
+            </a:pPr>
+            <a:r>
+              <a:rPr sz="1600" b="1">
+                <a:solidFill>
+                  <a:srgbClr val="1F2A4E"/>
+                </a:solidFill>
+              </a:rPr>
+              <a:t>•  Etapas 4, 5 e 6:  </a:t>
+            </a:r>
+            <a:r>
+              <a:rPr sz="1600">
+                <a:solidFill>
+                  <a:srgbClr val="3D424E"/>
+                </a:solidFill>
+              </a:rPr>
+              <a:t>métricas de equidade, quatro baselines, análise Pareto, verificação em RFW/BFW e decomposição ANOVA/R².</a:t>
+            </a:r>
+          </a:p>
+          <a:p>
+            <a:pPr>
+              <a:spcAft>
+                <a:spcPts val="600"/>
+              </a:spcAft>
+            </a:pPr>
+            <a:r>
+              <a:rPr sz="1600" b="1">
+                <a:solidFill>
+                  <a:srgbClr val="1F2A4E"/>
+                </a:solidFill>
+              </a:rPr>
+              <a:t>•  Texto da dissertação:  </a:t>
+            </a:r>
+            <a:r>
+              <a:rPr sz="1600">
+                <a:solidFill>
+                  <a:srgbClr val="3D424E"/>
+                </a:solidFill>
+              </a:rPr>
+              <a:t>cinco capítulos consolidados, três passadas de revisão de estilo e 104 fichas bibliográficas.</a:t>
+            </a:r>
+          </a:p>
+        </p:txBody>
+      </p:sp>
+      <p:sp>
+        <p:nvSpPr>
+          <p:cNvPr id="18" name="TextBox 17"/>
+          <p:cNvSpPr txBox="1"/>
+          <p:nvPr/>
+        </p:nvSpPr>
+        <p:spPr>
+          <a:xfrm>
+            <a:off x="457200" y="6446520"/>
+            <a:ext cx="10515600" cy="365760"/>
+          </a:xfrm>
+          <a:prstGeom prst="rect">
+            <a:avLst/>
+          </a:prstGeom>
+          <a:noFill/>
+        </p:spPr>
+        <p:txBody>
+          <a:bodyPr wrap="none">
+            <a:spAutoFit/>
+          </a:bodyPr>
+          <a:lstStyle/>
+          <a:p>
+            <a:pPr>
+              <a:defRPr sz="900" i="1">
+                <a:solidFill>
+                  <a:srgbClr val="707682"/>
+                </a:solidFill>
+              </a:defRPr>
+            </a:pPr>
+            <a:r>
+              <a:t>Exame de Qualificação · Marcello Ozzetti · Orientação: Prof. Dr. Marcos G. Quiles · PPG-CC UNIFESP/ICT</a:t>
+            </a:r>
+          </a:p>
+        </p:txBody>
+      </p:sp>
+      <p:sp>
+        <p:nvSpPr>
+          <p:cNvPr id="19" name="TextBox 18"/>
+          <p:cNvSpPr txBox="1"/>
+          <p:nvPr/>
+        </p:nvSpPr>
+        <p:spPr>
+          <a:xfrm>
+            <a:off x="11521440" y="6446520"/>
+            <a:ext cx="640080" cy="365760"/>
+          </a:xfrm>
+          <a:prstGeom prst="rect">
+            <a:avLst/>
+          </a:prstGeom>
+          <a:noFill/>
+        </p:spPr>
+        <p:txBody>
+          <a:bodyPr wrap="none">
+            <a:spAutoFit/>
+          </a:bodyPr>
+          <a:lstStyle/>
+          <a:p>
+            <a:pPr>
+              <a:defRPr sz="900" i="1">
+                <a:solidFill>
+                  <a:srgbClr val="707682"/>
+                </a:solidFill>
+              </a:defRPr>
+            </a:pPr>
+            <a:r>
+              <a:t>28 / 29</a:t>
+            </a:r>
+          </a:p>
+        </p:txBody>
+      </p:sp>
+    </p:spTree>
+  </p:cSld>
+  <p:clrMapOvr>
+    <a:masterClrMapping/>
+  </p:clrMapOvr>
+</p:sld>
+</file>
+
+<file path=ppt/slides/slide29.xml><?xml version="1.0" encoding="utf-8"?>
+<p:sld xmlns:a="http://schemas.openxmlformats.org/drawingml/2006/main" xmlns:p="http://schemas.openxmlformats.org/presentationml/2006/main" xmlns:r="http://schemas.openxmlformats.org/officeDocument/2006/relationships">
+  <p:cSld>
+    <p:spTree>
+      <p:nvGrpSpPr>
+        <p:cNvPr id="1" name=""/>
+        <p:cNvGrpSpPr/>
+        <p:nvPr/>
+      </p:nvGrpSpPr>
+      <p:grpSpPr/>
+      <p:sp>
+        <p:nvSpPr>
           <p:cNvPr id="2" name="Rectangle 1"/>
           <p:cNvSpPr/>
           <p:nvPr/>
@@ -11368,7 +11055,7 @@
               </a:defRPr>
             </a:pPr>
             <a:r>
-              <a:t>Regulação formal em vigor: European AI Act (2024)</a:t>
+              <a:t>Reconhecimento facial: adoção sociotécnica em larga escala</a:t>
             </a:r>
           </a:p>
         </p:txBody>
@@ -11418,23 +11105,25 @@
       </p:sp>
       <p:sp>
         <p:nvSpPr>
-          <p:cNvPr id="4" name="Rectangle 3"/>
+          <p:cNvPr id="4" name="Rounded Rectangle 3"/>
           <p:cNvSpPr/>
           <p:nvPr/>
         </p:nvSpPr>
         <p:spPr>
           <a:xfrm>
-            <a:off x="1065276" y="2167128"/>
-            <a:ext cx="10058400" cy="54864"/>
-          </a:xfrm>
-          <a:prstGeom prst="rect">
+            <a:off x="996695" y="1463040"/>
+            <a:ext cx="2377440" cy="1645920"/>
+          </a:xfrm>
+          <a:prstGeom prst="roundRect">
             <a:avLst/>
           </a:prstGeom>
           <a:solidFill>
-            <a:srgbClr val="707682"/>
+            <a:srgbClr val="E8EAED"/>
           </a:solidFill>
           <a:ln>
-            <a:noFill/>
+            <a:solidFill>
+              <a:srgbClr val="E8EAED"/>
+            </a:solidFill>
           </a:ln>
         </p:spPr>
         <p:style>
@@ -11461,24 +11150,106 @@
       </p:sp>
       <p:sp>
         <p:nvSpPr>
-          <p:cNvPr id="5" name="Oval 4"/>
+          <p:cNvPr id="5" name="TextBox 4"/>
+          <p:cNvSpPr txBox="1"/>
+          <p:nvPr/>
+        </p:nvSpPr>
+        <p:spPr>
+          <a:xfrm>
+            <a:off x="996695" y="1691640"/>
+            <a:ext cx="2377440" cy="365760"/>
+          </a:xfrm>
+          <a:prstGeom prst="rect">
+            <a:avLst/>
+          </a:prstGeom>
+          <a:noFill/>
+        </p:spPr>
+        <p:txBody>
+          <a:bodyPr wrap="none">
+            <a:spAutoFit/>
+          </a:bodyPr>
+          <a:lstStyle/>
+          <a:p>
+            <a:pPr algn="ctr">
+              <a:defRPr sz="1300" b="1">
+                <a:solidFill>
+                  <a:srgbClr val="C0392B"/>
+                </a:solidFill>
+              </a:defRPr>
+            </a:pPr>
+            <a:r>
+              <a:t>DISPOSITIVOS</a:t>
+            </a:r>
+          </a:p>
+        </p:txBody>
+      </p:sp>
+      <p:sp>
+        <p:nvSpPr>
+          <p:cNvPr id="6" name="TextBox 5"/>
+          <p:cNvSpPr txBox="1"/>
+          <p:nvPr/>
+        </p:nvSpPr>
+        <p:spPr>
+          <a:xfrm>
+            <a:off x="1088136" y="2148840"/>
+            <a:ext cx="2194560" cy="822960"/>
+          </a:xfrm>
+          <a:prstGeom prst="rect">
+            <a:avLst/>
+          </a:prstGeom>
+          <a:noFill/>
+        </p:spPr>
+        <p:txBody>
+          <a:bodyPr wrap="square">
+            <a:spAutoFit/>
+          </a:bodyPr>
+          <a:lstStyle/>
+          <a:p>
+            <a:pPr algn="ctr">
+              <a:defRPr sz="1600" b="1">
+                <a:solidFill>
+                  <a:srgbClr val="1F2A4E"/>
+                </a:solidFill>
+              </a:defRPr>
+            </a:pPr>
+            <a:r>
+              <a:t>Desbloqueio</a:t>
+            </a:r>
+          </a:p>
+          <a:p>
+            <a:pPr algn="ctr">
+              <a:defRPr sz="1600" b="1">
+                <a:solidFill>
+                  <a:srgbClr val="1F2A4E"/>
+                </a:solidFill>
+              </a:defRPr>
+            </a:pPr>
+            <a:r>
+              <a:t>de celular</a:t>
+            </a:r>
+          </a:p>
+        </p:txBody>
+      </p:sp>
+      <p:sp>
+        <p:nvSpPr>
+          <p:cNvPr id="7" name="Rounded Rectangle 6"/>
           <p:cNvSpPr/>
           <p:nvPr/>
         </p:nvSpPr>
         <p:spPr>
           <a:xfrm>
-            <a:off x="745236" y="1874519"/>
-            <a:ext cx="640080" cy="640080"/>
-          </a:xfrm>
-          <a:prstGeom prst="ellipse">
+            <a:off x="3602736" y="1463040"/>
+            <a:ext cx="2377440" cy="1645920"/>
+          </a:xfrm>
+          <a:prstGeom prst="roundRect">
             <a:avLst/>
           </a:prstGeom>
           <a:solidFill>
-            <a:srgbClr val="1F2A4E"/>
+            <a:srgbClr val="E8EAED"/>
           </a:solidFill>
           <a:ln>
             <a:solidFill>
-              <a:srgbClr val="FFFFFF"/>
+              <a:srgbClr val="E8EAED"/>
             </a:solidFill>
           </a:ln>
         </p:spPr>
@@ -11506,14 +11277,14 @@
       </p:sp>
       <p:sp>
         <p:nvSpPr>
-          <p:cNvPr id="6" name="TextBox 5"/>
+          <p:cNvPr id="8" name="TextBox 7"/>
           <p:cNvSpPr txBox="1"/>
           <p:nvPr/>
         </p:nvSpPr>
         <p:spPr>
           <a:xfrm>
-            <a:off x="379476" y="1188719"/>
-            <a:ext cx="1371600" cy="457200"/>
+            <a:off x="3602736" y="1691640"/>
+            <a:ext cx="2377440" cy="365760"/>
           </a:xfrm>
           <a:prstGeom prst="rect">
             <a:avLst/>
@@ -11527,63 +11298,28 @@
           <a:lstStyle/>
           <a:p>
             <a:pPr algn="ctr">
-              <a:defRPr sz="2200" b="1">
-                <a:solidFill>
-                  <a:srgbClr val="1F2A4E"/>
-                </a:solidFill>
-              </a:defRPr>
-            </a:pPr>
-            <a:r>
-              <a:t>2018</a:t>
-            </a:r>
-          </a:p>
-        </p:txBody>
-      </p:sp>
-      <p:sp>
-        <p:nvSpPr>
-          <p:cNvPr id="7" name="TextBox 6"/>
+              <a:defRPr sz="1300" b="1">
+                <a:solidFill>
+                  <a:srgbClr val="C0392B"/>
+                </a:solidFill>
+              </a:defRPr>
+            </a:pPr>
+            <a:r>
+              <a:t>BANCOS</a:t>
+            </a:r>
+          </a:p>
+        </p:txBody>
+      </p:sp>
+      <p:sp>
+        <p:nvSpPr>
+          <p:cNvPr id="9" name="TextBox 8"/>
           <p:cNvSpPr txBox="1"/>
           <p:nvPr/>
         </p:nvSpPr>
         <p:spPr>
           <a:xfrm>
-            <a:off x="-169164" y="2651760"/>
-            <a:ext cx="2468880" cy="457200"/>
-          </a:xfrm>
-          <a:prstGeom prst="rect">
-            <a:avLst/>
-          </a:prstGeom>
-          <a:noFill/>
-        </p:spPr>
-        <p:txBody>
-          <a:bodyPr wrap="none">
-            <a:spAutoFit/>
-          </a:bodyPr>
-          <a:lstStyle/>
-          <a:p>
-            <a:pPr algn="ctr">
-              <a:defRPr sz="1600" b="1">
-                <a:solidFill>
-                  <a:srgbClr val="1F2A4E"/>
-                </a:solidFill>
-              </a:defRPr>
-            </a:pPr>
-            <a:r>
-              <a:t>Gender Shades</a:t>
-            </a:r>
-          </a:p>
-        </p:txBody>
-      </p:sp>
-      <p:sp>
-        <p:nvSpPr>
-          <p:cNvPr id="8" name="TextBox 7"/>
-          <p:cNvSpPr txBox="1"/>
-          <p:nvPr/>
-        </p:nvSpPr>
-        <p:spPr>
-          <a:xfrm>
-            <a:off x="-306323" y="3246120"/>
-            <a:ext cx="2743200" cy="2194560"/>
+            <a:off x="3694176" y="2148840"/>
+            <a:ext cx="2194560" cy="822960"/>
           </a:xfrm>
           <a:prstGeom prst="rect">
             <a:avLst/>
@@ -11597,38 +11333,50 @@
           <a:lstStyle/>
           <a:p>
             <a:pPr algn="ctr">
-              <a:defRPr sz="1300">
-                <a:solidFill>
-                  <a:srgbClr val="3D424E"/>
-                </a:solidFill>
-              </a:defRPr>
-            </a:pPr>
-            <a:r>
-              <a:t>Buolamwini &amp; Gebru colocam o viés na agenda.</a:t>
-            </a:r>
-          </a:p>
-        </p:txBody>
-      </p:sp>
-      <p:sp>
-        <p:nvSpPr>
-          <p:cNvPr id="9" name="Oval 8"/>
+              <a:defRPr sz="1600" b="1">
+                <a:solidFill>
+                  <a:srgbClr val="1F2A4E"/>
+                </a:solidFill>
+              </a:defRPr>
+            </a:pPr>
+            <a:r>
+              <a:t>Autenticação</a:t>
+            </a:r>
+          </a:p>
+          <a:p>
+            <a:pPr algn="ctr">
+              <a:defRPr sz="1600" b="1">
+                <a:solidFill>
+                  <a:srgbClr val="1F2A4E"/>
+                </a:solidFill>
+              </a:defRPr>
+            </a:pPr>
+            <a:r>
+              <a:t>financeira</a:t>
+            </a:r>
+          </a:p>
+        </p:txBody>
+      </p:sp>
+      <p:sp>
+        <p:nvSpPr>
+          <p:cNvPr id="10" name="Rounded Rectangle 9"/>
           <p:cNvSpPr/>
           <p:nvPr/>
         </p:nvSpPr>
         <p:spPr>
           <a:xfrm>
-            <a:off x="4098036" y="1874519"/>
-            <a:ext cx="640080" cy="640080"/>
-          </a:xfrm>
-          <a:prstGeom prst="ellipse">
+            <a:off x="6208776" y="1463040"/>
+            <a:ext cx="2377440" cy="1645920"/>
+          </a:xfrm>
+          <a:prstGeom prst="roundRect">
             <a:avLst/>
           </a:prstGeom>
           <a:solidFill>
-            <a:srgbClr val="1F2A4E"/>
+            <a:srgbClr val="E8EAED"/>
           </a:solidFill>
           <a:ln>
             <a:solidFill>
-              <a:srgbClr val="FFFFFF"/>
+              <a:srgbClr val="E8EAED"/>
             </a:solidFill>
           </a:ln>
         </p:spPr>
@@ -11656,14 +11404,14 @@
       </p:sp>
       <p:sp>
         <p:nvSpPr>
-          <p:cNvPr id="10" name="TextBox 9"/>
+          <p:cNvPr id="11" name="TextBox 10"/>
           <p:cNvSpPr txBox="1"/>
           <p:nvPr/>
         </p:nvSpPr>
         <p:spPr>
           <a:xfrm>
-            <a:off x="3732276" y="1188719"/>
-            <a:ext cx="1371600" cy="457200"/>
+            <a:off x="6208776" y="1691640"/>
+            <a:ext cx="2377440" cy="365760"/>
           </a:xfrm>
           <a:prstGeom prst="rect">
             <a:avLst/>
@@ -11677,49 +11425,14 @@
           <a:lstStyle/>
           <a:p>
             <a:pPr algn="ctr">
-              <a:defRPr sz="2200" b="1">
-                <a:solidFill>
-                  <a:srgbClr val="1F2A4E"/>
-                </a:solidFill>
-              </a:defRPr>
-            </a:pPr>
-            <a:r>
-              <a:t>2019</a:t>
-            </a:r>
-          </a:p>
-        </p:txBody>
-      </p:sp>
-      <p:sp>
-        <p:nvSpPr>
-          <p:cNvPr id="11" name="TextBox 10"/>
-          <p:cNvSpPr txBox="1"/>
-          <p:nvPr/>
-        </p:nvSpPr>
-        <p:spPr>
-          <a:xfrm>
-            <a:off x="3183636" y="2651760"/>
-            <a:ext cx="2468880" cy="457200"/>
-          </a:xfrm>
-          <a:prstGeom prst="rect">
-            <a:avLst/>
-          </a:prstGeom>
-          <a:noFill/>
-        </p:spPr>
-        <p:txBody>
-          <a:bodyPr wrap="none">
-            <a:spAutoFit/>
-          </a:bodyPr>
-          <a:lstStyle/>
-          <a:p>
-            <a:pPr algn="ctr">
-              <a:defRPr sz="1600" b="1">
-                <a:solidFill>
-                  <a:srgbClr val="1F2A4E"/>
-                </a:solidFill>
-              </a:defRPr>
-            </a:pPr>
-            <a:r>
-              <a:t>NIST FRVT</a:t>
+              <a:defRPr sz="1300" b="1">
+                <a:solidFill>
+                  <a:srgbClr val="C0392B"/>
+                </a:solidFill>
+              </a:defRPr>
+            </a:pPr>
+            <a:r>
+              <a:t>FRONTEIRAS</a:t>
             </a:r>
           </a:p>
         </p:txBody>
@@ -11732,8 +11445,8 @@
         </p:nvSpPr>
         <p:spPr>
           <a:xfrm>
-            <a:off x="3046476" y="3246120"/>
-            <a:ext cx="2743200" cy="2194560"/>
+            <a:off x="6300216" y="2148840"/>
+            <a:ext cx="2194560" cy="822960"/>
           </a:xfrm>
           <a:prstGeom prst="rect">
             <a:avLst/>
@@ -11747,38 +11460,50 @@
           <a:lstStyle/>
           <a:p>
             <a:pPr algn="ctr">
-              <a:defRPr sz="1300">
-                <a:solidFill>
-                  <a:srgbClr val="3D424E"/>
-                </a:solidFill>
-              </a:defRPr>
-            </a:pPr>
-            <a:r>
-              <a:t>Grother et al. documentam disparidade 10–100× em escala industrial.</a:t>
-            </a:r>
-          </a:p>
-        </p:txBody>
-      </p:sp>
-      <p:sp>
-        <p:nvSpPr>
-          <p:cNvPr id="13" name="Oval 12"/>
+              <a:defRPr sz="1600" b="1">
+                <a:solidFill>
+                  <a:srgbClr val="1F2A4E"/>
+                </a:solidFill>
+              </a:defRPr>
+            </a:pPr>
+            <a:r>
+              <a:t>Controle</a:t>
+            </a:r>
+          </a:p>
+          <a:p>
+            <a:pPr algn="ctr">
+              <a:defRPr sz="1600" b="1">
+                <a:solidFill>
+                  <a:srgbClr val="1F2A4E"/>
+                </a:solidFill>
+              </a:defRPr>
+            </a:pPr>
+            <a:r>
+              <a:t>migratório</a:t>
+            </a:r>
+          </a:p>
+        </p:txBody>
+      </p:sp>
+      <p:sp>
+        <p:nvSpPr>
+          <p:cNvPr id="13" name="Rounded Rectangle 12"/>
           <p:cNvSpPr/>
           <p:nvPr/>
         </p:nvSpPr>
         <p:spPr>
           <a:xfrm>
-            <a:off x="7450836" y="1874519"/>
-            <a:ext cx="640080" cy="640080"/>
-          </a:xfrm>
-          <a:prstGeom prst="ellipse">
+            <a:off x="8814816" y="1463040"/>
+            <a:ext cx="2377440" cy="1645920"/>
+          </a:xfrm>
+          <a:prstGeom prst="roundRect">
             <a:avLst/>
           </a:prstGeom>
           <a:solidFill>
-            <a:srgbClr val="C0392B"/>
+            <a:srgbClr val="E8EAED"/>
           </a:solidFill>
           <a:ln>
             <a:solidFill>
-              <a:srgbClr val="FFFFFF"/>
+              <a:srgbClr val="E8EAED"/>
             </a:solidFill>
           </a:ln>
         </p:spPr>
@@ -11812,8 +11537,8 @@
         </p:nvSpPr>
         <p:spPr>
           <a:xfrm>
-            <a:off x="7085076" y="1188719"/>
-            <a:ext cx="1371600" cy="457200"/>
+            <a:off x="8814816" y="1691640"/>
+            <a:ext cx="2377440" cy="365760"/>
           </a:xfrm>
           <a:prstGeom prst="rect">
             <a:avLst/>
@@ -11827,14 +11552,14 @@
           <a:lstStyle/>
           <a:p>
             <a:pPr algn="ctr">
-              <a:defRPr sz="2200" b="1">
+              <a:defRPr sz="1300" b="1">
                 <a:solidFill>
                   <a:srgbClr val="C0392B"/>
                 </a:solidFill>
               </a:defRPr>
             </a:pPr>
             <a:r>
-              <a:t>2024</a:t>
+              <a:t>SEGURANÇA</a:t>
             </a:r>
           </a:p>
         </p:txBody>
@@ -11847,43 +11572,8 @@
         </p:nvSpPr>
         <p:spPr>
           <a:xfrm>
-            <a:off x="6536436" y="2651760"/>
-            <a:ext cx="2468880" cy="457200"/>
-          </a:xfrm>
-          <a:prstGeom prst="rect">
-            <a:avLst/>
-          </a:prstGeom>
-          <a:noFill/>
-        </p:spPr>
-        <p:txBody>
-          <a:bodyPr wrap="none">
-            <a:spAutoFit/>
-          </a:bodyPr>
-          <a:lstStyle/>
-          <a:p>
-            <a:pPr algn="ctr">
-              <a:defRPr sz="1600" b="1">
-                <a:solidFill>
-                  <a:srgbClr val="1F2A4E"/>
-                </a:solidFill>
-              </a:defRPr>
-            </a:pPr>
-            <a:r>
-              <a:t>EU AI Act</a:t>
-            </a:r>
-          </a:p>
-        </p:txBody>
-      </p:sp>
-      <p:sp>
-        <p:nvSpPr>
-          <p:cNvPr id="16" name="TextBox 15"/>
-          <p:cNvSpPr txBox="1"/>
-          <p:nvPr/>
-        </p:nvSpPr>
-        <p:spPr>
-          <a:xfrm>
-            <a:off x="6399276" y="3246120"/>
-            <a:ext cx="2743200" cy="2194560"/>
+            <a:off x="8906256" y="2148840"/>
+            <a:ext cx="2194560" cy="822960"/>
           </a:xfrm>
           <a:prstGeom prst="rect">
             <a:avLst/>
@@ -11897,39 +11587,49 @@
           <a:lstStyle/>
           <a:p>
             <a:pPr algn="ctr">
-              <a:defRPr sz="1300">
-                <a:solidFill>
-                  <a:srgbClr val="3D424E"/>
-                </a:solidFill>
-              </a:defRPr>
-            </a:pPr>
-            <a:r>
-              <a:t>Auditoria de equidade torna-se requisito formal para sistemas biométricos.</a:t>
-            </a:r>
-          </a:p>
-        </p:txBody>
-      </p:sp>
-      <p:sp>
-        <p:nvSpPr>
-          <p:cNvPr id="17" name="Oval 16"/>
+              <a:defRPr sz="1600" b="1">
+                <a:solidFill>
+                  <a:srgbClr val="1F2A4E"/>
+                </a:solidFill>
+              </a:defRPr>
+            </a:pPr>
+            <a:r>
+              <a:t>Identificação</a:t>
+            </a:r>
+          </a:p>
+          <a:p>
+            <a:pPr algn="ctr">
+              <a:defRPr sz="1600" b="1">
+                <a:solidFill>
+                  <a:srgbClr val="1F2A4E"/>
+                </a:solidFill>
+              </a:defRPr>
+            </a:pPr>
+            <a:r>
+              <a:t>policial</a:t>
+            </a:r>
+          </a:p>
+        </p:txBody>
+      </p:sp>
+      <p:sp>
+        <p:nvSpPr>
+          <p:cNvPr id="16" name="Rounded Rectangle 15"/>
           <p:cNvSpPr/>
           <p:nvPr/>
         </p:nvSpPr>
         <p:spPr>
           <a:xfrm>
-            <a:off x="10803636" y="1874519"/>
-            <a:ext cx="640080" cy="640080"/>
-          </a:xfrm>
-          <a:prstGeom prst="ellipse">
+            <a:off x="640080" y="3566160"/>
+            <a:ext cx="4114800" cy="2377440"/>
+          </a:xfrm>
+          <a:prstGeom prst="roundRect">
             <a:avLst/>
           </a:prstGeom>
           <a:solidFill>
             <a:srgbClr val="1F2A4E"/>
           </a:solidFill>
           <a:ln>
-            <a:solidFill>
-              <a:srgbClr val="FFFFFF"/>
-            </a:solidFill>
+            <a:noFill/>
           </a:ln>
         </p:spPr>
         <p:style>
@@ -11956,14 +11656,14 @@
       </p:sp>
       <p:sp>
         <p:nvSpPr>
-          <p:cNvPr id="18" name="TextBox 17"/>
+          <p:cNvPr id="17" name="TextBox 16"/>
           <p:cNvSpPr txBox="1"/>
           <p:nvPr/>
         </p:nvSpPr>
         <p:spPr>
           <a:xfrm>
-            <a:off x="10437876" y="1188719"/>
-            <a:ext cx="1371600" cy="457200"/>
+            <a:off x="640080" y="3794760"/>
+            <a:ext cx="4114800" cy="1005840"/>
           </a:xfrm>
           <a:prstGeom prst="rect">
             <a:avLst/>
@@ -11977,14 +11677,57 @@
           <a:lstStyle/>
           <a:p>
             <a:pPr algn="ctr">
-              <a:defRPr sz="2200" b="1">
-                <a:solidFill>
-                  <a:srgbClr val="1F2A4E"/>
-                </a:solidFill>
-              </a:defRPr>
-            </a:pPr>
-            <a:r>
-              <a:t>2025</a:t>
+              <a:defRPr sz="4600" b="1">
+                <a:solidFill>
+                  <a:srgbClr val="FFFFFF"/>
+                </a:solidFill>
+              </a:defRPr>
+            </a:pPr>
+            <a:r>
+              <a:t>10 – 100 ×</a:t>
+            </a:r>
+          </a:p>
+        </p:txBody>
+      </p:sp>
+      <p:sp>
+        <p:nvSpPr>
+          <p:cNvPr id="18" name="TextBox 17"/>
+          <p:cNvSpPr txBox="1"/>
+          <p:nvPr/>
+        </p:nvSpPr>
+        <p:spPr>
+          <a:xfrm>
+            <a:off x="822960" y="4937760"/>
+            <a:ext cx="3749039" cy="914400"/>
+          </a:xfrm>
+          <a:prstGeom prst="rect">
+            <a:avLst/>
+          </a:prstGeom>
+          <a:noFill/>
+        </p:spPr>
+        <p:txBody>
+          <a:bodyPr wrap="square">
+            <a:spAutoFit/>
+          </a:bodyPr>
+          <a:lstStyle/>
+          <a:p>
+            <a:pPr algn="ctr">
+              <a:defRPr sz="1400">
+                <a:solidFill>
+                  <a:srgbClr val="B4C4E8"/>
+                </a:solidFill>
+              </a:defRPr>
+            </a:pPr>
+            <a:r>
+              <a:t>disparidade na taxa de</a:t>
+            </a:r>
+            <a:br/>
+            <a:r>
+              <a:t>falso positivo entre</a:t>
+            </a:r>
+            <a:br/>
+            <a:r>
+              <a:t>grupos demográficos</a:t>
             </a:r>
           </a:p>
         </p:txBody>
@@ -11997,8 +11740,100 @@
         </p:nvSpPr>
         <p:spPr>
           <a:xfrm>
-            <a:off x="9889236" y="2651760"/>
-            <a:ext cx="2468880" cy="457200"/>
+            <a:off x="5029200" y="3566160"/>
+            <a:ext cx="6766560" cy="2377440"/>
+          </a:xfrm>
+          <a:prstGeom prst="rect">
+            <a:avLst/>
+          </a:prstGeom>
+          <a:noFill/>
+        </p:spPr>
+        <p:txBody>
+          <a:bodyPr wrap="square">
+            <a:spAutoFit/>
+          </a:bodyPr>
+          <a:lstStyle/>
+          <a:p>
+            <a:pPr>
+              <a:spcAft>
+                <a:spcPts val="700"/>
+              </a:spcAft>
+            </a:pPr>
+            <a:r>
+              <a:rPr sz="1600" b="1">
+                <a:solidFill>
+                  <a:srgbClr val="1F2A4E"/>
+                </a:solidFill>
+              </a:rPr>
+              <a:t>NIST 2019 (Grother et al.): </a:t>
+            </a:r>
+            <a:r>
+              <a:rPr sz="1600">
+                <a:solidFill>
+                  <a:srgbClr val="3D424E"/>
+                </a:solidFill>
+              </a:rPr>
+              <a:t>maior auditoria pública já feita em biometria facial — 189 algoritmos comerciais avaliados sobre 18 milhões de imagens.</a:t>
+            </a:r>
+          </a:p>
+          <a:p>
+            <a:pPr>
+              <a:spcAft>
+                <a:spcPts val="700"/>
+              </a:spcAft>
+            </a:pPr>
+            <a:r>
+              <a:rPr sz="1600" b="1">
+                <a:solidFill>
+                  <a:srgbClr val="1F2A4E"/>
+                </a:solidFill>
+              </a:rPr>
+              <a:t>Gender Shades (Buolamwini &amp; Gebru, 2018): </a:t>
+            </a:r>
+            <a:r>
+              <a:rPr sz="1600">
+                <a:solidFill>
+                  <a:srgbClr val="3D424E"/>
+                </a:solidFill>
+              </a:rPr>
+              <a:t>estudo fundacional que colocou o viés racial-de-gênero na agenda pública.</a:t>
+            </a:r>
+          </a:p>
+          <a:p>
+            <a:pPr>
+              <a:spcAft>
+                <a:spcPts val="700"/>
+              </a:spcAft>
+            </a:pPr>
+            <a:r>
+              <a:rPr sz="1600" b="1">
+                <a:solidFill>
+                  <a:srgbClr val="1F2A4E"/>
+                </a:solidFill>
+              </a:rPr>
+              <a:t>Conclusão: </a:t>
+            </a:r>
+            <a:r>
+              <a:rPr sz="1600">
+                <a:solidFill>
+                  <a:srgbClr val="3D424E"/>
+                </a:solidFill>
+              </a:rPr>
+              <a:t>desempenho agregado favorável coexiste com disparidade sistemática entre subgrupos demográficos.</a:t>
+            </a:r>
+          </a:p>
+        </p:txBody>
+      </p:sp>
+      <p:sp>
+        <p:nvSpPr>
+          <p:cNvPr id="20" name="TextBox 19"/>
+          <p:cNvSpPr txBox="1"/>
+          <p:nvPr/>
+        </p:nvSpPr>
+        <p:spPr>
+          <a:xfrm>
+            <a:off x="457200" y="6446520"/>
+            <a:ext cx="10515600" cy="365760"/>
           </a:xfrm>
           <a:prstGeom prst="rect">
             <a:avLst/>
@@ -12011,142 +11846,29 @@
           </a:bodyPr>
           <a:lstStyle/>
           <a:p>
-            <a:pPr algn="ctr">
-              <a:defRPr sz="1600" b="1">
-                <a:solidFill>
-                  <a:srgbClr val="1F2A4E"/>
-                </a:solidFill>
-              </a:defRPr>
-            </a:pPr>
-            <a:r>
-              <a:t>FAccT</a:t>
-            </a:r>
-          </a:p>
-        </p:txBody>
-      </p:sp>
-      <p:sp>
-        <p:nvSpPr>
-          <p:cNvPr id="20" name="TextBox 19"/>
+            <a:pPr>
+              <a:defRPr sz="900" i="1">
+                <a:solidFill>
+                  <a:srgbClr val="707682"/>
+                </a:solidFill>
+              </a:defRPr>
+            </a:pPr>
+            <a:r>
+              <a:t>Exame de Qualificação · Marcello Ozzetti · Orientação: Prof. Dr. Marcos G. Quiles · PPG-CC UNIFESP/ICT</a:t>
+            </a:r>
+          </a:p>
+        </p:txBody>
+      </p:sp>
+      <p:sp>
+        <p:nvSpPr>
+          <p:cNvPr id="21" name="TextBox 20"/>
           <p:cNvSpPr txBox="1"/>
           <p:nvPr/>
         </p:nvSpPr>
         <p:spPr>
           <a:xfrm>
-            <a:off x="9752076" y="3246120"/>
-            <a:ext cx="2743200" cy="2194560"/>
-          </a:xfrm>
-          <a:prstGeom prst="rect">
-            <a:avLst/>
-          </a:prstGeom>
-          <a:noFill/>
-        </p:spPr>
-        <p:txBody>
-          <a:bodyPr wrap="square">
-            <a:spAutoFit/>
-          </a:bodyPr>
-          <a:lstStyle/>
-          <a:p>
-            <a:pPr algn="ctr">
-              <a:defRPr sz="1300">
-                <a:solidFill>
-                  <a:srgbClr val="3D424E"/>
-                </a:solidFill>
-              </a:defRPr>
-            </a:pPr>
-            <a:r>
-              <a:t>Lafargue et al. propõem pipeline de auditoria com propagação de incerteza.</a:t>
-            </a:r>
-          </a:p>
-        </p:txBody>
-      </p:sp>
-      <p:sp>
-        <p:nvSpPr>
-          <p:cNvPr id="21" name="Rounded Rectangle 20"/>
-          <p:cNvSpPr/>
-          <p:nvPr/>
-        </p:nvSpPr>
-        <p:spPr>
-          <a:xfrm>
-            <a:off x="640080" y="5120640"/>
-            <a:ext cx="10881360" cy="1005840"/>
-          </a:xfrm>
-          <a:prstGeom prst="roundRect">
-            <a:avLst/>
-          </a:prstGeom>
-          <a:solidFill>
-            <a:srgbClr val="1F2A4E"/>
-          </a:solidFill>
-          <a:ln>
-            <a:noFill/>
-          </a:ln>
-        </p:spPr>
-        <p:style>
-          <a:lnRef idx="1">
-            <a:schemeClr val="accent1"/>
-          </a:lnRef>
-          <a:fillRef idx="3">
-            <a:schemeClr val="accent1"/>
-          </a:fillRef>
-          <a:effectRef idx="2">
-            <a:schemeClr val="accent1"/>
-          </a:effectRef>
-          <a:fontRef idx="minor">
-            <a:schemeClr val="lt1"/>
-          </a:fontRef>
-        </p:style>
-        <p:txBody>
-          <a:bodyPr rtlCol="0" anchor="ctr"/>
-          <a:lstStyle/>
-          <a:p>
-            <a:pPr algn="ctr"/>
-          </a:p>
-        </p:txBody>
-      </p:sp>
-      <p:sp>
-        <p:nvSpPr>
-          <p:cNvPr id="22" name="TextBox 21"/>
-          <p:cNvSpPr txBox="1"/>
-          <p:nvPr/>
-        </p:nvSpPr>
-        <p:spPr>
-          <a:xfrm>
-            <a:off x="822960" y="5230368"/>
-            <a:ext cx="10515600" cy="822960"/>
-          </a:xfrm>
-          <a:prstGeom prst="rect">
-            <a:avLst/>
-          </a:prstGeom>
-          <a:noFill/>
-        </p:spPr>
-        <p:txBody>
-          <a:bodyPr wrap="square">
-            <a:spAutoFit/>
-          </a:bodyPr>
-          <a:lstStyle/>
-          <a:p>
-            <a:pPr algn="ctr">
-              <a:defRPr sz="1500" i="1">
-                <a:solidFill>
-                  <a:srgbClr val="FFFFFF"/>
-                </a:solidFill>
-              </a:defRPr>
-            </a:pPr>
-            <a:r>
-              <a:t>A questão científica desloca-se da constatação do viés — empiricamente estabelecida — para o desenvolvimento de mecanismos de mitigação defensáveis e auditáveis.</a:t>
-            </a:r>
-          </a:p>
-        </p:txBody>
-      </p:sp>
-      <p:sp>
-        <p:nvSpPr>
-          <p:cNvPr id="23" name="TextBox 22"/>
-          <p:cNvSpPr txBox="1"/>
-          <p:nvPr/>
-        </p:nvSpPr>
-        <p:spPr>
-          <a:xfrm>
-            <a:off x="457200" y="6446520"/>
-            <a:ext cx="10515600" cy="365760"/>
+            <a:off x="11521440" y="6446520"/>
+            <a:ext cx="640080" cy="365760"/>
           </a:xfrm>
           <a:prstGeom prst="rect">
             <a:avLst/>
@@ -12167,42 +11889,7 @@
               </a:defRPr>
             </a:pPr>
             <a:r>
-              <a:t>Exame de Qualificação · Marcello Ozzetti · Orientação: Prof. Dr. Marcos G. Quiles · PPG-CC UNIFESP/ICT</a:t>
-            </a:r>
-          </a:p>
-        </p:txBody>
-      </p:sp>
-      <p:sp>
-        <p:nvSpPr>
-          <p:cNvPr id="24" name="TextBox 23"/>
-          <p:cNvSpPr txBox="1"/>
-          <p:nvPr/>
-        </p:nvSpPr>
-        <p:spPr>
-          <a:xfrm>
-            <a:off x="11521440" y="6446520"/>
-            <a:ext cx="640080" cy="365760"/>
-          </a:xfrm>
-          <a:prstGeom prst="rect">
-            <a:avLst/>
-          </a:prstGeom>
-          <a:noFill/>
-        </p:spPr>
-        <p:txBody>
-          <a:bodyPr wrap="none">
-            <a:spAutoFit/>
-          </a:bodyPr>
-          <a:lstStyle/>
-          <a:p>
-            <a:pPr>
-              <a:defRPr sz="900" i="1">
-                <a:solidFill>
-                  <a:srgbClr val="707682"/>
-                </a:solidFill>
-              </a:defRPr>
-            </a:pPr>
-            <a:r>
-              <a:t>3 / 28</a:t>
+              <a:t>3 / 29</a:t>
             </a:r>
           </a:p>
         </p:txBody>
@@ -12255,7 +11942,7 @@
               </a:defRPr>
             </a:pPr>
             <a:r>
-              <a:t>Disparidade sistemática de aproximadamente 30 pontos percentuais entre grupos raciais</a:t>
+              <a:t>Regulação formal em vigor: European AI Act (2024)</a:t>
             </a:r>
           </a:p>
         </p:txBody>
@@ -12303,40 +11990,104 @@
           </a:p>
         </p:txBody>
       </p:sp>
-      <p:pic>
-        <p:nvPicPr>
-          <p:cNvPr id="4" name="Picture 3" descr="fig_disparidade_racial.png"/>
-          <p:cNvPicPr>
-            <a:picLocks noChangeAspect="1"/>
-          </p:cNvPicPr>
-          <p:nvPr/>
-        </p:nvPicPr>
-        <p:blipFill>
-          <a:blip r:embed="rId2"/>
-          <a:stretch>
-            <a:fillRect/>
-          </a:stretch>
-        </p:blipFill>
-        <p:spPr>
-          <a:xfrm>
-            <a:off x="1089190" y="1371600"/>
-            <a:ext cx="10010570" cy="4389120"/>
-          </a:xfrm>
-          <a:prstGeom prst="rect">
-            <a:avLst/>
-          </a:prstGeom>
-        </p:spPr>
-      </p:pic>
-      <p:sp>
-        <p:nvSpPr>
-          <p:cNvPr id="5" name="TextBox 4"/>
+      <p:sp>
+        <p:nvSpPr>
+          <p:cNvPr id="4" name="Rectangle 3"/>
+          <p:cNvSpPr/>
+          <p:nvPr/>
+        </p:nvSpPr>
+        <p:spPr>
+          <a:xfrm>
+            <a:off x="1065276" y="2167128"/>
+            <a:ext cx="10058400" cy="54864"/>
+          </a:xfrm>
+          <a:prstGeom prst="rect">
+            <a:avLst/>
+          </a:prstGeom>
+          <a:solidFill>
+            <a:srgbClr val="707682"/>
+          </a:solidFill>
+          <a:ln>
+            <a:noFill/>
+          </a:ln>
+        </p:spPr>
+        <p:style>
+          <a:lnRef idx="1">
+            <a:schemeClr val="accent1"/>
+          </a:lnRef>
+          <a:fillRef idx="3">
+            <a:schemeClr val="accent1"/>
+          </a:fillRef>
+          <a:effectRef idx="2">
+            <a:schemeClr val="accent1"/>
+          </a:effectRef>
+          <a:fontRef idx="minor">
+            <a:schemeClr val="lt1"/>
+          </a:fontRef>
+        </p:style>
+        <p:txBody>
+          <a:bodyPr rtlCol="0" anchor="ctr"/>
+          <a:lstStyle/>
+          <a:p>
+            <a:pPr algn="ctr"/>
+          </a:p>
+        </p:txBody>
+      </p:sp>
+      <p:sp>
+        <p:nvSpPr>
+          <p:cNvPr id="5" name="Oval 4"/>
+          <p:cNvSpPr/>
+          <p:nvPr/>
+        </p:nvSpPr>
+        <p:spPr>
+          <a:xfrm>
+            <a:off x="745236" y="1874519"/>
+            <a:ext cx="640080" cy="640080"/>
+          </a:xfrm>
+          <a:prstGeom prst="ellipse">
+            <a:avLst/>
+          </a:prstGeom>
+          <a:solidFill>
+            <a:srgbClr val="1F2A4E"/>
+          </a:solidFill>
+          <a:ln>
+            <a:solidFill>
+              <a:srgbClr val="FFFFFF"/>
+            </a:solidFill>
+          </a:ln>
+        </p:spPr>
+        <p:style>
+          <a:lnRef idx="1">
+            <a:schemeClr val="accent1"/>
+          </a:lnRef>
+          <a:fillRef idx="3">
+            <a:schemeClr val="accent1"/>
+          </a:fillRef>
+          <a:effectRef idx="2">
+            <a:schemeClr val="accent1"/>
+          </a:effectRef>
+          <a:fontRef idx="minor">
+            <a:schemeClr val="lt1"/>
+          </a:fontRef>
+        </p:style>
+        <p:txBody>
+          <a:bodyPr rtlCol="0" anchor="ctr"/>
+          <a:lstStyle/>
+          <a:p>
+            <a:pPr algn="ctr"/>
+          </a:p>
+        </p:txBody>
+      </p:sp>
+      <p:sp>
+        <p:nvSpPr>
+          <p:cNvPr id="6" name="TextBox 5"/>
           <p:cNvSpPr txBox="1"/>
           <p:nvPr/>
         </p:nvSpPr>
         <p:spPr>
           <a:xfrm>
-            <a:off x="457200" y="5989320"/>
-            <a:ext cx="11430000" cy="365760"/>
+            <a:off x="379476" y="1188719"/>
+            <a:ext cx="1371600" cy="457200"/>
           </a:xfrm>
           <a:prstGeom prst="rect">
             <a:avLst/>
@@ -12350,28 +12101,28 @@
           <a:lstStyle/>
           <a:p>
             <a:pPr algn="ctr">
-              <a:defRPr sz="1400" i="1">
-                <a:solidFill>
-                  <a:srgbClr val="707682"/>
-                </a:solidFill>
-              </a:defRPr>
-            </a:pPr>
-            <a:r>
-              <a:t>FaceScanPaliGemma (AlDahoul et al., 2024) avaliado sobre o dataset FairFace (Kärkkäinen &amp; Joo, 2021). Diferencial entre Black e Latinx: 30 pontos percentuais em F1.</a:t>
-            </a:r>
-          </a:p>
-        </p:txBody>
-      </p:sp>
-      <p:sp>
-        <p:nvSpPr>
-          <p:cNvPr id="6" name="TextBox 5"/>
+              <a:defRPr sz="2200" b="1">
+                <a:solidFill>
+                  <a:srgbClr val="1F2A4E"/>
+                </a:solidFill>
+              </a:defRPr>
+            </a:pPr>
+            <a:r>
+              <a:t>2018</a:t>
+            </a:r>
+          </a:p>
+        </p:txBody>
+      </p:sp>
+      <p:sp>
+        <p:nvSpPr>
+          <p:cNvPr id="7" name="TextBox 6"/>
           <p:cNvSpPr txBox="1"/>
           <p:nvPr/>
         </p:nvSpPr>
         <p:spPr>
           <a:xfrm>
-            <a:off x="457200" y="6446520"/>
-            <a:ext cx="10515600" cy="365760"/>
+            <a:off x="-169164" y="2651760"/>
+            <a:ext cx="2468880" cy="457200"/>
           </a:xfrm>
           <a:prstGeom prst="rect">
             <a:avLst/>
@@ -12384,29 +12135,109 @@
           </a:bodyPr>
           <a:lstStyle/>
           <a:p>
-            <a:pPr>
-              <a:defRPr sz="900" i="1">
-                <a:solidFill>
-                  <a:srgbClr val="707682"/>
-                </a:solidFill>
-              </a:defRPr>
-            </a:pPr>
-            <a:r>
-              <a:t>Exame de Qualificação · Marcello Ozzetti · Orientação: Prof. Dr. Marcos G. Quiles · PPG-CC UNIFESP/ICT</a:t>
-            </a:r>
-          </a:p>
-        </p:txBody>
-      </p:sp>
-      <p:sp>
-        <p:nvSpPr>
-          <p:cNvPr id="7" name="TextBox 6"/>
+            <a:pPr algn="ctr">
+              <a:defRPr sz="1600" b="1">
+                <a:solidFill>
+                  <a:srgbClr val="1F2A4E"/>
+                </a:solidFill>
+              </a:defRPr>
+            </a:pPr>
+            <a:r>
+              <a:t>Gender Shades</a:t>
+            </a:r>
+          </a:p>
+        </p:txBody>
+      </p:sp>
+      <p:sp>
+        <p:nvSpPr>
+          <p:cNvPr id="8" name="TextBox 7"/>
           <p:cNvSpPr txBox="1"/>
           <p:nvPr/>
         </p:nvSpPr>
         <p:spPr>
           <a:xfrm>
-            <a:off x="11521440" y="6446520"/>
-            <a:ext cx="640080" cy="365760"/>
+            <a:off x="-306323" y="3246120"/>
+            <a:ext cx="2743200" cy="2194560"/>
+          </a:xfrm>
+          <a:prstGeom prst="rect">
+            <a:avLst/>
+          </a:prstGeom>
+          <a:noFill/>
+        </p:spPr>
+        <p:txBody>
+          <a:bodyPr wrap="square">
+            <a:spAutoFit/>
+          </a:bodyPr>
+          <a:lstStyle/>
+          <a:p>
+            <a:pPr algn="ctr">
+              <a:defRPr sz="1300">
+                <a:solidFill>
+                  <a:srgbClr val="3D424E"/>
+                </a:solidFill>
+              </a:defRPr>
+            </a:pPr>
+            <a:r>
+              <a:t>Buolamwini &amp; Gebru colocam o viés na agenda.</a:t>
+            </a:r>
+          </a:p>
+        </p:txBody>
+      </p:sp>
+      <p:sp>
+        <p:nvSpPr>
+          <p:cNvPr id="9" name="Oval 8"/>
+          <p:cNvSpPr/>
+          <p:nvPr/>
+        </p:nvSpPr>
+        <p:spPr>
+          <a:xfrm>
+            <a:off x="4098036" y="1874519"/>
+            <a:ext cx="640080" cy="640080"/>
+          </a:xfrm>
+          <a:prstGeom prst="ellipse">
+            <a:avLst/>
+          </a:prstGeom>
+          <a:solidFill>
+            <a:srgbClr val="1F2A4E"/>
+          </a:solidFill>
+          <a:ln>
+            <a:solidFill>
+              <a:srgbClr val="FFFFFF"/>
+            </a:solidFill>
+          </a:ln>
+        </p:spPr>
+        <p:style>
+          <a:lnRef idx="1">
+            <a:schemeClr val="accent1"/>
+          </a:lnRef>
+          <a:fillRef idx="3">
+            <a:schemeClr val="accent1"/>
+          </a:fillRef>
+          <a:effectRef idx="2">
+            <a:schemeClr val="accent1"/>
+          </a:effectRef>
+          <a:fontRef idx="minor">
+            <a:schemeClr val="lt1"/>
+          </a:fontRef>
+        </p:style>
+        <p:txBody>
+          <a:bodyPr rtlCol="0" anchor="ctr"/>
+          <a:lstStyle/>
+          <a:p>
+            <a:pPr algn="ctr"/>
+          </a:p>
+        </p:txBody>
+      </p:sp>
+      <p:sp>
+        <p:nvSpPr>
+          <p:cNvPr id="10" name="TextBox 9"/>
+          <p:cNvSpPr txBox="1"/>
+          <p:nvPr/>
+        </p:nvSpPr>
+        <p:spPr>
+          <a:xfrm>
+            <a:off x="3732276" y="1188719"/>
+            <a:ext cx="1371600" cy="457200"/>
           </a:xfrm>
           <a:prstGeom prst="rect">
             <a:avLst/>
@@ -12419,6 +12250,489 @@
           </a:bodyPr>
           <a:lstStyle/>
           <a:p>
+            <a:pPr algn="ctr">
+              <a:defRPr sz="2200" b="1">
+                <a:solidFill>
+                  <a:srgbClr val="1F2A4E"/>
+                </a:solidFill>
+              </a:defRPr>
+            </a:pPr>
+            <a:r>
+              <a:t>2019</a:t>
+            </a:r>
+          </a:p>
+        </p:txBody>
+      </p:sp>
+      <p:sp>
+        <p:nvSpPr>
+          <p:cNvPr id="11" name="TextBox 10"/>
+          <p:cNvSpPr txBox="1"/>
+          <p:nvPr/>
+        </p:nvSpPr>
+        <p:spPr>
+          <a:xfrm>
+            <a:off x="3183636" y="2651760"/>
+            <a:ext cx="2468880" cy="457200"/>
+          </a:xfrm>
+          <a:prstGeom prst="rect">
+            <a:avLst/>
+          </a:prstGeom>
+          <a:noFill/>
+        </p:spPr>
+        <p:txBody>
+          <a:bodyPr wrap="none">
+            <a:spAutoFit/>
+          </a:bodyPr>
+          <a:lstStyle/>
+          <a:p>
+            <a:pPr algn="ctr">
+              <a:defRPr sz="1600" b="1">
+                <a:solidFill>
+                  <a:srgbClr val="1F2A4E"/>
+                </a:solidFill>
+              </a:defRPr>
+            </a:pPr>
+            <a:r>
+              <a:t>NIST FRVT</a:t>
+            </a:r>
+          </a:p>
+        </p:txBody>
+      </p:sp>
+      <p:sp>
+        <p:nvSpPr>
+          <p:cNvPr id="12" name="TextBox 11"/>
+          <p:cNvSpPr txBox="1"/>
+          <p:nvPr/>
+        </p:nvSpPr>
+        <p:spPr>
+          <a:xfrm>
+            <a:off x="3046476" y="3246120"/>
+            <a:ext cx="2743200" cy="2194560"/>
+          </a:xfrm>
+          <a:prstGeom prst="rect">
+            <a:avLst/>
+          </a:prstGeom>
+          <a:noFill/>
+        </p:spPr>
+        <p:txBody>
+          <a:bodyPr wrap="square">
+            <a:spAutoFit/>
+          </a:bodyPr>
+          <a:lstStyle/>
+          <a:p>
+            <a:pPr algn="ctr">
+              <a:defRPr sz="1300">
+                <a:solidFill>
+                  <a:srgbClr val="3D424E"/>
+                </a:solidFill>
+              </a:defRPr>
+            </a:pPr>
+            <a:r>
+              <a:t>Grother et al. documentam disparidade 10–100× em escala industrial.</a:t>
+            </a:r>
+          </a:p>
+        </p:txBody>
+      </p:sp>
+      <p:sp>
+        <p:nvSpPr>
+          <p:cNvPr id="13" name="Oval 12"/>
+          <p:cNvSpPr/>
+          <p:nvPr/>
+        </p:nvSpPr>
+        <p:spPr>
+          <a:xfrm>
+            <a:off x="7450836" y="1874519"/>
+            <a:ext cx="640080" cy="640080"/>
+          </a:xfrm>
+          <a:prstGeom prst="ellipse">
+            <a:avLst/>
+          </a:prstGeom>
+          <a:solidFill>
+            <a:srgbClr val="C0392B"/>
+          </a:solidFill>
+          <a:ln>
+            <a:solidFill>
+              <a:srgbClr val="FFFFFF"/>
+            </a:solidFill>
+          </a:ln>
+        </p:spPr>
+        <p:style>
+          <a:lnRef idx="1">
+            <a:schemeClr val="accent1"/>
+          </a:lnRef>
+          <a:fillRef idx="3">
+            <a:schemeClr val="accent1"/>
+          </a:fillRef>
+          <a:effectRef idx="2">
+            <a:schemeClr val="accent1"/>
+          </a:effectRef>
+          <a:fontRef idx="minor">
+            <a:schemeClr val="lt1"/>
+          </a:fontRef>
+        </p:style>
+        <p:txBody>
+          <a:bodyPr rtlCol="0" anchor="ctr"/>
+          <a:lstStyle/>
+          <a:p>
+            <a:pPr algn="ctr"/>
+          </a:p>
+        </p:txBody>
+      </p:sp>
+      <p:sp>
+        <p:nvSpPr>
+          <p:cNvPr id="14" name="TextBox 13"/>
+          <p:cNvSpPr txBox="1"/>
+          <p:nvPr/>
+        </p:nvSpPr>
+        <p:spPr>
+          <a:xfrm>
+            <a:off x="7085076" y="1188719"/>
+            <a:ext cx="1371600" cy="457200"/>
+          </a:xfrm>
+          <a:prstGeom prst="rect">
+            <a:avLst/>
+          </a:prstGeom>
+          <a:noFill/>
+        </p:spPr>
+        <p:txBody>
+          <a:bodyPr wrap="none">
+            <a:spAutoFit/>
+          </a:bodyPr>
+          <a:lstStyle/>
+          <a:p>
+            <a:pPr algn="ctr">
+              <a:defRPr sz="2200" b="1">
+                <a:solidFill>
+                  <a:srgbClr val="C0392B"/>
+                </a:solidFill>
+              </a:defRPr>
+            </a:pPr>
+            <a:r>
+              <a:t>2024</a:t>
+            </a:r>
+          </a:p>
+        </p:txBody>
+      </p:sp>
+      <p:sp>
+        <p:nvSpPr>
+          <p:cNvPr id="15" name="TextBox 14"/>
+          <p:cNvSpPr txBox="1"/>
+          <p:nvPr/>
+        </p:nvSpPr>
+        <p:spPr>
+          <a:xfrm>
+            <a:off x="6536436" y="2651760"/>
+            <a:ext cx="2468880" cy="457200"/>
+          </a:xfrm>
+          <a:prstGeom prst="rect">
+            <a:avLst/>
+          </a:prstGeom>
+          <a:noFill/>
+        </p:spPr>
+        <p:txBody>
+          <a:bodyPr wrap="none">
+            <a:spAutoFit/>
+          </a:bodyPr>
+          <a:lstStyle/>
+          <a:p>
+            <a:pPr algn="ctr">
+              <a:defRPr sz="1600" b="1">
+                <a:solidFill>
+                  <a:srgbClr val="1F2A4E"/>
+                </a:solidFill>
+              </a:defRPr>
+            </a:pPr>
+            <a:r>
+              <a:t>EU AI Act</a:t>
+            </a:r>
+          </a:p>
+        </p:txBody>
+      </p:sp>
+      <p:sp>
+        <p:nvSpPr>
+          <p:cNvPr id="16" name="TextBox 15"/>
+          <p:cNvSpPr txBox="1"/>
+          <p:nvPr/>
+        </p:nvSpPr>
+        <p:spPr>
+          <a:xfrm>
+            <a:off x="6399276" y="3246120"/>
+            <a:ext cx="2743200" cy="2194560"/>
+          </a:xfrm>
+          <a:prstGeom prst="rect">
+            <a:avLst/>
+          </a:prstGeom>
+          <a:noFill/>
+        </p:spPr>
+        <p:txBody>
+          <a:bodyPr wrap="square">
+            <a:spAutoFit/>
+          </a:bodyPr>
+          <a:lstStyle/>
+          <a:p>
+            <a:pPr algn="ctr">
+              <a:defRPr sz="1300">
+                <a:solidFill>
+                  <a:srgbClr val="3D424E"/>
+                </a:solidFill>
+              </a:defRPr>
+            </a:pPr>
+            <a:r>
+              <a:t>Auditoria de equidade torna-se requisito formal para sistemas biométricos.</a:t>
+            </a:r>
+          </a:p>
+        </p:txBody>
+      </p:sp>
+      <p:sp>
+        <p:nvSpPr>
+          <p:cNvPr id="17" name="Oval 16"/>
+          <p:cNvSpPr/>
+          <p:nvPr/>
+        </p:nvSpPr>
+        <p:spPr>
+          <a:xfrm>
+            <a:off x="10803636" y="1874519"/>
+            <a:ext cx="640080" cy="640080"/>
+          </a:xfrm>
+          <a:prstGeom prst="ellipse">
+            <a:avLst/>
+          </a:prstGeom>
+          <a:solidFill>
+            <a:srgbClr val="1F2A4E"/>
+          </a:solidFill>
+          <a:ln>
+            <a:solidFill>
+              <a:srgbClr val="FFFFFF"/>
+            </a:solidFill>
+          </a:ln>
+        </p:spPr>
+        <p:style>
+          <a:lnRef idx="1">
+            <a:schemeClr val="accent1"/>
+          </a:lnRef>
+          <a:fillRef idx="3">
+            <a:schemeClr val="accent1"/>
+          </a:fillRef>
+          <a:effectRef idx="2">
+            <a:schemeClr val="accent1"/>
+          </a:effectRef>
+          <a:fontRef idx="minor">
+            <a:schemeClr val="lt1"/>
+          </a:fontRef>
+        </p:style>
+        <p:txBody>
+          <a:bodyPr rtlCol="0" anchor="ctr"/>
+          <a:lstStyle/>
+          <a:p>
+            <a:pPr algn="ctr"/>
+          </a:p>
+        </p:txBody>
+      </p:sp>
+      <p:sp>
+        <p:nvSpPr>
+          <p:cNvPr id="18" name="TextBox 17"/>
+          <p:cNvSpPr txBox="1"/>
+          <p:nvPr/>
+        </p:nvSpPr>
+        <p:spPr>
+          <a:xfrm>
+            <a:off x="10437876" y="1188719"/>
+            <a:ext cx="1371600" cy="457200"/>
+          </a:xfrm>
+          <a:prstGeom prst="rect">
+            <a:avLst/>
+          </a:prstGeom>
+          <a:noFill/>
+        </p:spPr>
+        <p:txBody>
+          <a:bodyPr wrap="none">
+            <a:spAutoFit/>
+          </a:bodyPr>
+          <a:lstStyle/>
+          <a:p>
+            <a:pPr algn="ctr">
+              <a:defRPr sz="2200" b="1">
+                <a:solidFill>
+                  <a:srgbClr val="1F2A4E"/>
+                </a:solidFill>
+              </a:defRPr>
+            </a:pPr>
+            <a:r>
+              <a:t>2025</a:t>
+            </a:r>
+          </a:p>
+        </p:txBody>
+      </p:sp>
+      <p:sp>
+        <p:nvSpPr>
+          <p:cNvPr id="19" name="TextBox 18"/>
+          <p:cNvSpPr txBox="1"/>
+          <p:nvPr/>
+        </p:nvSpPr>
+        <p:spPr>
+          <a:xfrm>
+            <a:off x="9889236" y="2651760"/>
+            <a:ext cx="2468880" cy="457200"/>
+          </a:xfrm>
+          <a:prstGeom prst="rect">
+            <a:avLst/>
+          </a:prstGeom>
+          <a:noFill/>
+        </p:spPr>
+        <p:txBody>
+          <a:bodyPr wrap="none">
+            <a:spAutoFit/>
+          </a:bodyPr>
+          <a:lstStyle/>
+          <a:p>
+            <a:pPr algn="ctr">
+              <a:defRPr sz="1600" b="1">
+                <a:solidFill>
+                  <a:srgbClr val="1F2A4E"/>
+                </a:solidFill>
+              </a:defRPr>
+            </a:pPr>
+            <a:r>
+              <a:t>FAccT</a:t>
+            </a:r>
+          </a:p>
+        </p:txBody>
+      </p:sp>
+      <p:sp>
+        <p:nvSpPr>
+          <p:cNvPr id="20" name="TextBox 19"/>
+          <p:cNvSpPr txBox="1"/>
+          <p:nvPr/>
+        </p:nvSpPr>
+        <p:spPr>
+          <a:xfrm>
+            <a:off x="9752076" y="3246120"/>
+            <a:ext cx="2743200" cy="2194560"/>
+          </a:xfrm>
+          <a:prstGeom prst="rect">
+            <a:avLst/>
+          </a:prstGeom>
+          <a:noFill/>
+        </p:spPr>
+        <p:txBody>
+          <a:bodyPr wrap="square">
+            <a:spAutoFit/>
+          </a:bodyPr>
+          <a:lstStyle/>
+          <a:p>
+            <a:pPr algn="ctr">
+              <a:defRPr sz="1300">
+                <a:solidFill>
+                  <a:srgbClr val="3D424E"/>
+                </a:solidFill>
+              </a:defRPr>
+            </a:pPr>
+            <a:r>
+              <a:t>Lafargue et al. propõem pipeline de auditoria com propagação de incerteza.</a:t>
+            </a:r>
+          </a:p>
+        </p:txBody>
+      </p:sp>
+      <p:sp>
+        <p:nvSpPr>
+          <p:cNvPr id="21" name="Rounded Rectangle 20"/>
+          <p:cNvSpPr/>
+          <p:nvPr/>
+        </p:nvSpPr>
+        <p:spPr>
+          <a:xfrm>
+            <a:off x="640080" y="5120640"/>
+            <a:ext cx="10881360" cy="1005840"/>
+          </a:xfrm>
+          <a:prstGeom prst="roundRect">
+            <a:avLst/>
+          </a:prstGeom>
+          <a:solidFill>
+            <a:srgbClr val="1F2A4E"/>
+          </a:solidFill>
+          <a:ln>
+            <a:noFill/>
+          </a:ln>
+        </p:spPr>
+        <p:style>
+          <a:lnRef idx="1">
+            <a:schemeClr val="accent1"/>
+          </a:lnRef>
+          <a:fillRef idx="3">
+            <a:schemeClr val="accent1"/>
+          </a:fillRef>
+          <a:effectRef idx="2">
+            <a:schemeClr val="accent1"/>
+          </a:effectRef>
+          <a:fontRef idx="minor">
+            <a:schemeClr val="lt1"/>
+          </a:fontRef>
+        </p:style>
+        <p:txBody>
+          <a:bodyPr rtlCol="0" anchor="ctr"/>
+          <a:lstStyle/>
+          <a:p>
+            <a:pPr algn="ctr"/>
+          </a:p>
+        </p:txBody>
+      </p:sp>
+      <p:sp>
+        <p:nvSpPr>
+          <p:cNvPr id="22" name="TextBox 21"/>
+          <p:cNvSpPr txBox="1"/>
+          <p:nvPr/>
+        </p:nvSpPr>
+        <p:spPr>
+          <a:xfrm>
+            <a:off x="822960" y="5230368"/>
+            <a:ext cx="10515600" cy="822960"/>
+          </a:xfrm>
+          <a:prstGeom prst="rect">
+            <a:avLst/>
+          </a:prstGeom>
+          <a:noFill/>
+        </p:spPr>
+        <p:txBody>
+          <a:bodyPr wrap="square">
+            <a:spAutoFit/>
+          </a:bodyPr>
+          <a:lstStyle/>
+          <a:p>
+            <a:pPr algn="ctr">
+              <a:defRPr sz="1500" i="1">
+                <a:solidFill>
+                  <a:srgbClr val="FFFFFF"/>
+                </a:solidFill>
+              </a:defRPr>
+            </a:pPr>
+            <a:r>
+              <a:t>A questão científica desloca-se da constatação do viés — empiricamente estabelecida — para o desenvolvimento de mecanismos de mitigação defensáveis e auditáveis.</a:t>
+            </a:r>
+          </a:p>
+        </p:txBody>
+      </p:sp>
+      <p:sp>
+        <p:nvSpPr>
+          <p:cNvPr id="23" name="TextBox 22"/>
+          <p:cNvSpPr txBox="1"/>
+          <p:nvPr/>
+        </p:nvSpPr>
+        <p:spPr>
+          <a:xfrm>
+            <a:off x="457200" y="6446520"/>
+            <a:ext cx="10515600" cy="365760"/>
+          </a:xfrm>
+          <a:prstGeom prst="rect">
+            <a:avLst/>
+          </a:prstGeom>
+          <a:noFill/>
+        </p:spPr>
+        <p:txBody>
+          <a:bodyPr wrap="none">
+            <a:spAutoFit/>
+          </a:bodyPr>
+          <a:lstStyle/>
+          <a:p>
             <a:pPr>
               <a:defRPr sz="900" i="1">
                 <a:solidFill>
@@ -12427,7 +12741,42 @@
               </a:defRPr>
             </a:pPr>
             <a:r>
-              <a:t>4 / 28</a:t>
+              <a:t>Exame de Qualificação · Marcello Ozzetti · Orientação: Prof. Dr. Marcos G. Quiles · PPG-CC UNIFESP/ICT</a:t>
+            </a:r>
+          </a:p>
+        </p:txBody>
+      </p:sp>
+      <p:sp>
+        <p:nvSpPr>
+          <p:cNvPr id="24" name="TextBox 23"/>
+          <p:cNvSpPr txBox="1"/>
+          <p:nvPr/>
+        </p:nvSpPr>
+        <p:spPr>
+          <a:xfrm>
+            <a:off x="11521440" y="6446520"/>
+            <a:ext cx="640080" cy="365760"/>
+          </a:xfrm>
+          <a:prstGeom prst="rect">
+            <a:avLst/>
+          </a:prstGeom>
+          <a:noFill/>
+        </p:spPr>
+        <p:txBody>
+          <a:bodyPr wrap="none">
+            <a:spAutoFit/>
+          </a:bodyPr>
+          <a:lstStyle/>
+          <a:p>
+            <a:pPr>
+              <a:defRPr sz="900" i="1">
+                <a:solidFill>
+                  <a:srgbClr val="707682"/>
+                </a:solidFill>
+              </a:defRPr>
+            </a:pPr>
+            <a:r>
+              <a:t>4 / 29</a:t>
             </a:r>
           </a:p>
         </p:txBody>
@@ -12480,7 +12829,7 @@
               </a:defRPr>
             </a:pPr>
             <a:r>
-              <a:t>Heterogeneidade fenotípica intra-categorial: o caso Latinx</a:t>
+              <a:t>Disparidade sistemática de aproximadamente 30 pontos percentuais entre grupos raciais</a:t>
             </a:r>
           </a:p>
         </p:txBody>
@@ -12530,7 +12879,7 @@
       </p:sp>
       <p:pic>
         <p:nvPicPr>
-          <p:cNvPr id="4" name="Picture 3" descr="fig_fitzpatrick_vs_mst.png"/>
+          <p:cNvPr id="4" name="Picture 3" descr="fig_disparidade_racial.png"/>
           <p:cNvPicPr>
             <a:picLocks noChangeAspect="1"/>
           </p:cNvPicPr>
@@ -12544,8 +12893,8 @@
         </p:blipFill>
         <p:spPr>
           <a:xfrm>
-            <a:off x="457200" y="1828800"/>
-            <a:ext cx="5669280" cy="2292169"/>
+            <a:off x="1089190" y="1371600"/>
+            <a:ext cx="10010570" cy="4389120"/>
           </a:xfrm>
           <a:prstGeom prst="rect">
             <a:avLst/>
@@ -12560,8 +12909,8 @@
         </p:nvSpPr>
         <p:spPr>
           <a:xfrm>
-            <a:off x="457200" y="5852160"/>
-            <a:ext cx="5669280" cy="365760"/>
+            <a:off x="457200" y="5989320"/>
+            <a:ext cx="11430000" cy="365760"/>
           </a:xfrm>
           <a:prstGeom prst="rect">
             <a:avLst/>
@@ -12575,14 +12924,14 @@
           <a:lstStyle/>
           <a:p>
             <a:pPr algn="ctr">
-              <a:defRPr sz="1200" i="1">
+              <a:defRPr sz="1400" i="1">
                 <a:solidFill>
                   <a:srgbClr val="707682"/>
                 </a:solidFill>
               </a:defRPr>
             </a:pPr>
             <a:r>
-              <a:t>Fitzpatrick (esq., 6 tons) × Monk (dir., 10 tons).</a:t>
+              <a:t>FaceScanPaliGemma (AlDahoul et al., 2024) avaliado sobre o dataset FairFace (Kärkkäinen &amp; Joo, 2021). Diferencial entre Black e Latinx: 30 pontos percentuais em F1.</a:t>
             </a:r>
           </a:p>
         </p:txBody>
@@ -12590,121 +12939,6 @@
       <p:sp>
         <p:nvSpPr>
           <p:cNvPr id="6" name="TextBox 5"/>
-          <p:cNvSpPr txBox="1"/>
-          <p:nvPr/>
-        </p:nvSpPr>
-        <p:spPr>
-          <a:xfrm>
-            <a:off x="6492240" y="1554480"/>
-            <a:ext cx="5303520" cy="4846320"/>
-          </a:xfrm>
-          <a:prstGeom prst="rect">
-            <a:avLst/>
-          </a:prstGeom>
-          <a:noFill/>
-        </p:spPr>
-        <p:txBody>
-          <a:bodyPr wrap="square">
-            <a:spAutoFit/>
-          </a:bodyPr>
-          <a:lstStyle/>
-          <a:p>
-            <a:pPr>
-              <a:spcAft>
-                <a:spcPts val="1000"/>
-              </a:spcAft>
-            </a:pPr>
-            <a:r>
-              <a:rPr sz="1600" b="1">
-                <a:solidFill>
-                  <a:srgbClr val="1F2A4E"/>
-                </a:solidFill>
-              </a:rPr>
-              <a:t>Rótulo monolítico:  </a:t>
-            </a:r>
-            <a:r>
-              <a:rPr sz="1600">
-                <a:solidFill>
-                  <a:srgbClr val="3D424E"/>
-                </a:solidFill>
-              </a:rPr>
-              <a:t>a rotulagem monolítica agrega fenótipos heterogêneos sob única categoria discreta.</a:t>
-            </a:r>
-          </a:p>
-          <a:p>
-            <a:pPr>
-              <a:spcAft>
-                <a:spcPts val="1000"/>
-              </a:spcAft>
-            </a:pPr>
-            <a:r>
-              <a:rPr sz="1600" b="1">
-                <a:solidFill>
-                  <a:srgbClr val="1F2A4E"/>
-                </a:solidFill>
-              </a:rPr>
-              <a:t>Escala Monk (Ellis Monk, 2019):  </a:t>
-            </a:r>
-            <a:r>
-              <a:rPr sz="1600">
-                <a:solidFill>
-                  <a:srgbClr val="3D424E"/>
-                </a:solidFill>
-              </a:rPr>
-              <a:t>escala de 10 tons — sucessora moderna da escala Fitzpatrick, que sub-representa tons escuros.</a:t>
-            </a:r>
-          </a:p>
-          <a:p>
-            <a:pPr>
-              <a:spcAft>
-                <a:spcPts val="1000"/>
-              </a:spcAft>
-            </a:pPr>
-            <a:r>
-              <a:rPr sz="1600" b="1">
-                <a:solidFill>
-                  <a:srgbClr val="1F2A4E"/>
-                </a:solidFill>
-              </a:rPr>
-              <a:t>Schumann et al. (2023):  </a:t>
-            </a:r>
-            <a:r>
-              <a:rPr sz="1600">
-                <a:solidFill>
-                  <a:srgbClr val="3D424E"/>
-                </a:solidFill>
-              </a:rPr>
-              <a:t>consolida a MST como padrão moderno de auditoria de equidade em análise facial.</a:t>
-            </a:r>
-          </a:p>
-          <a:p>
-            <a:pPr>
-              <a:spcAft>
-                <a:spcPts val="1000"/>
-              </a:spcAft>
-            </a:pPr>
-            <a:r>
-              <a:rPr sz="1600" b="1">
-                <a:solidFill>
-                  <a:srgbClr val="1F2A4E"/>
-                </a:solidFill>
-              </a:rPr>
-              <a:t>Consequência:  </a:t>
-            </a:r>
-            <a:r>
-              <a:rPr sz="1600">
-                <a:solidFill>
-                  <a:srgbClr val="3D424E"/>
-                </a:solidFill>
-              </a:rPr>
-              <a:t>a rotulagem monolítica compromete a acurácia condicional em grupos com maior variabilidade fenotípica, como Latinx.</a:t>
-            </a:r>
-          </a:p>
-        </p:txBody>
-      </p:sp>
-      <p:sp>
-        <p:nvSpPr>
-          <p:cNvPr id="7" name="TextBox 6"/>
           <p:cNvSpPr txBox="1"/>
           <p:nvPr/>
         </p:nvSpPr>
@@ -12739,7 +12973,7 @@
       </p:sp>
       <p:sp>
         <p:nvSpPr>
-          <p:cNvPr id="8" name="TextBox 7"/>
+          <p:cNvPr id="7" name="TextBox 6"/>
           <p:cNvSpPr txBox="1"/>
           <p:nvPr/>
         </p:nvSpPr>
@@ -12767,7 +13001,7 @@
               </a:defRPr>
             </a:pPr>
             <a:r>
-              <a:t>5 / 28</a:t>
+              <a:t>5 / 29</a:t>
             </a:r>
           </a:p>
         </p:txBody>
@@ -12820,7 +13054,7 @@
               </a:defRPr>
             </a:pPr>
             <a:r>
-              <a:t>Refutação concorrente: tom de pele como principal fator (Pangelinan, 2023)</a:t>
+              <a:t>Heterogeneidade fenotípica intra-categorial: o caso Latinx</a:t>
             </a:r>
           </a:p>
         </p:txBody>
@@ -12868,49 +13102,30 @@
           </a:p>
         </p:txBody>
       </p:sp>
-      <p:sp>
-        <p:nvSpPr>
-          <p:cNvPr id="4" name="Rounded Rectangle 3"/>
-          <p:cNvSpPr/>
-          <p:nvPr/>
-        </p:nvSpPr>
-        <p:spPr>
-          <a:xfrm>
-            <a:off x="425196" y="1417320"/>
-            <a:ext cx="5486400" cy="502920"/>
-          </a:xfrm>
-          <a:prstGeom prst="roundRect">
-            <a:avLst/>
-          </a:prstGeom>
-          <a:solidFill>
-            <a:srgbClr val="C0392B"/>
-          </a:solidFill>
-          <a:ln>
-            <a:noFill/>
-          </a:ln>
-        </p:spPr>
-        <p:style>
-          <a:lnRef idx="1">
-            <a:schemeClr val="accent1"/>
-          </a:lnRef>
-          <a:fillRef idx="3">
-            <a:schemeClr val="accent1"/>
-          </a:fillRef>
-          <a:effectRef idx="2">
-            <a:schemeClr val="accent1"/>
-          </a:effectRef>
-          <a:fontRef idx="minor">
-            <a:schemeClr val="lt1"/>
-          </a:fontRef>
-        </p:style>
-        <p:txBody>
-          <a:bodyPr rtlCol="0" anchor="ctr"/>
-          <a:lstStyle/>
-          <a:p>
-            <a:pPr algn="ctr"/>
-          </a:p>
-        </p:txBody>
-      </p:sp>
+      <p:pic>
+        <p:nvPicPr>
+          <p:cNvPr id="4" name="Picture 3" descr="fig_fitzpatrick_vs_mst.png"/>
+          <p:cNvPicPr>
+            <a:picLocks noChangeAspect="1"/>
+          </p:cNvPicPr>
+          <p:nvPr/>
+        </p:nvPicPr>
+        <p:blipFill>
+          <a:blip r:embed="rId2"/>
+          <a:stretch>
+            <a:fillRect/>
+          </a:stretch>
+        </p:blipFill>
+        <p:spPr>
+          <a:xfrm>
+            <a:off x="457200" y="1828800"/>
+            <a:ext cx="5669280" cy="2292169"/>
+          </a:xfrm>
+          <a:prstGeom prst="rect">
+            <a:avLst/>
+          </a:prstGeom>
+        </p:spPr>
+      </p:pic>
       <p:sp>
         <p:nvSpPr>
           <p:cNvPr id="5" name="TextBox 4"/>
@@ -12919,8 +13134,8 @@
         </p:nvSpPr>
         <p:spPr>
           <a:xfrm>
-            <a:off x="425196" y="1472184"/>
-            <a:ext cx="5486400" cy="457200"/>
+            <a:off x="457200" y="5852160"/>
+            <a:ext cx="5669280" cy="365760"/>
           </a:xfrm>
           <a:prstGeom prst="rect">
             <a:avLst/>
@@ -12934,73 +13149,28 @@
           <a:lstStyle/>
           <a:p>
             <a:pPr algn="ctr">
-              <a:defRPr sz="1500" b="1">
-                <a:solidFill>
-                  <a:srgbClr val="FFFFFF"/>
-                </a:solidFill>
-              </a:defRPr>
-            </a:pPr>
-            <a:r>
-              <a:t>A CRÍTICA DA LITERATURA</a:t>
-            </a:r>
-          </a:p>
-        </p:txBody>
-      </p:sp>
-      <p:sp>
-        <p:nvSpPr>
-          <p:cNvPr id="6" name="Rounded Rectangle 5"/>
-          <p:cNvSpPr/>
-          <p:nvPr/>
-        </p:nvSpPr>
-        <p:spPr>
-          <a:xfrm>
-            <a:off x="425196" y="2011680"/>
-            <a:ext cx="5486400" cy="4343400"/>
-          </a:xfrm>
-          <a:prstGeom prst="roundRect">
-            <a:avLst/>
-          </a:prstGeom>
-          <a:solidFill>
-            <a:srgbClr val="E8EAED"/>
-          </a:solidFill>
-          <a:ln>
-            <a:solidFill>
-              <a:srgbClr val="E8EAED"/>
-            </a:solidFill>
-          </a:ln>
-        </p:spPr>
-        <p:style>
-          <a:lnRef idx="1">
-            <a:schemeClr val="accent1"/>
-          </a:lnRef>
-          <a:fillRef idx="3">
-            <a:schemeClr val="accent1"/>
-          </a:fillRef>
-          <a:effectRef idx="2">
-            <a:schemeClr val="accent1"/>
-          </a:effectRef>
-          <a:fontRef idx="minor">
-            <a:schemeClr val="lt1"/>
-          </a:fontRef>
-        </p:style>
-        <p:txBody>
-          <a:bodyPr rtlCol="0" anchor="ctr"/>
-          <a:lstStyle/>
-          <a:p>
-            <a:pPr algn="ctr"/>
-          </a:p>
-        </p:txBody>
-      </p:sp>
-      <p:sp>
-        <p:nvSpPr>
-          <p:cNvPr id="7" name="TextBox 6"/>
+              <a:defRPr sz="1200" i="1">
+                <a:solidFill>
+                  <a:srgbClr val="707682"/>
+                </a:solidFill>
+              </a:defRPr>
+            </a:pPr>
+            <a:r>
+              <a:t>Fitzpatrick (esq., 6 tons) × Monk (dir., 10 tons).</a:t>
+            </a:r>
+          </a:p>
+        </p:txBody>
+      </p:sp>
+      <p:sp>
+        <p:nvSpPr>
+          <p:cNvPr id="6" name="TextBox 5"/>
           <p:cNvSpPr txBox="1"/>
           <p:nvPr/>
         </p:nvSpPr>
         <p:spPr>
           <a:xfrm>
-            <a:off x="653796" y="2194560"/>
-            <a:ext cx="5029200" cy="4023360"/>
+            <a:off x="6492240" y="1554480"/>
+            <a:ext cx="5303520" cy="4846320"/>
           </a:xfrm>
           <a:prstGeom prst="rect">
             <a:avLst/>
@@ -13015,16 +13185,16 @@
           <a:p>
             <a:pPr>
               <a:spcAft>
-                <a:spcPts val="800"/>
+                <a:spcPts val="1000"/>
               </a:spcAft>
             </a:pPr>
             <a:r>
               <a:rPr sz="1600" b="1">
                 <a:solidFill>
-                  <a:srgbClr val="C0392B"/>
+                  <a:srgbClr val="1F2A4E"/>
                 </a:solidFill>
               </a:rPr>
-              <a:t>Pangelinan et al. (2023, FAccT):  </a:t>
+              <a:t>Rótulo monolítico:  </a:t>
             </a:r>
             <a:r>
               <a:rPr sz="1600">
@@ -13032,22 +13202,22 @@
                   <a:srgbClr val="3D424E"/>
                 </a:solidFill>
               </a:rPr>
-              <a:t>a disparidade racial em face recognition é primariamente explicada pela fração de área facial útil na imagem (pixel information), não pelo rótulo racial.</a:t>
+              <a:t>a rotulagem monolítica agrega fenótipos heterogêneos sob única categoria discreta.</a:t>
             </a:r>
           </a:p>
           <a:p>
             <a:pPr>
               <a:spcAft>
-                <a:spcPts val="800"/>
+                <a:spcPts val="1000"/>
               </a:spcAft>
             </a:pPr>
             <a:r>
               <a:rPr sz="1600" b="1">
                 <a:solidFill>
-                  <a:srgbClr val="C0392B"/>
+                  <a:srgbClr val="1F2A4E"/>
                 </a:solidFill>
               </a:rPr>
-              <a:t>Matias et al. (2026):  </a:t>
+              <a:t>Escala Monk (Ellis Monk, 2019):  </a:t>
             </a:r>
             <a:r>
               <a:rPr sz="1600">
@@ -13055,22 +13225,22 @@
                   <a:srgbClr val="3D424E"/>
                 </a:solidFill>
               </a:rPr>
-              <a:t>publica o SkinToneNet e reforça o tom de pele como dimensão auditável, tensionando o uso de rótulos nominais.</a:t>
+              <a:t>escala de 10 tons — sucessora moderna da escala Fitzpatrick, que sub-representa tons escuros.</a:t>
             </a:r>
           </a:p>
           <a:p>
             <a:pPr>
               <a:spcAft>
-                <a:spcPts val="800"/>
+                <a:spcPts val="1000"/>
               </a:spcAft>
             </a:pPr>
             <a:r>
               <a:rPr sz="1600" b="1">
                 <a:solidFill>
-                  <a:srgbClr val="C0392B"/>
+                  <a:srgbClr val="1F2A4E"/>
                 </a:solidFill>
               </a:rPr>
-              <a:t>Implicação forte:  </a:t>
+              <a:t>Schumann et al. (2023):  </a:t>
             </a:r>
             <a:r>
               <a:rPr sz="1600">
@@ -13078,64 +13248,44 @@
                   <a:srgbClr val="3D424E"/>
                 </a:solidFill>
               </a:rPr>
-              <a:t>se a refutação se sustenta, o condicionamento por rótulo racial nominal perde sustentação teórica em favor do sinal fenotípico direto.</a:t>
-            </a:r>
-          </a:p>
-        </p:txBody>
-      </p:sp>
-      <p:sp>
-        <p:nvSpPr>
-          <p:cNvPr id="8" name="Rounded Rectangle 7"/>
-          <p:cNvSpPr/>
-          <p:nvPr/>
-        </p:nvSpPr>
-        <p:spPr>
-          <a:xfrm>
-            <a:off x="6277356" y="1417320"/>
-            <a:ext cx="5486400" cy="502920"/>
-          </a:xfrm>
-          <a:prstGeom prst="roundRect">
-            <a:avLst/>
-          </a:prstGeom>
-          <a:solidFill>
-            <a:srgbClr val="1F2A4E"/>
-          </a:solidFill>
-          <a:ln>
-            <a:noFill/>
-          </a:ln>
-        </p:spPr>
-        <p:style>
-          <a:lnRef idx="1">
-            <a:schemeClr val="accent1"/>
-          </a:lnRef>
-          <a:fillRef idx="3">
-            <a:schemeClr val="accent1"/>
-          </a:fillRef>
-          <a:effectRef idx="2">
-            <a:schemeClr val="accent1"/>
-          </a:effectRef>
-          <a:fontRef idx="minor">
-            <a:schemeClr val="lt1"/>
-          </a:fontRef>
-        </p:style>
-        <p:txBody>
-          <a:bodyPr rtlCol="0" anchor="ctr"/>
-          <a:lstStyle/>
-          <a:p>
-            <a:pPr algn="ctr"/>
-          </a:p>
-        </p:txBody>
-      </p:sp>
-      <p:sp>
-        <p:nvSpPr>
-          <p:cNvPr id="9" name="TextBox 8"/>
+              <a:t>consolida a MST como padrão moderno de auditoria de equidade em análise facial.</a:t>
+            </a:r>
+          </a:p>
+          <a:p>
+            <a:pPr>
+              <a:spcAft>
+                <a:spcPts val="1000"/>
+              </a:spcAft>
+            </a:pPr>
+            <a:r>
+              <a:rPr sz="1600" b="1">
+                <a:solidFill>
+                  <a:srgbClr val="1F2A4E"/>
+                </a:solidFill>
+              </a:rPr>
+              <a:t>Consequência:  </a:t>
+            </a:r>
+            <a:r>
+              <a:rPr sz="1600">
+                <a:solidFill>
+                  <a:srgbClr val="3D424E"/>
+                </a:solidFill>
+              </a:rPr>
+              <a:t>a rotulagem monolítica compromete a acurácia condicional em grupos com maior variabilidade fenotípica, como Latinx.</a:t>
+            </a:r>
+          </a:p>
+        </p:txBody>
+      </p:sp>
+      <p:sp>
+        <p:nvSpPr>
+          <p:cNvPr id="7" name="TextBox 6"/>
           <p:cNvSpPr txBox="1"/>
           <p:nvPr/>
         </p:nvSpPr>
         <p:spPr>
           <a:xfrm>
-            <a:off x="6277356" y="1472184"/>
-            <a:ext cx="5486400" cy="457200"/>
+            <a:off x="457200" y="6446520"/>
+            <a:ext cx="10515600" cy="365760"/>
           </a:xfrm>
           <a:prstGeom prst="rect">
             <a:avLst/>
@@ -13148,166 +13298,29 @@
           </a:bodyPr>
           <a:lstStyle/>
           <a:p>
-            <a:pPr algn="ctr">
-              <a:defRPr sz="1500" b="1">
-                <a:solidFill>
-                  <a:srgbClr val="FFFFFF"/>
-                </a:solidFill>
-              </a:defRPr>
-            </a:pPr>
-            <a:r>
-              <a:t>NOSSA POSIÇÃO</a:t>
-            </a:r>
-          </a:p>
-        </p:txBody>
-      </p:sp>
-      <p:sp>
-        <p:nvSpPr>
-          <p:cNvPr id="10" name="Rounded Rectangle 9"/>
-          <p:cNvSpPr/>
-          <p:nvPr/>
-        </p:nvSpPr>
-        <p:spPr>
-          <a:xfrm>
-            <a:off x="6277356" y="2011680"/>
-            <a:ext cx="5486400" cy="4343400"/>
-          </a:xfrm>
-          <a:prstGeom prst="roundRect">
-            <a:avLst/>
-          </a:prstGeom>
-          <a:solidFill>
-            <a:srgbClr val="B4C4E8"/>
-          </a:solidFill>
-          <a:ln>
-            <a:solidFill>
-              <a:srgbClr val="B4C4E8"/>
-            </a:solidFill>
-          </a:ln>
-        </p:spPr>
-        <p:style>
-          <a:lnRef idx="1">
-            <a:schemeClr val="accent1"/>
-          </a:lnRef>
-          <a:fillRef idx="3">
-            <a:schemeClr val="accent1"/>
-          </a:fillRef>
-          <a:effectRef idx="2">
-            <a:schemeClr val="accent1"/>
-          </a:effectRef>
-          <a:fontRef idx="minor">
-            <a:schemeClr val="lt1"/>
-          </a:fontRef>
-        </p:style>
-        <p:txBody>
-          <a:bodyPr rtlCol="0" anchor="ctr"/>
-          <a:lstStyle/>
-          <a:p>
-            <a:pPr algn="ctr"/>
-          </a:p>
-        </p:txBody>
-      </p:sp>
-      <p:sp>
-        <p:nvSpPr>
-          <p:cNvPr id="11" name="TextBox 10"/>
+            <a:pPr>
+              <a:defRPr sz="900" i="1">
+                <a:solidFill>
+                  <a:srgbClr val="707682"/>
+                </a:solidFill>
+              </a:defRPr>
+            </a:pPr>
+            <a:r>
+              <a:t>Exame de Qualificação · Marcello Ozzetti · Orientação: Prof. Dr. Marcos G. Quiles · PPG-CC UNIFESP/ICT</a:t>
+            </a:r>
+          </a:p>
+        </p:txBody>
+      </p:sp>
+      <p:sp>
+        <p:nvSpPr>
+          <p:cNvPr id="8" name="TextBox 7"/>
           <p:cNvSpPr txBox="1"/>
           <p:nvPr/>
         </p:nvSpPr>
         <p:spPr>
           <a:xfrm>
-            <a:off x="6505956" y="2194560"/>
-            <a:ext cx="5029200" cy="4023360"/>
-          </a:xfrm>
-          <a:prstGeom prst="rect">
-            <a:avLst/>
-          </a:prstGeom>
-          <a:noFill/>
-        </p:spPr>
-        <p:txBody>
-          <a:bodyPr wrap="square">
-            <a:spAutoFit/>
-          </a:bodyPr>
-          <a:lstStyle/>
-          <a:p>
-            <a:pPr>
-              <a:spcAft>
-                <a:spcPts val="600"/>
-              </a:spcAft>
-            </a:pPr>
-            <a:r>
-              <a:rPr sz="1600" b="1">
-                <a:solidFill>
-                  <a:srgbClr val="1F2A4E"/>
-                </a:solidFill>
-              </a:rPr>
-              <a:t>O tom de pele complementa o rótulo racial:  </a:t>
-            </a:r>
-            <a:r>
-              <a:rPr sz="1600">
-                <a:solidFill>
-                  <a:srgbClr val="3D424E"/>
-                </a:solidFill>
-              </a:rPr>
-              <a:t>o vetor MST atua como sinal condicionante; o rótulo racial permanece como alvo de predição.</a:t>
-            </a:r>
-          </a:p>
-          <a:p>
-            <a:pPr>
-              <a:spcAft>
-                <a:spcPts val="600"/>
-              </a:spcAft>
-            </a:pPr>
-            <a:r>
-              <a:rPr sz="1600" b="1">
-                <a:solidFill>
-                  <a:srgbClr val="1F2A4E"/>
-                </a:solidFill>
-              </a:rPr>
-              <a:t>Incorporamos a crítica formalmente:  </a:t>
-            </a:r>
-            <a:r>
-              <a:rPr sz="1600">
-                <a:solidFill>
-                  <a:srgbClr val="3D424E"/>
-                </a:solidFill>
-              </a:rPr>
-              <a:t>a hipótese H6 testa diretamente a tese de Pangelinan (R² ≥ 70 % explicado por pixel information).</a:t>
-            </a:r>
-          </a:p>
-          <a:p>
-            <a:pPr>
-              <a:spcAft>
-                <a:spcPts val="600"/>
-              </a:spcAft>
-            </a:pPr>
-            <a:r>
-              <a:rPr sz="1600" b="1">
-                <a:solidFill>
-                  <a:srgbClr val="1F2A4E"/>
-                </a:solidFill>
-              </a:rPr>
-              <a:t>Refutação convertida em contribuição:  </a:t>
-            </a:r>
-            <a:r>
-              <a:rPr sz="1600">
-                <a:solidFill>
-                  <a:srgbClr val="3D424E"/>
-                </a:solidFill>
-              </a:rPr>
-              <a:t>eventual confirmação da refutação produz decomposição quantitativa do erro, resultado científico válido em si.</a:t>
-            </a:r>
-          </a:p>
-        </p:txBody>
-      </p:sp>
-      <p:sp>
-        <p:nvSpPr>
-          <p:cNvPr id="12" name="TextBox 11"/>
-          <p:cNvSpPr txBox="1"/>
-          <p:nvPr/>
-        </p:nvSpPr>
-        <p:spPr>
-          <a:xfrm>
-            <a:off x="457200" y="6446520"/>
-            <a:ext cx="10515600" cy="365760"/>
+            <a:off x="11521440" y="6446520"/>
+            <a:ext cx="640080" cy="365760"/>
           </a:xfrm>
           <a:prstGeom prst="rect">
             <a:avLst/>
@@ -13328,42 +13341,7 @@
               </a:defRPr>
             </a:pPr>
             <a:r>
-              <a:t>Exame de Qualificação · Marcello Ozzetti · Orientação: Prof. Dr. Marcos G. Quiles · PPG-CC UNIFESP/ICT</a:t>
-            </a:r>
-          </a:p>
-        </p:txBody>
-      </p:sp>
-      <p:sp>
-        <p:nvSpPr>
-          <p:cNvPr id="13" name="TextBox 12"/>
-          <p:cNvSpPr txBox="1"/>
-          <p:nvPr/>
-        </p:nvSpPr>
-        <p:spPr>
-          <a:xfrm>
-            <a:off x="11521440" y="6446520"/>
-            <a:ext cx="640080" cy="365760"/>
-          </a:xfrm>
-          <a:prstGeom prst="rect">
-            <a:avLst/>
-          </a:prstGeom>
-          <a:noFill/>
-        </p:spPr>
-        <p:txBody>
-          <a:bodyPr wrap="none">
-            <a:spAutoFit/>
-          </a:bodyPr>
-          <a:lstStyle/>
-          <a:p>
-            <a:pPr>
-              <a:defRPr sz="900" i="1">
-                <a:solidFill>
-                  <a:srgbClr val="707682"/>
-                </a:solidFill>
-              </a:defRPr>
-            </a:pPr>
-            <a:r>
-              <a:t>6 / 28</a:t>
+              <a:t>6 / 29</a:t>
             </a:r>
           </a:p>
         </p:txBody>
@@ -13416,7 +13394,7 @@
               </a:defRPr>
             </a:pPr>
             <a:r>
-              <a:t>Objetivo geral</a:t>
+              <a:t>Refutação concorrente: tom de pele como principal fator (Pangelinan, 2023)</a:t>
             </a:r>
           </a:p>
         </p:txBody>
@@ -13472,14 +13450,14 @@
         </p:nvSpPr>
         <p:spPr>
           <a:xfrm>
-            <a:off x="1371600" y="1828800"/>
-            <a:ext cx="9418320" cy="2560320"/>
+            <a:off x="425196" y="1417320"/>
+            <a:ext cx="5486400" cy="502920"/>
           </a:xfrm>
           <a:prstGeom prst="roundRect">
             <a:avLst/>
           </a:prstGeom>
           <a:solidFill>
-            <a:srgbClr val="1F2A4E"/>
+            <a:srgbClr val="C0392B"/>
           </a:solidFill>
           <a:ln>
             <a:noFill/>
@@ -13515,8 +13493,88 @@
         </p:nvSpPr>
         <p:spPr>
           <a:xfrm>
-            <a:off x="1828800" y="2194560"/>
-            <a:ext cx="8503920" cy="1828800"/>
+            <a:off x="425196" y="1472184"/>
+            <a:ext cx="5486400" cy="457200"/>
+          </a:xfrm>
+          <a:prstGeom prst="rect">
+            <a:avLst/>
+          </a:prstGeom>
+          <a:noFill/>
+        </p:spPr>
+        <p:txBody>
+          <a:bodyPr wrap="none">
+            <a:spAutoFit/>
+          </a:bodyPr>
+          <a:lstStyle/>
+          <a:p>
+            <a:pPr algn="ctr">
+              <a:defRPr sz="1500" b="1">
+                <a:solidFill>
+                  <a:srgbClr val="FFFFFF"/>
+                </a:solidFill>
+              </a:defRPr>
+            </a:pPr>
+            <a:r>
+              <a:t>A CRÍTICA DA LITERATURA</a:t>
+            </a:r>
+          </a:p>
+        </p:txBody>
+      </p:sp>
+      <p:sp>
+        <p:nvSpPr>
+          <p:cNvPr id="6" name="Rounded Rectangle 5"/>
+          <p:cNvSpPr/>
+          <p:nvPr/>
+        </p:nvSpPr>
+        <p:spPr>
+          <a:xfrm>
+            <a:off x="425196" y="2011680"/>
+            <a:ext cx="5486400" cy="4343400"/>
+          </a:xfrm>
+          <a:prstGeom prst="roundRect">
+            <a:avLst/>
+          </a:prstGeom>
+          <a:solidFill>
+            <a:srgbClr val="E8EAED"/>
+          </a:solidFill>
+          <a:ln>
+            <a:solidFill>
+              <a:srgbClr val="E8EAED"/>
+            </a:solidFill>
+          </a:ln>
+        </p:spPr>
+        <p:style>
+          <a:lnRef idx="1">
+            <a:schemeClr val="accent1"/>
+          </a:lnRef>
+          <a:fillRef idx="3">
+            <a:schemeClr val="accent1"/>
+          </a:fillRef>
+          <a:effectRef idx="2">
+            <a:schemeClr val="accent1"/>
+          </a:effectRef>
+          <a:fontRef idx="minor">
+            <a:schemeClr val="lt1"/>
+          </a:fontRef>
+        </p:style>
+        <p:txBody>
+          <a:bodyPr rtlCol="0" anchor="ctr"/>
+          <a:lstStyle/>
+          <a:p>
+            <a:pPr algn="ctr"/>
+          </a:p>
+        </p:txBody>
+      </p:sp>
+      <p:sp>
+        <p:nvSpPr>
+          <p:cNvPr id="7" name="TextBox 6"/>
+          <p:cNvSpPr txBox="1"/>
+          <p:nvPr/>
+        </p:nvSpPr>
+        <p:spPr>
+          <a:xfrm>
+            <a:off x="653796" y="2194560"/>
+            <a:ext cx="5029200" cy="4023360"/>
           </a:xfrm>
           <a:prstGeom prst="rect">
             <a:avLst/>
@@ -13530,28 +13588,208 @@
           <a:lstStyle/>
           <a:p>
             <a:pPr>
-              <a:defRPr sz="2000">
+              <a:spcAft>
+                <a:spcPts val="800"/>
+              </a:spcAft>
+            </a:pPr>
+            <a:r>
+              <a:rPr sz="1600" b="1">
+                <a:solidFill>
+                  <a:srgbClr val="C0392B"/>
+                </a:solidFill>
+              </a:rPr>
+              <a:t>Pangelinan et al. (2023, FAccT):  </a:t>
+            </a:r>
+            <a:r>
+              <a:rPr sz="1600">
+                <a:solidFill>
+                  <a:srgbClr val="3D424E"/>
+                </a:solidFill>
+              </a:rPr>
+              <a:t>a disparidade racial em face recognition é primariamente explicada pela fração de área facial útil na imagem (pixel information), não pelo rótulo racial.</a:t>
+            </a:r>
+          </a:p>
+          <a:p>
+            <a:pPr>
+              <a:spcAft>
+                <a:spcPts val="800"/>
+              </a:spcAft>
+            </a:pPr>
+            <a:r>
+              <a:rPr sz="1600" b="1">
+                <a:solidFill>
+                  <a:srgbClr val="C0392B"/>
+                </a:solidFill>
+              </a:rPr>
+              <a:t>Matias et al. (2026):  </a:t>
+            </a:r>
+            <a:r>
+              <a:rPr sz="1600">
+                <a:solidFill>
+                  <a:srgbClr val="3D424E"/>
+                </a:solidFill>
+              </a:rPr>
+              <a:t>publica o SkinToneNet e reforça o tom de pele como dimensão auditável, tensionando o uso de rótulos nominais.</a:t>
+            </a:r>
+          </a:p>
+          <a:p>
+            <a:pPr>
+              <a:spcAft>
+                <a:spcPts val="800"/>
+              </a:spcAft>
+            </a:pPr>
+            <a:r>
+              <a:rPr sz="1600" b="1">
+                <a:solidFill>
+                  <a:srgbClr val="C0392B"/>
+                </a:solidFill>
+              </a:rPr>
+              <a:t>Implicação forte:  </a:t>
+            </a:r>
+            <a:r>
+              <a:rPr sz="1600">
+                <a:solidFill>
+                  <a:srgbClr val="3D424E"/>
+                </a:solidFill>
+              </a:rPr>
+              <a:t>se a refutação se sustenta, o condicionamento por rótulo racial nominal perde sustentação teórica em favor do sinal fenotípico direto.</a:t>
+            </a:r>
+          </a:p>
+        </p:txBody>
+      </p:sp>
+      <p:sp>
+        <p:nvSpPr>
+          <p:cNvPr id="8" name="Rounded Rectangle 7"/>
+          <p:cNvSpPr/>
+          <p:nvPr/>
+        </p:nvSpPr>
+        <p:spPr>
+          <a:xfrm>
+            <a:off x="6277356" y="1417320"/>
+            <a:ext cx="5486400" cy="502920"/>
+          </a:xfrm>
+          <a:prstGeom prst="roundRect">
+            <a:avLst/>
+          </a:prstGeom>
+          <a:solidFill>
+            <a:srgbClr val="1F2A4E"/>
+          </a:solidFill>
+          <a:ln>
+            <a:noFill/>
+          </a:ln>
+        </p:spPr>
+        <p:style>
+          <a:lnRef idx="1">
+            <a:schemeClr val="accent1"/>
+          </a:lnRef>
+          <a:fillRef idx="3">
+            <a:schemeClr val="accent1"/>
+          </a:fillRef>
+          <a:effectRef idx="2">
+            <a:schemeClr val="accent1"/>
+          </a:effectRef>
+          <a:fontRef idx="minor">
+            <a:schemeClr val="lt1"/>
+          </a:fontRef>
+        </p:style>
+        <p:txBody>
+          <a:bodyPr rtlCol="0" anchor="ctr"/>
+          <a:lstStyle/>
+          <a:p>
+            <a:pPr algn="ctr"/>
+          </a:p>
+        </p:txBody>
+      </p:sp>
+      <p:sp>
+        <p:nvSpPr>
+          <p:cNvPr id="9" name="TextBox 8"/>
+          <p:cNvSpPr txBox="1"/>
+          <p:nvPr/>
+        </p:nvSpPr>
+        <p:spPr>
+          <a:xfrm>
+            <a:off x="6277356" y="1472184"/>
+            <a:ext cx="5486400" cy="457200"/>
+          </a:xfrm>
+          <a:prstGeom prst="rect">
+            <a:avLst/>
+          </a:prstGeom>
+          <a:noFill/>
+        </p:spPr>
+        <p:txBody>
+          <a:bodyPr wrap="none">
+            <a:spAutoFit/>
+          </a:bodyPr>
+          <a:lstStyle/>
+          <a:p>
+            <a:pPr algn="ctr">
+              <a:defRPr sz="1500" b="1">
                 <a:solidFill>
                   <a:srgbClr val="FFFFFF"/>
                 </a:solidFill>
               </a:defRPr>
             </a:pPr>
             <a:r>
-              <a:t>Desenvolver e avaliar um pipeline de classificação racial que usa o tom de pele (escala Monk, 10 tons) como sinal de contexto para reduzir a disparidade entre grupos, sem sacrificar a acurácia geral.</a:t>
-            </a:r>
-          </a:p>
-        </p:txBody>
-      </p:sp>
-      <p:sp>
-        <p:nvSpPr>
-          <p:cNvPr id="6" name="TextBox 5"/>
+              <a:t>NOSSA POSIÇÃO</a:t>
+            </a:r>
+          </a:p>
+        </p:txBody>
+      </p:sp>
+      <p:sp>
+        <p:nvSpPr>
+          <p:cNvPr id="10" name="Rounded Rectangle 9"/>
+          <p:cNvSpPr/>
+          <p:nvPr/>
+        </p:nvSpPr>
+        <p:spPr>
+          <a:xfrm>
+            <a:off x="6277356" y="2011680"/>
+            <a:ext cx="5486400" cy="4343400"/>
+          </a:xfrm>
+          <a:prstGeom prst="roundRect">
+            <a:avLst/>
+          </a:prstGeom>
+          <a:solidFill>
+            <a:srgbClr val="B4C4E8"/>
+          </a:solidFill>
+          <a:ln>
+            <a:solidFill>
+              <a:srgbClr val="B4C4E8"/>
+            </a:solidFill>
+          </a:ln>
+        </p:spPr>
+        <p:style>
+          <a:lnRef idx="1">
+            <a:schemeClr val="accent1"/>
+          </a:lnRef>
+          <a:fillRef idx="3">
+            <a:schemeClr val="accent1"/>
+          </a:fillRef>
+          <a:effectRef idx="2">
+            <a:schemeClr val="accent1"/>
+          </a:effectRef>
+          <a:fontRef idx="minor">
+            <a:schemeClr val="lt1"/>
+          </a:fontRef>
+        </p:style>
+        <p:txBody>
+          <a:bodyPr rtlCol="0" anchor="ctr"/>
+          <a:lstStyle/>
+          <a:p>
+            <a:pPr algn="ctr"/>
+          </a:p>
+        </p:txBody>
+      </p:sp>
+      <p:sp>
+        <p:nvSpPr>
+          <p:cNvPr id="11" name="TextBox 10"/>
           <p:cNvSpPr txBox="1"/>
           <p:nvPr/>
         </p:nvSpPr>
         <p:spPr>
           <a:xfrm>
-            <a:off x="1371600" y="4754880"/>
-            <a:ext cx="9418320" cy="1371600"/>
+            <a:off x="6505956" y="2194560"/>
+            <a:ext cx="5029200" cy="4023360"/>
           </a:xfrm>
           <a:prstGeom prst="rect">
             <a:avLst/>
@@ -13565,21 +13803,78 @@
           <a:lstStyle/>
           <a:p>
             <a:pPr>
-              <a:defRPr sz="1400" i="1">
+              <a:spcAft>
+                <a:spcPts val="600"/>
+              </a:spcAft>
+            </a:pPr>
+            <a:r>
+              <a:rPr sz="1600" b="1">
+                <a:solidFill>
+                  <a:srgbClr val="1F2A4E"/>
+                </a:solidFill>
+              </a:rPr>
+              <a:t>O tom de pele complementa o rótulo racial:  </a:t>
+            </a:r>
+            <a:r>
+              <a:rPr sz="1600">
                 <a:solidFill>
                   <a:srgbClr val="3D424E"/>
                 </a:solidFill>
-              </a:defRPr>
-            </a:pPr>
-            <a:r>
-              <a:t>Arquitetura escolhida: ConvNeXt-T (Liu et al., 2022) como rede base + FiLM (Perez et al., 2018) como mecanismo que “consulta” o tom de pele antes de decidir.</a:t>
-            </a:r>
-          </a:p>
-        </p:txBody>
-      </p:sp>
-      <p:sp>
-        <p:nvSpPr>
-          <p:cNvPr id="7" name="TextBox 6"/>
+              </a:rPr>
+              <a:t>o vetor MST atua como sinal condicionante; o rótulo racial permanece como alvo de predição.</a:t>
+            </a:r>
+          </a:p>
+          <a:p>
+            <a:pPr>
+              <a:spcAft>
+                <a:spcPts val="600"/>
+              </a:spcAft>
+            </a:pPr>
+            <a:r>
+              <a:rPr sz="1600" b="1">
+                <a:solidFill>
+                  <a:srgbClr val="1F2A4E"/>
+                </a:solidFill>
+              </a:rPr>
+              <a:t>Incorporamos a crítica formalmente:  </a:t>
+            </a:r>
+            <a:r>
+              <a:rPr sz="1600">
+                <a:solidFill>
+                  <a:srgbClr val="3D424E"/>
+                </a:solidFill>
+              </a:rPr>
+              <a:t>a hipótese H6 testa diretamente a tese de Pangelinan (R² ≥ 70 % explicado por pixel information).</a:t>
+            </a:r>
+          </a:p>
+          <a:p>
+            <a:pPr>
+              <a:spcAft>
+                <a:spcPts val="600"/>
+              </a:spcAft>
+            </a:pPr>
+            <a:r>
+              <a:rPr sz="1600" b="1">
+                <a:solidFill>
+                  <a:srgbClr val="1F2A4E"/>
+                </a:solidFill>
+              </a:rPr>
+              <a:t>Refutação convertida em contribuição:  </a:t>
+            </a:r>
+            <a:r>
+              <a:rPr sz="1600">
+                <a:solidFill>
+                  <a:srgbClr val="3D424E"/>
+                </a:solidFill>
+              </a:rPr>
+              <a:t>eventual confirmação da refutação produz decomposição quantitativa do erro, resultado científico válido em si.</a:t>
+            </a:r>
+          </a:p>
+        </p:txBody>
+      </p:sp>
+      <p:sp>
+        <p:nvSpPr>
+          <p:cNvPr id="12" name="TextBox 11"/>
           <p:cNvSpPr txBox="1"/>
           <p:nvPr/>
         </p:nvSpPr>
@@ -13614,7 +13909,7 @@
       </p:sp>
       <p:sp>
         <p:nvSpPr>
-          <p:cNvPr id="8" name="TextBox 7"/>
+          <p:cNvPr id="13" name="TextBox 12"/>
           <p:cNvSpPr txBox="1"/>
           <p:nvPr/>
         </p:nvSpPr>
@@ -13642,7 +13937,7 @@
               </a:defRPr>
             </a:pPr>
             <a:r>
-              <a:t>7 / 28</a:t>
+              <a:t>7 / 29</a:t>
             </a:r>
           </a:p>
         </p:txBody>
@@ -13695,7 +13990,7 @@
               </a:defRPr>
             </a:pPr>
             <a:r>
-              <a:t>Objetivos específicos e hipóteses testáveis</a:t>
+              <a:t>Objetivo geral</a:t>
             </a:r>
           </a:p>
         </p:txBody>
@@ -13751,8 +14046,8 @@
         </p:nvSpPr>
         <p:spPr>
           <a:xfrm>
-            <a:off x="470916" y="1417320"/>
-            <a:ext cx="5486400" cy="502920"/>
+            <a:off x="1371600" y="1828800"/>
+            <a:ext cx="9418320" cy="2560320"/>
           </a:xfrm>
           <a:prstGeom prst="roundRect">
             <a:avLst/>
@@ -13794,8 +14089,78 @@
         </p:nvSpPr>
         <p:spPr>
           <a:xfrm>
-            <a:off x="470916" y="1463040"/>
-            <a:ext cx="5486400" cy="457200"/>
+            <a:off x="1828800" y="2194560"/>
+            <a:ext cx="8503920" cy="1828800"/>
+          </a:xfrm>
+          <a:prstGeom prst="rect">
+            <a:avLst/>
+          </a:prstGeom>
+          <a:noFill/>
+        </p:spPr>
+        <p:txBody>
+          <a:bodyPr wrap="square">
+            <a:spAutoFit/>
+          </a:bodyPr>
+          <a:lstStyle/>
+          <a:p>
+            <a:pPr>
+              <a:defRPr sz="2000">
+                <a:solidFill>
+                  <a:srgbClr val="FFFFFF"/>
+                </a:solidFill>
+              </a:defRPr>
+            </a:pPr>
+            <a:r>
+              <a:t>Desenvolver e avaliar um pipeline de classificação racial que usa o tom de pele (escala Monk, 10 tons) como sinal de contexto para reduzir a disparidade entre grupos, sem sacrificar a acurácia geral.</a:t>
+            </a:r>
+          </a:p>
+        </p:txBody>
+      </p:sp>
+      <p:sp>
+        <p:nvSpPr>
+          <p:cNvPr id="6" name="TextBox 5"/>
+          <p:cNvSpPr txBox="1"/>
+          <p:nvPr/>
+        </p:nvSpPr>
+        <p:spPr>
+          <a:xfrm>
+            <a:off x="1371600" y="4754880"/>
+            <a:ext cx="9418320" cy="1371600"/>
+          </a:xfrm>
+          <a:prstGeom prst="rect">
+            <a:avLst/>
+          </a:prstGeom>
+          <a:noFill/>
+        </p:spPr>
+        <p:txBody>
+          <a:bodyPr wrap="square">
+            <a:spAutoFit/>
+          </a:bodyPr>
+          <a:lstStyle/>
+          <a:p>
+            <a:pPr>
+              <a:defRPr sz="1400" i="1">
+                <a:solidFill>
+                  <a:srgbClr val="3D424E"/>
+                </a:solidFill>
+              </a:defRPr>
+            </a:pPr>
+            <a:r>
+              <a:t>Arquitetura escolhida: ConvNeXt-T (Liu et al., 2022) como rede base + FiLM (Perez et al., 2018) como mecanismo que “consulta” o tom de pele antes de decidir.</a:t>
+            </a:r>
+          </a:p>
+        </p:txBody>
+      </p:sp>
+      <p:sp>
+        <p:nvSpPr>
+          <p:cNvPr id="7" name="TextBox 6"/>
+          <p:cNvSpPr txBox="1"/>
+          <p:nvPr/>
+        </p:nvSpPr>
+        <p:spPr>
+          <a:xfrm>
+            <a:off x="457200" y="6446520"/>
+            <a:ext cx="10515600" cy="365760"/>
           </a:xfrm>
           <a:prstGeom prst="rect">
             <a:avLst/>
@@ -13808,220 +14173,16 @@
           </a:bodyPr>
           <a:lstStyle/>
           <a:p>
-            <a:pPr algn="ctr">
-              <a:defRPr sz="1500" b="1">
-                <a:solidFill>
-                  <a:srgbClr val="FFFFFF"/>
-                </a:solidFill>
-              </a:defRPr>
-            </a:pPr>
-            <a:r>
-              <a:t>6 OBJETIVOS ESPECÍFICOS</a:t>
-            </a:r>
-          </a:p>
-        </p:txBody>
-      </p:sp>
-      <p:sp>
-        <p:nvSpPr>
-          <p:cNvPr id="6" name="TextBox 5"/>
-          <p:cNvSpPr txBox="1"/>
-          <p:nvPr/>
-        </p:nvSpPr>
-        <p:spPr>
-          <a:xfrm>
-            <a:off x="608076" y="2057400"/>
-            <a:ext cx="5212080" cy="4572000"/>
-          </a:xfrm>
-          <a:prstGeom prst="rect">
-            <a:avLst/>
-          </a:prstGeom>
-          <a:noFill/>
-        </p:spPr>
-        <p:txBody>
-          <a:bodyPr wrap="square">
-            <a:spAutoFit/>
-          </a:bodyPr>
-          <a:lstStyle/>
-          <a:p>
-            <a:pPr>
-              <a:spcAft>
-                <a:spcPts val="800"/>
-              </a:spcAft>
-            </a:pPr>
-            <a:r>
-              <a:rPr sz="1500" b="1">
-                <a:solidFill>
-                  <a:srgbClr val="1F2A4E"/>
-                </a:solidFill>
-              </a:rPr>
-              <a:t>1.  </a:t>
-            </a:r>
-            <a:r>
-              <a:rPr sz="1500">
-                <a:solidFill>
-                  <a:srgbClr val="3D424E"/>
-                </a:solidFill>
-              </a:rPr>
-              <a:t>Quantificar distribuição MST × classe racial no FairFace.</a:t>
-            </a:r>
-          </a:p>
-          <a:p>
-            <a:pPr>
-              <a:spcAft>
-                <a:spcPts val="800"/>
-              </a:spcAft>
-            </a:pPr>
-            <a:r>
-              <a:rPr sz="1500" b="1">
-                <a:solidFill>
-                  <a:srgbClr val="1F2A4E"/>
-                </a:solidFill>
-              </a:rPr>
-              <a:t>2.  </a:t>
-            </a:r>
-            <a:r>
-              <a:rPr sz="1500">
-                <a:solidFill>
-                  <a:srgbClr val="3D424E"/>
-                </a:solidFill>
-              </a:rPr>
-              <a:t>Treinar e avaliar classificador MST próprio + sensitivity.</a:t>
-            </a:r>
-          </a:p>
-          <a:p>
-            <a:pPr>
-              <a:spcAft>
-                <a:spcPts val="800"/>
-              </a:spcAft>
-            </a:pPr>
-            <a:r>
-              <a:rPr sz="1500" b="1">
-                <a:solidFill>
-                  <a:srgbClr val="1F2A4E"/>
-                </a:solidFill>
-              </a:rPr>
-              <a:t>3.  </a:t>
-            </a:r>
-            <a:r>
-              <a:rPr sz="1500">
-                <a:solidFill>
-                  <a:srgbClr val="3D424E"/>
-                </a:solidFill>
-              </a:rPr>
-              <a:t>Implementar FiLM sobre ConvNeXt-T e comparar vs 6 baselines.</a:t>
-            </a:r>
-          </a:p>
-          <a:p>
-            <a:pPr>
-              <a:spcAft>
-                <a:spcPts val="800"/>
-              </a:spcAft>
-            </a:pPr>
-            <a:r>
-              <a:rPr sz="1500" b="1">
-                <a:solidFill>
-                  <a:srgbClr val="1F2A4E"/>
-                </a:solidFill>
-              </a:rPr>
-              <a:t>4.  </a:t>
-            </a:r>
-            <a:r>
-              <a:rPr sz="1500">
-                <a:solidFill>
-                  <a:srgbClr val="3D424E"/>
-                </a:solidFill>
-              </a:rPr>
-              <a:t>Demonstrar transferência do ganho para reconhecimento (RFW/BFW).</a:t>
-            </a:r>
-          </a:p>
-          <a:p>
-            <a:pPr>
-              <a:spcAft>
-                <a:spcPts val="800"/>
-              </a:spcAft>
-            </a:pPr>
-            <a:r>
-              <a:rPr sz="1500" b="1">
-                <a:solidFill>
-                  <a:srgbClr val="1F2A4E"/>
-                </a:solidFill>
-              </a:rPr>
-              <a:t>5.  </a:t>
-            </a:r>
-            <a:r>
-              <a:rPr sz="1500">
-                <a:solidFill>
-                  <a:srgbClr val="3D424E"/>
-                </a:solidFill>
-              </a:rPr>
-              <a:t>Formalizar triangulação de métricas (DR, F1 pior classe, EO).</a:t>
-            </a:r>
-          </a:p>
-          <a:p>
-            <a:pPr>
-              <a:spcAft>
-                <a:spcPts val="800"/>
-              </a:spcAft>
-            </a:pPr>
-            <a:r>
-              <a:rPr sz="1500" b="1">
-                <a:solidFill>
-                  <a:srgbClr val="1F2A4E"/>
-                </a:solidFill>
-              </a:rPr>
-              <a:t>6.  </a:t>
-            </a:r>
-            <a:r>
-              <a:rPr sz="1500">
-                <a:solidFill>
-                  <a:srgbClr val="3D424E"/>
-                </a:solidFill>
-              </a:rPr>
-              <a:t>Decompor erro Latinx: fenótipo (irredutível) vs modelo (mitigável).</a:t>
-            </a:r>
-          </a:p>
-        </p:txBody>
-      </p:sp>
-      <p:sp>
-        <p:nvSpPr>
-          <p:cNvPr id="7" name="Rounded Rectangle 6"/>
-          <p:cNvSpPr/>
-          <p:nvPr/>
-        </p:nvSpPr>
-        <p:spPr>
-          <a:xfrm>
-            <a:off x="6231636" y="1417320"/>
-            <a:ext cx="5486400" cy="502920"/>
-          </a:xfrm>
-          <a:prstGeom prst="roundRect">
-            <a:avLst/>
-          </a:prstGeom>
-          <a:solidFill>
-            <a:srgbClr val="C0392B"/>
-          </a:solidFill>
-          <a:ln>
-            <a:noFill/>
-          </a:ln>
-        </p:spPr>
-        <p:style>
-          <a:lnRef idx="1">
-            <a:schemeClr val="accent1"/>
-          </a:lnRef>
-          <a:fillRef idx="3">
-            <a:schemeClr val="accent1"/>
-          </a:fillRef>
-          <a:effectRef idx="2">
-            <a:schemeClr val="accent1"/>
-          </a:effectRef>
-          <a:fontRef idx="minor">
-            <a:schemeClr val="lt1"/>
-          </a:fontRef>
-        </p:style>
-        <p:txBody>
-          <a:bodyPr rtlCol="0" anchor="ctr"/>
-          <a:lstStyle/>
-          <a:p>
-            <a:pPr algn="ctr"/>
+            <a:pPr>
+              <a:defRPr sz="900" i="1">
+                <a:solidFill>
+                  <a:srgbClr val="707682"/>
+                </a:solidFill>
+              </a:defRPr>
+            </a:pPr>
+            <a:r>
+              <a:t>Exame de Qualificação · Marcello Ozzetti · Orientação: Prof. Dr. Marcos G. Quiles · PPG-CC UNIFESP/ICT</a:t>
+            </a:r>
           </a:p>
         </p:txBody>
       </p:sp>
@@ -14033,8 +14194,8 @@
         </p:nvSpPr>
         <p:spPr>
           <a:xfrm>
-            <a:off x="6231636" y="1463040"/>
-            <a:ext cx="5486400" cy="457200"/>
+            <a:off x="11521440" y="6446520"/>
+            <a:ext cx="640080" cy="365760"/>
           </a:xfrm>
           <a:prstGeom prst="rect">
             <a:avLst/>
@@ -14047,294 +14208,15 @@
           </a:bodyPr>
           <a:lstStyle/>
           <a:p>
-            <a:pPr algn="ctr">
-              <a:defRPr sz="1500" b="1">
-                <a:solidFill>
-                  <a:srgbClr val="FFFFFF"/>
-                </a:solidFill>
-              </a:defRPr>
-            </a:pPr>
-            <a:r>
-              <a:t>6 HIPÓTESES TESTÁVEIS</a:t>
-            </a:r>
-          </a:p>
-        </p:txBody>
-      </p:sp>
-      <p:sp>
-        <p:nvSpPr>
-          <p:cNvPr id="9" name="TextBox 8"/>
-          <p:cNvSpPr txBox="1"/>
-          <p:nvPr/>
-        </p:nvSpPr>
-        <p:spPr>
-          <a:xfrm>
-            <a:off x="6368796" y="2057400"/>
-            <a:ext cx="5212080" cy="4572000"/>
-          </a:xfrm>
-          <a:prstGeom prst="rect">
-            <a:avLst/>
-          </a:prstGeom>
-          <a:noFill/>
-        </p:spPr>
-        <p:txBody>
-          <a:bodyPr wrap="square">
-            <a:spAutoFit/>
-          </a:bodyPr>
-          <a:lstStyle/>
-          <a:p>
-            <a:pPr>
-              <a:spcAft>
-                <a:spcPts val="800"/>
-              </a:spcAft>
-            </a:pPr>
-            <a:r>
-              <a:rPr sz="1500" b="1">
-                <a:solidFill>
-                  <a:srgbClr val="C0392B"/>
-                </a:solidFill>
-              </a:rPr>
-              <a:t>H1.  </a:t>
-            </a:r>
-            <a:r>
-              <a:rPr sz="1500">
-                <a:solidFill>
-                  <a:srgbClr val="3D424E"/>
-                </a:solidFill>
-              </a:rPr>
-              <a:t>Classificador MST atinge concordância humana  </a:t>
-            </a:r>
-            <a:r>
-              <a:rPr sz="1300" i="1">
+            <a:pPr>
+              <a:defRPr sz="900" i="1">
                 <a:solidFill>
                   <a:srgbClr val="707682"/>
                 </a:solidFill>
-              </a:rPr>
-              <a:t>[κ ≥ 0,7]</a:t>
-            </a:r>
-          </a:p>
-          <a:p>
-            <a:pPr>
-              <a:spcAft>
-                <a:spcPts val="800"/>
-              </a:spcAft>
-            </a:pPr>
-            <a:r>
-              <a:rPr sz="1500" b="1">
-                <a:solidFill>
-                  <a:srgbClr val="C0392B"/>
-                </a:solidFill>
-              </a:rPr>
-              <a:t>H2.  </a:t>
-            </a:r>
-            <a:r>
-              <a:rPr sz="1500">
-                <a:solidFill>
-                  <a:srgbClr val="3D424E"/>
-                </a:solidFill>
-              </a:rPr>
-              <a:t>Latinx cobre ≥ 5 dos 10 tons Monk  </a:t>
-            </a:r>
-            <a:r>
-              <a:rPr sz="1300" i="1">
-                <a:solidFill>
-                  <a:srgbClr val="707682"/>
-                </a:solidFill>
-              </a:rPr>
-              <a:t>[cobertura ≥ 5]</a:t>
-            </a:r>
-          </a:p>
-          <a:p>
-            <a:pPr>
-              <a:spcAft>
-                <a:spcPts val="800"/>
-              </a:spcAft>
-            </a:pPr>
-            <a:r>
-              <a:rPr sz="1500" b="1">
-                <a:solidFill>
-                  <a:srgbClr val="C0392B"/>
-                </a:solidFill>
-              </a:rPr>
-              <a:t>H3.  </a:t>
-            </a:r>
-            <a:r>
-              <a:rPr sz="1500">
-                <a:solidFill>
-                  <a:srgbClr val="3D424E"/>
-                </a:solidFill>
-              </a:rPr>
-              <a:t>Condicionamento reduz disparidade sem perder acurácia  </a:t>
-            </a:r>
-            <a:r>
-              <a:rPr sz="1300" i="1">
-                <a:solidFill>
-                  <a:srgbClr val="707682"/>
-                </a:solidFill>
-              </a:rPr>
-              <a:t>[DR ↓  ·  F1 ≥ baseline]</a:t>
-            </a:r>
-          </a:p>
-          <a:p>
-            <a:pPr>
-              <a:spcAft>
-                <a:spcPts val="800"/>
-              </a:spcAft>
-            </a:pPr>
-            <a:r>
-              <a:rPr sz="1500" b="1">
-                <a:solidFill>
-                  <a:srgbClr val="C0392B"/>
-                </a:solidFill>
-              </a:rPr>
-              <a:t>H4.  </a:t>
-            </a:r>
-            <a:r>
-              <a:rPr sz="1500">
-                <a:solidFill>
-                  <a:srgbClr val="3D424E"/>
-                </a:solidFill>
-              </a:rPr>
-              <a:t>≥ 50 % dos erros Latinx em zonas de sobreposição  </a:t>
-            </a:r>
-            <a:r>
-              <a:rPr sz="1300" i="1">
-                <a:solidFill>
-                  <a:srgbClr val="707682"/>
-                </a:solidFill>
-              </a:rPr>
-              <a:t>[concentração ≥ 50 %]</a:t>
-            </a:r>
-          </a:p>
-          <a:p>
-            <a:pPr>
-              <a:spcAft>
-                <a:spcPts val="800"/>
-              </a:spcAft>
-            </a:pPr>
-            <a:r>
-              <a:rPr sz="1500" b="1">
-                <a:solidFill>
-                  <a:srgbClr val="C0392B"/>
-                </a:solidFill>
-              </a:rPr>
-              <a:t>H5.  </a:t>
-            </a:r>
-            <a:r>
-              <a:rPr sz="1500">
-                <a:solidFill>
-                  <a:srgbClr val="3D424E"/>
-                </a:solidFill>
-              </a:rPr>
-              <a:t>Ganho transfere para reconhecimento (RFW/BFW)  </a:t>
-            </a:r>
-            <a:r>
-              <a:rPr sz="1300" i="1">
-                <a:solidFill>
-                  <a:srgbClr val="707682"/>
-                </a:solidFill>
-              </a:rPr>
-              <a:t>[gap ↓ downstream]</a:t>
-            </a:r>
-          </a:p>
-          <a:p>
-            <a:pPr>
-              <a:spcAft>
-                <a:spcPts val="800"/>
-              </a:spcAft>
-            </a:pPr>
-            <a:r>
-              <a:rPr sz="1500" b="1">
-                <a:solidFill>
-                  <a:srgbClr val="C0392B"/>
-                </a:solidFill>
-              </a:rPr>
-              <a:t>H6.  </a:t>
-            </a:r>
-            <a:r>
-              <a:rPr sz="1500">
-                <a:solidFill>
-                  <a:srgbClr val="3D424E"/>
-                </a:solidFill>
-              </a:rPr>
-              <a:t>Pixel information explica variância do erro (Pangelinan)  </a:t>
-            </a:r>
-            <a:r>
-              <a:rPr sz="1300" i="1">
-                <a:solidFill>
-                  <a:srgbClr val="707682"/>
-                </a:solidFill>
-              </a:rPr>
-              <a:t>[R² ≥ 70 %]</a:t>
-            </a:r>
-          </a:p>
-        </p:txBody>
-      </p:sp>
-      <p:sp>
-        <p:nvSpPr>
-          <p:cNvPr id="10" name="TextBox 9"/>
-          <p:cNvSpPr txBox="1"/>
-          <p:nvPr/>
-        </p:nvSpPr>
-        <p:spPr>
-          <a:xfrm>
-            <a:off x="457200" y="6446520"/>
-            <a:ext cx="10515600" cy="365760"/>
-          </a:xfrm>
-          <a:prstGeom prst="rect">
-            <a:avLst/>
-          </a:prstGeom>
-          <a:noFill/>
-        </p:spPr>
-        <p:txBody>
-          <a:bodyPr wrap="none">
-            <a:spAutoFit/>
-          </a:bodyPr>
-          <a:lstStyle/>
-          <a:p>
-            <a:pPr>
-              <a:defRPr sz="900" i="1">
-                <a:solidFill>
-                  <a:srgbClr val="707682"/>
-                </a:solidFill>
-              </a:defRPr>
-            </a:pPr>
-            <a:r>
-              <a:t>Exame de Qualificação · Marcello Ozzetti · Orientação: Prof. Dr. Marcos G. Quiles · PPG-CC UNIFESP/ICT</a:t>
-            </a:r>
-          </a:p>
-        </p:txBody>
-      </p:sp>
-      <p:sp>
-        <p:nvSpPr>
-          <p:cNvPr id="11" name="TextBox 10"/>
-          <p:cNvSpPr txBox="1"/>
-          <p:nvPr/>
-        </p:nvSpPr>
-        <p:spPr>
-          <a:xfrm>
-            <a:off x="11521440" y="6446520"/>
-            <a:ext cx="640080" cy="365760"/>
-          </a:xfrm>
-          <a:prstGeom prst="rect">
-            <a:avLst/>
-          </a:prstGeom>
-          <a:noFill/>
-        </p:spPr>
-        <p:txBody>
-          <a:bodyPr wrap="none">
-            <a:spAutoFit/>
-          </a:bodyPr>
-          <a:lstStyle/>
-          <a:p>
-            <a:pPr>
-              <a:defRPr sz="900" i="1">
-                <a:solidFill>
-                  <a:srgbClr val="707682"/>
-                </a:solidFill>
-              </a:defRPr>
-            </a:pPr>
-            <a:r>
-              <a:t>8 / 28</a:t>
+              </a:defRPr>
+            </a:pPr>
+            <a:r>
+              <a:t>8 / 29</a:t>
             </a:r>
           </a:p>
         </p:txBody>
@@ -14387,7 +14269,7 @@
               </a:defRPr>
             </a:pPr>
             <a:r>
-              <a:t>Linha do tempo das principais respostas ao problema (2018–2026)</a:t>
+              <a:t>Objetivos específicos e hipóteses testáveis</a:t>
             </a:r>
           </a:p>
         </p:txBody>
@@ -14435,30 +14317,49 @@
           </a:p>
         </p:txBody>
       </p:sp>
-      <p:pic>
-        <p:nvPicPr>
-          <p:cNvPr id="4" name="Picture 3" descr="fig_timeline_mitigacoes.png"/>
-          <p:cNvPicPr>
-            <a:picLocks noChangeAspect="1"/>
-          </p:cNvPicPr>
-          <p:nvPr/>
-        </p:nvPicPr>
-        <p:blipFill>
-          <a:blip r:embed="rId2"/>
-          <a:stretch>
-            <a:fillRect/>
-          </a:stretch>
-        </p:blipFill>
-        <p:spPr>
-          <a:xfrm>
-            <a:off x="820882" y="1371600"/>
-            <a:ext cx="10547188" cy="4389120"/>
-          </a:xfrm>
-          <a:prstGeom prst="rect">
-            <a:avLst/>
-          </a:prstGeom>
-        </p:spPr>
-      </p:pic>
+      <p:sp>
+        <p:nvSpPr>
+          <p:cNvPr id="4" name="Rounded Rectangle 3"/>
+          <p:cNvSpPr/>
+          <p:nvPr/>
+        </p:nvSpPr>
+        <p:spPr>
+          <a:xfrm>
+            <a:off x="470916" y="1417320"/>
+            <a:ext cx="5486400" cy="502920"/>
+          </a:xfrm>
+          <a:prstGeom prst="roundRect">
+            <a:avLst/>
+          </a:prstGeom>
+          <a:solidFill>
+            <a:srgbClr val="1F2A4E"/>
+          </a:solidFill>
+          <a:ln>
+            <a:noFill/>
+          </a:ln>
+        </p:spPr>
+        <p:style>
+          <a:lnRef idx="1">
+            <a:schemeClr val="accent1"/>
+          </a:lnRef>
+          <a:fillRef idx="3">
+            <a:schemeClr val="accent1"/>
+          </a:fillRef>
+          <a:effectRef idx="2">
+            <a:schemeClr val="accent1"/>
+          </a:effectRef>
+          <a:fontRef idx="minor">
+            <a:schemeClr val="lt1"/>
+          </a:fontRef>
+        </p:style>
+        <p:txBody>
+          <a:bodyPr rtlCol="0" anchor="ctr"/>
+          <a:lstStyle/>
+          <a:p>
+            <a:pPr algn="ctr"/>
+          </a:p>
+        </p:txBody>
+      </p:sp>
       <p:sp>
         <p:nvSpPr>
           <p:cNvPr id="5" name="TextBox 4"/>
@@ -14467,8 +14368,8 @@
         </p:nvSpPr>
         <p:spPr>
           <a:xfrm>
-            <a:off x="457200" y="5989320"/>
-            <a:ext cx="11430000" cy="365760"/>
+            <a:off x="470916" y="1463040"/>
+            <a:ext cx="5486400" cy="457200"/>
           </a:xfrm>
           <a:prstGeom prst="rect">
             <a:avLst/>
@@ -14482,14 +14383,14 @@
           <a:lstStyle/>
           <a:p>
             <a:pPr algn="ctr">
-              <a:defRPr sz="1400" i="1">
-                <a:solidFill>
-                  <a:srgbClr val="707682"/>
-                </a:solidFill>
-              </a:defRPr>
-            </a:pPr>
-            <a:r>
-              <a:t>Frentes cronológicas: dados balanceados → funções de perda → arquiteturas Pareto-eficientes → modelos vision-language → escalas MST → heterogeneidade fenotípica.</a:t>
+              <a:defRPr sz="1500" b="1">
+                <a:solidFill>
+                  <a:srgbClr val="FFFFFF"/>
+                </a:solidFill>
+              </a:defRPr>
+            </a:pPr>
+            <a:r>
+              <a:t>6 OBJETIVOS ESPECÍFICOS</a:t>
             </a:r>
           </a:p>
         </p:txBody>
@@ -14502,8 +14403,212 @@
         </p:nvSpPr>
         <p:spPr>
           <a:xfrm>
-            <a:off x="457200" y="6446520"/>
-            <a:ext cx="10515600" cy="365760"/>
+            <a:off x="608076" y="2057400"/>
+            <a:ext cx="5212080" cy="4572000"/>
+          </a:xfrm>
+          <a:prstGeom prst="rect">
+            <a:avLst/>
+          </a:prstGeom>
+          <a:noFill/>
+        </p:spPr>
+        <p:txBody>
+          <a:bodyPr wrap="square">
+            <a:spAutoFit/>
+          </a:bodyPr>
+          <a:lstStyle/>
+          <a:p>
+            <a:pPr>
+              <a:spcAft>
+                <a:spcPts val="800"/>
+              </a:spcAft>
+            </a:pPr>
+            <a:r>
+              <a:rPr sz="1500" b="1">
+                <a:solidFill>
+                  <a:srgbClr val="1F2A4E"/>
+                </a:solidFill>
+              </a:rPr>
+              <a:t>1.  </a:t>
+            </a:r>
+            <a:r>
+              <a:rPr sz="1500">
+                <a:solidFill>
+                  <a:srgbClr val="3D424E"/>
+                </a:solidFill>
+              </a:rPr>
+              <a:t>Quantificar distribuição MST × classe racial no FairFace.</a:t>
+            </a:r>
+          </a:p>
+          <a:p>
+            <a:pPr>
+              <a:spcAft>
+                <a:spcPts val="800"/>
+              </a:spcAft>
+            </a:pPr>
+            <a:r>
+              <a:rPr sz="1500" b="1">
+                <a:solidFill>
+                  <a:srgbClr val="1F2A4E"/>
+                </a:solidFill>
+              </a:rPr>
+              <a:t>2.  </a:t>
+            </a:r>
+            <a:r>
+              <a:rPr sz="1500">
+                <a:solidFill>
+                  <a:srgbClr val="3D424E"/>
+                </a:solidFill>
+              </a:rPr>
+              <a:t>Treinar e avaliar classificador MST próprio + sensitivity.</a:t>
+            </a:r>
+          </a:p>
+          <a:p>
+            <a:pPr>
+              <a:spcAft>
+                <a:spcPts val="800"/>
+              </a:spcAft>
+            </a:pPr>
+            <a:r>
+              <a:rPr sz="1500" b="1">
+                <a:solidFill>
+                  <a:srgbClr val="1F2A4E"/>
+                </a:solidFill>
+              </a:rPr>
+              <a:t>3.  </a:t>
+            </a:r>
+            <a:r>
+              <a:rPr sz="1500">
+                <a:solidFill>
+                  <a:srgbClr val="3D424E"/>
+                </a:solidFill>
+              </a:rPr>
+              <a:t>Implementar FiLM sobre ConvNeXt-T e comparar vs 6 baselines.</a:t>
+            </a:r>
+          </a:p>
+          <a:p>
+            <a:pPr>
+              <a:spcAft>
+                <a:spcPts val="800"/>
+              </a:spcAft>
+            </a:pPr>
+            <a:r>
+              <a:rPr sz="1500" b="1">
+                <a:solidFill>
+                  <a:srgbClr val="1F2A4E"/>
+                </a:solidFill>
+              </a:rPr>
+              <a:t>4.  </a:t>
+            </a:r>
+            <a:r>
+              <a:rPr sz="1500">
+                <a:solidFill>
+                  <a:srgbClr val="3D424E"/>
+                </a:solidFill>
+              </a:rPr>
+              <a:t>Demonstrar transferência do ganho para reconhecimento (RFW/BFW).</a:t>
+            </a:r>
+          </a:p>
+          <a:p>
+            <a:pPr>
+              <a:spcAft>
+                <a:spcPts val="800"/>
+              </a:spcAft>
+            </a:pPr>
+            <a:r>
+              <a:rPr sz="1500" b="1">
+                <a:solidFill>
+                  <a:srgbClr val="1F2A4E"/>
+                </a:solidFill>
+              </a:rPr>
+              <a:t>5.  </a:t>
+            </a:r>
+            <a:r>
+              <a:rPr sz="1500">
+                <a:solidFill>
+                  <a:srgbClr val="3D424E"/>
+                </a:solidFill>
+              </a:rPr>
+              <a:t>Formalizar triangulação de métricas (DR, F1 pior classe, EO).</a:t>
+            </a:r>
+          </a:p>
+          <a:p>
+            <a:pPr>
+              <a:spcAft>
+                <a:spcPts val="800"/>
+              </a:spcAft>
+            </a:pPr>
+            <a:r>
+              <a:rPr sz="1500" b="1">
+                <a:solidFill>
+                  <a:srgbClr val="1F2A4E"/>
+                </a:solidFill>
+              </a:rPr>
+              <a:t>6.  </a:t>
+            </a:r>
+            <a:r>
+              <a:rPr sz="1500">
+                <a:solidFill>
+                  <a:srgbClr val="3D424E"/>
+                </a:solidFill>
+              </a:rPr>
+              <a:t>Decompor erro Latinx: fenótipo (irredutível) vs modelo (mitigável).</a:t>
+            </a:r>
+          </a:p>
+        </p:txBody>
+      </p:sp>
+      <p:sp>
+        <p:nvSpPr>
+          <p:cNvPr id="7" name="Rounded Rectangle 6"/>
+          <p:cNvSpPr/>
+          <p:nvPr/>
+        </p:nvSpPr>
+        <p:spPr>
+          <a:xfrm>
+            <a:off x="6231636" y="1417320"/>
+            <a:ext cx="5486400" cy="502920"/>
+          </a:xfrm>
+          <a:prstGeom prst="roundRect">
+            <a:avLst/>
+          </a:prstGeom>
+          <a:solidFill>
+            <a:srgbClr val="C0392B"/>
+          </a:solidFill>
+          <a:ln>
+            <a:noFill/>
+          </a:ln>
+        </p:spPr>
+        <p:style>
+          <a:lnRef idx="1">
+            <a:schemeClr val="accent1"/>
+          </a:lnRef>
+          <a:fillRef idx="3">
+            <a:schemeClr val="accent1"/>
+          </a:fillRef>
+          <a:effectRef idx="2">
+            <a:schemeClr val="accent1"/>
+          </a:effectRef>
+          <a:fontRef idx="minor">
+            <a:schemeClr val="lt1"/>
+          </a:fontRef>
+        </p:style>
+        <p:txBody>
+          <a:bodyPr rtlCol="0" anchor="ctr"/>
+          <a:lstStyle/>
+          <a:p>
+            <a:pPr algn="ctr"/>
+          </a:p>
+        </p:txBody>
+      </p:sp>
+      <p:sp>
+        <p:nvSpPr>
+          <p:cNvPr id="8" name="TextBox 7"/>
+          <p:cNvSpPr txBox="1"/>
+          <p:nvPr/>
+        </p:nvSpPr>
+        <p:spPr>
+          <a:xfrm>
+            <a:off x="6231636" y="1463040"/>
+            <a:ext cx="5486400" cy="457200"/>
           </a:xfrm>
           <a:prstGeom prst="rect">
             <a:avLst/>
@@ -14516,29 +14621,238 @@
           </a:bodyPr>
           <a:lstStyle/>
           <a:p>
-            <a:pPr>
-              <a:defRPr sz="900" i="1">
+            <a:pPr algn="ctr">
+              <a:defRPr sz="1500" b="1">
+                <a:solidFill>
+                  <a:srgbClr val="FFFFFF"/>
+                </a:solidFill>
+              </a:defRPr>
+            </a:pPr>
+            <a:r>
+              <a:t>6 HIPÓTESES TESTÁVEIS</a:t>
+            </a:r>
+          </a:p>
+        </p:txBody>
+      </p:sp>
+      <p:sp>
+        <p:nvSpPr>
+          <p:cNvPr id="9" name="TextBox 8"/>
+          <p:cNvSpPr txBox="1"/>
+          <p:nvPr/>
+        </p:nvSpPr>
+        <p:spPr>
+          <a:xfrm>
+            <a:off x="6368796" y="2057400"/>
+            <a:ext cx="5212080" cy="4572000"/>
+          </a:xfrm>
+          <a:prstGeom prst="rect">
+            <a:avLst/>
+          </a:prstGeom>
+          <a:noFill/>
+        </p:spPr>
+        <p:txBody>
+          <a:bodyPr wrap="square">
+            <a:spAutoFit/>
+          </a:bodyPr>
+          <a:lstStyle/>
+          <a:p>
+            <a:pPr>
+              <a:spcAft>
+                <a:spcPts val="800"/>
+              </a:spcAft>
+            </a:pPr>
+            <a:r>
+              <a:rPr sz="1500" b="1">
+                <a:solidFill>
+                  <a:srgbClr val="C0392B"/>
+                </a:solidFill>
+              </a:rPr>
+              <a:t>H1.  </a:t>
+            </a:r>
+            <a:r>
+              <a:rPr sz="1500">
+                <a:solidFill>
+                  <a:srgbClr val="3D424E"/>
+                </a:solidFill>
+              </a:rPr>
+              <a:t>Classificador MST atinge concordância humana  </a:t>
+            </a:r>
+            <a:r>
+              <a:rPr sz="1300" i="1">
                 <a:solidFill>
                   <a:srgbClr val="707682"/>
                 </a:solidFill>
-              </a:defRPr>
-            </a:pPr>
-            <a:r>
-              <a:t>Exame de Qualificação · Marcello Ozzetti · Orientação: Prof. Dr. Marcos G. Quiles · PPG-CC UNIFESP/ICT</a:t>
-            </a:r>
-          </a:p>
-        </p:txBody>
-      </p:sp>
-      <p:sp>
-        <p:nvSpPr>
-          <p:cNvPr id="7" name="TextBox 6"/>
+              </a:rPr>
+              <a:t>[κ ≥ 0,7]</a:t>
+            </a:r>
+          </a:p>
+          <a:p>
+            <a:pPr>
+              <a:spcAft>
+                <a:spcPts val="800"/>
+              </a:spcAft>
+            </a:pPr>
+            <a:r>
+              <a:rPr sz="1500" b="1">
+                <a:solidFill>
+                  <a:srgbClr val="C0392B"/>
+                </a:solidFill>
+              </a:rPr>
+              <a:t>H2.  </a:t>
+            </a:r>
+            <a:r>
+              <a:rPr sz="1500">
+                <a:solidFill>
+                  <a:srgbClr val="3D424E"/>
+                </a:solidFill>
+              </a:rPr>
+              <a:t>Latinx cobre ≥ 5 dos 10 tons Monk  </a:t>
+            </a:r>
+            <a:r>
+              <a:rPr sz="1300" i="1">
+                <a:solidFill>
+                  <a:srgbClr val="707682"/>
+                </a:solidFill>
+              </a:rPr>
+              <a:t>[cobertura ≥ 5]</a:t>
+            </a:r>
+          </a:p>
+          <a:p>
+            <a:pPr>
+              <a:spcAft>
+                <a:spcPts val="800"/>
+              </a:spcAft>
+            </a:pPr>
+            <a:r>
+              <a:rPr sz="1500" b="1">
+                <a:solidFill>
+                  <a:srgbClr val="C0392B"/>
+                </a:solidFill>
+              </a:rPr>
+              <a:t>H3.  </a:t>
+            </a:r>
+            <a:r>
+              <a:rPr sz="1500">
+                <a:solidFill>
+                  <a:srgbClr val="3D424E"/>
+                </a:solidFill>
+              </a:rPr>
+              <a:t>Condicionamento reduz disparidade sem perder acurácia  </a:t>
+            </a:r>
+            <a:r>
+              <a:rPr sz="1300" i="1">
+                <a:solidFill>
+                  <a:srgbClr val="707682"/>
+                </a:solidFill>
+              </a:rPr>
+              <a:t>[DR ↓  ·  F1 ≥ baseline]</a:t>
+            </a:r>
+          </a:p>
+          <a:p>
+            <a:pPr>
+              <a:spcAft>
+                <a:spcPts val="800"/>
+              </a:spcAft>
+            </a:pPr>
+            <a:r>
+              <a:rPr sz="1500" b="1">
+                <a:solidFill>
+                  <a:srgbClr val="C0392B"/>
+                </a:solidFill>
+              </a:rPr>
+              <a:t>H4.  </a:t>
+            </a:r>
+            <a:r>
+              <a:rPr sz="1500">
+                <a:solidFill>
+                  <a:srgbClr val="3D424E"/>
+                </a:solidFill>
+              </a:rPr>
+              <a:t>≥ 50 % dos erros Latinx em zonas de sobreposição  </a:t>
+            </a:r>
+            <a:r>
+              <a:rPr sz="1300" i="1">
+                <a:solidFill>
+                  <a:srgbClr val="707682"/>
+                </a:solidFill>
+              </a:rPr>
+              <a:t>[concentração ≥ 50 %]</a:t>
+            </a:r>
+          </a:p>
+          <a:p>
+            <a:pPr>
+              <a:spcAft>
+                <a:spcPts val="800"/>
+              </a:spcAft>
+            </a:pPr>
+            <a:r>
+              <a:rPr sz="1500" b="1">
+                <a:solidFill>
+                  <a:srgbClr val="C0392B"/>
+                </a:solidFill>
+              </a:rPr>
+              <a:t>H5.  </a:t>
+            </a:r>
+            <a:r>
+              <a:rPr sz="1500">
+                <a:solidFill>
+                  <a:srgbClr val="3D424E"/>
+                </a:solidFill>
+              </a:rPr>
+              <a:t>Ganho transfere para reconhecimento (RFW/BFW)  </a:t>
+            </a:r>
+            <a:r>
+              <a:rPr sz="1300" i="1">
+                <a:solidFill>
+                  <a:srgbClr val="707682"/>
+                </a:solidFill>
+              </a:rPr>
+              <a:t>[gap ↓ downstream]</a:t>
+            </a:r>
+          </a:p>
+          <a:p>
+            <a:pPr>
+              <a:spcAft>
+                <a:spcPts val="800"/>
+              </a:spcAft>
+            </a:pPr>
+            <a:r>
+              <a:rPr sz="1500" b="1">
+                <a:solidFill>
+                  <a:srgbClr val="C0392B"/>
+                </a:solidFill>
+              </a:rPr>
+              <a:t>H6.  </a:t>
+            </a:r>
+            <a:r>
+              <a:rPr sz="1500">
+                <a:solidFill>
+                  <a:srgbClr val="3D424E"/>
+                </a:solidFill>
+              </a:rPr>
+              <a:t>Pixel information explica variância do erro (Pangelinan)  </a:t>
+            </a:r>
+            <a:r>
+              <a:rPr sz="1300" i="1">
+                <a:solidFill>
+                  <a:srgbClr val="707682"/>
+                </a:solidFill>
+              </a:rPr>
+              <a:t>[R² ≥ 70 %]</a:t>
+            </a:r>
+          </a:p>
+        </p:txBody>
+      </p:sp>
+      <p:sp>
+        <p:nvSpPr>
+          <p:cNvPr id="10" name="TextBox 9"/>
           <p:cNvSpPr txBox="1"/>
           <p:nvPr/>
         </p:nvSpPr>
         <p:spPr>
           <a:xfrm>
-            <a:off x="11521440" y="6446520"/>
-            <a:ext cx="640080" cy="365760"/>
+            <a:off x="457200" y="6446520"/>
+            <a:ext cx="10515600" cy="365760"/>
           </a:xfrm>
           <a:prstGeom prst="rect">
             <a:avLst/>
@@ -14559,7 +14873,42 @@
               </a:defRPr>
             </a:pPr>
             <a:r>
-              <a:t>9 / 28</a:t>
+              <a:t>Exame de Qualificação · Marcello Ozzetti · Orientação: Prof. Dr. Marcos G. Quiles · PPG-CC UNIFESP/ICT</a:t>
+            </a:r>
+          </a:p>
+        </p:txBody>
+      </p:sp>
+      <p:sp>
+        <p:nvSpPr>
+          <p:cNvPr id="11" name="TextBox 10"/>
+          <p:cNvSpPr txBox="1"/>
+          <p:nvPr/>
+        </p:nvSpPr>
+        <p:spPr>
+          <a:xfrm>
+            <a:off x="11521440" y="6446520"/>
+            <a:ext cx="640080" cy="365760"/>
+          </a:xfrm>
+          <a:prstGeom prst="rect">
+            <a:avLst/>
+          </a:prstGeom>
+          <a:noFill/>
+        </p:spPr>
+        <p:txBody>
+          <a:bodyPr wrap="none">
+            <a:spAutoFit/>
+          </a:bodyPr>
+          <a:lstStyle/>
+          <a:p>
+            <a:pPr>
+              <a:defRPr sz="900" i="1">
+                <a:solidFill>
+                  <a:srgbClr val="707682"/>
+                </a:solidFill>
+              </a:defRPr>
+            </a:pPr>
+            <a:r>
+              <a:t>9 / 29</a:t>
             </a:r>
           </a:p>
         </p:txBody>

--- a/docs/ativo/material_qualificacao_2026-10-05.pptx
+++ b/docs/ativo/material_qualificacao_2026-10-05.pptx
@@ -3582,8 +3582,8 @@
         </p:blipFill>
         <p:spPr>
           <a:xfrm>
-            <a:off x="820882" y="1371600"/>
-            <a:ext cx="10547188" cy="4389120"/>
+            <a:off x="1703880" y="1371600"/>
+            <a:ext cx="8781190" cy="4389120"/>
           </a:xfrm>
           <a:prstGeom prst="rect">
             <a:avLst/>
@@ -4386,9 +4386,9 @@
                 <a:tableStyleId>{5C22544A-7EE6-4342-B048-85BDC9FD1C3A}</a:tableStyleId>
               </a:tblPr>
               <a:tblGrid>
-                <a:gridCol w="548640"/>
-                <a:gridCol w="5943600"/>
-                <a:gridCol w="4937760"/>
+                <a:gridCol w="457200"/>
+                <a:gridCol w="7315200"/>
+                <a:gridCol w="3657600"/>
               </a:tblGrid>
               <a:tr h="792480">
                 <a:tc>
@@ -4444,7 +4444,7 @@
                             <a:srgbClr val="FFFFFF"/>
                           </a:solidFill>
                         </a:rPr>
-                        <a:t>Como endereçamos</a:t>
+                        <a:t>Endereçamento</a:t>
                       </a:r>
                     </a:p>
                   </a:txBody>
@@ -4462,7 +4462,7 @@
                     <a:lstStyle/>
                     <a:p>
                       <a:r>
-                        <a:rPr sz="1500">
+                        <a:rPr sz="1100">
                           <a:solidFill>
                             <a:srgbClr val="3D424E"/>
                           </a:solidFill>
@@ -4479,12 +4479,12 @@
                     <a:lstStyle/>
                     <a:p>
                       <a:r>
-                        <a:rPr sz="1500">
+                        <a:rPr sz="1100">
                           <a:solidFill>
                             <a:srgbClr val="3D424E"/>
                           </a:solidFill>
                         </a:rPr>
-                        <a:t>Não existe matriz pública MST × classes raciais no FairFace.</a:t>
+                        <a:t>Ausência de tabulação pública MST × raça sobre FairFace. Schumann et al. (2023, NeurIPS) estabelecem o protocolo MST sem aplicá-lo ao FairFace; Pereira et al. (2026) liberam o STW sobre dataset próprio.</a:t>
                       </a:r>
                     </a:p>
                   </a:txBody>
@@ -4496,7 +4496,7 @@
                     <a:lstStyle/>
                     <a:p>
                       <a:r>
-                        <a:rPr sz="1500">
+                        <a:rPr sz="1100">
                           <a:solidFill>
                             <a:srgbClr val="3D424E"/>
                           </a:solidFill>
@@ -4515,7 +4515,7 @@
                     <a:lstStyle/>
                     <a:p>
                       <a:r>
-                        <a:rPr sz="1500">
+                        <a:rPr sz="1100">
                           <a:solidFill>
                             <a:srgbClr val="3D424E"/>
                           </a:solidFill>
@@ -4532,12 +4532,12 @@
                     <a:lstStyle/>
                     <a:p>
                       <a:r>
-                        <a:rPr sz="1500">
+                        <a:rPr sz="1100">
                           <a:solidFill>
                             <a:srgbClr val="3D424E"/>
                           </a:solidFill>
                         </a:rPr>
-                        <a:t>FiLM (Perez 2018) nunca foi aplicado em classificação racial multi-classe.</a:t>
+                        <a:t>FiLM nunca instanciado em classificação racial multi-classe. Nem o mecanismo original (Perez et al., 2018) nem sua formulação equivalente Conditional Batch Normalization (de Vries et al., 2017) foram adotados com condicionamento por tom de pele contínuo.</a:t>
                       </a:r>
                     </a:p>
                   </a:txBody>
@@ -4549,7 +4549,7 @@
                     <a:lstStyle/>
                     <a:p>
                       <a:r>
-                        <a:rPr sz="1500">
+                        <a:rPr sz="1100">
                           <a:solidFill>
                             <a:srgbClr val="3D424E"/>
                           </a:solidFill>
@@ -4568,7 +4568,7 @@
                     <a:lstStyle/>
                     <a:p>
                       <a:r>
-                        <a:rPr sz="1500">
+                        <a:rPr sz="1100">
                           <a:solidFill>
                             <a:srgbClr val="3D424E"/>
                           </a:solidFill>
@@ -4585,12 +4585,12 @@
                     <a:lstStyle/>
                     <a:p>
                       <a:r>
-                        <a:rPr sz="1500">
+                        <a:rPr sz="1100">
                           <a:solidFill>
                             <a:srgbClr val="3D424E"/>
                           </a:solidFill>
                         </a:rPr>
-                        <a:t>Métricas de fairness multi-classe estão fragmentadas na literatura.</a:t>
+                        <a:t>Falta decomposição formal do erro Latinx. Pangelinan et al. (2023) decompõem o gender gap em verificação (FST 6-tons), mas não estendem a classificação racial multi-classe; o patamar F1 ≈ 60 % em Latinx (Lin et al., 2022; AlDahoul et al., 2024) permanece sem explicação quantitativa.</a:t>
                       </a:r>
                     </a:p>
                   </a:txBody>
@@ -4602,12 +4602,12 @@
                     <a:lstStyle/>
                     <a:p>
                       <a:r>
-                        <a:rPr sz="1500">
+                        <a:rPr sz="1100">
                           <a:solidFill>
                             <a:srgbClr val="3D424E"/>
                           </a:solidFill>
                         </a:rPr>
-                        <a:t>Etapa 4 — Contribuição 4 (triangulação).</a:t>
+                        <a:t>Etapa 6 — Contribuição 5.</a:t>
                       </a:r>
                     </a:p>
                   </a:txBody>
@@ -4621,7 +4621,7 @@
                     <a:lstStyle/>
                     <a:p>
                       <a:r>
-                        <a:rPr sz="1500">
+                        <a:rPr sz="1100">
                           <a:solidFill>
                             <a:srgbClr val="3D424E"/>
                           </a:solidFill>
@@ -4638,12 +4638,12 @@
                     <a:lstStyle/>
                     <a:p>
                       <a:r>
-                        <a:rPr sz="1500">
+                        <a:rPr sz="1100">
                           <a:solidFill>
                             <a:srgbClr val="3D424E"/>
                           </a:solidFill>
                         </a:rPr>
-                        <a:t>Transferência de fairness (Madras et al., 2018) para reconhecimento é pouco estudada.</a:t>
+                        <a:t>Transferência classificação → verificação com condicionamento preservado é lacuna. Madras et al. (2018, LAFTR) provam a transferência fair apenas em dados tabulares; FairCal (2021), MixFairFace (2022) e score normalization (2024) treinam a mitigação diretamente em RFW/BFW.</a:t>
                       </a:r>
                     </a:p>
                   </a:txBody>
@@ -4655,12 +4655,12 @@
                     <a:lstStyle/>
                     <a:p>
                       <a:r>
-                        <a:rPr sz="1500">
+                        <a:rPr sz="1100">
                           <a:solidFill>
                             <a:srgbClr val="3D424E"/>
                           </a:solidFill>
                         </a:rPr>
-                        <a:t>Etapa 5 — Contribuição 5.</a:t>
+                        <a:t>Etapa 5 — Contribuição 6.</a:t>
                       </a:r>
                     </a:p>
                   </a:txBody>
@@ -4674,7 +4674,7 @@
                     <a:lstStyle/>
                     <a:p>
                       <a:r>
-                        <a:rPr sz="1500">
+                        <a:rPr sz="1100">
                           <a:solidFill>
                             <a:srgbClr val="3D424E"/>
                           </a:solidFill>
@@ -4691,12 +4691,12 @@
                     <a:lstStyle/>
                     <a:p>
                       <a:r>
-                        <a:rPr sz="1500">
+                        <a:rPr sz="1100">
                           <a:solidFill>
                             <a:srgbClr val="3D424E"/>
                           </a:solidFill>
                         </a:rPr>
-                        <a:t>Não há decomposição quantitativa do gap Latinx (fenótipo × algoritmo).</a:t>
+                        <a:t>Reporte empírico de mitigação sem triangulação. Apesar do Teorema da Impossibilidade (Kleinberg et al., 2017) e dos surveys que o catalogam (Mehrabi et al., 2021), papers de mitigação continuam reportando um único indicador agregado.</a:t>
                       </a:r>
                     </a:p>
                   </a:txBody>
@@ -4708,12 +4708,12 @@
                     <a:lstStyle/>
                     <a:p>
                       <a:r>
-                        <a:rPr sz="1500">
+                        <a:rPr sz="1100">
                           <a:solidFill>
                             <a:srgbClr val="3D424E"/>
                           </a:solidFill>
                         </a:rPr>
-                        <a:t>Etapa 6 — Contribuição 6.</a:t>
+                        <a:t>Etapa 4 — Contribuição 4.</a:t>
                       </a:r>
                     </a:p>
                   </a:txBody>
@@ -13119,7 +13119,7 @@
         <p:spPr>
           <a:xfrm>
             <a:off x="457200" y="1828800"/>
-            <a:ext cx="5669280" cy="2292169"/>
+            <a:ext cx="5669280" cy="2240014"/>
           </a:xfrm>
           <a:prstGeom prst="rect">
             <a:avLst/>

--- a/docs/ativo/material_qualificacao_2026-10-05.pptx
+++ b/docs/ativo/material_qualificacao_2026-10-05.pptx
@@ -4890,40 +4890,853 @@
           </a:p>
         </p:txBody>
       </p:sp>
-      <p:pic>
-        <p:nvPicPr>
-          <p:cNvPr id="4" name="Picture 3" descr="fig_pipeline_6etapas.png"/>
-          <p:cNvPicPr>
-            <a:picLocks noChangeAspect="1"/>
-          </p:cNvPicPr>
-          <p:nvPr/>
-        </p:nvPicPr>
-        <p:blipFill>
-          <a:blip r:embed="rId2"/>
-          <a:stretch>
-            <a:fillRect/>
-          </a:stretch>
-        </p:blipFill>
-        <p:spPr>
-          <a:xfrm>
-            <a:off x="4040534" y="1371600"/>
-            <a:ext cx="4107884" cy="4937760"/>
-          </a:xfrm>
-          <a:prstGeom prst="rect">
-            <a:avLst/>
-          </a:prstGeom>
-        </p:spPr>
-      </p:pic>
-      <p:sp>
-        <p:nvSpPr>
-          <p:cNvPr id="5" name="TextBox 4"/>
+      <p:sp>
+        <p:nvSpPr>
+          <p:cNvPr id="4" name="Rounded Rectangle 3"/>
+          <p:cNvSpPr/>
+          <p:nvPr/>
+        </p:nvSpPr>
+        <p:spPr>
+          <a:xfrm>
+            <a:off x="356615" y="1325880"/>
+            <a:ext cx="3758184" cy="384048"/>
+          </a:xfrm>
+          <a:prstGeom prst="roundRect">
+            <a:avLst/>
+          </a:prstGeom>
+          <a:solidFill>
+            <a:srgbClr val="E8EAED"/>
+          </a:solidFill>
+          <a:ln w="9525">
+            <a:solidFill>
+              <a:srgbClr val="3D424E"/>
+            </a:solidFill>
+          </a:ln>
+        </p:spPr>
+        <p:style>
+          <a:lnRef idx="1">
+            <a:schemeClr val="accent1"/>
+          </a:lnRef>
+          <a:fillRef idx="3">
+            <a:schemeClr val="accent1"/>
+          </a:fillRef>
+          <a:effectRef idx="2">
+            <a:schemeClr val="accent1"/>
+          </a:effectRef>
+          <a:fontRef idx="minor">
+            <a:schemeClr val="lt1"/>
+          </a:fontRef>
+        </p:style>
+        <p:txBody>
+          <a:bodyPr rtlCol="0" anchor="ctr" lIns="73152" rIns="73152" tIns="18288" bIns="18288"/>
+          <a:lstStyle/>
+          <a:p>
+            <a:pPr algn="ctr"/>
+            <a:r>
+              <a:rPr sz="1300" b="1">
+                <a:solidFill>
+                  <a:srgbClr val="3D424E"/>
+                </a:solidFill>
+              </a:rPr>
+              <a:t>A. DIAGNÓSTICO</a:t>
+            </a:r>
+          </a:p>
+        </p:txBody>
+      </p:sp>
+      <p:sp>
+        <p:nvSpPr>
+          <p:cNvPr id="5" name="Rounded Rectangle 4"/>
+          <p:cNvSpPr/>
+          <p:nvPr/>
+        </p:nvSpPr>
+        <p:spPr>
+          <a:xfrm>
+            <a:off x="4215383" y="1325880"/>
+            <a:ext cx="1828800" cy="384048"/>
+          </a:xfrm>
+          <a:prstGeom prst="roundRect">
+            <a:avLst/>
+          </a:prstGeom>
+          <a:solidFill>
+            <a:srgbClr val="B4C4E8"/>
+          </a:solidFill>
+          <a:ln w="9525">
+            <a:solidFill>
+              <a:srgbClr val="1F2A4E"/>
+            </a:solidFill>
+          </a:ln>
+        </p:spPr>
+        <p:style>
+          <a:lnRef idx="1">
+            <a:schemeClr val="accent1"/>
+          </a:lnRef>
+          <a:fillRef idx="3">
+            <a:schemeClr val="accent1"/>
+          </a:fillRef>
+          <a:effectRef idx="2">
+            <a:schemeClr val="accent1"/>
+          </a:effectRef>
+          <a:fontRef idx="minor">
+            <a:schemeClr val="lt1"/>
+          </a:fontRef>
+        </p:style>
+        <p:txBody>
+          <a:bodyPr rtlCol="0" anchor="ctr" lIns="73152" rIns="73152" tIns="18288" bIns="18288"/>
+          <a:lstStyle/>
+          <a:p>
+            <a:pPr algn="ctr"/>
+            <a:r>
+              <a:rPr sz="1300" b="1">
+                <a:solidFill>
+                  <a:srgbClr val="1F2A4E"/>
+                </a:solidFill>
+              </a:rPr>
+              <a:t>B. MÉTODO</a:t>
+            </a:r>
+          </a:p>
+        </p:txBody>
+      </p:sp>
+      <p:sp>
+        <p:nvSpPr>
+          <p:cNvPr id="6" name="Rounded Rectangle 5"/>
+          <p:cNvSpPr/>
+          <p:nvPr/>
+        </p:nvSpPr>
+        <p:spPr>
+          <a:xfrm>
+            <a:off x="6144768" y="1325880"/>
+            <a:ext cx="5687567" cy="384048"/>
+          </a:xfrm>
+          <a:prstGeom prst="roundRect">
+            <a:avLst/>
+          </a:prstGeom>
+          <a:solidFill>
+            <a:srgbClr val="E8EAED"/>
+          </a:solidFill>
+          <a:ln w="9525">
+            <a:solidFill>
+              <a:srgbClr val="3D424E"/>
+            </a:solidFill>
+          </a:ln>
+        </p:spPr>
+        <p:style>
+          <a:lnRef idx="1">
+            <a:schemeClr val="accent1"/>
+          </a:lnRef>
+          <a:fillRef idx="3">
+            <a:schemeClr val="accent1"/>
+          </a:fillRef>
+          <a:effectRef idx="2">
+            <a:schemeClr val="accent1"/>
+          </a:effectRef>
+          <a:fontRef idx="minor">
+            <a:schemeClr val="lt1"/>
+          </a:fontRef>
+        </p:style>
+        <p:txBody>
+          <a:bodyPr rtlCol="0" anchor="ctr" lIns="73152" rIns="73152" tIns="18288" bIns="18288"/>
+          <a:lstStyle/>
+          <a:p>
+            <a:pPr algn="ctr"/>
+            <a:r>
+              <a:rPr sz="1300" b="1">
+                <a:solidFill>
+                  <a:srgbClr val="3D424E"/>
+                </a:solidFill>
+              </a:rPr>
+              <a:t>C. VALIDAÇÃO</a:t>
+            </a:r>
+          </a:p>
+        </p:txBody>
+      </p:sp>
+      <p:sp>
+        <p:nvSpPr>
+          <p:cNvPr id="7" name="Rounded Rectangle 6"/>
+          <p:cNvSpPr/>
+          <p:nvPr/>
+        </p:nvSpPr>
+        <p:spPr>
+          <a:xfrm>
+            <a:off x="356615" y="1920240"/>
+            <a:ext cx="1828800" cy="3931920"/>
+          </a:xfrm>
+          <a:prstGeom prst="roundRect">
+            <a:avLst/>
+          </a:prstGeom>
+          <a:solidFill>
+            <a:srgbClr val="FFFFFF"/>
+          </a:solidFill>
+          <a:ln w="15240">
+            <a:solidFill>
+              <a:srgbClr val="1F2A4E"/>
+            </a:solidFill>
+          </a:ln>
+        </p:spPr>
+        <p:style>
+          <a:lnRef idx="1">
+            <a:schemeClr val="accent1"/>
+          </a:lnRef>
+          <a:fillRef idx="3">
+            <a:schemeClr val="accent1"/>
+          </a:fillRef>
+          <a:effectRef idx="2">
+            <a:schemeClr val="accent1"/>
+          </a:effectRef>
+          <a:fontRef idx="minor">
+            <a:schemeClr val="lt1"/>
+          </a:fontRef>
+        </p:style>
+        <p:txBody>
+          <a:bodyPr rtlCol="0" anchor="ctr" wrap="square" lIns="109728" rIns="109728" tIns="137160" bIns="109728"/>
+          <a:lstStyle/>
+          <a:p>
+            <a:pPr algn="ctr"/>
+            <a:r>
+              <a:rPr sz="1100" b="1">
+                <a:solidFill>
+                  <a:srgbClr val="3D68BB"/>
+                </a:solidFill>
+              </a:rPr>
+              <a:t>ETAPA 1</a:t>
+            </a:r>
+          </a:p>
+          <a:p>
+            <a:pPr algn="ctr">
+              <a:spcBef>
+                <a:spcPts val="600"/>
+              </a:spcBef>
+            </a:pPr>
+            <a:r>
+              <a:rPr sz="1600" b="1">
+                <a:solidFill>
+                  <a:srgbClr val="1F2A4E"/>
+                </a:solidFill>
+              </a:rPr>
+              <a:t>Classificador MST</a:t>
+            </a:r>
+          </a:p>
+          <a:p>
+            <a:pPr algn="ctr">
+              <a:spcBef>
+                <a:spcPts val="1400"/>
+              </a:spcBef>
+            </a:pPr>
+            <a:r>
+              <a:rPr sz="1200">
+                <a:solidFill>
+                  <a:srgbClr val="3D424E"/>
+                </a:solidFill>
+              </a:rPr>
+              <a:t>Treina rede 10-tons sobre MSTE + CCv2.</a:t>
+            </a:r>
+          </a:p>
+        </p:txBody>
+      </p:sp>
+      <p:sp>
+        <p:nvSpPr>
+          <p:cNvPr id="8" name="Rounded Rectangle 7"/>
+          <p:cNvSpPr/>
+          <p:nvPr/>
+        </p:nvSpPr>
+        <p:spPr>
+          <a:xfrm>
+            <a:off x="2285999" y="1920240"/>
+            <a:ext cx="1828800" cy="3931920"/>
+          </a:xfrm>
+          <a:prstGeom prst="roundRect">
+            <a:avLst/>
+          </a:prstGeom>
+          <a:solidFill>
+            <a:srgbClr val="FFFFFF"/>
+          </a:solidFill>
+          <a:ln w="15240">
+            <a:solidFill>
+              <a:srgbClr val="1F2A4E"/>
+            </a:solidFill>
+          </a:ln>
+        </p:spPr>
+        <p:style>
+          <a:lnRef idx="1">
+            <a:schemeClr val="accent1"/>
+          </a:lnRef>
+          <a:fillRef idx="3">
+            <a:schemeClr val="accent1"/>
+          </a:fillRef>
+          <a:effectRef idx="2">
+            <a:schemeClr val="accent1"/>
+          </a:effectRef>
+          <a:fontRef idx="minor">
+            <a:schemeClr val="lt1"/>
+          </a:fontRef>
+        </p:style>
+        <p:txBody>
+          <a:bodyPr rtlCol="0" anchor="ctr" wrap="square" lIns="109728" rIns="109728" tIns="137160" bIns="109728"/>
+          <a:lstStyle/>
+          <a:p>
+            <a:pPr algn="ctr"/>
+            <a:r>
+              <a:rPr sz="1100" b="1">
+                <a:solidFill>
+                  <a:srgbClr val="3D68BB"/>
+                </a:solidFill>
+              </a:rPr>
+              <a:t>ETAPA 2</a:t>
+            </a:r>
+          </a:p>
+          <a:p>
+            <a:pPr algn="ctr">
+              <a:spcBef>
+                <a:spcPts val="600"/>
+              </a:spcBef>
+            </a:pPr>
+            <a:r>
+              <a:rPr sz="1600" b="1">
+                <a:solidFill>
+                  <a:srgbClr val="1F2A4E"/>
+                </a:solidFill>
+              </a:rPr>
+              <a:t>Matriz MST × raça</a:t>
+            </a:r>
+          </a:p>
+          <a:p>
+            <a:pPr algn="ctr">
+              <a:spcBef>
+                <a:spcPts val="1400"/>
+              </a:spcBef>
+            </a:pPr>
+            <a:r>
+              <a:rPr sz="1200">
+                <a:solidFill>
+                  <a:srgbClr val="3D424E"/>
+                </a:solidFill>
+              </a:rPr>
+              <a:t>Tabula tons preditos pelas 7 classes FairFace.</a:t>
+            </a:r>
+          </a:p>
+        </p:txBody>
+      </p:sp>
+      <p:sp>
+        <p:nvSpPr>
+          <p:cNvPr id="9" name="Rounded Rectangle 8"/>
+          <p:cNvSpPr/>
+          <p:nvPr/>
+        </p:nvSpPr>
+        <p:spPr>
+          <a:xfrm>
+            <a:off x="4215383" y="1920240"/>
+            <a:ext cx="1828800" cy="3931920"/>
+          </a:xfrm>
+          <a:prstGeom prst="roundRect">
+            <a:avLst/>
+          </a:prstGeom>
+          <a:solidFill>
+            <a:srgbClr val="1F2A4E"/>
+          </a:solidFill>
+          <a:ln w="25400">
+            <a:solidFill>
+              <a:srgbClr val="1F2A4E"/>
+            </a:solidFill>
+          </a:ln>
+        </p:spPr>
+        <p:style>
+          <a:lnRef idx="1">
+            <a:schemeClr val="accent1"/>
+          </a:lnRef>
+          <a:fillRef idx="3">
+            <a:schemeClr val="accent1"/>
+          </a:fillRef>
+          <a:effectRef idx="2">
+            <a:schemeClr val="accent1"/>
+          </a:effectRef>
+          <a:fontRef idx="minor">
+            <a:schemeClr val="lt1"/>
+          </a:fontRef>
+        </p:style>
+        <p:txBody>
+          <a:bodyPr rtlCol="0" anchor="ctr" wrap="square" lIns="109728" rIns="109728" tIns="137160" bIns="109728"/>
+          <a:lstStyle/>
+          <a:p>
+            <a:pPr algn="ctr"/>
+            <a:r>
+              <a:rPr sz="1100" b="1">
+                <a:solidFill>
+                  <a:srgbClr val="B4C4E8"/>
+                </a:solidFill>
+              </a:rPr>
+              <a:t>ETAPA 3</a:t>
+            </a:r>
+          </a:p>
+          <a:p>
+            <a:pPr algn="ctr">
+              <a:spcBef>
+                <a:spcPts val="600"/>
+              </a:spcBef>
+            </a:pPr>
+            <a:r>
+              <a:rPr sz="1600" b="1">
+                <a:solidFill>
+                  <a:srgbClr val="FFFFFF"/>
+                </a:solidFill>
+              </a:rPr>
+              <a:t>FiLM + ConvNeXt-T</a:t>
+            </a:r>
+          </a:p>
+          <a:p>
+            <a:pPr algn="ctr">
+              <a:spcBef>
+                <a:spcPts val="1400"/>
+              </a:spcBef>
+            </a:pPr>
+            <a:r>
+              <a:rPr sz="1200">
+                <a:solidFill>
+                  <a:srgbClr val="B4C4E8"/>
+                </a:solidFill>
+              </a:rPr>
+              <a:t>Rede condiciona features ao vetor MST (método proposto).</a:t>
+            </a:r>
+          </a:p>
+        </p:txBody>
+      </p:sp>
+      <p:sp>
+        <p:nvSpPr>
+          <p:cNvPr id="10" name="Rounded Rectangle 9"/>
+          <p:cNvSpPr/>
+          <p:nvPr/>
+        </p:nvSpPr>
+        <p:spPr>
+          <a:xfrm>
+            <a:off x="6144768" y="1920240"/>
+            <a:ext cx="1828800" cy="3931920"/>
+          </a:xfrm>
+          <a:prstGeom prst="roundRect">
+            <a:avLst/>
+          </a:prstGeom>
+          <a:solidFill>
+            <a:srgbClr val="FFFFFF"/>
+          </a:solidFill>
+          <a:ln w="15240">
+            <a:solidFill>
+              <a:srgbClr val="1F2A4E"/>
+            </a:solidFill>
+          </a:ln>
+        </p:spPr>
+        <p:style>
+          <a:lnRef idx="1">
+            <a:schemeClr val="accent1"/>
+          </a:lnRef>
+          <a:fillRef idx="3">
+            <a:schemeClr val="accent1"/>
+          </a:fillRef>
+          <a:effectRef idx="2">
+            <a:schemeClr val="accent1"/>
+          </a:effectRef>
+          <a:fontRef idx="minor">
+            <a:schemeClr val="lt1"/>
+          </a:fontRef>
+        </p:style>
+        <p:txBody>
+          <a:bodyPr rtlCol="0" anchor="ctr" wrap="square" lIns="109728" rIns="109728" tIns="137160" bIns="109728"/>
+          <a:lstStyle/>
+          <a:p>
+            <a:pPr algn="ctr"/>
+            <a:r>
+              <a:rPr sz="1100" b="1">
+                <a:solidFill>
+                  <a:srgbClr val="3D68BB"/>
+                </a:solidFill>
+              </a:rPr>
+              <a:t>ETAPA 4</a:t>
+            </a:r>
+          </a:p>
+          <a:p>
+            <a:pPr algn="ctr">
+              <a:spcBef>
+                <a:spcPts val="600"/>
+              </a:spcBef>
+            </a:pPr>
+            <a:r>
+              <a:rPr sz="1600" b="1">
+                <a:solidFill>
+                  <a:srgbClr val="1F2A4E"/>
+                </a:solidFill>
+              </a:rPr>
+              <a:t>Baselines e cenários</a:t>
+            </a:r>
+          </a:p>
+          <a:p>
+            <a:pPr algn="ctr">
+              <a:spcBef>
+                <a:spcPts val="1400"/>
+              </a:spcBef>
+            </a:pPr>
+            <a:r>
+              <a:rPr sz="1200">
+                <a:solidFill>
+                  <a:srgbClr val="3D424E"/>
+                </a:solidFill>
+              </a:rPr>
+              <a:t>Confronta a proposta com seis famílias já publicadas.</a:t>
+            </a:r>
+          </a:p>
+        </p:txBody>
+      </p:sp>
+      <p:sp>
+        <p:nvSpPr>
+          <p:cNvPr id="11" name="Rounded Rectangle 10"/>
+          <p:cNvSpPr/>
+          <p:nvPr/>
+        </p:nvSpPr>
+        <p:spPr>
+          <a:xfrm>
+            <a:off x="8074151" y="1920240"/>
+            <a:ext cx="1828800" cy="3931920"/>
+          </a:xfrm>
+          <a:prstGeom prst="roundRect">
+            <a:avLst/>
+          </a:prstGeom>
+          <a:solidFill>
+            <a:srgbClr val="FFFFFF"/>
+          </a:solidFill>
+          <a:ln w="15240">
+            <a:solidFill>
+              <a:srgbClr val="1F2A4E"/>
+            </a:solidFill>
+          </a:ln>
+        </p:spPr>
+        <p:style>
+          <a:lnRef idx="1">
+            <a:schemeClr val="accent1"/>
+          </a:lnRef>
+          <a:fillRef idx="3">
+            <a:schemeClr val="accent1"/>
+          </a:fillRef>
+          <a:effectRef idx="2">
+            <a:schemeClr val="accent1"/>
+          </a:effectRef>
+          <a:fontRef idx="minor">
+            <a:schemeClr val="lt1"/>
+          </a:fontRef>
+        </p:style>
+        <p:txBody>
+          <a:bodyPr rtlCol="0" anchor="ctr" wrap="square" lIns="109728" rIns="109728" tIns="137160" bIns="109728"/>
+          <a:lstStyle/>
+          <a:p>
+            <a:pPr algn="ctr"/>
+            <a:r>
+              <a:rPr sz="1100" b="1">
+                <a:solidFill>
+                  <a:srgbClr val="3D68BB"/>
+                </a:solidFill>
+              </a:rPr>
+              <a:t>ETAPA 5</a:t>
+            </a:r>
+          </a:p>
+          <a:p>
+            <a:pPr algn="ctr">
+              <a:spcBef>
+                <a:spcPts val="600"/>
+              </a:spcBef>
+            </a:pPr>
+            <a:r>
+              <a:rPr sz="1600" b="1">
+                <a:solidFill>
+                  <a:srgbClr val="1F2A4E"/>
+                </a:solidFill>
+              </a:rPr>
+              <a:t>Transferência RFW/BFW</a:t>
+            </a:r>
+          </a:p>
+          <a:p>
+            <a:pPr algn="ctr">
+              <a:spcBef>
+                <a:spcPts val="1400"/>
+              </a:spcBef>
+            </a:pPr>
+            <a:r>
+              <a:rPr sz="1200">
+                <a:solidFill>
+                  <a:srgbClr val="3D424E"/>
+                </a:solidFill>
+              </a:rPr>
+              <a:t>Verifica herança do condicionamento em reconhecimento.</a:t>
+            </a:r>
+          </a:p>
+        </p:txBody>
+      </p:sp>
+      <p:sp>
+        <p:nvSpPr>
+          <p:cNvPr id="12" name="Rounded Rectangle 11"/>
+          <p:cNvSpPr/>
+          <p:nvPr/>
+        </p:nvSpPr>
+        <p:spPr>
+          <a:xfrm>
+            <a:off x="10003535" y="1920240"/>
+            <a:ext cx="1828800" cy="3931920"/>
+          </a:xfrm>
+          <a:prstGeom prst="roundRect">
+            <a:avLst/>
+          </a:prstGeom>
+          <a:solidFill>
+            <a:srgbClr val="FFFFFF"/>
+          </a:solidFill>
+          <a:ln w="15240">
+            <a:solidFill>
+              <a:srgbClr val="1F2A4E"/>
+            </a:solidFill>
+          </a:ln>
+        </p:spPr>
+        <p:style>
+          <a:lnRef idx="1">
+            <a:schemeClr val="accent1"/>
+          </a:lnRef>
+          <a:fillRef idx="3">
+            <a:schemeClr val="accent1"/>
+          </a:fillRef>
+          <a:effectRef idx="2">
+            <a:schemeClr val="accent1"/>
+          </a:effectRef>
+          <a:fontRef idx="minor">
+            <a:schemeClr val="lt1"/>
+          </a:fontRef>
+        </p:style>
+        <p:txBody>
+          <a:bodyPr rtlCol="0" anchor="ctr" wrap="square" lIns="109728" rIns="109728" tIns="137160" bIns="109728"/>
+          <a:lstStyle/>
+          <a:p>
+            <a:pPr algn="ctr"/>
+            <a:r>
+              <a:rPr sz="1100" b="1">
+                <a:solidFill>
+                  <a:srgbClr val="3D68BB"/>
+                </a:solidFill>
+              </a:rPr>
+              <a:t>ETAPA 6</a:t>
+            </a:r>
+          </a:p>
+          <a:p>
+            <a:pPr algn="ctr">
+              <a:spcBef>
+                <a:spcPts val="600"/>
+              </a:spcBef>
+            </a:pPr>
+            <a:r>
+              <a:rPr sz="1600" b="1">
+                <a:solidFill>
+                  <a:srgbClr val="1F2A4E"/>
+                </a:solidFill>
+              </a:rPr>
+              <a:t>Decomposição do erro</a:t>
+            </a:r>
+          </a:p>
+          <a:p>
+            <a:pPr algn="ctr">
+              <a:spcBef>
+                <a:spcPts val="1400"/>
+              </a:spcBef>
+            </a:pPr>
+            <a:r>
+              <a:rPr sz="1200">
+                <a:solidFill>
+                  <a:srgbClr val="3D424E"/>
+                </a:solidFill>
+              </a:rPr>
+              <a:t>Separa componente fenotípico de componente algorítmico.</a:t>
+            </a:r>
+          </a:p>
+        </p:txBody>
+      </p:sp>
+      <p:cxnSp>
+        <p:nvCxnSpPr>
+          <p:cNvPr id="13" name="Connector 12"/>
+          <p:cNvCxnSpPr/>
+          <p:nvPr/>
+        </p:nvCxnSpPr>
+        <p:spPr>
+          <a:xfrm>
+            <a:off x="2185415" y="3886200"/>
+            <a:ext cx="100584" cy="0"/>
+          </a:xfrm>
+          <a:prstGeom prst="bentConnector3">
+            <a:avLst/>
+          </a:prstGeom>
+          <a:ln w="31750">
+            <a:solidFill>
+              <a:srgbClr val="1F2A4E"/>
+            </a:solidFill>
+            <a:tailEnd type="triangle" w="med" len="med"/>
+          </a:ln>
+        </p:spPr>
+        <p:style>
+          <a:lnRef idx="2">
+            <a:schemeClr val="accent1"/>
+          </a:lnRef>
+          <a:fillRef idx="0">
+            <a:schemeClr val="accent1"/>
+          </a:fillRef>
+          <a:effectRef idx="1">
+            <a:schemeClr val="accent1"/>
+          </a:effectRef>
+          <a:fontRef idx="minor">
+            <a:schemeClr val="tx1"/>
+          </a:fontRef>
+        </p:style>
+      </p:cxnSp>
+      <p:cxnSp>
+        <p:nvCxnSpPr>
+          <p:cNvPr id="14" name="Connector 13"/>
+          <p:cNvCxnSpPr/>
+          <p:nvPr/>
+        </p:nvCxnSpPr>
+        <p:spPr>
+          <a:xfrm>
+            <a:off x="4114800" y="3886200"/>
+            <a:ext cx="100583" cy="0"/>
+          </a:xfrm>
+          <a:prstGeom prst="bentConnector3">
+            <a:avLst/>
+          </a:prstGeom>
+          <a:ln w="31750">
+            <a:solidFill>
+              <a:srgbClr val="1F2A4E"/>
+            </a:solidFill>
+            <a:tailEnd type="triangle" w="med" len="med"/>
+          </a:ln>
+        </p:spPr>
+        <p:style>
+          <a:lnRef idx="2">
+            <a:schemeClr val="accent1"/>
+          </a:lnRef>
+          <a:fillRef idx="0">
+            <a:schemeClr val="accent1"/>
+          </a:fillRef>
+          <a:effectRef idx="1">
+            <a:schemeClr val="accent1"/>
+          </a:effectRef>
+          <a:fontRef idx="minor">
+            <a:schemeClr val="tx1"/>
+          </a:fontRef>
+        </p:style>
+      </p:cxnSp>
+      <p:cxnSp>
+        <p:nvCxnSpPr>
+          <p:cNvPr id="15" name="Connector 14"/>
+          <p:cNvCxnSpPr/>
+          <p:nvPr/>
+        </p:nvCxnSpPr>
+        <p:spPr>
+          <a:xfrm>
+            <a:off x="6044183" y="3886200"/>
+            <a:ext cx="100585" cy="0"/>
+          </a:xfrm>
+          <a:prstGeom prst="bentConnector3">
+            <a:avLst/>
+          </a:prstGeom>
+          <a:ln w="31750">
+            <a:solidFill>
+              <a:srgbClr val="1F2A4E"/>
+            </a:solidFill>
+            <a:tailEnd type="triangle" w="med" len="med"/>
+          </a:ln>
+        </p:spPr>
+        <p:style>
+          <a:lnRef idx="2">
+            <a:schemeClr val="accent1"/>
+          </a:lnRef>
+          <a:fillRef idx="0">
+            <a:schemeClr val="accent1"/>
+          </a:fillRef>
+          <a:effectRef idx="1">
+            <a:schemeClr val="accent1"/>
+          </a:effectRef>
+          <a:fontRef idx="minor">
+            <a:schemeClr val="tx1"/>
+          </a:fontRef>
+        </p:style>
+      </p:cxnSp>
+      <p:cxnSp>
+        <p:nvCxnSpPr>
+          <p:cNvPr id="16" name="Connector 15"/>
+          <p:cNvCxnSpPr/>
+          <p:nvPr/>
+        </p:nvCxnSpPr>
+        <p:spPr>
+          <a:xfrm>
+            <a:off x="7973567" y="3886200"/>
+            <a:ext cx="100584" cy="0"/>
+          </a:xfrm>
+          <a:prstGeom prst="bentConnector3">
+            <a:avLst/>
+          </a:prstGeom>
+          <a:ln w="31750">
+            <a:solidFill>
+              <a:srgbClr val="1F2A4E"/>
+            </a:solidFill>
+            <a:tailEnd type="triangle" w="med" len="med"/>
+          </a:ln>
+        </p:spPr>
+        <p:style>
+          <a:lnRef idx="2">
+            <a:schemeClr val="accent1"/>
+          </a:lnRef>
+          <a:fillRef idx="0">
+            <a:schemeClr val="accent1"/>
+          </a:fillRef>
+          <a:effectRef idx="1">
+            <a:schemeClr val="accent1"/>
+          </a:effectRef>
+          <a:fontRef idx="minor">
+            <a:schemeClr val="tx1"/>
+          </a:fontRef>
+        </p:style>
+      </p:cxnSp>
+      <p:cxnSp>
+        <p:nvCxnSpPr>
+          <p:cNvPr id="17" name="Connector 16"/>
+          <p:cNvCxnSpPr/>
+          <p:nvPr/>
+        </p:nvCxnSpPr>
+        <p:spPr>
+          <a:xfrm>
+            <a:off x="9902951" y="3886200"/>
+            <a:ext cx="100584" cy="0"/>
+          </a:xfrm>
+          <a:prstGeom prst="bentConnector3">
+            <a:avLst/>
+          </a:prstGeom>
+          <a:ln w="31750">
+            <a:solidFill>
+              <a:srgbClr val="1F2A4E"/>
+            </a:solidFill>
+            <a:tailEnd type="triangle" w="med" len="med"/>
+          </a:ln>
+        </p:spPr>
+        <p:style>
+          <a:lnRef idx="2">
+            <a:schemeClr val="accent1"/>
+          </a:lnRef>
+          <a:fillRef idx="0">
+            <a:schemeClr val="accent1"/>
+          </a:fillRef>
+          <a:effectRef idx="1">
+            <a:schemeClr val="accent1"/>
+          </a:effectRef>
+          <a:fontRef idx="minor">
+            <a:schemeClr val="tx1"/>
+          </a:fontRef>
+        </p:style>
+      </p:cxnSp>
+      <p:sp>
+        <p:nvSpPr>
+          <p:cNvPr id="18" name="TextBox 17"/>
           <p:cNvSpPr txBox="1"/>
           <p:nvPr/>
         </p:nvSpPr>
         <p:spPr>
           <a:xfrm>
             <a:off x="457200" y="5989320"/>
-            <a:ext cx="11430000" cy="365760"/>
+            <a:ext cx="11247120" cy="365760"/>
           </a:xfrm>
           <a:prstGeom prst="rect">
             <a:avLst/>
@@ -4937,21 +5750,21 @@
           <a:lstStyle/>
           <a:p>
             <a:pPr algn="ctr">
-              <a:defRPr sz="1400" i="1">
+              <a:defRPr sz="1200" i="1">
                 <a:solidFill>
                   <a:srgbClr val="707682"/>
                 </a:solidFill>
               </a:defRPr>
             </a:pPr>
             <a:r>
-              <a:t>Fluxo top-down organizado em três fases: diagnóstico (etapas 1 e 2), método proposto (etapa 3) e validação e síntese (etapas 4 a 6).</a:t>
-            </a:r>
-          </a:p>
-        </p:txBody>
-      </p:sp>
-      <p:sp>
-        <p:nvSpPr>
-          <p:cNvPr id="6" name="TextBox 5"/>
+              <a:t>Fluxo em três fases: diagnóstico (etapas 1 e 2), método proposto (etapa 3, destacada) e validação e síntese (etapas 4 a 6).</a:t>
+            </a:r>
+          </a:p>
+        </p:txBody>
+      </p:sp>
+      <p:sp>
+        <p:nvSpPr>
+          <p:cNvPr id="19" name="TextBox 18"/>
           <p:cNvSpPr txBox="1"/>
           <p:nvPr/>
         </p:nvSpPr>
@@ -4986,7 +5799,7 @@
       </p:sp>
       <p:sp>
         <p:nvSpPr>
-          <p:cNvPr id="7" name="TextBox 6"/>
+          <p:cNvPr id="20" name="TextBox 19"/>
           <p:cNvSpPr txBox="1"/>
           <p:nvPr/>
         </p:nvSpPr>
@@ -14799,7 +15612,7 @@
                   <a:srgbClr val="3D424E"/>
                 </a:solidFill>
               </a:rPr>
-              <a:t>Ganho transfere para reconhecimento (RFW/BFW)  </a:t>
+              <a:t>Módulo FiLM/MST pré-treinado transfere via feature-freeze para RFW/BFW  </a:t>
             </a:r>
             <a:r>
               <a:rPr sz="1300" i="1">
@@ -14807,7 +15620,7 @@
                   <a:srgbClr val="707682"/>
                 </a:solidFill>
               </a:rPr>
-              <a:t>[gap ↓ downstream]</a:t>
+              <a:t>[ΔTAR@FAR=1e-4 ≥ +3 pp (African)]</a:t>
             </a:r>
           </a:p>
           <a:p>

--- a/docs/ativo/material_qualificacao_2026-10-05.pptx
+++ b/docs/ativo/material_qualificacao_2026-10-05.pptx
@@ -8336,279 +8336,1051 @@
           </a:p>
         </p:txBody>
       </p:sp>
-      <p:graphicFrame>
-        <p:nvGraphicFramePr>
-          <p:cNvPr id="4" name="Table 3"/>
-          <p:cNvGraphicFramePr>
-            <a:graphicFrameLocks noGrp="1"/>
-          </p:cNvGraphicFramePr>
-          <p:nvPr/>
-        </p:nvGraphicFramePr>
-        <p:xfrm>
-          <a:off x="457200" y="1371600"/>
-          <a:ext cx="11430000" cy="4754880"/>
-        </p:xfrm>
-        <a:graphic>
-          <a:graphicData uri="http://schemas.openxmlformats.org/drawingml/2006/table">
-            <a:tbl>
-              <a:tblPr firstRow="1" bandRow="1">
-                <a:tableStyleId>{5C22544A-7EE6-4342-B048-85BDC9FD1C3A}</a:tableStyleId>
-              </a:tblPr>
-              <a:tblGrid>
-                <a:gridCol w="548640"/>
-                <a:gridCol w="4937760"/>
-                <a:gridCol w="5943600"/>
-              </a:tblGrid>
-              <a:tr h="1188720">
-                <a:tc>
-                  <a:txBody>
-                    <a:bodyPr/>
-                    <a:lstStyle/>
-                    <a:p>
-                      <a:r>
-                        <a:rPr sz="1500" b="1">
-                          <a:solidFill>
-                            <a:srgbClr val="FFFFFF"/>
-                          </a:solidFill>
-                        </a:rPr>
-                        <a:t>ID</a:t>
-                      </a:r>
-                    </a:p>
-                  </a:txBody>
-                  <a:tcPr>
-                    <a:solidFill>
-                      <a:srgbClr val="1F2A4E"/>
-                    </a:solidFill>
-                  </a:tcPr>
-                </a:tc>
-                <a:tc>
-                  <a:txBody>
-                    <a:bodyPr/>
-                    <a:lstStyle/>
-                    <a:p>
-                      <a:r>
-                        <a:rPr sz="1500" b="1">
-                          <a:solidFill>
-                            <a:srgbClr val="FFFFFF"/>
-                          </a:solidFill>
-                        </a:rPr>
-                        <a:t>Configuração</a:t>
-                      </a:r>
-                    </a:p>
-                  </a:txBody>
-                  <a:tcPr>
-                    <a:solidFill>
-                      <a:srgbClr val="1F2A4E"/>
-                    </a:solidFill>
-                  </a:tcPr>
-                </a:tc>
-                <a:tc>
-                  <a:txBody>
-                    <a:bodyPr/>
-                    <a:lstStyle/>
-                    <a:p>
-                      <a:r>
-                        <a:rPr sz="1500" b="1">
-                          <a:solidFill>
-                            <a:srgbClr val="FFFFFF"/>
-                          </a:solidFill>
-                        </a:rPr>
-                        <a:t>O que testa</a:t>
-                      </a:r>
-                    </a:p>
-                  </a:txBody>
-                  <a:tcPr>
-                    <a:solidFill>
-                      <a:srgbClr val="1F2A4E"/>
-                    </a:solidFill>
-                  </a:tcPr>
-                </a:tc>
-              </a:tr>
-              <a:tr h="1188720">
-                <a:tc>
-                  <a:txBody>
-                    <a:bodyPr/>
-                    <a:lstStyle/>
-                    <a:p>
-                      <a:r>
-                        <a:rPr sz="1400">
-                          <a:solidFill>
-                            <a:srgbClr val="3D424E"/>
-                          </a:solidFill>
-                        </a:rPr>
-                        <a:t>A</a:t>
-                      </a:r>
-                    </a:p>
-                  </a:txBody>
-                  <a:tcPr/>
-                </a:tc>
-                <a:tc>
-                  <a:txBody>
-                    <a:bodyPr/>
-                    <a:lstStyle/>
-                    <a:p>
-                      <a:r>
-                        <a:rPr sz="1400">
-                          <a:solidFill>
-                            <a:srgbClr val="3D424E"/>
-                          </a:solidFill>
-                        </a:rPr>
-                        <a:t>ConvNeXt-T puro (baseline)</a:t>
-                      </a:r>
-                    </a:p>
-                  </a:txBody>
-                  <a:tcPr/>
-                </a:tc>
-                <a:tc>
-                  <a:txBody>
-                    <a:bodyPr/>
-                    <a:lstStyle/>
-                    <a:p>
-                      <a:r>
-                        <a:rPr sz="1400">
-                          <a:solidFill>
-                            <a:srgbClr val="3D424E"/>
-                          </a:solidFill>
-                        </a:rPr>
-                        <a:t>Sem condicionamento — controle arquitetural.</a:t>
-                      </a:r>
-                    </a:p>
-                  </a:txBody>
-                  <a:tcPr/>
-                </a:tc>
-              </a:tr>
-              <a:tr h="1188720">
-                <a:tc>
-                  <a:txBody>
-                    <a:bodyPr/>
-                    <a:lstStyle/>
-                    <a:p>
-                      <a:r>
-                        <a:rPr sz="1400">
-                          <a:solidFill>
-                            <a:srgbClr val="3D424E"/>
-                          </a:solidFill>
-                        </a:rPr>
-                        <a:t>B</a:t>
-                      </a:r>
-                    </a:p>
-                  </a:txBody>
-                  <a:tcPr>
-                    <a:solidFill>
-                      <a:srgbClr val="E8EAED"/>
-                    </a:solidFill>
-                  </a:tcPr>
-                </a:tc>
-                <a:tc>
-                  <a:txBody>
-                    <a:bodyPr/>
-                    <a:lstStyle/>
-                    <a:p>
-                      <a:r>
-                        <a:rPr sz="1400">
-                          <a:solidFill>
-                            <a:srgbClr val="3D424E"/>
-                          </a:solidFill>
-                        </a:rPr>
-                        <a:t>ConvNeXt-T + FiLM (sinal MST direto, 10-dim)</a:t>
-                      </a:r>
-                    </a:p>
-                  </a:txBody>
-                  <a:tcPr>
-                    <a:solidFill>
-                      <a:srgbClr val="E8EAED"/>
-                    </a:solidFill>
-                  </a:tcPr>
-                </a:tc>
-                <a:tc>
-                  <a:txBody>
-                    <a:bodyPr/>
-                    <a:lstStyle/>
-                    <a:p>
-                      <a:r>
-                        <a:rPr sz="1400">
-                          <a:solidFill>
-                            <a:srgbClr val="3D424E"/>
-                          </a:solidFill>
-                        </a:rPr>
-                        <a:t>Proposta principal — tom de pele entra como contexto.</a:t>
-                      </a:r>
-                    </a:p>
-                  </a:txBody>
-                  <a:tcPr>
-                    <a:solidFill>
-                      <a:srgbClr val="E8EAED"/>
-                    </a:solidFill>
-                  </a:tcPr>
-                </a:tc>
-              </a:tr>
-              <a:tr h="1188720">
-                <a:tc>
-                  <a:txBody>
-                    <a:bodyPr/>
-                    <a:lstStyle/>
-                    <a:p>
-                      <a:r>
-                        <a:rPr sz="1400">
-                          <a:solidFill>
-                            <a:srgbClr val="3D424E"/>
-                          </a:solidFill>
-                        </a:rPr>
-                        <a:t>C</a:t>
-                      </a:r>
-                    </a:p>
-                  </a:txBody>
-                  <a:tcPr/>
-                </a:tc>
-                <a:tc>
-                  <a:txBody>
-                    <a:bodyPr/>
-                    <a:lstStyle/>
-                    <a:p>
-                      <a:r>
-                        <a:rPr sz="1400">
-                          <a:solidFill>
-                            <a:srgbClr val="3D424E"/>
-                          </a:solidFill>
-                        </a:rPr>
-                        <a:t>ConvNeXt-T + FiLM (sinal via CLIP-text, 512-dim)</a:t>
-                      </a:r>
-                    </a:p>
-                  </a:txBody>
-                  <a:tcPr/>
-                </a:tc>
-                <a:tc>
-                  <a:txBody>
-                    <a:bodyPr/>
-                    <a:lstStyle/>
-                    <a:p>
-                      <a:r>
-                        <a:rPr sz="1400">
-                          <a:solidFill>
-                            <a:srgbClr val="3D424E"/>
-                          </a:solidFill>
-                        </a:rPr>
-                        <a:t>Alternativa moderna — Radford et al. (2021) + Dehdashtian et al. (2024).</a:t>
-                      </a:r>
-                    </a:p>
-                  </a:txBody>
-                  <a:tcPr/>
-                </a:tc>
-              </a:tr>
-            </a:tbl>
-          </a:graphicData>
-        </a:graphic>
-      </p:graphicFrame>
-      <p:sp>
-        <p:nvSpPr>
-          <p:cNvPr id="5" name="TextBox 4"/>
+      <p:sp>
+        <p:nvSpPr>
+          <p:cNvPr id="4" name="Rounded Rectangle 3"/>
+          <p:cNvSpPr/>
+          <p:nvPr/>
+        </p:nvSpPr>
+        <p:spPr>
+          <a:xfrm>
+            <a:off x="333756" y="1325880"/>
+            <a:ext cx="3657600" cy="4617720"/>
+          </a:xfrm>
+          <a:prstGeom prst="roundRect">
+            <a:avLst/>
+          </a:prstGeom>
+          <a:solidFill>
+            <a:srgbClr val="FFFFFF"/>
+          </a:solidFill>
+          <a:ln w="16510">
+            <a:solidFill>
+              <a:srgbClr val="1F2A4E"/>
+            </a:solidFill>
+          </a:ln>
+        </p:spPr>
+        <p:style>
+          <a:lnRef idx="1">
+            <a:schemeClr val="accent1"/>
+          </a:lnRef>
+          <a:fillRef idx="3">
+            <a:schemeClr val="accent1"/>
+          </a:fillRef>
+          <a:effectRef idx="2">
+            <a:schemeClr val="accent1"/>
+          </a:effectRef>
+          <a:fontRef idx="minor">
+            <a:schemeClr val="lt1"/>
+          </a:fontRef>
+        </p:style>
+        <p:txBody>
+          <a:bodyPr rtlCol="0" anchor="ctr" tIns="0"/>
+          <a:lstStyle/>
+          <a:p>
+            <a:pPr algn="ctr"/>
+          </a:p>
+        </p:txBody>
+      </p:sp>
+      <p:sp>
+        <p:nvSpPr>
+          <p:cNvPr id="5" name="Oval 4"/>
+          <p:cNvSpPr/>
+          <p:nvPr/>
+        </p:nvSpPr>
+        <p:spPr>
+          <a:xfrm>
+            <a:off x="1819656" y="1554480"/>
+            <a:ext cx="685800" cy="685800"/>
+          </a:xfrm>
+          <a:prstGeom prst="ellipse">
+            <a:avLst/>
+          </a:prstGeom>
+          <a:solidFill>
+            <a:srgbClr val="1F2A4E"/>
+          </a:solidFill>
+          <a:ln w="19050">
+            <a:solidFill>
+              <a:srgbClr val="1F2A4E"/>
+            </a:solidFill>
+          </a:ln>
+        </p:spPr>
+        <p:style>
+          <a:lnRef idx="1">
+            <a:schemeClr val="accent1"/>
+          </a:lnRef>
+          <a:fillRef idx="3">
+            <a:schemeClr val="accent1"/>
+          </a:fillRef>
+          <a:effectRef idx="2">
+            <a:schemeClr val="accent1"/>
+          </a:effectRef>
+          <a:fontRef idx="minor">
+            <a:schemeClr val="lt1"/>
+          </a:fontRef>
+        </p:style>
+        <p:txBody>
+          <a:bodyPr rtlCol="0" anchor="ctr" tIns="0" bIns="0"/>
+          <a:lstStyle/>
+          <a:p>
+            <a:pPr algn="ctr"/>
+            <a:r>
+              <a:rPr sz="2800" b="1">
+                <a:solidFill>
+                  <a:srgbClr val="FFFFFF"/>
+                </a:solidFill>
+              </a:rPr>
+              <a:t>A</a:t>
+            </a:r>
+          </a:p>
+        </p:txBody>
+      </p:sp>
+      <p:sp>
+        <p:nvSpPr>
+          <p:cNvPr id="6" name="TextBox 5"/>
           <p:cNvSpPr txBox="1"/>
           <p:nvPr/>
         </p:nvSpPr>
         <p:spPr>
           <a:xfrm>
-            <a:off x="457200" y="6446520"/>
-            <a:ext cx="10515600" cy="365760"/>
+            <a:off x="470916" y="2331720"/>
+            <a:ext cx="3383280" cy="868680"/>
+          </a:xfrm>
+          <a:prstGeom prst="rect">
+            <a:avLst/>
+          </a:prstGeom>
+          <a:noFill/>
+        </p:spPr>
+        <p:txBody>
+          <a:bodyPr wrap="square">
+            <a:spAutoFit/>
+          </a:bodyPr>
+          <a:lstStyle/>
+          <a:p>
+            <a:pPr algn="ctr"/>
+            <a:r>
+              <a:rPr sz="1600" b="1">
+                <a:solidFill>
+                  <a:srgbClr val="1F2A4E"/>
+                </a:solidFill>
+              </a:rPr>
+              <a:t>ConvNeXt-T puro</a:t>
+            </a:r>
+          </a:p>
+        </p:txBody>
+      </p:sp>
+      <p:sp>
+        <p:nvSpPr>
+          <p:cNvPr id="7" name="Rounded Rectangle 6"/>
+          <p:cNvSpPr/>
+          <p:nvPr/>
+        </p:nvSpPr>
+        <p:spPr>
+          <a:xfrm>
+            <a:off x="516636" y="3291839"/>
+            <a:ext cx="1152144" cy="502920"/>
+          </a:xfrm>
+          <a:prstGeom prst="roundRect">
+            <a:avLst/>
+          </a:prstGeom>
+          <a:solidFill>
+            <a:srgbClr val="E8EAED"/>
+          </a:solidFill>
+          <a:ln w="13970">
+            <a:solidFill>
+              <a:srgbClr val="3D424E"/>
+            </a:solidFill>
+          </a:ln>
+        </p:spPr>
+        <p:style>
+          <a:lnRef idx="1">
+            <a:schemeClr val="accent1"/>
+          </a:lnRef>
+          <a:fillRef idx="3">
+            <a:schemeClr val="accent1"/>
+          </a:fillRef>
+          <a:effectRef idx="2">
+            <a:schemeClr val="accent1"/>
+          </a:effectRef>
+          <a:fontRef idx="minor">
+            <a:schemeClr val="lt1"/>
+          </a:fontRef>
+        </p:style>
+        <p:txBody>
+          <a:bodyPr rtlCol="0" anchor="ctr" lIns="36576" rIns="36576" tIns="18288" bIns="18288"/>
+          <a:lstStyle/>
+          <a:p>
+            <a:pPr algn="ctr"/>
+            <a:r>
+              <a:rPr sz="1000" b="1">
+                <a:solidFill>
+                  <a:srgbClr val="3D424E"/>
+                </a:solidFill>
+              </a:rPr>
+              <a:t>Imagem</a:t>
+            </a:r>
+          </a:p>
+        </p:txBody>
+      </p:sp>
+      <p:sp>
+        <p:nvSpPr>
+          <p:cNvPr id="8" name="Rounded Rectangle 7"/>
+          <p:cNvSpPr/>
+          <p:nvPr/>
+        </p:nvSpPr>
+        <p:spPr>
+          <a:xfrm>
+            <a:off x="2327148" y="3291839"/>
+            <a:ext cx="1481328" cy="502920"/>
+          </a:xfrm>
+          <a:prstGeom prst="roundRect">
+            <a:avLst/>
+          </a:prstGeom>
+          <a:solidFill>
+            <a:srgbClr val="FFFFFF"/>
+          </a:solidFill>
+          <a:ln w="13970">
+            <a:solidFill>
+              <a:srgbClr val="1F2A4E"/>
+            </a:solidFill>
+          </a:ln>
+        </p:spPr>
+        <p:style>
+          <a:lnRef idx="1">
+            <a:schemeClr val="accent1"/>
+          </a:lnRef>
+          <a:fillRef idx="3">
+            <a:schemeClr val="accent1"/>
+          </a:fillRef>
+          <a:effectRef idx="2">
+            <a:schemeClr val="accent1"/>
+          </a:effectRef>
+          <a:fontRef idx="minor">
+            <a:schemeClr val="lt1"/>
+          </a:fontRef>
+        </p:style>
+        <p:txBody>
+          <a:bodyPr rtlCol="0" anchor="ctr" lIns="36576" rIns="36576" tIns="18288" bIns="18288"/>
+          <a:lstStyle/>
+          <a:p>
+            <a:pPr algn="ctr"/>
+            <a:r>
+              <a:rPr sz="1000" b="1">
+                <a:solidFill>
+                  <a:srgbClr val="1F2A4E"/>
+                </a:solidFill>
+              </a:rPr>
+              <a:t>ConvNeXt-T</a:t>
+            </a:r>
+          </a:p>
+        </p:txBody>
+      </p:sp>
+      <p:cxnSp>
+        <p:nvCxnSpPr>
+          <p:cNvPr id="9" name="Connector 8"/>
+          <p:cNvCxnSpPr/>
+          <p:nvPr/>
+        </p:nvCxnSpPr>
+        <p:spPr>
+          <a:xfrm>
+            <a:off x="1668780" y="3543299"/>
+            <a:ext cx="658368" cy="0"/>
+          </a:xfrm>
+          <a:prstGeom prst="bentConnector3">
+            <a:avLst/>
+          </a:prstGeom>
+          <a:ln w="25400">
+            <a:solidFill>
+              <a:srgbClr val="3D424E"/>
+            </a:solidFill>
+            <a:tailEnd type="triangle" w="med" len="med"/>
+          </a:ln>
+        </p:spPr>
+        <p:style>
+          <a:lnRef idx="2">
+            <a:schemeClr val="accent1"/>
+          </a:lnRef>
+          <a:fillRef idx="0">
+            <a:schemeClr val="accent1"/>
+          </a:fillRef>
+          <a:effectRef idx="1">
+            <a:schemeClr val="accent1"/>
+          </a:effectRef>
+          <a:fontRef idx="minor">
+            <a:schemeClr val="tx1"/>
+          </a:fontRef>
+        </p:style>
+      </p:cxnSp>
+      <p:sp>
+        <p:nvSpPr>
+          <p:cNvPr id="10" name="TextBox 9"/>
+          <p:cNvSpPr txBox="1"/>
+          <p:nvPr/>
+        </p:nvSpPr>
+        <p:spPr>
+          <a:xfrm>
+            <a:off x="516636" y="4069080"/>
+            <a:ext cx="3291840" cy="960120"/>
+          </a:xfrm>
+          <a:prstGeom prst="rect">
+            <a:avLst/>
+          </a:prstGeom>
+          <a:noFill/>
+        </p:spPr>
+        <p:txBody>
+          <a:bodyPr wrap="square">
+            <a:spAutoFit/>
+          </a:bodyPr>
+          <a:lstStyle/>
+          <a:p>
+            <a:pPr algn="ctr"/>
+            <a:r>
+              <a:rPr sz="1300">
+                <a:solidFill>
+                  <a:srgbClr val="3D424E"/>
+                </a:solidFill>
+              </a:rPr>
+              <a:t>Controle arquitetural
+sem condicionamento.</a:t>
+            </a:r>
+          </a:p>
+        </p:txBody>
+      </p:sp>
+      <p:sp>
+        <p:nvSpPr>
+          <p:cNvPr id="11" name="TextBox 10"/>
+          <p:cNvSpPr txBox="1"/>
+          <p:nvPr/>
+        </p:nvSpPr>
+        <p:spPr>
+          <a:xfrm>
+            <a:off x="516636" y="5166360"/>
+            <a:ext cx="3291840" cy="640080"/>
+          </a:xfrm>
+          <a:prstGeom prst="rect">
+            <a:avLst/>
+          </a:prstGeom>
+          <a:noFill/>
+        </p:spPr>
+        <p:txBody>
+          <a:bodyPr wrap="square">
+            <a:spAutoFit/>
+          </a:bodyPr>
+          <a:lstStyle/>
+          <a:p>
+            <a:pPr algn="ctr"/>
+            <a:r>
+              <a:rPr sz="1050" i="1">
+                <a:solidFill>
+                  <a:srgbClr val="707682"/>
+                </a:solidFill>
+              </a:rPr>
+              <a:t>Baseline</a:t>
+            </a:r>
+          </a:p>
+        </p:txBody>
+      </p:sp>
+      <p:sp>
+        <p:nvSpPr>
+          <p:cNvPr id="12" name="Rounded Rectangle 11"/>
+          <p:cNvSpPr/>
+          <p:nvPr/>
+        </p:nvSpPr>
+        <p:spPr>
+          <a:xfrm>
+            <a:off x="4265676" y="1325880"/>
+            <a:ext cx="3657600" cy="4617720"/>
+          </a:xfrm>
+          <a:prstGeom prst="roundRect">
+            <a:avLst/>
+          </a:prstGeom>
+          <a:solidFill>
+            <a:srgbClr val="1F2A4E"/>
+          </a:solidFill>
+          <a:ln w="30480">
+            <a:solidFill>
+              <a:srgbClr val="1F2A4E"/>
+            </a:solidFill>
+          </a:ln>
+        </p:spPr>
+        <p:style>
+          <a:lnRef idx="1">
+            <a:schemeClr val="accent1"/>
+          </a:lnRef>
+          <a:fillRef idx="3">
+            <a:schemeClr val="accent1"/>
+          </a:fillRef>
+          <a:effectRef idx="2">
+            <a:schemeClr val="accent1"/>
+          </a:effectRef>
+          <a:fontRef idx="minor">
+            <a:schemeClr val="lt1"/>
+          </a:fontRef>
+        </p:style>
+        <p:txBody>
+          <a:bodyPr rtlCol="0" anchor="ctr" tIns="0"/>
+          <a:lstStyle/>
+          <a:p>
+            <a:pPr algn="ctr"/>
+          </a:p>
+        </p:txBody>
+      </p:sp>
+      <p:sp>
+        <p:nvSpPr>
+          <p:cNvPr id="13" name="Oval 12"/>
+          <p:cNvSpPr/>
+          <p:nvPr/>
+        </p:nvSpPr>
+        <p:spPr>
+          <a:xfrm>
+            <a:off x="5751576" y="1554480"/>
+            <a:ext cx="685800" cy="685800"/>
+          </a:xfrm>
+          <a:prstGeom prst="ellipse">
+            <a:avLst/>
+          </a:prstGeom>
+          <a:solidFill>
+            <a:srgbClr val="FFFFFF"/>
+          </a:solidFill>
+          <a:ln w="19050">
+            <a:solidFill>
+              <a:srgbClr val="1F2A4E"/>
+            </a:solidFill>
+          </a:ln>
+        </p:spPr>
+        <p:style>
+          <a:lnRef idx="1">
+            <a:schemeClr val="accent1"/>
+          </a:lnRef>
+          <a:fillRef idx="3">
+            <a:schemeClr val="accent1"/>
+          </a:fillRef>
+          <a:effectRef idx="2">
+            <a:schemeClr val="accent1"/>
+          </a:effectRef>
+          <a:fontRef idx="minor">
+            <a:schemeClr val="lt1"/>
+          </a:fontRef>
+        </p:style>
+        <p:txBody>
+          <a:bodyPr rtlCol="0" anchor="ctr" tIns="0" bIns="0"/>
+          <a:lstStyle/>
+          <a:p>
+            <a:pPr algn="ctr"/>
+            <a:r>
+              <a:rPr sz="2800" b="1">
+                <a:solidFill>
+                  <a:srgbClr val="1F2A4E"/>
+                </a:solidFill>
+              </a:rPr>
+              <a:t>B</a:t>
+            </a:r>
+          </a:p>
+        </p:txBody>
+      </p:sp>
+      <p:sp>
+        <p:nvSpPr>
+          <p:cNvPr id="14" name="TextBox 13"/>
+          <p:cNvSpPr txBox="1"/>
+          <p:nvPr/>
+        </p:nvSpPr>
+        <p:spPr>
+          <a:xfrm>
+            <a:off x="4402836" y="2331720"/>
+            <a:ext cx="3383280" cy="868680"/>
+          </a:xfrm>
+          <a:prstGeom prst="rect">
+            <a:avLst/>
+          </a:prstGeom>
+          <a:noFill/>
+        </p:spPr>
+        <p:txBody>
+          <a:bodyPr wrap="square">
+            <a:spAutoFit/>
+          </a:bodyPr>
+          <a:lstStyle/>
+          <a:p>
+            <a:pPr algn="ctr"/>
+            <a:r>
+              <a:rPr sz="1600" b="1">
+                <a:solidFill>
+                  <a:srgbClr val="FFFFFF"/>
+                </a:solidFill>
+              </a:rPr>
+              <a:t>ConvNeXt-T + FiLM
+(MST direto, 10-dim)</a:t>
+            </a:r>
+          </a:p>
+        </p:txBody>
+      </p:sp>
+      <p:sp>
+        <p:nvSpPr>
+          <p:cNvPr id="15" name="Rounded Rectangle 14"/>
+          <p:cNvSpPr/>
+          <p:nvPr/>
+        </p:nvSpPr>
+        <p:spPr>
+          <a:xfrm>
+            <a:off x="4448556" y="3291839"/>
+            <a:ext cx="1382572" cy="502920"/>
+          </a:xfrm>
+          <a:prstGeom prst="roundRect">
+            <a:avLst/>
+          </a:prstGeom>
+          <a:solidFill>
+            <a:srgbClr val="3D68BB"/>
+          </a:solidFill>
+          <a:ln w="13970">
+            <a:solidFill>
+              <a:srgbClr val="1F2A4E"/>
+            </a:solidFill>
+          </a:ln>
+        </p:spPr>
+        <p:style>
+          <a:lnRef idx="1">
+            <a:schemeClr val="accent1"/>
+          </a:lnRef>
+          <a:fillRef idx="3">
+            <a:schemeClr val="accent1"/>
+          </a:fillRef>
+          <a:effectRef idx="2">
+            <a:schemeClr val="accent1"/>
+          </a:effectRef>
+          <a:fontRef idx="minor">
+            <a:schemeClr val="lt1"/>
+          </a:fontRef>
+        </p:style>
+        <p:txBody>
+          <a:bodyPr rtlCol="0" anchor="ctr" lIns="36576" rIns="36576" tIns="18288" bIns="18288"/>
+          <a:lstStyle/>
+          <a:p>
+            <a:pPr algn="ctr"/>
+            <a:r>
+              <a:rPr sz="1000" b="1">
+                <a:solidFill>
+                  <a:srgbClr val="FFFFFF"/>
+                </a:solidFill>
+              </a:rPr>
+              <a:t>MST (10-dim)</a:t>
+            </a:r>
+          </a:p>
+        </p:txBody>
+      </p:sp>
+      <p:sp>
+        <p:nvSpPr>
+          <p:cNvPr id="16" name="Rounded Rectangle 15"/>
+          <p:cNvSpPr/>
+          <p:nvPr/>
+        </p:nvSpPr>
+        <p:spPr>
+          <a:xfrm>
+            <a:off x="6489496" y="3291839"/>
+            <a:ext cx="1250899" cy="502920"/>
+          </a:xfrm>
+          <a:prstGeom prst="roundRect">
+            <a:avLst/>
+          </a:prstGeom>
+          <a:solidFill>
+            <a:srgbClr val="B4C4E8"/>
+          </a:solidFill>
+          <a:ln w="13970">
+            <a:solidFill>
+              <a:srgbClr val="1F2A4E"/>
+            </a:solidFill>
+          </a:ln>
+        </p:spPr>
+        <p:style>
+          <a:lnRef idx="1">
+            <a:schemeClr val="accent1"/>
+          </a:lnRef>
+          <a:fillRef idx="3">
+            <a:schemeClr val="accent1"/>
+          </a:fillRef>
+          <a:effectRef idx="2">
+            <a:schemeClr val="accent1"/>
+          </a:effectRef>
+          <a:fontRef idx="minor">
+            <a:schemeClr val="lt1"/>
+          </a:fontRef>
+        </p:style>
+        <p:txBody>
+          <a:bodyPr rtlCol="0" anchor="ctr" lIns="36576" rIns="36576" tIns="18288" bIns="18288"/>
+          <a:lstStyle/>
+          <a:p>
+            <a:pPr algn="ctr"/>
+            <a:r>
+              <a:rPr sz="1000" b="1">
+                <a:solidFill>
+                  <a:srgbClr val="1F2A4E"/>
+                </a:solidFill>
+              </a:rPr>
+              <a:t>FiLM · ConvNeXt-T</a:t>
+            </a:r>
+          </a:p>
+        </p:txBody>
+      </p:sp>
+      <p:cxnSp>
+        <p:nvCxnSpPr>
+          <p:cNvPr id="17" name="Connector 16"/>
+          <p:cNvCxnSpPr/>
+          <p:nvPr/>
+        </p:nvCxnSpPr>
+        <p:spPr>
+          <a:xfrm>
+            <a:off x="5831128" y="3543299"/>
+            <a:ext cx="658368" cy="0"/>
+          </a:xfrm>
+          <a:prstGeom prst="bentConnector3">
+            <a:avLst/>
+          </a:prstGeom>
+          <a:ln w="25400">
+            <a:solidFill>
+              <a:srgbClr val="FFFFFF"/>
+            </a:solidFill>
+            <a:tailEnd type="triangle" w="med" len="med"/>
+          </a:ln>
+        </p:spPr>
+        <p:style>
+          <a:lnRef idx="2">
+            <a:schemeClr val="accent1"/>
+          </a:lnRef>
+          <a:fillRef idx="0">
+            <a:schemeClr val="accent1"/>
+          </a:fillRef>
+          <a:effectRef idx="1">
+            <a:schemeClr val="accent1"/>
+          </a:effectRef>
+          <a:fontRef idx="minor">
+            <a:schemeClr val="tx1"/>
+          </a:fontRef>
+        </p:style>
+      </p:cxnSp>
+      <p:sp>
+        <p:nvSpPr>
+          <p:cNvPr id="18" name="TextBox 17"/>
+          <p:cNvSpPr txBox="1"/>
+          <p:nvPr/>
+        </p:nvSpPr>
+        <p:spPr>
+          <a:xfrm>
+            <a:off x="4448556" y="4069080"/>
+            <a:ext cx="3291840" cy="960120"/>
+          </a:xfrm>
+          <a:prstGeom prst="rect">
+            <a:avLst/>
+          </a:prstGeom>
+          <a:noFill/>
+        </p:spPr>
+        <p:txBody>
+          <a:bodyPr wrap="square">
+            <a:spAutoFit/>
+          </a:bodyPr>
+          <a:lstStyle/>
+          <a:p>
+            <a:pPr algn="ctr"/>
+            <a:r>
+              <a:rPr sz="1300">
+                <a:solidFill>
+                  <a:srgbClr val="B4C4E8"/>
+                </a:solidFill>
+              </a:rPr>
+              <a:t>Proposta principal — tom
+de pele contínuo como
+contexto arquitetural.</a:t>
+            </a:r>
+          </a:p>
+        </p:txBody>
+      </p:sp>
+      <p:sp>
+        <p:nvSpPr>
+          <p:cNvPr id="19" name="TextBox 18"/>
+          <p:cNvSpPr txBox="1"/>
+          <p:nvPr/>
+        </p:nvSpPr>
+        <p:spPr>
+          <a:xfrm>
+            <a:off x="4448556" y="5166360"/>
+            <a:ext cx="3291840" cy="640080"/>
+          </a:xfrm>
+          <a:prstGeom prst="rect">
+            <a:avLst/>
+          </a:prstGeom>
+          <a:noFill/>
+        </p:spPr>
+        <p:txBody>
+          <a:bodyPr wrap="square">
+            <a:spAutoFit/>
+          </a:bodyPr>
+          <a:lstStyle/>
+          <a:p>
+            <a:pPr algn="ctr"/>
+            <a:r>
+              <a:rPr sz="1050" i="1">
+                <a:solidFill>
+                  <a:srgbClr val="B4C4E8"/>
+                </a:solidFill>
+              </a:rPr>
+              <a:t>Perez et al. (2018) + Monk
+(Schumann et al., 2023)</a:t>
+            </a:r>
+          </a:p>
+        </p:txBody>
+      </p:sp>
+      <p:sp>
+        <p:nvSpPr>
+          <p:cNvPr id="20" name="Rounded Rectangle 19"/>
+          <p:cNvSpPr/>
+          <p:nvPr/>
+        </p:nvSpPr>
+        <p:spPr>
+          <a:xfrm>
+            <a:off x="8197596" y="1325880"/>
+            <a:ext cx="3657600" cy="4617720"/>
+          </a:xfrm>
+          <a:prstGeom prst="roundRect">
+            <a:avLst/>
+          </a:prstGeom>
+          <a:solidFill>
+            <a:srgbClr val="FFFFFF"/>
+          </a:solidFill>
+          <a:ln w="16510">
+            <a:solidFill>
+              <a:srgbClr val="1F2A4E"/>
+            </a:solidFill>
+          </a:ln>
+        </p:spPr>
+        <p:style>
+          <a:lnRef idx="1">
+            <a:schemeClr val="accent1"/>
+          </a:lnRef>
+          <a:fillRef idx="3">
+            <a:schemeClr val="accent1"/>
+          </a:fillRef>
+          <a:effectRef idx="2">
+            <a:schemeClr val="accent1"/>
+          </a:effectRef>
+          <a:fontRef idx="minor">
+            <a:schemeClr val="lt1"/>
+          </a:fontRef>
+        </p:style>
+        <p:txBody>
+          <a:bodyPr rtlCol="0" anchor="ctr" tIns="0"/>
+          <a:lstStyle/>
+          <a:p>
+            <a:pPr algn="ctr"/>
+          </a:p>
+        </p:txBody>
+      </p:sp>
+      <p:sp>
+        <p:nvSpPr>
+          <p:cNvPr id="21" name="Oval 20"/>
+          <p:cNvSpPr/>
+          <p:nvPr/>
+        </p:nvSpPr>
+        <p:spPr>
+          <a:xfrm>
+            <a:off x="9683496" y="1554480"/>
+            <a:ext cx="685800" cy="685800"/>
+          </a:xfrm>
+          <a:prstGeom prst="ellipse">
+            <a:avLst/>
+          </a:prstGeom>
+          <a:solidFill>
+            <a:srgbClr val="1F2A4E"/>
+          </a:solidFill>
+          <a:ln w="19050">
+            <a:solidFill>
+              <a:srgbClr val="1F2A4E"/>
+            </a:solidFill>
+          </a:ln>
+        </p:spPr>
+        <p:style>
+          <a:lnRef idx="1">
+            <a:schemeClr val="accent1"/>
+          </a:lnRef>
+          <a:fillRef idx="3">
+            <a:schemeClr val="accent1"/>
+          </a:fillRef>
+          <a:effectRef idx="2">
+            <a:schemeClr val="accent1"/>
+          </a:effectRef>
+          <a:fontRef idx="minor">
+            <a:schemeClr val="lt1"/>
+          </a:fontRef>
+        </p:style>
+        <p:txBody>
+          <a:bodyPr rtlCol="0" anchor="ctr" tIns="0" bIns="0"/>
+          <a:lstStyle/>
+          <a:p>
+            <a:pPr algn="ctr"/>
+            <a:r>
+              <a:rPr sz="2800" b="1">
+                <a:solidFill>
+                  <a:srgbClr val="FFFFFF"/>
+                </a:solidFill>
+              </a:rPr>
+              <a:t>C</a:t>
+            </a:r>
+          </a:p>
+        </p:txBody>
+      </p:sp>
+      <p:sp>
+        <p:nvSpPr>
+          <p:cNvPr id="22" name="TextBox 21"/>
+          <p:cNvSpPr txBox="1"/>
+          <p:nvPr/>
+        </p:nvSpPr>
+        <p:spPr>
+          <a:xfrm>
+            <a:off x="8334756" y="2331720"/>
+            <a:ext cx="3383280" cy="868680"/>
+          </a:xfrm>
+          <a:prstGeom prst="rect">
+            <a:avLst/>
+          </a:prstGeom>
+          <a:noFill/>
+        </p:spPr>
+        <p:txBody>
+          <a:bodyPr wrap="square">
+            <a:spAutoFit/>
+          </a:bodyPr>
+          <a:lstStyle/>
+          <a:p>
+            <a:pPr algn="ctr"/>
+            <a:r>
+              <a:rPr sz="1600" b="1">
+                <a:solidFill>
+                  <a:srgbClr val="1F2A4E"/>
+                </a:solidFill>
+              </a:rPr>
+              <a:t>ConvNeXt-T + FiLM
+(CLIP-text, 512-dim)</a:t>
+            </a:r>
+          </a:p>
+        </p:txBody>
+      </p:sp>
+      <p:sp>
+        <p:nvSpPr>
+          <p:cNvPr id="23" name="Rounded Rectangle 22"/>
+          <p:cNvSpPr/>
+          <p:nvPr/>
+        </p:nvSpPr>
+        <p:spPr>
+          <a:xfrm>
+            <a:off x="8380475" y="3291839"/>
+            <a:ext cx="1382572" cy="502920"/>
+          </a:xfrm>
+          <a:prstGeom prst="roundRect">
+            <a:avLst/>
+          </a:prstGeom>
+          <a:solidFill>
+            <a:srgbClr val="E8EAED"/>
+          </a:solidFill>
+          <a:ln w="13970">
+            <a:solidFill>
+              <a:srgbClr val="1F2A4E"/>
+            </a:solidFill>
+          </a:ln>
+        </p:spPr>
+        <p:style>
+          <a:lnRef idx="1">
+            <a:schemeClr val="accent1"/>
+          </a:lnRef>
+          <a:fillRef idx="3">
+            <a:schemeClr val="accent1"/>
+          </a:fillRef>
+          <a:effectRef idx="2">
+            <a:schemeClr val="accent1"/>
+          </a:effectRef>
+          <a:fontRef idx="minor">
+            <a:schemeClr val="lt1"/>
+          </a:fontRef>
+        </p:style>
+        <p:txBody>
+          <a:bodyPr rtlCol="0" anchor="ctr" lIns="36576" rIns="36576" tIns="18288" bIns="18288"/>
+          <a:lstStyle/>
+          <a:p>
+            <a:pPr algn="ctr"/>
+            <a:r>
+              <a:rPr sz="1000" b="1">
+                <a:solidFill>
+                  <a:srgbClr val="1F2A4E"/>
+                </a:solidFill>
+              </a:rPr>
+              <a:t>CLIP-text (512-dim)</a:t>
+            </a:r>
+          </a:p>
+        </p:txBody>
+      </p:sp>
+      <p:sp>
+        <p:nvSpPr>
+          <p:cNvPr id="24" name="Rounded Rectangle 23"/>
+          <p:cNvSpPr/>
+          <p:nvPr/>
+        </p:nvSpPr>
+        <p:spPr>
+          <a:xfrm>
+            <a:off x="10421416" y="3291839"/>
+            <a:ext cx="1250899" cy="502920"/>
+          </a:xfrm>
+          <a:prstGeom prst="roundRect">
+            <a:avLst/>
+          </a:prstGeom>
+          <a:solidFill>
+            <a:srgbClr val="FFFFFF"/>
+          </a:solidFill>
+          <a:ln w="13970">
+            <a:solidFill>
+              <a:srgbClr val="1F2A4E"/>
+            </a:solidFill>
+          </a:ln>
+        </p:spPr>
+        <p:style>
+          <a:lnRef idx="1">
+            <a:schemeClr val="accent1"/>
+          </a:lnRef>
+          <a:fillRef idx="3">
+            <a:schemeClr val="accent1"/>
+          </a:fillRef>
+          <a:effectRef idx="2">
+            <a:schemeClr val="accent1"/>
+          </a:effectRef>
+          <a:fontRef idx="minor">
+            <a:schemeClr val="lt1"/>
+          </a:fontRef>
+        </p:style>
+        <p:txBody>
+          <a:bodyPr rtlCol="0" anchor="ctr" lIns="36576" rIns="36576" tIns="18288" bIns="18288"/>
+          <a:lstStyle/>
+          <a:p>
+            <a:pPr algn="ctr"/>
+            <a:r>
+              <a:rPr sz="1000" b="1">
+                <a:solidFill>
+                  <a:srgbClr val="1F2A4E"/>
+                </a:solidFill>
+              </a:rPr>
+              <a:t>FiLM · ConvNeXt-T</a:t>
+            </a:r>
+          </a:p>
+        </p:txBody>
+      </p:sp>
+      <p:cxnSp>
+        <p:nvCxnSpPr>
+          <p:cNvPr id="25" name="Connector 24"/>
+          <p:cNvCxnSpPr/>
+          <p:nvPr/>
+        </p:nvCxnSpPr>
+        <p:spPr>
+          <a:xfrm>
+            <a:off x="9763048" y="3543299"/>
+            <a:ext cx="658368" cy="0"/>
+          </a:xfrm>
+          <a:prstGeom prst="bentConnector3">
+            <a:avLst/>
+          </a:prstGeom>
+          <a:ln w="25400">
+            <a:solidFill>
+              <a:srgbClr val="3D68BB"/>
+            </a:solidFill>
+            <a:tailEnd type="triangle" w="med" len="med"/>
+          </a:ln>
+        </p:spPr>
+        <p:style>
+          <a:lnRef idx="2">
+            <a:schemeClr val="accent1"/>
+          </a:lnRef>
+          <a:fillRef idx="0">
+            <a:schemeClr val="accent1"/>
+          </a:fillRef>
+          <a:effectRef idx="1">
+            <a:schemeClr val="accent1"/>
+          </a:effectRef>
+          <a:fontRef idx="minor">
+            <a:schemeClr val="tx1"/>
+          </a:fontRef>
+        </p:style>
+      </p:cxnSp>
+      <p:sp>
+        <p:nvSpPr>
+          <p:cNvPr id="26" name="TextBox 25"/>
+          <p:cNvSpPr txBox="1"/>
+          <p:nvPr/>
+        </p:nvSpPr>
+        <p:spPr>
+          <a:xfrm>
+            <a:off x="8380475" y="4069080"/>
+            <a:ext cx="3291840" cy="960120"/>
+          </a:xfrm>
+          <a:prstGeom prst="rect">
+            <a:avLst/>
+          </a:prstGeom>
+          <a:noFill/>
+        </p:spPr>
+        <p:txBody>
+          <a:bodyPr wrap="square">
+            <a:spAutoFit/>
+          </a:bodyPr>
+          <a:lstStyle/>
+          <a:p>
+            <a:pPr algn="ctr"/>
+            <a:r>
+              <a:rPr sz="1300">
+                <a:solidFill>
+                  <a:srgbClr val="3D424E"/>
+                </a:solidFill>
+              </a:rPr>
+              <a:t>Alternativa moderna —
+embedding textual rico
+como sinal condicionante.</a:t>
+            </a:r>
+          </a:p>
+        </p:txBody>
+      </p:sp>
+      <p:sp>
+        <p:nvSpPr>
+          <p:cNvPr id="27" name="TextBox 26"/>
+          <p:cNvSpPr txBox="1"/>
+          <p:nvPr/>
+        </p:nvSpPr>
+        <p:spPr>
+          <a:xfrm>
+            <a:off x="8380475" y="5166360"/>
+            <a:ext cx="3291840" cy="640080"/>
+          </a:xfrm>
+          <a:prstGeom prst="rect">
+            <a:avLst/>
+          </a:prstGeom>
+          <a:noFill/>
+        </p:spPr>
+        <p:txBody>
+          <a:bodyPr wrap="square">
+            <a:spAutoFit/>
+          </a:bodyPr>
+          <a:lstStyle/>
+          <a:p>
+            <a:pPr algn="ctr"/>
+            <a:r>
+              <a:rPr sz="1050" i="1">
+                <a:solidFill>
+                  <a:srgbClr val="707682"/>
+                </a:solidFill>
+              </a:rPr>
+              <a:t>Radford et al. (2021) +
+Dehdashtian et al. (2024)</a:t>
+            </a:r>
+          </a:p>
+        </p:txBody>
+      </p:sp>
+      <p:sp>
+        <p:nvSpPr>
+          <p:cNvPr id="28" name="TextBox 27"/>
+          <p:cNvSpPr txBox="1"/>
+          <p:nvPr/>
+        </p:nvSpPr>
+        <p:spPr>
+          <a:xfrm>
+            <a:off x="457200" y="6035040"/>
+            <a:ext cx="11247120" cy="365760"/>
           </a:xfrm>
           <a:prstGeom prst="rect">
             <a:avLst/>
@@ -8621,6 +9393,41 @@
           </a:bodyPr>
           <a:lstStyle/>
           <a:p>
+            <a:pPr algn="ctr">
+              <a:defRPr sz="1200" i="1">
+                <a:solidFill>
+                  <a:srgbClr val="707682"/>
+                </a:solidFill>
+              </a:defRPr>
+            </a:pPr>
+            <a:r>
+              <a:t>Ceteris paribus: mesmo backbone (ConvNeXt-T), mesmo dataset (FairFace), mesmas três sementes, mesma receita de treino — varia-se apenas o sinal condicionante.</a:t>
+            </a:r>
+          </a:p>
+        </p:txBody>
+      </p:sp>
+      <p:sp>
+        <p:nvSpPr>
+          <p:cNvPr id="29" name="TextBox 28"/>
+          <p:cNvSpPr txBox="1"/>
+          <p:nvPr/>
+        </p:nvSpPr>
+        <p:spPr>
+          <a:xfrm>
+            <a:off x="457200" y="6446520"/>
+            <a:ext cx="10515600" cy="365760"/>
+          </a:xfrm>
+          <a:prstGeom prst="rect">
+            <a:avLst/>
+          </a:prstGeom>
+          <a:noFill/>
+        </p:spPr>
+        <p:txBody>
+          <a:bodyPr wrap="none">
+            <a:spAutoFit/>
+          </a:bodyPr>
+          <a:lstStyle/>
+          <a:p>
             <a:pPr>
               <a:defRPr sz="900" i="1">
                 <a:solidFill>
@@ -8636,7 +9443,7 @@
       </p:sp>
       <p:sp>
         <p:nvSpPr>
-          <p:cNvPr id="6" name="TextBox 5"/>
+          <p:cNvPr id="30" name="TextBox 29"/>
           <p:cNvSpPr txBox="1"/>
           <p:nvPr/>
         </p:nvSpPr>

--- a/docs/ativo/material_qualificacao_2026-10-05.pptx
+++ b/docs/ativo/material_qualificacao_2026-10-05.pptx
@@ -8476,8 +8476,8 @@
         </p:nvSpPr>
         <p:spPr>
           <a:xfrm>
-            <a:off x="516636" y="3291839"/>
-            <a:ext cx="1152144" cy="502920"/>
+            <a:off x="516636" y="3502152"/>
+            <a:ext cx="1250899" cy="384048"/>
           </a:xfrm>
           <a:prstGeom prst="roundRect">
             <a:avLst/>
@@ -8506,7 +8506,7 @@
           </a:fontRef>
         </p:style>
         <p:txBody>
-          <a:bodyPr rtlCol="0" anchor="ctr" lIns="36576" rIns="36576" tIns="18288" bIns="18288"/>
+          <a:bodyPr rtlCol="0" anchor="ctr" lIns="27432" rIns="27432" tIns="9144" bIns="9144"/>
           <a:lstStyle/>
           <a:p>
             <a:pPr algn="ctr"/>
@@ -8529,8 +8529,8 @@
         </p:nvSpPr>
         <p:spPr>
           <a:xfrm>
-            <a:off x="2327148" y="3291839"/>
-            <a:ext cx="1481328" cy="502920"/>
+            <a:off x="2228392" y="3502152"/>
+            <a:ext cx="1580083" cy="384048"/>
           </a:xfrm>
           <a:prstGeom prst="roundRect">
             <a:avLst/>
@@ -8559,7 +8559,7 @@
           </a:fontRef>
         </p:style>
         <p:txBody>
-          <a:bodyPr rtlCol="0" anchor="ctr" lIns="36576" rIns="36576" tIns="18288" bIns="18288"/>
+          <a:bodyPr rtlCol="0" anchor="ctr" lIns="27432" rIns="27432" tIns="9144" bIns="9144"/>
           <a:lstStyle/>
           <a:p>
             <a:pPr algn="ctr"/>
@@ -8582,8 +8582,8 @@
         </p:nvCxnSpPr>
         <p:spPr>
           <a:xfrm>
-            <a:off x="1668780" y="3543299"/>
-            <a:ext cx="658368" cy="0"/>
+            <a:off x="1767535" y="3694176"/>
+            <a:ext cx="460857" cy="0"/>
           </a:xfrm>
           <a:prstGeom prst="bentConnector3">
             <a:avLst/>
@@ -8618,8 +8618,8 @@
         </p:nvSpPr>
         <p:spPr>
           <a:xfrm>
-            <a:off x="516636" y="4069080"/>
-            <a:ext cx="3291840" cy="960120"/>
+            <a:off x="516636" y="4343400"/>
+            <a:ext cx="3291840" cy="914400"/>
           </a:xfrm>
           <a:prstGeom prst="rect">
             <a:avLst/>
@@ -8653,8 +8653,8 @@
         </p:nvSpPr>
         <p:spPr>
           <a:xfrm>
-            <a:off x="516636" y="5166360"/>
-            <a:ext cx="3291840" cy="640080"/>
+            <a:off x="516636" y="5257800"/>
+            <a:ext cx="3291840" cy="594360"/>
           </a:xfrm>
           <a:prstGeom prst="rect">
             <a:avLst/>
@@ -8821,7 +8821,495 @@
         <p:spPr>
           <a:xfrm>
             <a:off x="4448556" y="3291839"/>
-            <a:ext cx="1382572" cy="502920"/>
+            <a:ext cx="1382572" cy="384048"/>
+          </a:xfrm>
+          <a:prstGeom prst="roundRect">
+            <a:avLst/>
+          </a:prstGeom>
+          <a:solidFill>
+            <a:srgbClr val="E8EAED"/>
+          </a:solidFill>
+          <a:ln w="13970">
+            <a:solidFill>
+              <a:srgbClr val="3D424E"/>
+            </a:solidFill>
+          </a:ln>
+        </p:spPr>
+        <p:style>
+          <a:lnRef idx="1">
+            <a:schemeClr val="accent1"/>
+          </a:lnRef>
+          <a:fillRef idx="3">
+            <a:schemeClr val="accent1"/>
+          </a:fillRef>
+          <a:effectRef idx="2">
+            <a:schemeClr val="accent1"/>
+          </a:effectRef>
+          <a:fontRef idx="minor">
+            <a:schemeClr val="lt1"/>
+          </a:fontRef>
+        </p:style>
+        <p:txBody>
+          <a:bodyPr rtlCol="0" anchor="ctr" lIns="27432" rIns="27432" tIns="9144" bIns="9144"/>
+          <a:lstStyle/>
+          <a:p>
+            <a:pPr algn="ctr"/>
+            <a:r>
+              <a:rPr sz="1000" b="1">
+                <a:solidFill>
+                  <a:srgbClr val="3D424E"/>
+                </a:solidFill>
+              </a:rPr>
+              <a:t>Imagem</a:t>
+            </a:r>
+          </a:p>
+        </p:txBody>
+      </p:sp>
+      <p:sp>
+        <p:nvSpPr>
+          <p:cNvPr id="16" name="Rounded Rectangle 15"/>
+          <p:cNvSpPr/>
+          <p:nvPr/>
+        </p:nvSpPr>
+        <p:spPr>
+          <a:xfrm>
+            <a:off x="4448556" y="3749039"/>
+            <a:ext cx="1382572" cy="384048"/>
+          </a:xfrm>
+          <a:prstGeom prst="roundRect">
+            <a:avLst/>
+          </a:prstGeom>
+          <a:solidFill>
+            <a:srgbClr val="B4C4E8"/>
+          </a:solidFill>
+          <a:ln w="13970">
+            <a:solidFill>
+              <a:srgbClr val="1F2A4E"/>
+            </a:solidFill>
+          </a:ln>
+        </p:spPr>
+        <p:style>
+          <a:lnRef idx="1">
+            <a:schemeClr val="accent1"/>
+          </a:lnRef>
+          <a:fillRef idx="3">
+            <a:schemeClr val="accent1"/>
+          </a:fillRef>
+          <a:effectRef idx="2">
+            <a:schemeClr val="accent1"/>
+          </a:effectRef>
+          <a:fontRef idx="minor">
+            <a:schemeClr val="lt1"/>
+          </a:fontRef>
+        </p:style>
+        <p:txBody>
+          <a:bodyPr rtlCol="0" anchor="ctr" lIns="27432" rIns="27432" tIns="9144" bIns="9144"/>
+          <a:lstStyle/>
+          <a:p>
+            <a:pPr algn="ctr"/>
+            <a:r>
+              <a:rPr sz="1000" b="1">
+                <a:solidFill>
+                  <a:srgbClr val="1F2A4E"/>
+                </a:solidFill>
+              </a:rPr>
+              <a:t>MST (10-dim)</a:t>
+            </a:r>
+          </a:p>
+        </p:txBody>
+      </p:sp>
+      <p:sp>
+        <p:nvSpPr>
+          <p:cNvPr id="17" name="Rounded Rectangle 16"/>
+          <p:cNvSpPr/>
+          <p:nvPr/>
+        </p:nvSpPr>
+        <p:spPr>
+          <a:xfrm>
+            <a:off x="6160312" y="3520439"/>
+            <a:ext cx="1580083" cy="384048"/>
+          </a:xfrm>
+          <a:prstGeom prst="roundRect">
+            <a:avLst/>
+          </a:prstGeom>
+          <a:solidFill>
+            <a:srgbClr val="B4C4E8"/>
+          </a:solidFill>
+          <a:ln w="13970">
+            <a:solidFill>
+              <a:srgbClr val="1F2A4E"/>
+            </a:solidFill>
+          </a:ln>
+        </p:spPr>
+        <p:style>
+          <a:lnRef idx="1">
+            <a:schemeClr val="accent1"/>
+          </a:lnRef>
+          <a:fillRef idx="3">
+            <a:schemeClr val="accent1"/>
+          </a:fillRef>
+          <a:effectRef idx="2">
+            <a:schemeClr val="accent1"/>
+          </a:effectRef>
+          <a:fontRef idx="minor">
+            <a:schemeClr val="lt1"/>
+          </a:fontRef>
+        </p:style>
+        <p:txBody>
+          <a:bodyPr rtlCol="0" anchor="ctr" lIns="27432" rIns="27432" tIns="9144" bIns="9144"/>
+          <a:lstStyle/>
+          <a:p>
+            <a:pPr algn="ctr"/>
+            <a:r>
+              <a:rPr sz="1000" b="1">
+                <a:solidFill>
+                  <a:srgbClr val="1F2A4E"/>
+                </a:solidFill>
+              </a:rPr>
+              <a:t>FiLM · ConvNeXt-T</a:t>
+            </a:r>
+          </a:p>
+        </p:txBody>
+      </p:sp>
+      <p:cxnSp>
+        <p:nvCxnSpPr>
+          <p:cNvPr id="18" name="Connector 17"/>
+          <p:cNvCxnSpPr/>
+          <p:nvPr/>
+        </p:nvCxnSpPr>
+        <p:spPr>
+          <a:xfrm>
+            <a:off x="5831128" y="3483863"/>
+            <a:ext cx="329184" cy="228600"/>
+          </a:xfrm>
+          <a:prstGeom prst="bentConnector3">
+            <a:avLst/>
+          </a:prstGeom>
+          <a:ln w="22860">
+            <a:solidFill>
+              <a:srgbClr val="3D424E"/>
+            </a:solidFill>
+            <a:tailEnd type="triangle" w="med" len="med"/>
+          </a:ln>
+        </p:spPr>
+        <p:style>
+          <a:lnRef idx="2">
+            <a:schemeClr val="accent1"/>
+          </a:lnRef>
+          <a:fillRef idx="0">
+            <a:schemeClr val="accent1"/>
+          </a:fillRef>
+          <a:effectRef idx="1">
+            <a:schemeClr val="accent1"/>
+          </a:effectRef>
+          <a:fontRef idx="minor">
+            <a:schemeClr val="tx1"/>
+          </a:fontRef>
+        </p:style>
+      </p:cxnSp>
+      <p:cxnSp>
+        <p:nvCxnSpPr>
+          <p:cNvPr id="19" name="Connector 18"/>
+          <p:cNvCxnSpPr/>
+          <p:nvPr/>
+        </p:nvCxnSpPr>
+        <p:spPr>
+          <a:xfrm flipV="1">
+            <a:off x="5831128" y="3712463"/>
+            <a:ext cx="329184" cy="228600"/>
+          </a:xfrm>
+          <a:prstGeom prst="bentConnector3">
+            <a:avLst/>
+          </a:prstGeom>
+          <a:ln w="22860">
+            <a:solidFill>
+              <a:srgbClr val="FFFFFF"/>
+            </a:solidFill>
+            <a:tailEnd type="triangle" w="med" len="med"/>
+          </a:ln>
+        </p:spPr>
+        <p:style>
+          <a:lnRef idx="2">
+            <a:schemeClr val="accent1"/>
+          </a:lnRef>
+          <a:fillRef idx="0">
+            <a:schemeClr val="accent1"/>
+          </a:fillRef>
+          <a:effectRef idx="1">
+            <a:schemeClr val="accent1"/>
+          </a:effectRef>
+          <a:fontRef idx="minor">
+            <a:schemeClr val="tx1"/>
+          </a:fontRef>
+        </p:style>
+      </p:cxnSp>
+      <p:sp>
+        <p:nvSpPr>
+          <p:cNvPr id="20" name="TextBox 19"/>
+          <p:cNvSpPr txBox="1"/>
+          <p:nvPr/>
+        </p:nvSpPr>
+        <p:spPr>
+          <a:xfrm>
+            <a:off x="4448556" y="4343400"/>
+            <a:ext cx="3291840" cy="914400"/>
+          </a:xfrm>
+          <a:prstGeom prst="rect">
+            <a:avLst/>
+          </a:prstGeom>
+          <a:noFill/>
+        </p:spPr>
+        <p:txBody>
+          <a:bodyPr wrap="square">
+            <a:spAutoFit/>
+          </a:bodyPr>
+          <a:lstStyle/>
+          <a:p>
+            <a:pPr algn="ctr"/>
+            <a:r>
+              <a:rPr sz="1300">
+                <a:solidFill>
+                  <a:srgbClr val="B4C4E8"/>
+                </a:solidFill>
+              </a:rPr>
+              <a:t>Proposta principal — tom
+de pele contínuo como
+contexto arquitetural.</a:t>
+            </a:r>
+          </a:p>
+        </p:txBody>
+      </p:sp>
+      <p:sp>
+        <p:nvSpPr>
+          <p:cNvPr id="21" name="TextBox 20"/>
+          <p:cNvSpPr txBox="1"/>
+          <p:nvPr/>
+        </p:nvSpPr>
+        <p:spPr>
+          <a:xfrm>
+            <a:off x="4448556" y="5257800"/>
+            <a:ext cx="3291840" cy="594360"/>
+          </a:xfrm>
+          <a:prstGeom prst="rect">
+            <a:avLst/>
+          </a:prstGeom>
+          <a:noFill/>
+        </p:spPr>
+        <p:txBody>
+          <a:bodyPr wrap="square">
+            <a:spAutoFit/>
+          </a:bodyPr>
+          <a:lstStyle/>
+          <a:p>
+            <a:pPr algn="ctr"/>
+            <a:r>
+              <a:rPr sz="1050" i="1">
+                <a:solidFill>
+                  <a:srgbClr val="B4C4E8"/>
+                </a:solidFill>
+              </a:rPr>
+              <a:t>Perez et al. (2018) + Monk
+(Schumann et al., 2023)</a:t>
+            </a:r>
+          </a:p>
+        </p:txBody>
+      </p:sp>
+      <p:sp>
+        <p:nvSpPr>
+          <p:cNvPr id="22" name="Rounded Rectangle 21"/>
+          <p:cNvSpPr/>
+          <p:nvPr/>
+        </p:nvSpPr>
+        <p:spPr>
+          <a:xfrm>
+            <a:off x="8197596" y="1325880"/>
+            <a:ext cx="3657600" cy="4617720"/>
+          </a:xfrm>
+          <a:prstGeom prst="roundRect">
+            <a:avLst/>
+          </a:prstGeom>
+          <a:solidFill>
+            <a:srgbClr val="FFFFFF"/>
+          </a:solidFill>
+          <a:ln w="16510">
+            <a:solidFill>
+              <a:srgbClr val="1F2A4E"/>
+            </a:solidFill>
+          </a:ln>
+        </p:spPr>
+        <p:style>
+          <a:lnRef idx="1">
+            <a:schemeClr val="accent1"/>
+          </a:lnRef>
+          <a:fillRef idx="3">
+            <a:schemeClr val="accent1"/>
+          </a:fillRef>
+          <a:effectRef idx="2">
+            <a:schemeClr val="accent1"/>
+          </a:effectRef>
+          <a:fontRef idx="minor">
+            <a:schemeClr val="lt1"/>
+          </a:fontRef>
+        </p:style>
+        <p:txBody>
+          <a:bodyPr rtlCol="0" anchor="ctr" tIns="0"/>
+          <a:lstStyle/>
+          <a:p>
+            <a:pPr algn="ctr"/>
+          </a:p>
+        </p:txBody>
+      </p:sp>
+      <p:sp>
+        <p:nvSpPr>
+          <p:cNvPr id="23" name="Oval 22"/>
+          <p:cNvSpPr/>
+          <p:nvPr/>
+        </p:nvSpPr>
+        <p:spPr>
+          <a:xfrm>
+            <a:off x="9683496" y="1554480"/>
+            <a:ext cx="685800" cy="685800"/>
+          </a:xfrm>
+          <a:prstGeom prst="ellipse">
+            <a:avLst/>
+          </a:prstGeom>
+          <a:solidFill>
+            <a:srgbClr val="1F2A4E"/>
+          </a:solidFill>
+          <a:ln w="19050">
+            <a:solidFill>
+              <a:srgbClr val="1F2A4E"/>
+            </a:solidFill>
+          </a:ln>
+        </p:spPr>
+        <p:style>
+          <a:lnRef idx="1">
+            <a:schemeClr val="accent1"/>
+          </a:lnRef>
+          <a:fillRef idx="3">
+            <a:schemeClr val="accent1"/>
+          </a:fillRef>
+          <a:effectRef idx="2">
+            <a:schemeClr val="accent1"/>
+          </a:effectRef>
+          <a:fontRef idx="minor">
+            <a:schemeClr val="lt1"/>
+          </a:fontRef>
+        </p:style>
+        <p:txBody>
+          <a:bodyPr rtlCol="0" anchor="ctr" tIns="0" bIns="0"/>
+          <a:lstStyle/>
+          <a:p>
+            <a:pPr algn="ctr"/>
+            <a:r>
+              <a:rPr sz="2800" b="1">
+                <a:solidFill>
+                  <a:srgbClr val="FFFFFF"/>
+                </a:solidFill>
+              </a:rPr>
+              <a:t>C</a:t>
+            </a:r>
+          </a:p>
+        </p:txBody>
+      </p:sp>
+      <p:sp>
+        <p:nvSpPr>
+          <p:cNvPr id="24" name="TextBox 23"/>
+          <p:cNvSpPr txBox="1"/>
+          <p:nvPr/>
+        </p:nvSpPr>
+        <p:spPr>
+          <a:xfrm>
+            <a:off x="8334756" y="2331720"/>
+            <a:ext cx="3383280" cy="868680"/>
+          </a:xfrm>
+          <a:prstGeom prst="rect">
+            <a:avLst/>
+          </a:prstGeom>
+          <a:noFill/>
+        </p:spPr>
+        <p:txBody>
+          <a:bodyPr wrap="square">
+            <a:spAutoFit/>
+          </a:bodyPr>
+          <a:lstStyle/>
+          <a:p>
+            <a:pPr algn="ctr"/>
+            <a:r>
+              <a:rPr sz="1600" b="1">
+                <a:solidFill>
+                  <a:srgbClr val="1F2A4E"/>
+                </a:solidFill>
+              </a:rPr>
+              <a:t>ConvNeXt-T + FiLM
+(CLIP-text, 512-dim)</a:t>
+            </a:r>
+          </a:p>
+        </p:txBody>
+      </p:sp>
+      <p:sp>
+        <p:nvSpPr>
+          <p:cNvPr id="25" name="Rounded Rectangle 24"/>
+          <p:cNvSpPr/>
+          <p:nvPr/>
+        </p:nvSpPr>
+        <p:spPr>
+          <a:xfrm>
+            <a:off x="8380475" y="3291839"/>
+            <a:ext cx="1382572" cy="384048"/>
+          </a:xfrm>
+          <a:prstGeom prst="roundRect">
+            <a:avLst/>
+          </a:prstGeom>
+          <a:solidFill>
+            <a:srgbClr val="E8EAED"/>
+          </a:solidFill>
+          <a:ln w="13970">
+            <a:solidFill>
+              <a:srgbClr val="3D424E"/>
+            </a:solidFill>
+          </a:ln>
+        </p:spPr>
+        <p:style>
+          <a:lnRef idx="1">
+            <a:schemeClr val="accent1"/>
+          </a:lnRef>
+          <a:fillRef idx="3">
+            <a:schemeClr val="accent1"/>
+          </a:fillRef>
+          <a:effectRef idx="2">
+            <a:schemeClr val="accent1"/>
+          </a:effectRef>
+          <a:fontRef idx="minor">
+            <a:schemeClr val="lt1"/>
+          </a:fontRef>
+        </p:style>
+        <p:txBody>
+          <a:bodyPr rtlCol="0" anchor="ctr" lIns="27432" rIns="27432" tIns="9144" bIns="9144"/>
+          <a:lstStyle/>
+          <a:p>
+            <a:pPr algn="ctr"/>
+            <a:r>
+              <a:rPr sz="1000" b="1">
+                <a:solidFill>
+                  <a:srgbClr val="3D424E"/>
+                </a:solidFill>
+              </a:rPr>
+              <a:t>Imagem</a:t>
+            </a:r>
+          </a:p>
+        </p:txBody>
+      </p:sp>
+      <p:sp>
+        <p:nvSpPr>
+          <p:cNvPr id="26" name="Rounded Rectangle 25"/>
+          <p:cNvSpPr/>
+          <p:nvPr/>
+        </p:nvSpPr>
+        <p:spPr>
+          <a:xfrm>
+            <a:off x="8380475" y="3749039"/>
+            <a:ext cx="1382572" cy="384048"/>
           </a:xfrm>
           <a:prstGeom prst="roundRect">
             <a:avLst/>
@@ -8850,7 +9338,7 @@
           </a:fontRef>
         </p:style>
         <p:txBody>
-          <a:bodyPr rtlCol="0" anchor="ctr" lIns="36576" rIns="36576" tIns="18288" bIns="18288"/>
+          <a:bodyPr rtlCol="0" anchor="ctr" lIns="27432" rIns="27432" tIns="9144" bIns="9144"/>
           <a:lstStyle/>
           <a:p>
             <a:pPr algn="ctr"/>
@@ -8860,367 +9348,21 @@
                   <a:srgbClr val="FFFFFF"/>
                 </a:solidFill>
               </a:rPr>
-              <a:t>MST (10-dim)</a:t>
-            </a:r>
-          </a:p>
-        </p:txBody>
-      </p:sp>
-      <p:sp>
-        <p:nvSpPr>
-          <p:cNvPr id="16" name="Rounded Rectangle 15"/>
+              <a:t>CLIP-text (512-dim)</a:t>
+            </a:r>
+          </a:p>
+        </p:txBody>
+      </p:sp>
+      <p:sp>
+        <p:nvSpPr>
+          <p:cNvPr id="27" name="Rounded Rectangle 26"/>
           <p:cNvSpPr/>
           <p:nvPr/>
         </p:nvSpPr>
         <p:spPr>
           <a:xfrm>
-            <a:off x="6489496" y="3291839"/>
-            <a:ext cx="1250899" cy="502920"/>
-          </a:xfrm>
-          <a:prstGeom prst="roundRect">
-            <a:avLst/>
-          </a:prstGeom>
-          <a:solidFill>
-            <a:srgbClr val="B4C4E8"/>
-          </a:solidFill>
-          <a:ln w="13970">
-            <a:solidFill>
-              <a:srgbClr val="1F2A4E"/>
-            </a:solidFill>
-          </a:ln>
-        </p:spPr>
-        <p:style>
-          <a:lnRef idx="1">
-            <a:schemeClr val="accent1"/>
-          </a:lnRef>
-          <a:fillRef idx="3">
-            <a:schemeClr val="accent1"/>
-          </a:fillRef>
-          <a:effectRef idx="2">
-            <a:schemeClr val="accent1"/>
-          </a:effectRef>
-          <a:fontRef idx="minor">
-            <a:schemeClr val="lt1"/>
-          </a:fontRef>
-        </p:style>
-        <p:txBody>
-          <a:bodyPr rtlCol="0" anchor="ctr" lIns="36576" rIns="36576" tIns="18288" bIns="18288"/>
-          <a:lstStyle/>
-          <a:p>
-            <a:pPr algn="ctr"/>
-            <a:r>
-              <a:rPr sz="1000" b="1">
-                <a:solidFill>
-                  <a:srgbClr val="1F2A4E"/>
-                </a:solidFill>
-              </a:rPr>
-              <a:t>FiLM · ConvNeXt-T</a:t>
-            </a:r>
-          </a:p>
-        </p:txBody>
-      </p:sp>
-      <p:cxnSp>
-        <p:nvCxnSpPr>
-          <p:cNvPr id="17" name="Connector 16"/>
-          <p:cNvCxnSpPr/>
-          <p:nvPr/>
-        </p:nvCxnSpPr>
-        <p:spPr>
-          <a:xfrm>
-            <a:off x="5831128" y="3543299"/>
-            <a:ext cx="658368" cy="0"/>
-          </a:xfrm>
-          <a:prstGeom prst="bentConnector3">
-            <a:avLst/>
-          </a:prstGeom>
-          <a:ln w="25400">
-            <a:solidFill>
-              <a:srgbClr val="FFFFFF"/>
-            </a:solidFill>
-            <a:tailEnd type="triangle" w="med" len="med"/>
-          </a:ln>
-        </p:spPr>
-        <p:style>
-          <a:lnRef idx="2">
-            <a:schemeClr val="accent1"/>
-          </a:lnRef>
-          <a:fillRef idx="0">
-            <a:schemeClr val="accent1"/>
-          </a:fillRef>
-          <a:effectRef idx="1">
-            <a:schemeClr val="accent1"/>
-          </a:effectRef>
-          <a:fontRef idx="minor">
-            <a:schemeClr val="tx1"/>
-          </a:fontRef>
-        </p:style>
-      </p:cxnSp>
-      <p:sp>
-        <p:nvSpPr>
-          <p:cNvPr id="18" name="TextBox 17"/>
-          <p:cNvSpPr txBox="1"/>
-          <p:nvPr/>
-        </p:nvSpPr>
-        <p:spPr>
-          <a:xfrm>
-            <a:off x="4448556" y="4069080"/>
-            <a:ext cx="3291840" cy="960120"/>
-          </a:xfrm>
-          <a:prstGeom prst="rect">
-            <a:avLst/>
-          </a:prstGeom>
-          <a:noFill/>
-        </p:spPr>
-        <p:txBody>
-          <a:bodyPr wrap="square">
-            <a:spAutoFit/>
-          </a:bodyPr>
-          <a:lstStyle/>
-          <a:p>
-            <a:pPr algn="ctr"/>
-            <a:r>
-              <a:rPr sz="1300">
-                <a:solidFill>
-                  <a:srgbClr val="B4C4E8"/>
-                </a:solidFill>
-              </a:rPr>
-              <a:t>Proposta principal — tom
-de pele contínuo como
-contexto arquitetural.</a:t>
-            </a:r>
-          </a:p>
-        </p:txBody>
-      </p:sp>
-      <p:sp>
-        <p:nvSpPr>
-          <p:cNvPr id="19" name="TextBox 18"/>
-          <p:cNvSpPr txBox="1"/>
-          <p:nvPr/>
-        </p:nvSpPr>
-        <p:spPr>
-          <a:xfrm>
-            <a:off x="4448556" y="5166360"/>
-            <a:ext cx="3291840" cy="640080"/>
-          </a:xfrm>
-          <a:prstGeom prst="rect">
-            <a:avLst/>
-          </a:prstGeom>
-          <a:noFill/>
-        </p:spPr>
-        <p:txBody>
-          <a:bodyPr wrap="square">
-            <a:spAutoFit/>
-          </a:bodyPr>
-          <a:lstStyle/>
-          <a:p>
-            <a:pPr algn="ctr"/>
-            <a:r>
-              <a:rPr sz="1050" i="1">
-                <a:solidFill>
-                  <a:srgbClr val="B4C4E8"/>
-                </a:solidFill>
-              </a:rPr>
-              <a:t>Perez et al. (2018) + Monk
-(Schumann et al., 2023)</a:t>
-            </a:r>
-          </a:p>
-        </p:txBody>
-      </p:sp>
-      <p:sp>
-        <p:nvSpPr>
-          <p:cNvPr id="20" name="Rounded Rectangle 19"/>
-          <p:cNvSpPr/>
-          <p:nvPr/>
-        </p:nvSpPr>
-        <p:spPr>
-          <a:xfrm>
-            <a:off x="8197596" y="1325880"/>
-            <a:ext cx="3657600" cy="4617720"/>
-          </a:xfrm>
-          <a:prstGeom prst="roundRect">
-            <a:avLst/>
-          </a:prstGeom>
-          <a:solidFill>
-            <a:srgbClr val="FFFFFF"/>
-          </a:solidFill>
-          <a:ln w="16510">
-            <a:solidFill>
-              <a:srgbClr val="1F2A4E"/>
-            </a:solidFill>
-          </a:ln>
-        </p:spPr>
-        <p:style>
-          <a:lnRef idx="1">
-            <a:schemeClr val="accent1"/>
-          </a:lnRef>
-          <a:fillRef idx="3">
-            <a:schemeClr val="accent1"/>
-          </a:fillRef>
-          <a:effectRef idx="2">
-            <a:schemeClr val="accent1"/>
-          </a:effectRef>
-          <a:fontRef idx="minor">
-            <a:schemeClr val="lt1"/>
-          </a:fontRef>
-        </p:style>
-        <p:txBody>
-          <a:bodyPr rtlCol="0" anchor="ctr" tIns="0"/>
-          <a:lstStyle/>
-          <a:p>
-            <a:pPr algn="ctr"/>
-          </a:p>
-        </p:txBody>
-      </p:sp>
-      <p:sp>
-        <p:nvSpPr>
-          <p:cNvPr id="21" name="Oval 20"/>
-          <p:cNvSpPr/>
-          <p:nvPr/>
-        </p:nvSpPr>
-        <p:spPr>
-          <a:xfrm>
-            <a:off x="9683496" y="1554480"/>
-            <a:ext cx="685800" cy="685800"/>
-          </a:xfrm>
-          <a:prstGeom prst="ellipse">
-            <a:avLst/>
-          </a:prstGeom>
-          <a:solidFill>
-            <a:srgbClr val="1F2A4E"/>
-          </a:solidFill>
-          <a:ln w="19050">
-            <a:solidFill>
-              <a:srgbClr val="1F2A4E"/>
-            </a:solidFill>
-          </a:ln>
-        </p:spPr>
-        <p:style>
-          <a:lnRef idx="1">
-            <a:schemeClr val="accent1"/>
-          </a:lnRef>
-          <a:fillRef idx="3">
-            <a:schemeClr val="accent1"/>
-          </a:fillRef>
-          <a:effectRef idx="2">
-            <a:schemeClr val="accent1"/>
-          </a:effectRef>
-          <a:fontRef idx="minor">
-            <a:schemeClr val="lt1"/>
-          </a:fontRef>
-        </p:style>
-        <p:txBody>
-          <a:bodyPr rtlCol="0" anchor="ctr" tIns="0" bIns="0"/>
-          <a:lstStyle/>
-          <a:p>
-            <a:pPr algn="ctr"/>
-            <a:r>
-              <a:rPr sz="2800" b="1">
-                <a:solidFill>
-                  <a:srgbClr val="FFFFFF"/>
-                </a:solidFill>
-              </a:rPr>
-              <a:t>C</a:t>
-            </a:r>
-          </a:p>
-        </p:txBody>
-      </p:sp>
-      <p:sp>
-        <p:nvSpPr>
-          <p:cNvPr id="22" name="TextBox 21"/>
-          <p:cNvSpPr txBox="1"/>
-          <p:nvPr/>
-        </p:nvSpPr>
-        <p:spPr>
-          <a:xfrm>
-            <a:off x="8334756" y="2331720"/>
-            <a:ext cx="3383280" cy="868680"/>
-          </a:xfrm>
-          <a:prstGeom prst="rect">
-            <a:avLst/>
-          </a:prstGeom>
-          <a:noFill/>
-        </p:spPr>
-        <p:txBody>
-          <a:bodyPr wrap="square">
-            <a:spAutoFit/>
-          </a:bodyPr>
-          <a:lstStyle/>
-          <a:p>
-            <a:pPr algn="ctr"/>
-            <a:r>
-              <a:rPr sz="1600" b="1">
-                <a:solidFill>
-                  <a:srgbClr val="1F2A4E"/>
-                </a:solidFill>
-              </a:rPr>
-              <a:t>ConvNeXt-T + FiLM
-(CLIP-text, 512-dim)</a:t>
-            </a:r>
-          </a:p>
-        </p:txBody>
-      </p:sp>
-      <p:sp>
-        <p:nvSpPr>
-          <p:cNvPr id="23" name="Rounded Rectangle 22"/>
-          <p:cNvSpPr/>
-          <p:nvPr/>
-        </p:nvSpPr>
-        <p:spPr>
-          <a:xfrm>
-            <a:off x="8380475" y="3291839"/>
-            <a:ext cx="1382572" cy="502920"/>
-          </a:xfrm>
-          <a:prstGeom prst="roundRect">
-            <a:avLst/>
-          </a:prstGeom>
-          <a:solidFill>
-            <a:srgbClr val="E8EAED"/>
-          </a:solidFill>
-          <a:ln w="13970">
-            <a:solidFill>
-              <a:srgbClr val="1F2A4E"/>
-            </a:solidFill>
-          </a:ln>
-        </p:spPr>
-        <p:style>
-          <a:lnRef idx="1">
-            <a:schemeClr val="accent1"/>
-          </a:lnRef>
-          <a:fillRef idx="3">
-            <a:schemeClr val="accent1"/>
-          </a:fillRef>
-          <a:effectRef idx="2">
-            <a:schemeClr val="accent1"/>
-          </a:effectRef>
-          <a:fontRef idx="minor">
-            <a:schemeClr val="lt1"/>
-          </a:fontRef>
-        </p:style>
-        <p:txBody>
-          <a:bodyPr rtlCol="0" anchor="ctr" lIns="36576" rIns="36576" tIns="18288" bIns="18288"/>
-          <a:lstStyle/>
-          <a:p>
-            <a:pPr algn="ctr"/>
-            <a:r>
-              <a:rPr sz="1000" b="1">
-                <a:solidFill>
-                  <a:srgbClr val="1F2A4E"/>
-                </a:solidFill>
-              </a:rPr>
-              <a:t>CLIP-text (512-dim)</a:t>
-            </a:r>
-          </a:p>
-        </p:txBody>
-      </p:sp>
-      <p:sp>
-        <p:nvSpPr>
-          <p:cNvPr id="24" name="Rounded Rectangle 23"/>
-          <p:cNvSpPr/>
-          <p:nvPr/>
-        </p:nvSpPr>
-        <p:spPr>
-          <a:xfrm>
-            <a:off x="10421416" y="3291839"/>
-            <a:ext cx="1250899" cy="502920"/>
+            <a:off x="10092232" y="3520439"/>
+            <a:ext cx="1580083" cy="384048"/>
           </a:xfrm>
           <a:prstGeom prst="roundRect">
             <a:avLst/>
@@ -9249,7 +9391,7 @@
           </a:fontRef>
         </p:style>
         <p:txBody>
-          <a:bodyPr rtlCol="0" anchor="ctr" lIns="36576" rIns="36576" tIns="18288" bIns="18288"/>
+          <a:bodyPr rtlCol="0" anchor="ctr" lIns="27432" rIns="27432" tIns="9144" bIns="9144"/>
           <a:lstStyle/>
           <a:p>
             <a:pPr algn="ctr"/>
@@ -9266,21 +9408,21 @@
       </p:sp>
       <p:cxnSp>
         <p:nvCxnSpPr>
-          <p:cNvPr id="25" name="Connector 24"/>
+          <p:cNvPr id="28" name="Connector 27"/>
           <p:cNvCxnSpPr/>
           <p:nvPr/>
         </p:nvCxnSpPr>
         <p:spPr>
           <a:xfrm>
-            <a:off x="9763048" y="3543299"/>
-            <a:ext cx="658368" cy="0"/>
+            <a:off x="9763048" y="3483863"/>
+            <a:ext cx="329184" cy="228600"/>
           </a:xfrm>
           <a:prstGeom prst="bentConnector3">
             <a:avLst/>
           </a:prstGeom>
-          <a:ln w="25400">
+          <a:ln w="22860">
             <a:solidFill>
-              <a:srgbClr val="3D68BB"/>
+              <a:srgbClr val="3D424E"/>
             </a:solidFill>
             <a:tailEnd type="triangle" w="med" len="med"/>
           </a:ln>
@@ -9300,16 +9442,52 @@
           </a:fontRef>
         </p:style>
       </p:cxnSp>
-      <p:sp>
-        <p:nvSpPr>
-          <p:cNvPr id="26" name="TextBox 25"/>
+      <p:cxnSp>
+        <p:nvCxnSpPr>
+          <p:cNvPr id="29" name="Connector 28"/>
+          <p:cNvCxnSpPr/>
+          <p:nvPr/>
+        </p:nvCxnSpPr>
+        <p:spPr>
+          <a:xfrm flipV="1">
+            <a:off x="9763048" y="3712463"/>
+            <a:ext cx="329184" cy="228600"/>
+          </a:xfrm>
+          <a:prstGeom prst="bentConnector3">
+            <a:avLst/>
+          </a:prstGeom>
+          <a:ln w="22860">
+            <a:solidFill>
+              <a:srgbClr val="3D68BB"/>
+            </a:solidFill>
+            <a:tailEnd type="triangle" w="med" len="med"/>
+          </a:ln>
+        </p:spPr>
+        <p:style>
+          <a:lnRef idx="2">
+            <a:schemeClr val="accent1"/>
+          </a:lnRef>
+          <a:fillRef idx="0">
+            <a:schemeClr val="accent1"/>
+          </a:fillRef>
+          <a:effectRef idx="1">
+            <a:schemeClr val="accent1"/>
+          </a:effectRef>
+          <a:fontRef idx="minor">
+            <a:schemeClr val="tx1"/>
+          </a:fontRef>
+        </p:style>
+      </p:cxnSp>
+      <p:sp>
+        <p:nvSpPr>
+          <p:cNvPr id="30" name="TextBox 29"/>
           <p:cNvSpPr txBox="1"/>
           <p:nvPr/>
         </p:nvSpPr>
         <p:spPr>
           <a:xfrm>
-            <a:off x="8380475" y="4069080"/>
-            <a:ext cx="3291840" cy="960120"/>
+            <a:off x="8380475" y="4343400"/>
+            <a:ext cx="3291840" cy="914400"/>
           </a:xfrm>
           <a:prstGeom prst="rect">
             <a:avLst/>
@@ -9338,14 +9516,14 @@
       </p:sp>
       <p:sp>
         <p:nvSpPr>
-          <p:cNvPr id="27" name="TextBox 26"/>
+          <p:cNvPr id="31" name="TextBox 30"/>
           <p:cNvSpPr txBox="1"/>
           <p:nvPr/>
         </p:nvSpPr>
         <p:spPr>
           <a:xfrm>
-            <a:off x="8380475" y="5166360"/>
-            <a:ext cx="3291840" cy="640080"/>
+            <a:off x="8380475" y="5257800"/>
+            <a:ext cx="3291840" cy="594360"/>
           </a:xfrm>
           <a:prstGeom prst="rect">
             <a:avLst/>
@@ -9373,7 +9551,7 @@
       </p:sp>
       <p:sp>
         <p:nvSpPr>
-          <p:cNvPr id="28" name="TextBox 27"/>
+          <p:cNvPr id="32" name="TextBox 31"/>
           <p:cNvSpPr txBox="1"/>
           <p:nvPr/>
         </p:nvSpPr>
@@ -9408,7 +9586,7 @@
       </p:sp>
       <p:sp>
         <p:nvSpPr>
-          <p:cNvPr id="29" name="TextBox 28"/>
+          <p:cNvPr id="33" name="TextBox 32"/>
           <p:cNvSpPr txBox="1"/>
           <p:nvPr/>
         </p:nvSpPr>
@@ -9443,7 +9621,7 @@
       </p:sp>
       <p:sp>
         <p:nvSpPr>
-          <p:cNvPr id="30" name="TextBox 29"/>
+          <p:cNvPr id="34" name="TextBox 33"/>
           <p:cNvSpPr txBox="1"/>
           <p:nvPr/>
         </p:nvSpPr>

--- a/docs/ativo/material_qualificacao_2026-10-05.pptx
+++ b/docs/ativo/material_qualificacao_2026-10-05.pptx
@@ -9702,7 +9702,7 @@
               </a:defRPr>
             </a:pPr>
             <a:r>
-              <a:t>Protocolo de validação: cenários e norma</a:t>
+              <a:t>Protocolo de validação: cenários, rigor e transferência</a:t>
             </a:r>
           </a:p>
         </p:txBody>
@@ -9752,14 +9752,110 @@
       </p:sp>
       <p:sp>
         <p:nvSpPr>
-          <p:cNvPr id="4" name="TextBox 3"/>
-          <p:cNvSpPr txBox="1"/>
-          <p:nvPr/>
-        </p:nvSpPr>
-        <p:spPr>
-          <a:xfrm>
-            <a:off x="457200" y="1417320"/>
-            <a:ext cx="11430000" cy="4937760"/>
+          <p:cNvPr id="4" name="Rounded Rectangle 3"/>
+          <p:cNvSpPr/>
+          <p:nvPr/>
+        </p:nvSpPr>
+        <p:spPr>
+          <a:xfrm>
+            <a:off x="333756" y="1325880"/>
+            <a:ext cx="3657600" cy="502920"/>
+          </a:xfrm>
+          <a:prstGeom prst="roundRect">
+            <a:avLst/>
+          </a:prstGeom>
+          <a:solidFill>
+            <a:srgbClr val="1F2A4E"/>
+          </a:solidFill>
+          <a:ln>
+            <a:noFill/>
+          </a:ln>
+        </p:spPr>
+        <p:style>
+          <a:lnRef idx="1">
+            <a:schemeClr val="accent1"/>
+          </a:lnRef>
+          <a:fillRef idx="3">
+            <a:schemeClr val="accent1"/>
+          </a:fillRef>
+          <a:effectRef idx="2">
+            <a:schemeClr val="accent1"/>
+          </a:effectRef>
+          <a:fontRef idx="minor">
+            <a:schemeClr val="lt1"/>
+          </a:fontRef>
+        </p:style>
+        <p:txBody>
+          <a:bodyPr rtlCol="0" anchor="ctr"/>
+          <a:lstStyle/>
+          <a:p>
+            <a:pPr algn="ctr"/>
+            <a:r>
+              <a:rPr sz="1400" b="1">
+                <a:solidFill>
+                  <a:srgbClr val="FFFFFF"/>
+                </a:solidFill>
+              </a:rPr>
+              <a:t>O QUE AVALIO</a:t>
+            </a:r>
+          </a:p>
+        </p:txBody>
+      </p:sp>
+      <p:sp>
+        <p:nvSpPr>
+          <p:cNvPr id="5" name="Rounded Rectangle 4"/>
+          <p:cNvSpPr/>
+          <p:nvPr/>
+        </p:nvSpPr>
+        <p:spPr>
+          <a:xfrm>
+            <a:off x="333756" y="1956816"/>
+            <a:ext cx="3657600" cy="1984248"/>
+          </a:xfrm>
+          <a:prstGeom prst="roundRect">
+            <a:avLst/>
+          </a:prstGeom>
+          <a:solidFill>
+            <a:srgbClr val="FFFFFF"/>
+          </a:solidFill>
+          <a:ln w="17780">
+            <a:solidFill>
+              <a:srgbClr val="1F2A4E"/>
+            </a:solidFill>
+          </a:ln>
+        </p:spPr>
+        <p:style>
+          <a:lnRef idx="1">
+            <a:schemeClr val="accent1"/>
+          </a:lnRef>
+          <a:fillRef idx="3">
+            <a:schemeClr val="accent1"/>
+          </a:fillRef>
+          <a:effectRef idx="2">
+            <a:schemeClr val="accent1"/>
+          </a:effectRef>
+          <a:fontRef idx="minor">
+            <a:schemeClr val="lt1"/>
+          </a:fontRef>
+        </p:style>
+        <p:txBody>
+          <a:bodyPr rtlCol="0" anchor="ctr" tIns="0"/>
+          <a:lstStyle/>
+          <a:p>
+            <a:pPr algn="ctr"/>
+          </a:p>
+        </p:txBody>
+      </p:sp>
+      <p:sp>
+        <p:nvSpPr>
+          <p:cNvPr id="6" name="TextBox 5"/>
+          <p:cNvSpPr txBox="1"/>
+          <p:nvPr/>
+        </p:nvSpPr>
+        <p:spPr>
+          <a:xfrm>
+            <a:off x="470916" y="2048256"/>
+            <a:ext cx="3383280" cy="320040"/>
           </a:xfrm>
           <a:prstGeom prst="rect">
             <a:avLst/>
@@ -9772,125 +9868,972 @@
           </a:bodyPr>
           <a:lstStyle/>
           <a:p>
-            <a:pPr>
-              <a:spcAft>
-                <a:spcPts val="1000"/>
-              </a:spcAft>
-            </a:pPr>
-            <a:r>
-              <a:rPr sz="1800" b="1">
+            <a:pPr algn="ctr"/>
+            <a:r>
+              <a:rPr sz="1100" b="1">
                 <a:solidFill>
                   <a:srgbClr val="1F2A4E"/>
                 </a:solidFill>
               </a:rPr>
-              <a:t>Cenário A — apenas raça:  </a:t>
-            </a:r>
-            <a:r>
-              <a:rPr sz="1800">
+              <a:t>Cenário A</a:t>
+            </a:r>
+          </a:p>
+        </p:txBody>
+      </p:sp>
+      <p:sp>
+        <p:nvSpPr>
+          <p:cNvPr id="7" name="TextBox 6"/>
+          <p:cNvSpPr txBox="1"/>
+          <p:nvPr/>
+        </p:nvSpPr>
+        <p:spPr>
+          <a:xfrm>
+            <a:off x="470916" y="2414016"/>
+            <a:ext cx="3383280" cy="502920"/>
+          </a:xfrm>
+          <a:prstGeom prst="rect">
+            <a:avLst/>
+          </a:prstGeom>
+          <a:noFill/>
+        </p:spPr>
+        <p:txBody>
+          <a:bodyPr wrap="square">
+            <a:spAutoFit/>
+          </a:bodyPr>
+          <a:lstStyle/>
+          <a:p>
+            <a:pPr algn="ctr"/>
+            <a:r>
+              <a:rPr sz="1500" b="1">
+                <a:solidFill>
+                  <a:srgbClr val="1F2A4E"/>
+                </a:solidFill>
+              </a:rPr>
+              <a:t>7 classes raciais</a:t>
+            </a:r>
+          </a:p>
+        </p:txBody>
+      </p:sp>
+      <p:sp>
+        <p:nvSpPr>
+          <p:cNvPr id="8" name="TextBox 7"/>
+          <p:cNvSpPr txBox="1"/>
+          <p:nvPr/>
+        </p:nvSpPr>
+        <p:spPr>
+          <a:xfrm>
+            <a:off x="498348" y="2944368"/>
+            <a:ext cx="3328416" cy="932688"/>
+          </a:xfrm>
+          <a:prstGeom prst="rect">
+            <a:avLst/>
+          </a:prstGeom>
+          <a:noFill/>
+        </p:spPr>
+        <p:txBody>
+          <a:bodyPr wrap="square">
+            <a:spAutoFit/>
+          </a:bodyPr>
+          <a:lstStyle/>
+          <a:p>
+            <a:pPr algn="ctr"/>
+            <a:r>
+              <a:rPr sz="1200">
                 <a:solidFill>
                   <a:srgbClr val="3D424E"/>
                 </a:solidFill>
               </a:rPr>
-              <a:t>reporte estratificado por classe racial (sete classes do FairFace).</a:t>
-            </a:r>
-          </a:p>
-          <a:p>
-            <a:pPr>
-              <a:spcAft>
-                <a:spcPts val="1000"/>
-              </a:spcAft>
-            </a:pPr>
-            <a:r>
-              <a:rPr sz="1800" b="1">
+              <a:t>Reporte estratificado por classe
+racial do FairFace.</a:t>
+            </a:r>
+          </a:p>
+        </p:txBody>
+      </p:sp>
+      <p:sp>
+        <p:nvSpPr>
+          <p:cNvPr id="9" name="Rounded Rectangle 8"/>
+          <p:cNvSpPr/>
+          <p:nvPr/>
+        </p:nvSpPr>
+        <p:spPr>
+          <a:xfrm>
+            <a:off x="333756" y="4105656"/>
+            <a:ext cx="3657600" cy="1984248"/>
+          </a:xfrm>
+          <a:prstGeom prst="roundRect">
+            <a:avLst/>
+          </a:prstGeom>
+          <a:solidFill>
+            <a:srgbClr val="FFFFFF"/>
+          </a:solidFill>
+          <a:ln w="17780">
+            <a:solidFill>
+              <a:srgbClr val="1F2A4E"/>
+            </a:solidFill>
+          </a:ln>
+        </p:spPr>
+        <p:style>
+          <a:lnRef idx="1">
+            <a:schemeClr val="accent1"/>
+          </a:lnRef>
+          <a:fillRef idx="3">
+            <a:schemeClr val="accent1"/>
+          </a:fillRef>
+          <a:effectRef idx="2">
+            <a:schemeClr val="accent1"/>
+          </a:effectRef>
+          <a:fontRef idx="minor">
+            <a:schemeClr val="lt1"/>
+          </a:fontRef>
+        </p:style>
+        <p:txBody>
+          <a:bodyPr rtlCol="0" anchor="ctr" tIns="0"/>
+          <a:lstStyle/>
+          <a:p>
+            <a:pPr algn="ctr"/>
+          </a:p>
+        </p:txBody>
+      </p:sp>
+      <p:sp>
+        <p:nvSpPr>
+          <p:cNvPr id="10" name="TextBox 9"/>
+          <p:cNvSpPr txBox="1"/>
+          <p:nvPr/>
+        </p:nvSpPr>
+        <p:spPr>
+          <a:xfrm>
+            <a:off x="470916" y="4197096"/>
+            <a:ext cx="3383280" cy="320040"/>
+          </a:xfrm>
+          <a:prstGeom prst="rect">
+            <a:avLst/>
+          </a:prstGeom>
+          <a:noFill/>
+        </p:spPr>
+        <p:txBody>
+          <a:bodyPr wrap="square">
+            <a:spAutoFit/>
+          </a:bodyPr>
+          <a:lstStyle/>
+          <a:p>
+            <a:pPr algn="ctr"/>
+            <a:r>
+              <a:rPr sz="1100" b="1">
                 <a:solidFill>
                   <a:srgbClr val="1F2A4E"/>
                 </a:solidFill>
               </a:rPr>
-              <a:t>Cenário B — raça × gênero:  </a:t>
-            </a:r>
-            <a:r>
-              <a:rPr sz="1800">
+              <a:t>Cenário B</a:t>
+            </a:r>
+          </a:p>
+        </p:txBody>
+      </p:sp>
+      <p:sp>
+        <p:nvSpPr>
+          <p:cNvPr id="11" name="TextBox 10"/>
+          <p:cNvSpPr txBox="1"/>
+          <p:nvPr/>
+        </p:nvSpPr>
+        <p:spPr>
+          <a:xfrm>
+            <a:off x="470916" y="4562856"/>
+            <a:ext cx="3383280" cy="502920"/>
+          </a:xfrm>
+          <a:prstGeom prst="rect">
+            <a:avLst/>
+          </a:prstGeom>
+          <a:noFill/>
+        </p:spPr>
+        <p:txBody>
+          <a:bodyPr wrap="square">
+            <a:spAutoFit/>
+          </a:bodyPr>
+          <a:lstStyle/>
+          <a:p>
+            <a:pPr algn="ctr"/>
+            <a:r>
+              <a:rPr sz="1500" b="1">
+                <a:solidFill>
+                  <a:srgbClr val="1F2A4E"/>
+                </a:solidFill>
+              </a:rPr>
+              <a:t>8 subgrupos (raça × gênero)</a:t>
+            </a:r>
+          </a:p>
+        </p:txBody>
+      </p:sp>
+      <p:sp>
+        <p:nvSpPr>
+          <p:cNvPr id="12" name="TextBox 11"/>
+          <p:cNvSpPr txBox="1"/>
+          <p:nvPr/>
+        </p:nvSpPr>
+        <p:spPr>
+          <a:xfrm>
+            <a:off x="498348" y="5093208"/>
+            <a:ext cx="3328416" cy="932688"/>
+          </a:xfrm>
+          <a:prstGeom prst="rect">
+            <a:avLst/>
+          </a:prstGeom>
+          <a:noFill/>
+        </p:spPr>
+        <p:txBody>
+          <a:bodyPr wrap="square">
+            <a:spAutoFit/>
+          </a:bodyPr>
+          <a:lstStyle/>
+          <a:p>
+            <a:pPr algn="ctr"/>
+            <a:r>
+              <a:rPr sz="1200">
                 <a:solidFill>
                   <a:srgbClr val="3D424E"/>
                 </a:solidFill>
               </a:rPr>
-              <a:t>análise interseccional (oito subgrupos), conforme protocolo estabelecido por Gender Shades (Buolamwini &amp; Gebru, 2018).</a:t>
-            </a:r>
-          </a:p>
-          <a:p>
-            <a:pPr>
-              <a:spcAft>
-                <a:spcPts val="1000"/>
-              </a:spcAft>
-            </a:pPr>
-            <a:r>
-              <a:rPr sz="1800" b="1">
+              <a:t>Análise interseccional segundo
+Gender Shades (Buolamwini &amp;
+Gebru, 2018).</a:t>
+            </a:r>
+          </a:p>
+        </p:txBody>
+      </p:sp>
+      <p:sp>
+        <p:nvSpPr>
+          <p:cNvPr id="13" name="Rounded Rectangle 12"/>
+          <p:cNvSpPr/>
+          <p:nvPr/>
+        </p:nvSpPr>
+        <p:spPr>
+          <a:xfrm>
+            <a:off x="4265676" y="1325880"/>
+            <a:ext cx="3657600" cy="502920"/>
+          </a:xfrm>
+          <a:prstGeom prst="roundRect">
+            <a:avLst/>
+          </a:prstGeom>
+          <a:solidFill>
+            <a:srgbClr val="3D68BB"/>
+          </a:solidFill>
+          <a:ln>
+            <a:noFill/>
+          </a:ln>
+        </p:spPr>
+        <p:style>
+          <a:lnRef idx="1">
+            <a:schemeClr val="accent1"/>
+          </a:lnRef>
+          <a:fillRef idx="3">
+            <a:schemeClr val="accent1"/>
+          </a:fillRef>
+          <a:effectRef idx="2">
+            <a:schemeClr val="accent1"/>
+          </a:effectRef>
+          <a:fontRef idx="minor">
+            <a:schemeClr val="lt1"/>
+          </a:fontRef>
+        </p:style>
+        <p:txBody>
+          <a:bodyPr rtlCol="0" anchor="ctr"/>
+          <a:lstStyle/>
+          <a:p>
+            <a:pPr algn="ctr"/>
+            <a:r>
+              <a:rPr sz="1400" b="1">
+                <a:solidFill>
+                  <a:srgbClr val="FFFFFF"/>
+                </a:solidFill>
+              </a:rPr>
+              <a:t>COM QUE RIGOR</a:t>
+            </a:r>
+          </a:p>
+        </p:txBody>
+      </p:sp>
+      <p:sp>
+        <p:nvSpPr>
+          <p:cNvPr id="14" name="Rounded Rectangle 13"/>
+          <p:cNvSpPr/>
+          <p:nvPr/>
+        </p:nvSpPr>
+        <p:spPr>
+          <a:xfrm>
+            <a:off x="4265676" y="1956816"/>
+            <a:ext cx="3657600" cy="1984248"/>
+          </a:xfrm>
+          <a:prstGeom prst="roundRect">
+            <a:avLst/>
+          </a:prstGeom>
+          <a:solidFill>
+            <a:srgbClr val="FFFFFF"/>
+          </a:solidFill>
+          <a:ln w="17780">
+            <a:solidFill>
+              <a:srgbClr val="3D68BB"/>
+            </a:solidFill>
+          </a:ln>
+        </p:spPr>
+        <p:style>
+          <a:lnRef idx="1">
+            <a:schemeClr val="accent1"/>
+          </a:lnRef>
+          <a:fillRef idx="3">
+            <a:schemeClr val="accent1"/>
+          </a:fillRef>
+          <a:effectRef idx="2">
+            <a:schemeClr val="accent1"/>
+          </a:effectRef>
+          <a:fontRef idx="minor">
+            <a:schemeClr val="lt1"/>
+          </a:fontRef>
+        </p:style>
+        <p:txBody>
+          <a:bodyPr rtlCol="0" anchor="ctr" tIns="0"/>
+          <a:lstStyle/>
+          <a:p>
+            <a:pPr algn="ctr"/>
+          </a:p>
+        </p:txBody>
+      </p:sp>
+      <p:sp>
+        <p:nvSpPr>
+          <p:cNvPr id="15" name="TextBox 14"/>
+          <p:cNvSpPr txBox="1"/>
+          <p:nvPr/>
+        </p:nvSpPr>
+        <p:spPr>
+          <a:xfrm>
+            <a:off x="4402836" y="2048256"/>
+            <a:ext cx="3383280" cy="320040"/>
+          </a:xfrm>
+          <a:prstGeom prst="rect">
+            <a:avLst/>
+          </a:prstGeom>
+          <a:noFill/>
+        </p:spPr>
+        <p:txBody>
+          <a:bodyPr wrap="square">
+            <a:spAutoFit/>
+          </a:bodyPr>
+          <a:lstStyle/>
+          <a:p>
+            <a:pPr algn="ctr"/>
+            <a:r>
+              <a:rPr sz="1100" b="1">
+                <a:solidFill>
+                  <a:srgbClr val="3D68BB"/>
+                </a:solidFill>
+              </a:rPr>
+              <a:t>Norma</a:t>
+            </a:r>
+          </a:p>
+        </p:txBody>
+      </p:sp>
+      <p:sp>
+        <p:nvSpPr>
+          <p:cNvPr id="16" name="TextBox 15"/>
+          <p:cNvSpPr txBox="1"/>
+          <p:nvPr/>
+        </p:nvSpPr>
+        <p:spPr>
+          <a:xfrm>
+            <a:off x="4402836" y="2414016"/>
+            <a:ext cx="3383280" cy="502920"/>
+          </a:xfrm>
+          <a:prstGeom prst="rect">
+            <a:avLst/>
+          </a:prstGeom>
+          <a:noFill/>
+        </p:spPr>
+        <p:txBody>
+          <a:bodyPr wrap="square">
+            <a:spAutoFit/>
+          </a:bodyPr>
+          <a:lstStyle/>
+          <a:p>
+            <a:pPr algn="ctr"/>
+            <a:r>
+              <a:rPr sz="1500" b="1">
                 <a:solidFill>
                   <a:srgbClr val="1F2A4E"/>
                 </a:solidFill>
               </a:rPr>
-              <a:t>Norma seguida:  </a:t>
-            </a:r>
-            <a:r>
-              <a:rPr sz="1800">
+              <a:t>ISO/IEC 19795-10:2024</a:t>
+            </a:r>
+          </a:p>
+        </p:txBody>
+      </p:sp>
+      <p:sp>
+        <p:nvSpPr>
+          <p:cNvPr id="17" name="TextBox 16"/>
+          <p:cNvSpPr txBox="1"/>
+          <p:nvPr/>
+        </p:nvSpPr>
+        <p:spPr>
+          <a:xfrm>
+            <a:off x="4430268" y="2944368"/>
+            <a:ext cx="3328416" cy="932688"/>
+          </a:xfrm>
+          <a:prstGeom prst="rect">
+            <a:avLst/>
+          </a:prstGeom>
+          <a:noFill/>
+        </p:spPr>
+        <p:txBody>
+          <a:bodyPr wrap="square">
+            <a:spAutoFit/>
+          </a:bodyPr>
+          <a:lstStyle/>
+          <a:p>
+            <a:pPr algn="ctr"/>
+            <a:r>
+              <a:rPr sz="1200">
                 <a:solidFill>
                   <a:srgbClr val="3D424E"/>
                 </a:solidFill>
               </a:rPr>
-              <a:t>ISO/IEC 19795-10:2024, padrão internacional para reporte de desempenho biométrico estratificado entre grupos demográficos.</a:t>
-            </a:r>
-          </a:p>
-          <a:p>
-            <a:pPr>
-              <a:spcAft>
-                <a:spcPts val="1000"/>
-              </a:spcAft>
-            </a:pPr>
-            <a:r>
-              <a:rPr sz="1800" b="1">
+              <a:t>Padrão internacional para
+reporte de desempenho biométrico
+estratificado entre grupos.</a:t>
+            </a:r>
+          </a:p>
+        </p:txBody>
+      </p:sp>
+      <p:sp>
+        <p:nvSpPr>
+          <p:cNvPr id="18" name="Rounded Rectangle 17"/>
+          <p:cNvSpPr/>
+          <p:nvPr/>
+        </p:nvSpPr>
+        <p:spPr>
+          <a:xfrm>
+            <a:off x="4265676" y="4105656"/>
+            <a:ext cx="3657600" cy="1984248"/>
+          </a:xfrm>
+          <a:prstGeom prst="roundRect">
+            <a:avLst/>
+          </a:prstGeom>
+          <a:solidFill>
+            <a:srgbClr val="FFFFFF"/>
+          </a:solidFill>
+          <a:ln w="17780">
+            <a:solidFill>
+              <a:srgbClr val="3D68BB"/>
+            </a:solidFill>
+          </a:ln>
+        </p:spPr>
+        <p:style>
+          <a:lnRef idx="1">
+            <a:schemeClr val="accent1"/>
+          </a:lnRef>
+          <a:fillRef idx="3">
+            <a:schemeClr val="accent1"/>
+          </a:fillRef>
+          <a:effectRef idx="2">
+            <a:schemeClr val="accent1"/>
+          </a:effectRef>
+          <a:fontRef idx="minor">
+            <a:schemeClr val="lt1"/>
+          </a:fontRef>
+        </p:style>
+        <p:txBody>
+          <a:bodyPr rtlCol="0" anchor="ctr" tIns="0"/>
+          <a:lstStyle/>
+          <a:p>
+            <a:pPr algn="ctr"/>
+          </a:p>
+        </p:txBody>
+      </p:sp>
+      <p:sp>
+        <p:nvSpPr>
+          <p:cNvPr id="19" name="TextBox 18"/>
+          <p:cNvSpPr txBox="1"/>
+          <p:nvPr/>
+        </p:nvSpPr>
+        <p:spPr>
+          <a:xfrm>
+            <a:off x="4402836" y="4197096"/>
+            <a:ext cx="3383280" cy="320040"/>
+          </a:xfrm>
+          <a:prstGeom prst="rect">
+            <a:avLst/>
+          </a:prstGeom>
+          <a:noFill/>
+        </p:spPr>
+        <p:txBody>
+          <a:bodyPr wrap="square">
+            <a:spAutoFit/>
+          </a:bodyPr>
+          <a:lstStyle/>
+          <a:p>
+            <a:pPr algn="ctr"/>
+            <a:r>
+              <a:rPr sz="1100" b="1">
+                <a:solidFill>
+                  <a:srgbClr val="3D68BB"/>
+                </a:solidFill>
+              </a:rPr>
+              <a:t>Estatística</a:t>
+            </a:r>
+          </a:p>
+        </p:txBody>
+      </p:sp>
+      <p:sp>
+        <p:nvSpPr>
+          <p:cNvPr id="20" name="TextBox 19"/>
+          <p:cNvSpPr txBox="1"/>
+          <p:nvPr/>
+        </p:nvSpPr>
+        <p:spPr>
+          <a:xfrm>
+            <a:off x="4402836" y="4562856"/>
+            <a:ext cx="3383280" cy="502920"/>
+          </a:xfrm>
+          <a:prstGeom prst="rect">
+            <a:avLst/>
+          </a:prstGeom>
+          <a:noFill/>
+        </p:spPr>
+        <p:txBody>
+          <a:bodyPr wrap="square">
+            <a:spAutoFit/>
+          </a:bodyPr>
+          <a:lstStyle/>
+          <a:p>
+            <a:pPr algn="ctr"/>
+            <a:r>
+              <a:rPr sz="1500" b="1">
                 <a:solidFill>
                   <a:srgbClr val="1F2A4E"/>
                 </a:solidFill>
               </a:rPr>
-              <a:t>Rigor experimental:  </a:t>
-            </a:r>
-            <a:r>
-              <a:rPr sz="1800">
+              <a:t>3 sementes · IC 95 % · pareado</a:t>
+            </a:r>
+          </a:p>
+        </p:txBody>
+      </p:sp>
+      <p:sp>
+        <p:nvSpPr>
+          <p:cNvPr id="21" name="TextBox 20"/>
+          <p:cNvSpPr txBox="1"/>
+          <p:nvPr/>
+        </p:nvSpPr>
+        <p:spPr>
+          <a:xfrm>
+            <a:off x="4430268" y="5093208"/>
+            <a:ext cx="3328416" cy="932688"/>
+          </a:xfrm>
+          <a:prstGeom prst="rect">
+            <a:avLst/>
+          </a:prstGeom>
+          <a:noFill/>
+        </p:spPr>
+        <p:txBody>
+          <a:bodyPr wrap="square">
+            <a:spAutoFit/>
+          </a:bodyPr>
+          <a:lstStyle/>
+          <a:p>
+            <a:pPr algn="ctr"/>
+            <a:r>
+              <a:rPr sz="1200">
                 <a:solidFill>
                   <a:srgbClr val="3D424E"/>
                 </a:solidFill>
               </a:rPr>
-              <a:t>três sementes independentes por experimento (42, 1, 2), comparação pareada e intervalo de confiança de 95 % via bootstrap não paramétrico.</a:t>
-            </a:r>
-          </a:p>
-          <a:p>
-            <a:pPr>
-              <a:spcAft>
-                <a:spcPts val="1000"/>
-              </a:spcAft>
-            </a:pPr>
-            <a:r>
-              <a:rPr sz="1800" b="1">
+              <a:t>Sementes (42, 1, 2); bootstrap
+não-paramétrico; comparação
+pareada entre configs.</a:t>
+            </a:r>
+          </a:p>
+        </p:txBody>
+      </p:sp>
+      <p:sp>
+        <p:nvSpPr>
+          <p:cNvPr id="22" name="Rounded Rectangle 21"/>
+          <p:cNvSpPr/>
+          <p:nvPr/>
+        </p:nvSpPr>
+        <p:spPr>
+          <a:xfrm>
+            <a:off x="8197596" y="1325880"/>
+            <a:ext cx="3657600" cy="502920"/>
+          </a:xfrm>
+          <a:prstGeom prst="roundRect">
+            <a:avLst/>
+          </a:prstGeom>
+          <a:solidFill>
+            <a:srgbClr val="707682"/>
+          </a:solidFill>
+          <a:ln>
+            <a:noFill/>
+          </a:ln>
+        </p:spPr>
+        <p:style>
+          <a:lnRef idx="1">
+            <a:schemeClr val="accent1"/>
+          </a:lnRef>
+          <a:fillRef idx="3">
+            <a:schemeClr val="accent1"/>
+          </a:fillRef>
+          <a:effectRef idx="2">
+            <a:schemeClr val="accent1"/>
+          </a:effectRef>
+          <a:fontRef idx="minor">
+            <a:schemeClr val="lt1"/>
+          </a:fontRef>
+        </p:style>
+        <p:txBody>
+          <a:bodyPr rtlCol="0" anchor="ctr"/>
+          <a:lstStyle/>
+          <a:p>
+            <a:pPr algn="ctr"/>
+            <a:r>
+              <a:rPr sz="1400" b="1">
+                <a:solidFill>
+                  <a:srgbClr val="FFFFFF"/>
+                </a:solidFill>
+              </a:rPr>
+              <a:t>ONDE GENERALIZA</a:t>
+            </a:r>
+          </a:p>
+        </p:txBody>
+      </p:sp>
+      <p:sp>
+        <p:nvSpPr>
+          <p:cNvPr id="23" name="Rounded Rectangle 22"/>
+          <p:cNvSpPr/>
+          <p:nvPr/>
+        </p:nvSpPr>
+        <p:spPr>
+          <a:xfrm>
+            <a:off x="8197596" y="1956816"/>
+            <a:ext cx="3657600" cy="1984248"/>
+          </a:xfrm>
+          <a:prstGeom prst="roundRect">
+            <a:avLst/>
+          </a:prstGeom>
+          <a:solidFill>
+            <a:srgbClr val="FFFFFF"/>
+          </a:solidFill>
+          <a:ln w="17780">
+            <a:solidFill>
+              <a:srgbClr val="707682"/>
+            </a:solidFill>
+          </a:ln>
+        </p:spPr>
+        <p:style>
+          <a:lnRef idx="1">
+            <a:schemeClr val="accent1"/>
+          </a:lnRef>
+          <a:fillRef idx="3">
+            <a:schemeClr val="accent1"/>
+          </a:fillRef>
+          <a:effectRef idx="2">
+            <a:schemeClr val="accent1"/>
+          </a:effectRef>
+          <a:fontRef idx="minor">
+            <a:schemeClr val="lt1"/>
+          </a:fontRef>
+        </p:style>
+        <p:txBody>
+          <a:bodyPr rtlCol="0" anchor="ctr" tIns="0"/>
+          <a:lstStyle/>
+          <a:p>
+            <a:pPr algn="ctr"/>
+          </a:p>
+        </p:txBody>
+      </p:sp>
+      <p:sp>
+        <p:nvSpPr>
+          <p:cNvPr id="24" name="TextBox 23"/>
+          <p:cNvSpPr txBox="1"/>
+          <p:nvPr/>
+        </p:nvSpPr>
+        <p:spPr>
+          <a:xfrm>
+            <a:off x="8334756" y="2048256"/>
+            <a:ext cx="3383280" cy="320040"/>
+          </a:xfrm>
+          <a:prstGeom prst="rect">
+            <a:avLst/>
+          </a:prstGeom>
+          <a:noFill/>
+        </p:spPr>
+        <p:txBody>
+          <a:bodyPr wrap="square">
+            <a:spAutoFit/>
+          </a:bodyPr>
+          <a:lstStyle/>
+          <a:p>
+            <a:pPr algn="ctr"/>
+            <a:r>
+              <a:rPr sz="1100" b="1">
+                <a:solidFill>
+                  <a:srgbClr val="707682"/>
+                </a:solidFill>
+              </a:rPr>
+              <a:t>RFW</a:t>
+            </a:r>
+          </a:p>
+        </p:txBody>
+      </p:sp>
+      <p:sp>
+        <p:nvSpPr>
+          <p:cNvPr id="25" name="TextBox 24"/>
+          <p:cNvSpPr txBox="1"/>
+          <p:nvPr/>
+        </p:nvSpPr>
+        <p:spPr>
+          <a:xfrm>
+            <a:off x="8334756" y="2414016"/>
+            <a:ext cx="3383280" cy="502920"/>
+          </a:xfrm>
+          <a:prstGeom prst="rect">
+            <a:avLst/>
+          </a:prstGeom>
+          <a:noFill/>
+        </p:spPr>
+        <p:txBody>
+          <a:bodyPr wrap="square">
+            <a:spAutoFit/>
+          </a:bodyPr>
+          <a:lstStyle/>
+          <a:p>
+            <a:pPr algn="ctr"/>
+            <a:r>
+              <a:rPr sz="1500" b="1">
                 <a:solidFill>
                   <a:srgbClr val="1F2A4E"/>
                 </a:solidFill>
               </a:rPr>
-              <a:t>Datasets de transferência (Etapa 5):  </a:t>
-            </a:r>
-            <a:r>
-              <a:rPr sz="1800">
+              <a:t>Racial Faces in-the-Wild</a:t>
+            </a:r>
+          </a:p>
+        </p:txBody>
+      </p:sp>
+      <p:sp>
+        <p:nvSpPr>
+          <p:cNvPr id="26" name="TextBox 25"/>
+          <p:cNvSpPr txBox="1"/>
+          <p:nvPr/>
+        </p:nvSpPr>
+        <p:spPr>
+          <a:xfrm>
+            <a:off x="8362188" y="2944368"/>
+            <a:ext cx="3328416" cy="932688"/>
+          </a:xfrm>
+          <a:prstGeom prst="rect">
+            <a:avLst/>
+          </a:prstGeom>
+          <a:noFill/>
+        </p:spPr>
+        <p:txBody>
+          <a:bodyPr wrap="square">
+            <a:spAutoFit/>
+          </a:bodyPr>
+          <a:lstStyle/>
+          <a:p>
+            <a:pPr algn="ctr"/>
+            <a:r>
+              <a:rPr sz="1200">
                 <a:solidFill>
                   <a:srgbClr val="3D424E"/>
                 </a:solidFill>
               </a:rPr>
-              <a:t>RFW (Wang et al., 2019) e BFW (Robinson et al., 2020), com pares oficiais de verificação 1:1.</a:t>
-            </a:r>
-          </a:p>
-        </p:txBody>
-      </p:sp>
-      <p:sp>
-        <p:nvSpPr>
-          <p:cNvPr id="5" name="TextBox 4"/>
+              <a:t>Pares oficiais 1 : 1 de verificação
+(Wang et al., 2019). Foco em
+grupo African.</a:t>
+            </a:r>
+          </a:p>
+        </p:txBody>
+      </p:sp>
+      <p:sp>
+        <p:nvSpPr>
+          <p:cNvPr id="27" name="Rounded Rectangle 26"/>
+          <p:cNvSpPr/>
+          <p:nvPr/>
+        </p:nvSpPr>
+        <p:spPr>
+          <a:xfrm>
+            <a:off x="8197596" y="4105656"/>
+            <a:ext cx="3657600" cy="1984248"/>
+          </a:xfrm>
+          <a:prstGeom prst="roundRect">
+            <a:avLst/>
+          </a:prstGeom>
+          <a:solidFill>
+            <a:srgbClr val="FFFFFF"/>
+          </a:solidFill>
+          <a:ln w="17780">
+            <a:solidFill>
+              <a:srgbClr val="707682"/>
+            </a:solidFill>
+          </a:ln>
+        </p:spPr>
+        <p:style>
+          <a:lnRef idx="1">
+            <a:schemeClr val="accent1"/>
+          </a:lnRef>
+          <a:fillRef idx="3">
+            <a:schemeClr val="accent1"/>
+          </a:fillRef>
+          <a:effectRef idx="2">
+            <a:schemeClr val="accent1"/>
+          </a:effectRef>
+          <a:fontRef idx="minor">
+            <a:schemeClr val="lt1"/>
+          </a:fontRef>
+        </p:style>
+        <p:txBody>
+          <a:bodyPr rtlCol="0" anchor="ctr" tIns="0"/>
+          <a:lstStyle/>
+          <a:p>
+            <a:pPr algn="ctr"/>
+          </a:p>
+        </p:txBody>
+      </p:sp>
+      <p:sp>
+        <p:nvSpPr>
+          <p:cNvPr id="28" name="TextBox 27"/>
+          <p:cNvSpPr txBox="1"/>
+          <p:nvPr/>
+        </p:nvSpPr>
+        <p:spPr>
+          <a:xfrm>
+            <a:off x="8334756" y="4197096"/>
+            <a:ext cx="3383280" cy="320040"/>
+          </a:xfrm>
+          <a:prstGeom prst="rect">
+            <a:avLst/>
+          </a:prstGeom>
+          <a:noFill/>
+        </p:spPr>
+        <p:txBody>
+          <a:bodyPr wrap="square">
+            <a:spAutoFit/>
+          </a:bodyPr>
+          <a:lstStyle/>
+          <a:p>
+            <a:pPr algn="ctr"/>
+            <a:r>
+              <a:rPr sz="1100" b="1">
+                <a:solidFill>
+                  <a:srgbClr val="707682"/>
+                </a:solidFill>
+              </a:rPr>
+              <a:t>BFW</a:t>
+            </a:r>
+          </a:p>
+        </p:txBody>
+      </p:sp>
+      <p:sp>
+        <p:nvSpPr>
+          <p:cNvPr id="29" name="TextBox 28"/>
+          <p:cNvSpPr txBox="1"/>
+          <p:nvPr/>
+        </p:nvSpPr>
+        <p:spPr>
+          <a:xfrm>
+            <a:off x="8334756" y="4562856"/>
+            <a:ext cx="3383280" cy="502920"/>
+          </a:xfrm>
+          <a:prstGeom prst="rect">
+            <a:avLst/>
+          </a:prstGeom>
+          <a:noFill/>
+        </p:spPr>
+        <p:txBody>
+          <a:bodyPr wrap="square">
+            <a:spAutoFit/>
+          </a:bodyPr>
+          <a:lstStyle/>
+          <a:p>
+            <a:pPr algn="ctr"/>
+            <a:r>
+              <a:rPr sz="1500" b="1">
+                <a:solidFill>
+                  <a:srgbClr val="1F2A4E"/>
+                </a:solidFill>
+              </a:rPr>
+              <a:t>Balanced Faces in-the-Wild</a:t>
+            </a:r>
+          </a:p>
+        </p:txBody>
+      </p:sp>
+      <p:sp>
+        <p:nvSpPr>
+          <p:cNvPr id="30" name="TextBox 29"/>
+          <p:cNvSpPr txBox="1"/>
+          <p:nvPr/>
+        </p:nvSpPr>
+        <p:spPr>
+          <a:xfrm>
+            <a:off x="8362188" y="5093208"/>
+            <a:ext cx="3328416" cy="932688"/>
+          </a:xfrm>
+          <a:prstGeom prst="rect">
+            <a:avLst/>
+          </a:prstGeom>
+          <a:noFill/>
+        </p:spPr>
+        <p:txBody>
+          <a:bodyPr wrap="square">
+            <a:spAutoFit/>
+          </a:bodyPr>
+          <a:lstStyle/>
+          <a:p>
+            <a:pPr algn="ctr"/>
+            <a:r>
+              <a:rPr sz="1200">
+                <a:solidFill>
+                  <a:srgbClr val="3D424E"/>
+                </a:solidFill>
+              </a:rPr>
+              <a:t>Protocolo balanceado por raça
+x gênero (Robinson et al.,
+2020).</a:t>
+            </a:r>
+          </a:p>
+        </p:txBody>
+      </p:sp>
+      <p:sp>
+        <p:nvSpPr>
+          <p:cNvPr id="31" name="TextBox 30"/>
+          <p:cNvSpPr txBox="1"/>
+          <p:nvPr/>
+        </p:nvSpPr>
+        <p:spPr>
+          <a:xfrm>
+            <a:off x="457200" y="6035040"/>
+            <a:ext cx="11247120" cy="365760"/>
+          </a:xfrm>
+          <a:prstGeom prst="rect">
+            <a:avLst/>
+          </a:prstGeom>
+          <a:noFill/>
+        </p:spPr>
+        <p:txBody>
+          <a:bodyPr wrap="none">
+            <a:spAutoFit/>
+          </a:bodyPr>
+          <a:lstStyle/>
+          <a:p>
+            <a:pPr algn="ctr">
+              <a:defRPr sz="1200" i="1">
+                <a:solidFill>
+                  <a:srgbClr val="707682"/>
+                </a:solidFill>
+              </a:defRPr>
+            </a:pPr>
+            <a:r>
+              <a:t>Fluxo narrativo: o que avalio (cenários A e B) → com que rigor (norma + estatística) → onde demonstro generalização (RFW, BFW).</a:t>
+            </a:r>
+          </a:p>
+        </p:txBody>
+      </p:sp>
+      <p:sp>
+        <p:nvSpPr>
+          <p:cNvPr id="32" name="TextBox 31"/>
           <p:cNvSpPr txBox="1"/>
           <p:nvPr/>
         </p:nvSpPr>
@@ -9925,7 +10868,7 @@
       </p:sp>
       <p:sp>
         <p:nvSpPr>
-          <p:cNvPr id="6" name="TextBox 5"/>
+          <p:cNvPr id="33" name="TextBox 32"/>
           <p:cNvSpPr txBox="1"/>
           <p:nvPr/>
         </p:nvSpPr>
@@ -10006,7 +10949,7 @@
               </a:defRPr>
             </a:pPr>
             <a:r>
-              <a:t>Triangulação de métricas de equidade</a:t>
+              <a:t>As métricas que vamos reportar</a:t>
             </a:r>
           </a:p>
         </p:txBody>
@@ -10062,8 +11005,148 @@
         </p:nvSpPr>
         <p:spPr>
           <a:xfrm>
-            <a:off x="457200" y="1417320"/>
-            <a:ext cx="11430000" cy="4937760"/>
+            <a:off x="457200" y="1170432"/>
+            <a:ext cx="11247120" cy="320040"/>
+          </a:xfrm>
+          <a:prstGeom prst="rect">
+            <a:avLst/>
+          </a:prstGeom>
+          <a:noFill/>
+        </p:spPr>
+        <p:txBody>
+          <a:bodyPr wrap="none">
+            <a:spAutoFit/>
+          </a:bodyPr>
+          <a:lstStyle/>
+          <a:p>
+            <a:pPr>
+              <a:defRPr sz="1300" i="1">
+                <a:solidFill>
+                  <a:srgbClr val="707682"/>
+                </a:solidFill>
+              </a:defRPr>
+            </a:pPr>
+            <a:r>
+              <a:t>Todas públicas, padrão da literatura — reportar as três simultaneamente como exigência metodológica.</a:t>
+            </a:r>
+          </a:p>
+        </p:txBody>
+      </p:sp>
+      <p:sp>
+        <p:nvSpPr>
+          <p:cNvPr id="5" name="Rounded Rectangle 4"/>
+          <p:cNvSpPr/>
+          <p:nvPr/>
+        </p:nvSpPr>
+        <p:spPr>
+          <a:xfrm>
+            <a:off x="379476" y="1600200"/>
+            <a:ext cx="3657600" cy="822960"/>
+          </a:xfrm>
+          <a:prstGeom prst="roundRect">
+            <a:avLst/>
+          </a:prstGeom>
+          <a:solidFill>
+            <a:srgbClr val="1F2A4E"/>
+          </a:solidFill>
+          <a:ln>
+            <a:noFill/>
+          </a:ln>
+        </p:spPr>
+        <p:style>
+          <a:lnRef idx="1">
+            <a:schemeClr val="accent1"/>
+          </a:lnRef>
+          <a:fillRef idx="3">
+            <a:schemeClr val="accent1"/>
+          </a:fillRef>
+          <a:effectRef idx="2">
+            <a:schemeClr val="accent1"/>
+          </a:effectRef>
+          <a:fontRef idx="minor">
+            <a:schemeClr val="lt1"/>
+          </a:fontRef>
+        </p:style>
+        <p:txBody>
+          <a:bodyPr rtlCol="0" anchor="ctr" tIns="73152"/>
+          <a:lstStyle/>
+          <a:p>
+            <a:pPr algn="ctr"/>
+            <a:r>
+              <a:rPr sz="2200" b="1">
+                <a:solidFill>
+                  <a:srgbClr val="FFFFFF"/>
+                </a:solidFill>
+              </a:rPr>
+              <a:t>F1 macro</a:t>
+            </a:r>
+          </a:p>
+          <a:p>
+            <a:pPr algn="ctr"/>
+            <a:r>
+              <a:rPr sz="1200" i="1">
+                <a:solidFill>
+                  <a:srgbClr val="B4C4E8"/>
+                </a:solidFill>
+              </a:rPr>
+              <a:t>performance média</a:t>
+            </a:r>
+          </a:p>
+        </p:txBody>
+      </p:sp>
+      <p:sp>
+        <p:nvSpPr>
+          <p:cNvPr id="6" name="Rounded Rectangle 5"/>
+          <p:cNvSpPr/>
+          <p:nvPr/>
+        </p:nvSpPr>
+        <p:spPr>
+          <a:xfrm>
+            <a:off x="379476" y="2468879"/>
+            <a:ext cx="3657600" cy="3657600"/>
+          </a:xfrm>
+          <a:prstGeom prst="roundRect">
+            <a:avLst/>
+          </a:prstGeom>
+          <a:solidFill>
+            <a:srgbClr val="E8EAED"/>
+          </a:solidFill>
+          <a:ln>
+            <a:noFill/>
+          </a:ln>
+        </p:spPr>
+        <p:style>
+          <a:lnRef idx="1">
+            <a:schemeClr val="accent1"/>
+          </a:lnRef>
+          <a:fillRef idx="3">
+            <a:schemeClr val="accent1"/>
+          </a:fillRef>
+          <a:effectRef idx="2">
+            <a:schemeClr val="accent1"/>
+          </a:effectRef>
+          <a:fontRef idx="minor">
+            <a:schemeClr val="lt1"/>
+          </a:fontRef>
+        </p:style>
+        <p:txBody>
+          <a:bodyPr rtlCol="0" anchor="ctr"/>
+          <a:lstStyle/>
+          <a:p>
+            <a:pPr algn="ctr"/>
+          </a:p>
+        </p:txBody>
+      </p:sp>
+      <p:sp>
+        <p:nvSpPr>
+          <p:cNvPr id="7" name="TextBox 6"/>
+          <p:cNvSpPr txBox="1"/>
+          <p:nvPr/>
+        </p:nvSpPr>
+        <p:spPr>
+          <a:xfrm>
+            <a:off x="562356" y="2606040"/>
+            <a:ext cx="3291840" cy="822960"/>
           </a:xfrm>
           <a:prstGeom prst="rect">
             <a:avLst/>
@@ -10076,148 +11159,872 @@
           </a:bodyPr>
           <a:lstStyle/>
           <a:p>
-            <a:pPr>
-              <a:spcAft>
-                <a:spcPts val="1000"/>
-              </a:spcAft>
-            </a:pPr>
-            <a:r>
-              <a:rPr sz="1800" b="1">
+            <a:r>
+              <a:rPr sz="1200">
+                <a:solidFill>
+                  <a:srgbClr val="3D424E"/>
+                </a:solidFill>
+              </a:rPr>
+              <a:t>Média harmônica de precision/recall por
+classe, depois média simples entre as
+7 raças.</a:t>
+            </a:r>
+          </a:p>
+        </p:txBody>
+      </p:sp>
+      <p:sp>
+        <p:nvSpPr>
+          <p:cNvPr id="8" name="TextBox 7"/>
+          <p:cNvSpPr txBox="1"/>
+          <p:nvPr/>
+        </p:nvSpPr>
+        <p:spPr>
+          <a:xfrm>
+            <a:off x="562356" y="3657600"/>
+            <a:ext cx="3291840" cy="502920"/>
+          </a:xfrm>
+          <a:prstGeom prst="rect">
+            <a:avLst/>
+          </a:prstGeom>
+          <a:noFill/>
+        </p:spPr>
+        <p:txBody>
+          <a:bodyPr wrap="square">
+            <a:spAutoFit/>
+          </a:bodyPr>
+          <a:lstStyle/>
+          <a:p>
+            <a:r>
+              <a:rPr sz="1050" i="1">
+                <a:solidFill>
+                  <a:srgbClr val="707682"/>
+                </a:solidFill>
+              </a:rPr>
+              <a:t>Referência: van Rijsbergen 1979</a:t>
+            </a:r>
+          </a:p>
+        </p:txBody>
+      </p:sp>
+      <p:cxnSp>
+        <p:nvCxnSpPr>
+          <p:cNvPr id="9" name="Connector 8"/>
+          <p:cNvCxnSpPr/>
+          <p:nvPr/>
+        </p:nvCxnSpPr>
+        <p:spPr>
+          <a:xfrm>
+            <a:off x="653796" y="4251960"/>
+            <a:ext cx="3108960" cy="0"/>
+          </a:xfrm>
+          <a:prstGeom prst="bentConnector3">
+            <a:avLst/>
+          </a:prstGeom>
+          <a:ln w="9525">
+            <a:solidFill>
+              <a:srgbClr val="707682"/>
+            </a:solidFill>
+          </a:ln>
+        </p:spPr>
+        <p:style>
+          <a:lnRef idx="2">
+            <a:schemeClr val="accent1"/>
+          </a:lnRef>
+          <a:fillRef idx="0">
+            <a:schemeClr val="accent1"/>
+          </a:fillRef>
+          <a:effectRef idx="1">
+            <a:schemeClr val="accent1"/>
+          </a:effectRef>
+          <a:fontRef idx="minor">
+            <a:schemeClr val="tx1"/>
+          </a:fontRef>
+        </p:style>
+      </p:cxnSp>
+      <p:sp>
+        <p:nvSpPr>
+          <p:cNvPr id="10" name="TextBox 9"/>
+          <p:cNvSpPr txBox="1"/>
+          <p:nvPr/>
+        </p:nvSpPr>
+        <p:spPr>
+          <a:xfrm>
+            <a:off x="562356" y="4343400"/>
+            <a:ext cx="3291840" cy="274320"/>
+          </a:xfrm>
+          <a:prstGeom prst="rect">
+            <a:avLst/>
+          </a:prstGeom>
+          <a:noFill/>
+        </p:spPr>
+        <p:txBody>
+          <a:bodyPr wrap="none">
+            <a:spAutoFit/>
+          </a:bodyPr>
+          <a:lstStyle/>
+          <a:p>
+            <a:pPr algn="ctr"/>
+            <a:r>
+              <a:rPr sz="1100" i="1">
+                <a:solidFill>
+                  <a:srgbClr val="707682"/>
+                </a:solidFill>
+              </a:rPr>
+              <a:t>SOTA atual</a:t>
+            </a:r>
+          </a:p>
+        </p:txBody>
+      </p:sp>
+      <p:sp>
+        <p:nvSpPr>
+          <p:cNvPr id="11" name="TextBox 10"/>
+          <p:cNvSpPr txBox="1"/>
+          <p:nvPr/>
+        </p:nvSpPr>
+        <p:spPr>
+          <a:xfrm>
+            <a:off x="562356" y="4663440"/>
+            <a:ext cx="3291840" cy="868680"/>
+          </a:xfrm>
+          <a:prstGeom prst="rect">
+            <a:avLst/>
+          </a:prstGeom>
+          <a:noFill/>
+        </p:spPr>
+        <p:txBody>
+          <a:bodyPr wrap="none">
+            <a:spAutoFit/>
+          </a:bodyPr>
+          <a:lstStyle/>
+          <a:p>
+            <a:pPr algn="ctr"/>
+            <a:r>
+              <a:rPr sz="4400" b="1">
                 <a:solidFill>
                   <a:srgbClr val="1F2A4E"/>
                 </a:solidFill>
               </a:rPr>
-              <a:t>Por que triangular — Kleinberg et al. (2017):  </a:t>
-            </a:r>
-            <a:r>
-              <a:rPr sz="1800">
+              <a:t>75 %</a:t>
+            </a:r>
+          </a:p>
+        </p:txBody>
+      </p:sp>
+      <p:sp>
+        <p:nvSpPr>
+          <p:cNvPr id="12" name="TextBox 11"/>
+          <p:cNvSpPr txBox="1"/>
+          <p:nvPr/>
+        </p:nvSpPr>
+        <p:spPr>
+          <a:xfrm>
+            <a:off x="562356" y="5577840"/>
+            <a:ext cx="3291840" cy="365760"/>
+          </a:xfrm>
+          <a:prstGeom prst="rect">
+            <a:avLst/>
+          </a:prstGeom>
+          <a:noFill/>
+        </p:spPr>
+        <p:txBody>
+          <a:bodyPr wrap="square">
+            <a:spAutoFit/>
+          </a:bodyPr>
+          <a:lstStyle/>
+          <a:p>
+            <a:pPr algn="ctr"/>
+            <a:r>
+              <a:rPr sz="1100">
                 <a:solidFill>
                   <a:srgbClr val="3D424E"/>
                 </a:solidFill>
               </a:rPr>
-              <a:t>Teorema da Impossibilidade — demonstra a impossibilidade formal de satisfação simultânea de múltiplas definições de equidade quando as prevalências diferem entre grupos.</a:t>
-            </a:r>
-          </a:p>
-          <a:p>
-            <a:pPr>
-              <a:spcAft>
-                <a:spcPts val="1000"/>
-              </a:spcAft>
-            </a:pPr>
-            <a:r>
-              <a:rPr sz="1800" b="1">
+              <a:t>FaceScanPaliGemma</a:t>
+            </a:r>
+          </a:p>
+        </p:txBody>
+      </p:sp>
+      <p:sp>
+        <p:nvSpPr>
+          <p:cNvPr id="13" name="Rounded Rectangle 12"/>
+          <p:cNvSpPr/>
+          <p:nvPr/>
+        </p:nvSpPr>
+        <p:spPr>
+          <a:xfrm>
+            <a:off x="4265676" y="1600200"/>
+            <a:ext cx="3657600" cy="822960"/>
+          </a:xfrm>
+          <a:prstGeom prst="roundRect">
+            <a:avLst/>
+          </a:prstGeom>
+          <a:solidFill>
+            <a:srgbClr val="1F2A4E"/>
+          </a:solidFill>
+          <a:ln>
+            <a:noFill/>
+          </a:ln>
+        </p:spPr>
+        <p:style>
+          <a:lnRef idx="1">
+            <a:schemeClr val="accent1"/>
+          </a:lnRef>
+          <a:fillRef idx="3">
+            <a:schemeClr val="accent1"/>
+          </a:fillRef>
+          <a:effectRef idx="2">
+            <a:schemeClr val="accent1"/>
+          </a:effectRef>
+          <a:fontRef idx="minor">
+            <a:schemeClr val="lt1"/>
+          </a:fontRef>
+        </p:style>
+        <p:txBody>
+          <a:bodyPr rtlCol="0" anchor="ctr" tIns="73152"/>
+          <a:lstStyle/>
+          <a:p>
+            <a:pPr algn="ctr"/>
+            <a:r>
+              <a:rPr sz="2200" b="1">
+                <a:solidFill>
+                  <a:srgbClr val="FFFFFF"/>
+                </a:solidFill>
+              </a:rPr>
+              <a:t>DR</a:t>
+            </a:r>
+          </a:p>
+          <a:p>
+            <a:pPr algn="ctr"/>
+            <a:r>
+              <a:rPr sz="1200" i="1">
+                <a:solidFill>
+                  <a:srgbClr val="B4C4E8"/>
+                </a:solidFill>
+              </a:rPr>
+              <a:t>Disparity Ratio</a:t>
+            </a:r>
+          </a:p>
+        </p:txBody>
+      </p:sp>
+      <p:sp>
+        <p:nvSpPr>
+          <p:cNvPr id="14" name="Rounded Rectangle 13"/>
+          <p:cNvSpPr/>
+          <p:nvPr/>
+        </p:nvSpPr>
+        <p:spPr>
+          <a:xfrm>
+            <a:off x="4265676" y="2468879"/>
+            <a:ext cx="3657600" cy="3657600"/>
+          </a:xfrm>
+          <a:prstGeom prst="roundRect">
+            <a:avLst/>
+          </a:prstGeom>
+          <a:solidFill>
+            <a:srgbClr val="E8EAED"/>
+          </a:solidFill>
+          <a:ln>
+            <a:noFill/>
+          </a:ln>
+        </p:spPr>
+        <p:style>
+          <a:lnRef idx="1">
+            <a:schemeClr val="accent1"/>
+          </a:lnRef>
+          <a:fillRef idx="3">
+            <a:schemeClr val="accent1"/>
+          </a:fillRef>
+          <a:effectRef idx="2">
+            <a:schemeClr val="accent1"/>
+          </a:effectRef>
+          <a:fontRef idx="minor">
+            <a:schemeClr val="lt1"/>
+          </a:fontRef>
+        </p:style>
+        <p:txBody>
+          <a:bodyPr rtlCol="0" anchor="ctr"/>
+          <a:lstStyle/>
+          <a:p>
+            <a:pPr algn="ctr"/>
+          </a:p>
+        </p:txBody>
+      </p:sp>
+      <p:sp>
+        <p:nvSpPr>
+          <p:cNvPr id="15" name="TextBox 14"/>
+          <p:cNvSpPr txBox="1"/>
+          <p:nvPr/>
+        </p:nvSpPr>
+        <p:spPr>
+          <a:xfrm>
+            <a:off x="4448556" y="2606040"/>
+            <a:ext cx="3291840" cy="822960"/>
+          </a:xfrm>
+          <a:prstGeom prst="rect">
+            <a:avLst/>
+          </a:prstGeom>
+          <a:noFill/>
+        </p:spPr>
+        <p:txBody>
+          <a:bodyPr wrap="square">
+            <a:spAutoFit/>
+          </a:bodyPr>
+          <a:lstStyle/>
+          <a:p>
+            <a:r>
+              <a:rPr sz="1200">
+                <a:solidFill>
+                  <a:srgbClr val="3D424E"/>
+                </a:solidFill>
+              </a:rPr>
+              <a:t>Razão entre o F1 da pior raça e o F1
+da melhor. Mede o gap entre subgrupos.</a:t>
+            </a:r>
+          </a:p>
+        </p:txBody>
+      </p:sp>
+      <p:sp>
+        <p:nvSpPr>
+          <p:cNvPr id="16" name="TextBox 15"/>
+          <p:cNvSpPr txBox="1"/>
+          <p:nvPr/>
+        </p:nvSpPr>
+        <p:spPr>
+          <a:xfrm>
+            <a:off x="4448556" y="3657600"/>
+            <a:ext cx="3291840" cy="502920"/>
+          </a:xfrm>
+          <a:prstGeom prst="rect">
+            <a:avLst/>
+          </a:prstGeom>
+          <a:noFill/>
+        </p:spPr>
+        <p:txBody>
+          <a:bodyPr wrap="square">
+            <a:spAutoFit/>
+          </a:bodyPr>
+          <a:lstStyle/>
+          <a:p>
+            <a:r>
+              <a:rPr sz="1050" i="1">
+                <a:solidFill>
+                  <a:srgbClr val="707682"/>
+                </a:solidFill>
+              </a:rPr>
+              <a:t>Referência: Hardt, Price &amp; Srebro 2016 (NeurIPS)</a:t>
+            </a:r>
+          </a:p>
+        </p:txBody>
+      </p:sp>
+      <p:cxnSp>
+        <p:nvCxnSpPr>
+          <p:cNvPr id="17" name="Connector 16"/>
+          <p:cNvCxnSpPr/>
+          <p:nvPr/>
+        </p:nvCxnSpPr>
+        <p:spPr>
+          <a:xfrm>
+            <a:off x="4539996" y="4251960"/>
+            <a:ext cx="3108959" cy="0"/>
+          </a:xfrm>
+          <a:prstGeom prst="bentConnector3">
+            <a:avLst/>
+          </a:prstGeom>
+          <a:ln w="9525">
+            <a:solidFill>
+              <a:srgbClr val="707682"/>
+            </a:solidFill>
+          </a:ln>
+        </p:spPr>
+        <p:style>
+          <a:lnRef idx="2">
+            <a:schemeClr val="accent1"/>
+          </a:lnRef>
+          <a:fillRef idx="0">
+            <a:schemeClr val="accent1"/>
+          </a:fillRef>
+          <a:effectRef idx="1">
+            <a:schemeClr val="accent1"/>
+          </a:effectRef>
+          <a:fontRef idx="minor">
+            <a:schemeClr val="tx1"/>
+          </a:fontRef>
+        </p:style>
+      </p:cxnSp>
+      <p:sp>
+        <p:nvSpPr>
+          <p:cNvPr id="18" name="TextBox 17"/>
+          <p:cNvSpPr txBox="1"/>
+          <p:nvPr/>
+        </p:nvSpPr>
+        <p:spPr>
+          <a:xfrm>
+            <a:off x="4448556" y="4343400"/>
+            <a:ext cx="3291840" cy="274320"/>
+          </a:xfrm>
+          <a:prstGeom prst="rect">
+            <a:avLst/>
+          </a:prstGeom>
+          <a:noFill/>
+        </p:spPr>
+        <p:txBody>
+          <a:bodyPr wrap="none">
+            <a:spAutoFit/>
+          </a:bodyPr>
+          <a:lstStyle/>
+          <a:p>
+            <a:pPr algn="ctr"/>
+            <a:r>
+              <a:rPr sz="1100" i="1">
+                <a:solidFill>
+                  <a:srgbClr val="707682"/>
+                </a:solidFill>
+              </a:rPr>
+              <a:t>Estado atual</a:t>
+            </a:r>
+          </a:p>
+        </p:txBody>
+      </p:sp>
+      <p:sp>
+        <p:nvSpPr>
+          <p:cNvPr id="19" name="TextBox 18"/>
+          <p:cNvSpPr txBox="1"/>
+          <p:nvPr/>
+        </p:nvSpPr>
+        <p:spPr>
+          <a:xfrm>
+            <a:off x="4448556" y="4663440"/>
+            <a:ext cx="3291840" cy="868680"/>
+          </a:xfrm>
+          <a:prstGeom prst="rect">
+            <a:avLst/>
+          </a:prstGeom>
+          <a:noFill/>
+        </p:spPr>
+        <p:txBody>
+          <a:bodyPr wrap="none">
+            <a:spAutoFit/>
+          </a:bodyPr>
+          <a:lstStyle/>
+          <a:p>
+            <a:pPr algn="ctr"/>
+            <a:r>
+              <a:rPr sz="4400" b="1">
                 <a:solidFill>
                   <a:srgbClr val="1F2A4E"/>
                 </a:solidFill>
               </a:rPr>
-              <a:t>Disparity Ratio:  </a:t>
-            </a:r>
-            <a:r>
-              <a:rPr sz="1800">
+              <a:t>0,67</a:t>
+            </a:r>
+          </a:p>
+        </p:txBody>
+      </p:sp>
+      <p:sp>
+        <p:nvSpPr>
+          <p:cNvPr id="20" name="TextBox 19"/>
+          <p:cNvSpPr txBox="1"/>
+          <p:nvPr/>
+        </p:nvSpPr>
+        <p:spPr>
+          <a:xfrm>
+            <a:off x="4448556" y="5577840"/>
+            <a:ext cx="3291840" cy="365760"/>
+          </a:xfrm>
+          <a:prstGeom prst="rect">
+            <a:avLst/>
+          </a:prstGeom>
+          <a:noFill/>
+        </p:spPr>
+        <p:txBody>
+          <a:bodyPr wrap="square">
+            <a:spAutoFit/>
+          </a:bodyPr>
+          <a:lstStyle/>
+          <a:p>
+            <a:pPr algn="ctr"/>
+            <a:r>
+              <a:rPr sz="1100">
                 <a:solidFill>
                   <a:srgbClr val="3D424E"/>
                 </a:solidFill>
               </a:rPr>
-              <a:t>razão entre F1 mínimo e máximo entre grupos; mensura a desigualdade de desempenho.</a:t>
-            </a:r>
-          </a:p>
-          <a:p>
-            <a:pPr>
-              <a:spcAft>
-                <a:spcPts val="1000"/>
-              </a:spcAft>
-            </a:pPr>
-            <a:r>
-              <a:rPr sz="1800" b="1">
+              <a:t>60 % Latinx ÷ 90 % Black</a:t>
+            </a:r>
+          </a:p>
+        </p:txBody>
+      </p:sp>
+      <p:sp>
+        <p:nvSpPr>
+          <p:cNvPr id="21" name="Rounded Rectangle 20"/>
+          <p:cNvSpPr/>
+          <p:nvPr/>
+        </p:nvSpPr>
+        <p:spPr>
+          <a:xfrm>
+            <a:off x="8151875" y="1600200"/>
+            <a:ext cx="3657600" cy="822960"/>
+          </a:xfrm>
+          <a:prstGeom prst="roundRect">
+            <a:avLst/>
+          </a:prstGeom>
+          <a:solidFill>
+            <a:srgbClr val="1F2A4E"/>
+          </a:solidFill>
+          <a:ln>
+            <a:noFill/>
+          </a:ln>
+        </p:spPr>
+        <p:style>
+          <a:lnRef idx="1">
+            <a:schemeClr val="accent1"/>
+          </a:lnRef>
+          <a:fillRef idx="3">
+            <a:schemeClr val="accent1"/>
+          </a:fillRef>
+          <a:effectRef idx="2">
+            <a:schemeClr val="accent1"/>
+          </a:effectRef>
+          <a:fontRef idx="minor">
+            <a:schemeClr val="lt1"/>
+          </a:fontRef>
+        </p:style>
+        <p:txBody>
+          <a:bodyPr rtlCol="0" anchor="ctr" tIns="73152"/>
+          <a:lstStyle/>
+          <a:p>
+            <a:pPr algn="ctr"/>
+            <a:r>
+              <a:rPr sz="2200" b="1">
+                <a:solidFill>
+                  <a:srgbClr val="FFFFFF"/>
+                </a:solidFill>
+              </a:rPr>
+              <a:t>Worst-class F1</a:t>
+            </a:r>
+          </a:p>
+          <a:p>
+            <a:pPr algn="ctr"/>
+            <a:r>
+              <a:rPr sz="1200" i="1">
+                <a:solidFill>
+                  <a:srgbClr val="B4C4E8"/>
+                </a:solidFill>
+              </a:rPr>
+              <a:t>pior subgrupo</a:t>
+            </a:r>
+          </a:p>
+        </p:txBody>
+      </p:sp>
+      <p:sp>
+        <p:nvSpPr>
+          <p:cNvPr id="22" name="Rounded Rectangle 21"/>
+          <p:cNvSpPr/>
+          <p:nvPr/>
+        </p:nvSpPr>
+        <p:spPr>
+          <a:xfrm>
+            <a:off x="8151875" y="2468879"/>
+            <a:ext cx="3657600" cy="3657600"/>
+          </a:xfrm>
+          <a:prstGeom prst="roundRect">
+            <a:avLst/>
+          </a:prstGeom>
+          <a:solidFill>
+            <a:srgbClr val="E8EAED"/>
+          </a:solidFill>
+          <a:ln>
+            <a:noFill/>
+          </a:ln>
+        </p:spPr>
+        <p:style>
+          <a:lnRef idx="1">
+            <a:schemeClr val="accent1"/>
+          </a:lnRef>
+          <a:fillRef idx="3">
+            <a:schemeClr val="accent1"/>
+          </a:fillRef>
+          <a:effectRef idx="2">
+            <a:schemeClr val="accent1"/>
+          </a:effectRef>
+          <a:fontRef idx="minor">
+            <a:schemeClr val="lt1"/>
+          </a:fontRef>
+        </p:style>
+        <p:txBody>
+          <a:bodyPr rtlCol="0" anchor="ctr"/>
+          <a:lstStyle/>
+          <a:p>
+            <a:pPr algn="ctr"/>
+          </a:p>
+        </p:txBody>
+      </p:sp>
+      <p:sp>
+        <p:nvSpPr>
+          <p:cNvPr id="23" name="TextBox 22"/>
+          <p:cNvSpPr txBox="1"/>
+          <p:nvPr/>
+        </p:nvSpPr>
+        <p:spPr>
+          <a:xfrm>
+            <a:off x="8334755" y="2606040"/>
+            <a:ext cx="3291840" cy="822960"/>
+          </a:xfrm>
+          <a:prstGeom prst="rect">
+            <a:avLst/>
+          </a:prstGeom>
+          <a:noFill/>
+        </p:spPr>
+        <p:txBody>
+          <a:bodyPr wrap="square">
+            <a:spAutoFit/>
+          </a:bodyPr>
+          <a:lstStyle/>
+          <a:p>
+            <a:r>
+              <a:rPr sz="1200">
+                <a:solidFill>
+                  <a:srgbClr val="3D424E"/>
+                </a:solidFill>
+              </a:rPr>
+              <a:t>F1 da raça em que o modelo erra mais.
+Garante que ninguém fique para trás.</a:t>
+            </a:r>
+          </a:p>
+        </p:txBody>
+      </p:sp>
+      <p:sp>
+        <p:nvSpPr>
+          <p:cNvPr id="24" name="TextBox 23"/>
+          <p:cNvSpPr txBox="1"/>
+          <p:nvPr/>
+        </p:nvSpPr>
+        <p:spPr>
+          <a:xfrm>
+            <a:off x="8334755" y="3657600"/>
+            <a:ext cx="3291840" cy="502920"/>
+          </a:xfrm>
+          <a:prstGeom prst="rect">
+            <a:avLst/>
+          </a:prstGeom>
+          <a:noFill/>
+        </p:spPr>
+        <p:txBody>
+          <a:bodyPr wrap="square">
+            <a:spAutoFit/>
+          </a:bodyPr>
+          <a:lstStyle/>
+          <a:p>
+            <a:r>
+              <a:rPr sz="1050" i="1">
+                <a:solidFill>
+                  <a:srgbClr val="707682"/>
+                </a:solidFill>
+              </a:rPr>
+              <a:t>Referência: Sagawa et al. 2020 (ICLR) — Group DRO</a:t>
+            </a:r>
+          </a:p>
+        </p:txBody>
+      </p:sp>
+      <p:cxnSp>
+        <p:nvCxnSpPr>
+          <p:cNvPr id="25" name="Connector 24"/>
+          <p:cNvCxnSpPr/>
+          <p:nvPr/>
+        </p:nvCxnSpPr>
+        <p:spPr>
+          <a:xfrm>
+            <a:off x="8426196" y="4251960"/>
+            <a:ext cx="3108959" cy="0"/>
+          </a:xfrm>
+          <a:prstGeom prst="bentConnector3">
+            <a:avLst/>
+          </a:prstGeom>
+          <a:ln w="9525">
+            <a:solidFill>
+              <a:srgbClr val="707682"/>
+            </a:solidFill>
+          </a:ln>
+        </p:spPr>
+        <p:style>
+          <a:lnRef idx="2">
+            <a:schemeClr val="accent1"/>
+          </a:lnRef>
+          <a:fillRef idx="0">
+            <a:schemeClr val="accent1"/>
+          </a:fillRef>
+          <a:effectRef idx="1">
+            <a:schemeClr val="accent1"/>
+          </a:effectRef>
+          <a:fontRef idx="minor">
+            <a:schemeClr val="tx1"/>
+          </a:fontRef>
+        </p:style>
+      </p:cxnSp>
+      <p:sp>
+        <p:nvSpPr>
+          <p:cNvPr id="26" name="TextBox 25"/>
+          <p:cNvSpPr txBox="1"/>
+          <p:nvPr/>
+        </p:nvSpPr>
+        <p:spPr>
+          <a:xfrm>
+            <a:off x="8334755" y="4343400"/>
+            <a:ext cx="3291840" cy="274320"/>
+          </a:xfrm>
+          <a:prstGeom prst="rect">
+            <a:avLst/>
+          </a:prstGeom>
+          <a:noFill/>
+        </p:spPr>
+        <p:txBody>
+          <a:bodyPr wrap="none">
+            <a:spAutoFit/>
+          </a:bodyPr>
+          <a:lstStyle/>
+          <a:p>
+            <a:pPr algn="ctr"/>
+            <a:r>
+              <a:rPr sz="1100" i="1">
+                <a:solidFill>
+                  <a:srgbClr val="707682"/>
+                </a:solidFill>
+              </a:rPr>
+              <a:t>Estado atual</a:t>
+            </a:r>
+          </a:p>
+        </p:txBody>
+      </p:sp>
+      <p:sp>
+        <p:nvSpPr>
+          <p:cNvPr id="27" name="TextBox 26"/>
+          <p:cNvSpPr txBox="1"/>
+          <p:nvPr/>
+        </p:nvSpPr>
+        <p:spPr>
+          <a:xfrm>
+            <a:off x="8334755" y="4663440"/>
+            <a:ext cx="3291840" cy="868680"/>
+          </a:xfrm>
+          <a:prstGeom prst="rect">
+            <a:avLst/>
+          </a:prstGeom>
+          <a:noFill/>
+        </p:spPr>
+        <p:txBody>
+          <a:bodyPr wrap="none">
+            <a:spAutoFit/>
+          </a:bodyPr>
+          <a:lstStyle/>
+          <a:p>
+            <a:pPr algn="ctr"/>
+            <a:r>
+              <a:rPr sz="4400" b="1">
                 <a:solidFill>
                   <a:srgbClr val="1F2A4E"/>
                 </a:solidFill>
               </a:rPr>
-              <a:t>F1 da pior classe:  </a:t>
-            </a:r>
-            <a:r>
-              <a:rPr sz="1800">
+              <a:t>60 %</a:t>
+            </a:r>
+          </a:p>
+        </p:txBody>
+      </p:sp>
+      <p:sp>
+        <p:nvSpPr>
+          <p:cNvPr id="28" name="TextBox 27"/>
+          <p:cNvSpPr txBox="1"/>
+          <p:nvPr/>
+        </p:nvSpPr>
+        <p:spPr>
+          <a:xfrm>
+            <a:off x="8334755" y="5577840"/>
+            <a:ext cx="3291840" cy="365760"/>
+          </a:xfrm>
+          <a:prstGeom prst="rect">
+            <a:avLst/>
+          </a:prstGeom>
+          <a:noFill/>
+        </p:spPr>
+        <p:txBody>
+          <a:bodyPr wrap="square">
+            <a:spAutoFit/>
+          </a:bodyPr>
+          <a:lstStyle/>
+          <a:p>
+            <a:pPr algn="ctr"/>
+            <a:r>
+              <a:rPr sz="1100">
                 <a:solidFill>
                   <a:srgbClr val="3D424E"/>
                 </a:solidFill>
               </a:rPr>
-              <a:t>protege o grupo sub-representado; evita ganhos concentrados apenas na média agregada.</a:t>
-            </a:r>
-          </a:p>
-          <a:p>
-            <a:pPr>
-              <a:spcAft>
-                <a:spcPts val="1000"/>
-              </a:spcAft>
-            </a:pPr>
-            <a:r>
-              <a:rPr sz="1800" b="1">
-                <a:solidFill>
-                  <a:srgbClr val="1F2A4E"/>
-                </a:solidFill>
-              </a:rPr>
-              <a:t>Equal Opportunity — Hardt et al. (2016, NeurIPS):  </a:t>
-            </a:r>
-            <a:r>
-              <a:rPr sz="1800">
-                <a:solidFill>
-                  <a:srgbClr val="3D424E"/>
-                </a:solidFill>
-              </a:rPr>
-              <a:t>requer igualdade de taxa de verdadeiro positivo (TPR) condicionada ao rótulo verdadeiro.</a:t>
-            </a:r>
-          </a:p>
-          <a:p>
-            <a:pPr>
-              <a:spcAft>
-                <a:spcPts val="1000"/>
-              </a:spcAft>
-            </a:pPr>
-            <a:r>
-              <a:rPr sz="1800" b="1">
-                <a:solidFill>
-                  <a:srgbClr val="1F2A4E"/>
-                </a:solidFill>
-              </a:rPr>
-              <a:t>Equalized Odds — Hardt et al. (2016):  </a:t>
-            </a:r>
-            <a:r>
-              <a:rPr sz="1800">
-                <a:solidFill>
-                  <a:srgbClr val="3D424E"/>
-                </a:solidFill>
-              </a:rPr>
-              <a:t>requisito estrito: igualdade simultânea de TPR e FPR entre grupos.</a:t>
-            </a:r>
-          </a:p>
-          <a:p>
-            <a:pPr>
-              <a:spcAft>
-                <a:spcPts val="1000"/>
-              </a:spcAft>
-            </a:pPr>
-            <a:r>
-              <a:rPr sz="1800" b="1">
-                <a:solidFill>
-                  <a:srgbClr val="1F2A4E"/>
-                </a:solidFill>
-              </a:rPr>
-              <a:t>Visualização Pareto:  </a:t>
-            </a:r>
-            <a:r>
-              <a:rPr sz="1800">
-                <a:solidFill>
-                  <a:srgbClr val="3D424E"/>
-                </a:solidFill>
-              </a:rPr>
-              <a:t>identificação da fronteira Pareto no trade-off acurácia agregada × disparidade demográfica.</a:t>
-            </a:r>
-          </a:p>
-        </p:txBody>
-      </p:sp>
-      <p:sp>
-        <p:nvSpPr>
-          <p:cNvPr id="5" name="TextBox 4"/>
+              <a:t>Latinx</a:t>
+            </a:r>
+          </a:p>
+        </p:txBody>
+      </p:sp>
+      <p:sp>
+        <p:nvSpPr>
+          <p:cNvPr id="29" name="Rounded Rectangle 28"/>
+          <p:cNvSpPr/>
+          <p:nvPr/>
+        </p:nvSpPr>
+        <p:spPr>
+          <a:xfrm>
+            <a:off x="457200" y="6080760"/>
+            <a:ext cx="11274552" cy="685800"/>
+          </a:xfrm>
+          <a:prstGeom prst="roundRect">
+            <a:avLst/>
+          </a:prstGeom>
+          <a:solidFill>
+            <a:srgbClr val="1F2A4E"/>
+          </a:solidFill>
+          <a:ln>
+            <a:noFill/>
+          </a:ln>
+        </p:spPr>
+        <p:style>
+          <a:lnRef idx="1">
+            <a:schemeClr val="accent1"/>
+          </a:lnRef>
+          <a:fillRef idx="3">
+            <a:schemeClr val="accent1"/>
+          </a:fillRef>
+          <a:effectRef idx="2">
+            <a:schemeClr val="accent1"/>
+          </a:effectRef>
+          <a:fontRef idx="minor">
+            <a:schemeClr val="lt1"/>
+          </a:fontRef>
+        </p:style>
+        <p:txBody>
+          <a:bodyPr rtlCol="0" anchor="ctr" lIns="228600" rIns="228600" tIns="54864"/>
+          <a:lstStyle/>
+          <a:p>
+            <a:pPr algn="ctr"/>
+            <a:r>
+              <a:rPr sz="1300" b="1">
+                <a:solidFill>
+                  <a:srgbClr val="FFFFFF"/>
+                </a:solidFill>
+              </a:rPr>
+              <a:t>Por que três métricas e não uma?</a:t>
+            </a:r>
+          </a:p>
+          <a:p>
+            <a:pPr algn="ctr"/>
+            <a:r>
+              <a:rPr sz="1100">
+                <a:solidFill>
+                  <a:srgbClr val="B4C4E8"/>
+                </a:solidFill>
+              </a:rPr>
+              <a:t>Teorema da Impossibilidade (Kleinberg, Mullainathan &amp; Raghavan 2017, ITCS): nenhuma métrica única de equidade satisfaz simultaneamente calibração, equal FPR e equal FNR — reportar as três é a forma honesta de comunicar trade-offs.</a:t>
+            </a:r>
+          </a:p>
+        </p:txBody>
+      </p:sp>
+      <p:sp>
+        <p:nvSpPr>
+          <p:cNvPr id="30" name="TextBox 29"/>
           <p:cNvSpPr txBox="1"/>
           <p:nvPr/>
         </p:nvSpPr>
@@ -10252,7 +12059,7 @@
       </p:sp>
       <p:sp>
         <p:nvSpPr>
-          <p:cNvPr id="6" name="TextBox 5"/>
+          <p:cNvPr id="31" name="TextBox 30"/>
           <p:cNvSpPr txBox="1"/>
           <p:nvPr/>
         </p:nvSpPr>

--- a/docs/ativo/material_qualificacao_2026-10-05.pptx
+++ b/docs/ativo/material_qualificacao_2026-10-05.pptx
@@ -11027,7 +11027,7 @@
               </a:defRPr>
             </a:pPr>
             <a:r>
-              <a:t>Todas públicas, padrão da literatura — reportar as três simultaneamente como exigência metodológica.</a:t>
+              <a:t>Padrão da literatura — valores reportados: SOTA FaceScanPaliGemma (AlDahoul et al., 2024) sobre FairFace 7-class in-domain.</a:t>
             </a:r>
           </a:p>
         </p:txBody>
@@ -11167,7 +11167,7 @@
               </a:rPr>
               <a:t>Média harmônica de precision/recall por
 classe, depois média simples entre as
-7 raças.</a:t>
+7 raças do FairFace.</a:t>
             </a:r>
           </a:p>
         </p:txBody>
@@ -11337,7 +11337,7 @@
                   <a:srgbClr val="3D424E"/>
                 </a:solidFill>
               </a:rPr>
-              <a:t>FaceScanPaliGemma</a:t>
+              <a:t>FaceScanPaliGemma  ·  baseline ResNet-34 = 72 %</a:t>
             </a:r>
           </a:p>
         </p:txBody>
@@ -11475,8 +11475,9 @@
                   <a:srgbClr val="3D424E"/>
                 </a:solidFill>
               </a:rPr>
-              <a:t>Razão entre o F1 da pior raça e o F1
-da melhor. Mede o gap entre subgrupos.</a:t>
+              <a:t>Razão F1_min / F1_max entre raças.
+Mede o gap entre o pior e o melhor
+subgrupo (0 = total disparidade, 1 = paridade).</a:t>
             </a:r>
           </a:p>
         </p:txBody>
@@ -11578,7 +11579,7 @@
                   <a:srgbClr val="707682"/>
                 </a:solidFill>
               </a:rPr>
-              <a:t>Estado atual</a:t>
+              <a:t>SOTA atual</a:t>
             </a:r>
           </a:p>
         </p:txBody>
@@ -11646,7 +11647,7 @@
                   <a:srgbClr val="3D424E"/>
                 </a:solidFill>
               </a:rPr>
-              <a:t>60 % Latinx ÷ 90 % Black</a:t>
+              <a:t>F1 Latinx 60 %  ÷  F1 Black 90 %</a:t>
             </a:r>
           </a:p>
         </p:txBody>
@@ -11785,7 +11786,8 @@
                 </a:solidFill>
               </a:rPr>
               <a:t>F1 da raça em que o modelo erra mais.
-Garante que ninguém fique para trás.</a:t>
+Garante que ninguém fique para trás,
+mesmo quando a média agregada é alta.</a:t>
             </a:r>
           </a:p>
         </p:txBody>
@@ -11887,7 +11889,7 @@
                   <a:srgbClr val="707682"/>
                 </a:solidFill>
               </a:rPr>
-              <a:t>Estado atual</a:t>
+              <a:t>SOTA atual</a:t>
             </a:r>
           </a:p>
         </p:txBody>
@@ -11955,7 +11957,7 @@
                   <a:srgbClr val="3D424E"/>
                 </a:solidFill>
               </a:rPr>
-              <a:t>Latinx</a:t>
+              <a:t>Latinx  ·  FaceScanPaliGemma</a:t>
             </a:r>
           </a:p>
         </p:txBody>

--- a/docs/ativo/material_qualificacao_2026-10-05.pptx
+++ b/docs/ativo/material_qualificacao_2026-10-05.pptx
@@ -9702,7 +9702,7 @@
               </a:defRPr>
             </a:pPr>
             <a:r>
-              <a:t>Protocolo de validação: cenários, rigor e transferência</a:t>
+              <a:t>Protocolo de validação</a:t>
             </a:r>
           </a:p>
         </p:txBody>
@@ -9752,14 +9752,49 @@
       </p:sp>
       <p:sp>
         <p:nvSpPr>
-          <p:cNvPr id="4" name="Rounded Rectangle 3"/>
+          <p:cNvPr id="4" name="TextBox 3"/>
+          <p:cNvSpPr txBox="1"/>
+          <p:nvPr/>
+        </p:nvSpPr>
+        <p:spPr>
+          <a:xfrm>
+            <a:off x="457200" y="1170432"/>
+            <a:ext cx="11247120" cy="320040"/>
+          </a:xfrm>
+          <a:prstGeom prst="rect">
+            <a:avLst/>
+          </a:prstGeom>
+          <a:noFill/>
+        </p:spPr>
+        <p:txBody>
+          <a:bodyPr wrap="none">
+            <a:spAutoFit/>
+          </a:bodyPr>
+          <a:lstStyle/>
+          <a:p>
+            <a:pPr>
+              <a:defRPr sz="1300" i="1">
+                <a:solidFill>
+                  <a:srgbClr val="707682"/>
+                </a:solidFill>
+              </a:defRPr>
+            </a:pPr>
+            <a:r>
+              <a:t>Três perguntas, três respostas pré-registradas — nenhum ajuste pós-resultado.</a:t>
+            </a:r>
+          </a:p>
+        </p:txBody>
+      </p:sp>
+      <p:sp>
+        <p:nvSpPr>
+          <p:cNvPr id="5" name="Rounded Rectangle 4"/>
           <p:cNvSpPr/>
           <p:nvPr/>
         </p:nvSpPr>
         <p:spPr>
           <a:xfrm>
-            <a:off x="333756" y="1325880"/>
-            <a:ext cx="3657600" cy="502920"/>
+            <a:off x="242316" y="1600200"/>
+            <a:ext cx="3749039" cy="594360"/>
           </a:xfrm>
           <a:prstGeom prst="roundRect">
             <a:avLst/>
@@ -9786,42 +9821,40 @@
           </a:fontRef>
         </p:style>
         <p:txBody>
-          <a:bodyPr rtlCol="0" anchor="ctr"/>
+          <a:bodyPr rtlCol="0" anchor="ctr" tIns="73152"/>
           <a:lstStyle/>
           <a:p>
             <a:pPr algn="ctr"/>
             <a:r>
-              <a:rPr sz="1400" b="1">
+              <a:rPr sz="1600" b="1">
                 <a:solidFill>
                   <a:srgbClr val="FFFFFF"/>
                 </a:solidFill>
               </a:rPr>
-              <a:t>O QUE AVALIO</a:t>
-            </a:r>
-          </a:p>
-        </p:txBody>
-      </p:sp>
-      <p:sp>
-        <p:nvSpPr>
-          <p:cNvPr id="5" name="Rounded Rectangle 4"/>
+              <a:t>O QUE AVALIO?</a:t>
+            </a:r>
+          </a:p>
+        </p:txBody>
+      </p:sp>
+      <p:sp>
+        <p:nvSpPr>
+          <p:cNvPr id="6" name="Rounded Rectangle 5"/>
           <p:cNvSpPr/>
           <p:nvPr/>
         </p:nvSpPr>
         <p:spPr>
           <a:xfrm>
-            <a:off x="333756" y="1956816"/>
-            <a:ext cx="3657600" cy="1984248"/>
+            <a:off x="242316" y="2240279"/>
+            <a:ext cx="3749039" cy="3657600"/>
           </a:xfrm>
           <a:prstGeom prst="roundRect">
             <a:avLst/>
           </a:prstGeom>
           <a:solidFill>
-            <a:srgbClr val="FFFFFF"/>
+            <a:srgbClr val="E8EAED"/>
           </a:solidFill>
-          <a:ln w="17780">
-            <a:solidFill>
-              <a:srgbClr val="1F2A4E"/>
-            </a:solidFill>
+          <a:ln>
+            <a:noFill/>
           </a:ln>
         </p:spPr>
         <p:style>
@@ -9839,7 +9872,7 @@
           </a:fontRef>
         </p:style>
         <p:txBody>
-          <a:bodyPr rtlCol="0" anchor="ctr" tIns="0"/>
+          <a:bodyPr rtlCol="0" anchor="ctr"/>
           <a:lstStyle/>
           <a:p>
             <a:pPr algn="ctr"/>
@@ -9848,14 +9881,48 @@
       </p:sp>
       <p:sp>
         <p:nvSpPr>
-          <p:cNvPr id="6" name="TextBox 5"/>
-          <p:cNvSpPr txBox="1"/>
-          <p:nvPr/>
-        </p:nvSpPr>
-        <p:spPr>
-          <a:xfrm>
-            <a:off x="470916" y="2048256"/>
-            <a:ext cx="3383280" cy="320040"/>
+          <p:cNvPr id="7" name="TextBox 6"/>
+          <p:cNvSpPr txBox="1"/>
+          <p:nvPr/>
+        </p:nvSpPr>
+        <p:spPr>
+          <a:xfrm>
+            <a:off x="379476" y="2423160"/>
+            <a:ext cx="3474720" cy="960120"/>
+          </a:xfrm>
+          <a:prstGeom prst="rect">
+            <a:avLst/>
+          </a:prstGeom>
+          <a:noFill/>
+        </p:spPr>
+        <p:txBody>
+          <a:bodyPr wrap="none">
+            <a:spAutoFit/>
+          </a:bodyPr>
+          <a:lstStyle/>
+          <a:p>
+            <a:pPr algn="ctr"/>
+            <a:r>
+              <a:rPr sz="4600" b="1">
+                <a:solidFill>
+                  <a:srgbClr val="1F2A4E"/>
+                </a:solidFill>
+              </a:rPr>
+              <a:t>7 + 8</a:t>
+            </a:r>
+          </a:p>
+        </p:txBody>
+      </p:sp>
+      <p:sp>
+        <p:nvSpPr>
+          <p:cNvPr id="8" name="TextBox 7"/>
+          <p:cNvSpPr txBox="1"/>
+          <p:nvPr/>
+        </p:nvSpPr>
+        <p:spPr>
+          <a:xfrm>
+            <a:off x="379476" y="3383280"/>
+            <a:ext cx="3474720" cy="320040"/>
           </a:xfrm>
           <a:prstGeom prst="rect">
             <a:avLst/>
@@ -9870,26 +9937,95 @@
           <a:p>
             <a:pPr algn="ctr"/>
             <a:r>
-              <a:rPr sz="1100" b="1">
+              <a:rPr sz="1200" i="1">
+                <a:solidFill>
+                  <a:srgbClr val="707682"/>
+                </a:solidFill>
+              </a:rPr>
+              <a:t>classes &amp; subgrupos</a:t>
+            </a:r>
+          </a:p>
+        </p:txBody>
+      </p:sp>
+      <p:cxnSp>
+        <p:nvCxnSpPr>
+          <p:cNvPr id="9" name="Connector 8"/>
+          <p:cNvCxnSpPr/>
+          <p:nvPr/>
+        </p:nvCxnSpPr>
+        <p:spPr>
+          <a:xfrm>
+            <a:off x="516636" y="3840480"/>
+            <a:ext cx="3200400" cy="0"/>
+          </a:xfrm>
+          <a:prstGeom prst="bentConnector3">
+            <a:avLst/>
+          </a:prstGeom>
+          <a:ln w="9525">
+            <a:solidFill>
+              <a:srgbClr val="707682"/>
+            </a:solidFill>
+          </a:ln>
+        </p:spPr>
+        <p:style>
+          <a:lnRef idx="2">
+            <a:schemeClr val="accent1"/>
+          </a:lnRef>
+          <a:fillRef idx="0">
+            <a:schemeClr val="accent1"/>
+          </a:fillRef>
+          <a:effectRef idx="1">
+            <a:schemeClr val="accent1"/>
+          </a:effectRef>
+          <a:fontRef idx="minor">
+            <a:schemeClr val="tx1"/>
+          </a:fontRef>
+        </p:style>
+      </p:cxnSp>
+      <p:sp>
+        <p:nvSpPr>
+          <p:cNvPr id="10" name="TextBox 9"/>
+          <p:cNvSpPr txBox="1"/>
+          <p:nvPr/>
+        </p:nvSpPr>
+        <p:spPr>
+          <a:xfrm>
+            <a:off x="470916" y="3977639"/>
+            <a:ext cx="3291839" cy="640080"/>
+          </a:xfrm>
+          <a:prstGeom prst="rect">
+            <a:avLst/>
+          </a:prstGeom>
+          <a:noFill/>
+        </p:spPr>
+        <p:txBody>
+          <a:bodyPr wrap="square">
+            <a:spAutoFit/>
+          </a:bodyPr>
+          <a:lstStyle/>
+          <a:p>
+            <a:pPr algn="ctr"/>
+            <a:r>
+              <a:rPr sz="1200" b="1">
                 <a:solidFill>
                   <a:srgbClr val="1F2A4E"/>
                 </a:solidFill>
               </a:rPr>
-              <a:t>Cenário A</a:t>
-            </a:r>
-          </a:p>
-        </p:txBody>
-      </p:sp>
-      <p:sp>
-        <p:nvSpPr>
-          <p:cNvPr id="7" name="TextBox 6"/>
-          <p:cNvSpPr txBox="1"/>
-          <p:nvPr/>
-        </p:nvSpPr>
-        <p:spPr>
-          <a:xfrm>
-            <a:off x="470916" y="2414016"/>
-            <a:ext cx="3383280" cy="502920"/>
+              <a:t>•  Cenário A — 7 classes raciais do FairFace</a:t>
+            </a:r>
+          </a:p>
+        </p:txBody>
+      </p:sp>
+      <p:sp>
+        <p:nvSpPr>
+          <p:cNvPr id="11" name="TextBox 10"/>
+          <p:cNvSpPr txBox="1"/>
+          <p:nvPr/>
+        </p:nvSpPr>
+        <p:spPr>
+          <a:xfrm>
+            <a:off x="470916" y="4617720"/>
+            <a:ext cx="3291839" cy="640080"/>
           </a:xfrm>
           <a:prstGeom prst="rect">
             <a:avLst/>
@@ -9904,26 +10040,26 @@
           <a:p>
             <a:pPr algn="ctr"/>
             <a:r>
-              <a:rPr sz="1500" b="1">
+              <a:rPr sz="1200" b="1">
                 <a:solidFill>
                   <a:srgbClr val="1F2A4E"/>
                 </a:solidFill>
               </a:rPr>
-              <a:t>7 classes raciais</a:t>
-            </a:r>
-          </a:p>
-        </p:txBody>
-      </p:sp>
-      <p:sp>
-        <p:nvSpPr>
-          <p:cNvPr id="8" name="TextBox 7"/>
-          <p:cNvSpPr txBox="1"/>
-          <p:nvPr/>
-        </p:nvSpPr>
-        <p:spPr>
-          <a:xfrm>
-            <a:off x="498348" y="2944368"/>
-            <a:ext cx="3328416" cy="932688"/>
+              <a:t>•  Cenário B — 8 subgrupos raça × gênero</a:t>
+            </a:r>
+          </a:p>
+        </p:txBody>
+      </p:sp>
+      <p:sp>
+        <p:nvSpPr>
+          <p:cNvPr id="12" name="TextBox 11"/>
+          <p:cNvSpPr txBox="1"/>
+          <p:nvPr/>
+        </p:nvSpPr>
+        <p:spPr>
+          <a:xfrm>
+            <a:off x="470916" y="5394960"/>
+            <a:ext cx="3291839" cy="411480"/>
           </a:xfrm>
           <a:prstGeom prst="rect">
             <a:avLst/>
@@ -9938,38 +10074,35 @@
           <a:p>
             <a:pPr algn="ctr"/>
             <a:r>
-              <a:rPr sz="1200">
-                <a:solidFill>
-                  <a:srgbClr val="3D424E"/>
-                </a:solidFill>
-              </a:rPr>
-              <a:t>Reporte estratificado por classe
-racial do FairFace.</a:t>
-            </a:r>
-          </a:p>
-        </p:txBody>
-      </p:sp>
-      <p:sp>
-        <p:nvSpPr>
-          <p:cNvPr id="9" name="Rounded Rectangle 8"/>
+              <a:rPr sz="1000" i="1">
+                <a:solidFill>
+                  <a:srgbClr val="707682"/>
+                </a:solidFill>
+              </a:rPr>
+              <a:t>Interseccional segundo Buolamwini &amp; Gebru (2018)</a:t>
+            </a:r>
+          </a:p>
+        </p:txBody>
+      </p:sp>
+      <p:sp>
+        <p:nvSpPr>
+          <p:cNvPr id="13" name="Rounded Rectangle 12"/>
           <p:cNvSpPr/>
           <p:nvPr/>
         </p:nvSpPr>
         <p:spPr>
           <a:xfrm>
-            <a:off x="333756" y="4105656"/>
-            <a:ext cx="3657600" cy="1984248"/>
+            <a:off x="4219956" y="1600200"/>
+            <a:ext cx="3749039" cy="594360"/>
           </a:xfrm>
           <a:prstGeom prst="roundRect">
             <a:avLst/>
           </a:prstGeom>
           <a:solidFill>
-            <a:srgbClr val="FFFFFF"/>
+            <a:srgbClr val="1F2A4E"/>
           </a:solidFill>
-          <a:ln w="17780">
-            <a:solidFill>
-              <a:srgbClr val="1F2A4E"/>
-            </a:solidFill>
+          <a:ln>
+            <a:noFill/>
           </a:ln>
         </p:spPr>
         <p:style>
@@ -9987,133 +10120,37 @@
           </a:fontRef>
         </p:style>
         <p:txBody>
-          <a:bodyPr rtlCol="0" anchor="ctr" tIns="0"/>
+          <a:bodyPr rtlCol="0" anchor="ctr" tIns="73152"/>
           <a:lstStyle/>
           <a:p>
             <a:pPr algn="ctr"/>
-          </a:p>
-        </p:txBody>
-      </p:sp>
-      <p:sp>
-        <p:nvSpPr>
-          <p:cNvPr id="10" name="TextBox 9"/>
-          <p:cNvSpPr txBox="1"/>
-          <p:nvPr/>
-        </p:nvSpPr>
-        <p:spPr>
-          <a:xfrm>
-            <a:off x="470916" y="4197096"/>
-            <a:ext cx="3383280" cy="320040"/>
-          </a:xfrm>
-          <a:prstGeom prst="rect">
-            <a:avLst/>
-          </a:prstGeom>
-          <a:noFill/>
-        </p:spPr>
-        <p:txBody>
-          <a:bodyPr wrap="square">
-            <a:spAutoFit/>
-          </a:bodyPr>
-          <a:lstStyle/>
-          <a:p>
-            <a:pPr algn="ctr"/>
-            <a:r>
-              <a:rPr sz="1100" b="1">
-                <a:solidFill>
-                  <a:srgbClr val="1F2A4E"/>
-                </a:solidFill>
-              </a:rPr>
-              <a:t>Cenário B</a:t>
-            </a:r>
-          </a:p>
-        </p:txBody>
-      </p:sp>
-      <p:sp>
-        <p:nvSpPr>
-          <p:cNvPr id="11" name="TextBox 10"/>
-          <p:cNvSpPr txBox="1"/>
-          <p:nvPr/>
-        </p:nvSpPr>
-        <p:spPr>
-          <a:xfrm>
-            <a:off x="470916" y="4562856"/>
-            <a:ext cx="3383280" cy="502920"/>
-          </a:xfrm>
-          <a:prstGeom prst="rect">
-            <a:avLst/>
-          </a:prstGeom>
-          <a:noFill/>
-        </p:spPr>
-        <p:txBody>
-          <a:bodyPr wrap="square">
-            <a:spAutoFit/>
-          </a:bodyPr>
-          <a:lstStyle/>
-          <a:p>
-            <a:pPr algn="ctr"/>
-            <a:r>
-              <a:rPr sz="1500" b="1">
-                <a:solidFill>
-                  <a:srgbClr val="1F2A4E"/>
-                </a:solidFill>
-              </a:rPr>
-              <a:t>8 subgrupos (raça × gênero)</a:t>
-            </a:r>
-          </a:p>
-        </p:txBody>
-      </p:sp>
-      <p:sp>
-        <p:nvSpPr>
-          <p:cNvPr id="12" name="TextBox 11"/>
-          <p:cNvSpPr txBox="1"/>
-          <p:nvPr/>
-        </p:nvSpPr>
-        <p:spPr>
-          <a:xfrm>
-            <a:off x="498348" y="5093208"/>
-            <a:ext cx="3328416" cy="932688"/>
-          </a:xfrm>
-          <a:prstGeom prst="rect">
-            <a:avLst/>
-          </a:prstGeom>
-          <a:noFill/>
-        </p:spPr>
-        <p:txBody>
-          <a:bodyPr wrap="square">
-            <a:spAutoFit/>
-          </a:bodyPr>
-          <a:lstStyle/>
-          <a:p>
-            <a:pPr algn="ctr"/>
-            <a:r>
-              <a:rPr sz="1200">
-                <a:solidFill>
-                  <a:srgbClr val="3D424E"/>
-                </a:solidFill>
-              </a:rPr>
-              <a:t>Análise interseccional segundo
-Gender Shades (Buolamwini &amp;
-Gebru, 2018).</a:t>
-            </a:r>
-          </a:p>
-        </p:txBody>
-      </p:sp>
-      <p:sp>
-        <p:nvSpPr>
-          <p:cNvPr id="13" name="Rounded Rectangle 12"/>
+            <a:r>
+              <a:rPr sz="1600" b="1">
+                <a:solidFill>
+                  <a:srgbClr val="FFFFFF"/>
+                </a:solidFill>
+              </a:rPr>
+              <a:t>COM QUE RIGOR?</a:t>
+            </a:r>
+          </a:p>
+        </p:txBody>
+      </p:sp>
+      <p:sp>
+        <p:nvSpPr>
+          <p:cNvPr id="14" name="Rounded Rectangle 13"/>
           <p:cNvSpPr/>
           <p:nvPr/>
         </p:nvSpPr>
         <p:spPr>
           <a:xfrm>
-            <a:off x="4265676" y="1325880"/>
-            <a:ext cx="3657600" cy="502920"/>
+            <a:off x="4219956" y="2240279"/>
+            <a:ext cx="3749039" cy="3657600"/>
           </a:xfrm>
           <a:prstGeom prst="roundRect">
             <a:avLst/>
           </a:prstGeom>
           <a:solidFill>
-            <a:srgbClr val="3D68BB"/>
+            <a:srgbClr val="E8EAED"/>
           </a:solidFill>
           <a:ln>
             <a:noFill/>
@@ -10138,38 +10175,233 @@
           <a:lstStyle/>
           <a:p>
             <a:pPr algn="ctr"/>
-            <a:r>
-              <a:rPr sz="1400" b="1">
-                <a:solidFill>
-                  <a:srgbClr val="FFFFFF"/>
-                </a:solidFill>
-              </a:rPr>
-              <a:t>COM QUE RIGOR</a:t>
-            </a:r>
-          </a:p>
-        </p:txBody>
-      </p:sp>
-      <p:sp>
-        <p:nvSpPr>
-          <p:cNvPr id="14" name="Rounded Rectangle 13"/>
+          </a:p>
+        </p:txBody>
+      </p:sp>
+      <p:sp>
+        <p:nvSpPr>
+          <p:cNvPr id="15" name="TextBox 14"/>
+          <p:cNvSpPr txBox="1"/>
+          <p:nvPr/>
+        </p:nvSpPr>
+        <p:spPr>
+          <a:xfrm>
+            <a:off x="4357116" y="2423160"/>
+            <a:ext cx="3474720" cy="960120"/>
+          </a:xfrm>
+          <a:prstGeom prst="rect">
+            <a:avLst/>
+          </a:prstGeom>
+          <a:noFill/>
+        </p:spPr>
+        <p:txBody>
+          <a:bodyPr wrap="none">
+            <a:spAutoFit/>
+          </a:bodyPr>
+          <a:lstStyle/>
+          <a:p>
+            <a:pPr algn="ctr"/>
+            <a:r>
+              <a:rPr sz="4600" b="1">
+                <a:solidFill>
+                  <a:srgbClr val="1F2A4E"/>
+                </a:solidFill>
+              </a:rPr>
+              <a:t>3</a:t>
+            </a:r>
+          </a:p>
+        </p:txBody>
+      </p:sp>
+      <p:sp>
+        <p:nvSpPr>
+          <p:cNvPr id="16" name="TextBox 15"/>
+          <p:cNvSpPr txBox="1"/>
+          <p:nvPr/>
+        </p:nvSpPr>
+        <p:spPr>
+          <a:xfrm>
+            <a:off x="4357116" y="3383280"/>
+            <a:ext cx="3474720" cy="320040"/>
+          </a:xfrm>
+          <a:prstGeom prst="rect">
+            <a:avLst/>
+          </a:prstGeom>
+          <a:noFill/>
+        </p:spPr>
+        <p:txBody>
+          <a:bodyPr wrap="square">
+            <a:spAutoFit/>
+          </a:bodyPr>
+          <a:lstStyle/>
+          <a:p>
+            <a:pPr algn="ctr"/>
+            <a:r>
+              <a:rPr sz="1200" i="1">
+                <a:solidFill>
+                  <a:srgbClr val="707682"/>
+                </a:solidFill>
+              </a:rPr>
+              <a:t>sementes · bootstrap IC 95 %</a:t>
+            </a:r>
+          </a:p>
+        </p:txBody>
+      </p:sp>
+      <p:cxnSp>
+        <p:nvCxnSpPr>
+          <p:cNvPr id="17" name="Connector 16"/>
+          <p:cNvCxnSpPr/>
+          <p:nvPr/>
+        </p:nvCxnSpPr>
+        <p:spPr>
+          <a:xfrm>
+            <a:off x="4494276" y="3840480"/>
+            <a:ext cx="3200399" cy="0"/>
+          </a:xfrm>
+          <a:prstGeom prst="bentConnector3">
+            <a:avLst/>
+          </a:prstGeom>
+          <a:ln w="9525">
+            <a:solidFill>
+              <a:srgbClr val="707682"/>
+            </a:solidFill>
+          </a:ln>
+        </p:spPr>
+        <p:style>
+          <a:lnRef idx="2">
+            <a:schemeClr val="accent1"/>
+          </a:lnRef>
+          <a:fillRef idx="0">
+            <a:schemeClr val="accent1"/>
+          </a:fillRef>
+          <a:effectRef idx="1">
+            <a:schemeClr val="accent1"/>
+          </a:effectRef>
+          <a:fontRef idx="minor">
+            <a:schemeClr val="tx1"/>
+          </a:fontRef>
+        </p:style>
+      </p:cxnSp>
+      <p:sp>
+        <p:nvSpPr>
+          <p:cNvPr id="18" name="TextBox 17"/>
+          <p:cNvSpPr txBox="1"/>
+          <p:nvPr/>
+        </p:nvSpPr>
+        <p:spPr>
+          <a:xfrm>
+            <a:off x="4448556" y="3977639"/>
+            <a:ext cx="3291839" cy="640080"/>
+          </a:xfrm>
+          <a:prstGeom prst="rect">
+            <a:avLst/>
+          </a:prstGeom>
+          <a:noFill/>
+        </p:spPr>
+        <p:txBody>
+          <a:bodyPr wrap="square">
+            <a:spAutoFit/>
+          </a:bodyPr>
+          <a:lstStyle/>
+          <a:p>
+            <a:pPr algn="ctr"/>
+            <a:r>
+              <a:rPr sz="1200" b="1">
+                <a:solidFill>
+                  <a:srgbClr val="1F2A4E"/>
+                </a:solidFill>
+              </a:rPr>
+              <a:t>•  Sementes 42, 1, 2 · comparação pareada</a:t>
+            </a:r>
+          </a:p>
+        </p:txBody>
+      </p:sp>
+      <p:sp>
+        <p:nvSpPr>
+          <p:cNvPr id="19" name="TextBox 18"/>
+          <p:cNvSpPr txBox="1"/>
+          <p:nvPr/>
+        </p:nvSpPr>
+        <p:spPr>
+          <a:xfrm>
+            <a:off x="4448556" y="4617720"/>
+            <a:ext cx="3291839" cy="640080"/>
+          </a:xfrm>
+          <a:prstGeom prst="rect">
+            <a:avLst/>
+          </a:prstGeom>
+          <a:noFill/>
+        </p:spPr>
+        <p:txBody>
+          <a:bodyPr wrap="square">
+            <a:spAutoFit/>
+          </a:bodyPr>
+          <a:lstStyle/>
+          <a:p>
+            <a:pPr algn="ctr"/>
+            <a:r>
+              <a:rPr sz="1200" b="1">
+                <a:solidFill>
+                  <a:srgbClr val="1F2A4E"/>
+                </a:solidFill>
+              </a:rPr>
+              <a:t>•  Norma ISO/IEC 19795-10:2024</a:t>
+            </a:r>
+          </a:p>
+        </p:txBody>
+      </p:sp>
+      <p:sp>
+        <p:nvSpPr>
+          <p:cNvPr id="20" name="TextBox 19"/>
+          <p:cNvSpPr txBox="1"/>
+          <p:nvPr/>
+        </p:nvSpPr>
+        <p:spPr>
+          <a:xfrm>
+            <a:off x="4448556" y="5394960"/>
+            <a:ext cx="3291839" cy="411480"/>
+          </a:xfrm>
+          <a:prstGeom prst="rect">
+            <a:avLst/>
+          </a:prstGeom>
+          <a:noFill/>
+        </p:spPr>
+        <p:txBody>
+          <a:bodyPr wrap="square">
+            <a:spAutoFit/>
+          </a:bodyPr>
+          <a:lstStyle/>
+          <a:p>
+            <a:pPr algn="ctr"/>
+            <a:r>
+              <a:rPr sz="1000" i="1">
+                <a:solidFill>
+                  <a:srgbClr val="707682"/>
+                </a:solidFill>
+              </a:rPr>
+              <a:t>Padrão biométrico internacional estratificado</a:t>
+            </a:r>
+          </a:p>
+        </p:txBody>
+      </p:sp>
+      <p:sp>
+        <p:nvSpPr>
+          <p:cNvPr id="21" name="Rounded Rectangle 20"/>
           <p:cNvSpPr/>
           <p:nvPr/>
         </p:nvSpPr>
         <p:spPr>
           <a:xfrm>
-            <a:off x="4265676" y="1956816"/>
-            <a:ext cx="3657600" cy="1984248"/>
+            <a:off x="8197596" y="1600200"/>
+            <a:ext cx="3749039" cy="594360"/>
           </a:xfrm>
           <a:prstGeom prst="roundRect">
             <a:avLst/>
           </a:prstGeom>
           <a:solidFill>
-            <a:srgbClr val="FFFFFF"/>
+            <a:srgbClr val="1F2A4E"/>
           </a:solidFill>
-          <a:ln w="17780">
-            <a:solidFill>
-              <a:srgbClr val="3D68BB"/>
-            </a:solidFill>
+          <a:ln>
+            <a:noFill/>
           </a:ln>
         </p:spPr>
         <p:style>
@@ -10187,138 +10419,40 @@
           </a:fontRef>
         </p:style>
         <p:txBody>
-          <a:bodyPr rtlCol="0" anchor="ctr" tIns="0"/>
+          <a:bodyPr rtlCol="0" anchor="ctr" tIns="73152"/>
           <a:lstStyle/>
           <a:p>
             <a:pPr algn="ctr"/>
-          </a:p>
-        </p:txBody>
-      </p:sp>
-      <p:sp>
-        <p:nvSpPr>
-          <p:cNvPr id="15" name="TextBox 14"/>
-          <p:cNvSpPr txBox="1"/>
-          <p:nvPr/>
-        </p:nvSpPr>
-        <p:spPr>
-          <a:xfrm>
-            <a:off x="4402836" y="2048256"/>
-            <a:ext cx="3383280" cy="320040"/>
-          </a:xfrm>
-          <a:prstGeom prst="rect">
-            <a:avLst/>
-          </a:prstGeom>
-          <a:noFill/>
-        </p:spPr>
-        <p:txBody>
-          <a:bodyPr wrap="square">
-            <a:spAutoFit/>
-          </a:bodyPr>
-          <a:lstStyle/>
-          <a:p>
-            <a:pPr algn="ctr"/>
-            <a:r>
-              <a:rPr sz="1100" b="1">
-                <a:solidFill>
-                  <a:srgbClr val="3D68BB"/>
-                </a:solidFill>
-              </a:rPr>
-              <a:t>Norma</a:t>
-            </a:r>
-          </a:p>
-        </p:txBody>
-      </p:sp>
-      <p:sp>
-        <p:nvSpPr>
-          <p:cNvPr id="16" name="TextBox 15"/>
-          <p:cNvSpPr txBox="1"/>
-          <p:nvPr/>
-        </p:nvSpPr>
-        <p:spPr>
-          <a:xfrm>
-            <a:off x="4402836" y="2414016"/>
-            <a:ext cx="3383280" cy="502920"/>
-          </a:xfrm>
-          <a:prstGeom prst="rect">
-            <a:avLst/>
-          </a:prstGeom>
-          <a:noFill/>
-        </p:spPr>
-        <p:txBody>
-          <a:bodyPr wrap="square">
-            <a:spAutoFit/>
-          </a:bodyPr>
-          <a:lstStyle/>
-          <a:p>
-            <a:pPr algn="ctr"/>
-            <a:r>
-              <a:rPr sz="1500" b="1">
-                <a:solidFill>
-                  <a:srgbClr val="1F2A4E"/>
-                </a:solidFill>
-              </a:rPr>
-              <a:t>ISO/IEC 19795-10:2024</a:t>
-            </a:r>
-          </a:p>
-        </p:txBody>
-      </p:sp>
-      <p:sp>
-        <p:nvSpPr>
-          <p:cNvPr id="17" name="TextBox 16"/>
-          <p:cNvSpPr txBox="1"/>
-          <p:nvPr/>
-        </p:nvSpPr>
-        <p:spPr>
-          <a:xfrm>
-            <a:off x="4430268" y="2944368"/>
-            <a:ext cx="3328416" cy="932688"/>
-          </a:xfrm>
-          <a:prstGeom prst="rect">
-            <a:avLst/>
-          </a:prstGeom>
-          <a:noFill/>
-        </p:spPr>
-        <p:txBody>
-          <a:bodyPr wrap="square">
-            <a:spAutoFit/>
-          </a:bodyPr>
-          <a:lstStyle/>
-          <a:p>
-            <a:pPr algn="ctr"/>
-            <a:r>
-              <a:rPr sz="1200">
-                <a:solidFill>
-                  <a:srgbClr val="3D424E"/>
-                </a:solidFill>
-              </a:rPr>
-              <a:t>Padrão internacional para
-reporte de desempenho biométrico
-estratificado entre grupos.</a:t>
-            </a:r>
-          </a:p>
-        </p:txBody>
-      </p:sp>
-      <p:sp>
-        <p:nvSpPr>
-          <p:cNvPr id="18" name="Rounded Rectangle 17"/>
+            <a:r>
+              <a:rPr sz="1600" b="1">
+                <a:solidFill>
+                  <a:srgbClr val="FFFFFF"/>
+                </a:solidFill>
+              </a:rPr>
+              <a:t>ONDE GENERALIZA?</a:t>
+            </a:r>
+          </a:p>
+        </p:txBody>
+      </p:sp>
+      <p:sp>
+        <p:nvSpPr>
+          <p:cNvPr id="22" name="Rounded Rectangle 21"/>
           <p:cNvSpPr/>
           <p:nvPr/>
         </p:nvSpPr>
         <p:spPr>
           <a:xfrm>
-            <a:off x="4265676" y="4105656"/>
-            <a:ext cx="3657600" cy="1984248"/>
+            <a:off x="8197596" y="2240279"/>
+            <a:ext cx="3749039" cy="3657600"/>
           </a:xfrm>
           <a:prstGeom prst="roundRect">
             <a:avLst/>
           </a:prstGeom>
           <a:solidFill>
-            <a:srgbClr val="FFFFFF"/>
+            <a:srgbClr val="E8EAED"/>
           </a:solidFill>
-          <a:ln w="17780">
-            <a:solidFill>
-              <a:srgbClr val="3D68BB"/>
-            </a:solidFill>
+          <a:ln>
+            <a:noFill/>
           </a:ln>
         </p:spPr>
         <p:style>
@@ -10336,7 +10470,7 @@
           </a:fontRef>
         </p:style>
         <p:txBody>
-          <a:bodyPr rtlCol="0" anchor="ctr" tIns="0"/>
+          <a:bodyPr rtlCol="0" anchor="ctr"/>
           <a:lstStyle/>
           <a:p>
             <a:pPr algn="ctr"/>
@@ -10345,14 +10479,48 @@
       </p:sp>
       <p:sp>
         <p:nvSpPr>
-          <p:cNvPr id="19" name="TextBox 18"/>
-          <p:cNvSpPr txBox="1"/>
-          <p:nvPr/>
-        </p:nvSpPr>
-        <p:spPr>
-          <a:xfrm>
-            <a:off x="4402836" y="4197096"/>
-            <a:ext cx="3383280" cy="320040"/>
+          <p:cNvPr id="23" name="TextBox 22"/>
+          <p:cNvSpPr txBox="1"/>
+          <p:nvPr/>
+        </p:nvSpPr>
+        <p:spPr>
+          <a:xfrm>
+            <a:off x="8334756" y="2423160"/>
+            <a:ext cx="3474720" cy="960120"/>
+          </a:xfrm>
+          <a:prstGeom prst="rect">
+            <a:avLst/>
+          </a:prstGeom>
+          <a:noFill/>
+        </p:spPr>
+        <p:txBody>
+          <a:bodyPr wrap="none">
+            <a:spAutoFit/>
+          </a:bodyPr>
+          <a:lstStyle/>
+          <a:p>
+            <a:pPr algn="ctr"/>
+            <a:r>
+              <a:rPr sz="4600" b="1">
+                <a:solidFill>
+                  <a:srgbClr val="1F2A4E"/>
+                </a:solidFill>
+              </a:rPr>
+              <a:t>~20 K</a:t>
+            </a:r>
+          </a:p>
+        </p:txBody>
+      </p:sp>
+      <p:sp>
+        <p:nvSpPr>
+          <p:cNvPr id="24" name="TextBox 23"/>
+          <p:cNvSpPr txBox="1"/>
+          <p:nvPr/>
+        </p:nvSpPr>
+        <p:spPr>
+          <a:xfrm>
+            <a:off x="8334756" y="3383280"/>
+            <a:ext cx="3474720" cy="320040"/>
           </a:xfrm>
           <a:prstGeom prst="rect">
             <a:avLst/>
@@ -10367,26 +10535,61 @@
           <a:p>
             <a:pPr algn="ctr"/>
             <a:r>
-              <a:rPr sz="1100" b="1">
-                <a:solidFill>
-                  <a:srgbClr val="3D68BB"/>
-                </a:solidFill>
-              </a:rPr>
-              <a:t>Estatística</a:t>
-            </a:r>
-          </a:p>
-        </p:txBody>
-      </p:sp>
-      <p:sp>
-        <p:nvSpPr>
-          <p:cNvPr id="20" name="TextBox 19"/>
-          <p:cNvSpPr txBox="1"/>
-          <p:nvPr/>
-        </p:nvSpPr>
-        <p:spPr>
-          <a:xfrm>
-            <a:off x="4402836" y="4562856"/>
-            <a:ext cx="3383280" cy="502920"/>
+              <a:rPr sz="1200" i="1">
+                <a:solidFill>
+                  <a:srgbClr val="707682"/>
+                </a:solidFill>
+              </a:rPr>
+              <a:t>pares de verificação externos</a:t>
+            </a:r>
+          </a:p>
+        </p:txBody>
+      </p:sp>
+      <p:cxnSp>
+        <p:nvCxnSpPr>
+          <p:cNvPr id="25" name="Connector 24"/>
+          <p:cNvCxnSpPr/>
+          <p:nvPr/>
+        </p:nvCxnSpPr>
+        <p:spPr>
+          <a:xfrm>
+            <a:off x="8471916" y="3840480"/>
+            <a:ext cx="3200399" cy="0"/>
+          </a:xfrm>
+          <a:prstGeom prst="bentConnector3">
+            <a:avLst/>
+          </a:prstGeom>
+          <a:ln w="9525">
+            <a:solidFill>
+              <a:srgbClr val="707682"/>
+            </a:solidFill>
+          </a:ln>
+        </p:spPr>
+        <p:style>
+          <a:lnRef idx="2">
+            <a:schemeClr val="accent1"/>
+          </a:lnRef>
+          <a:fillRef idx="0">
+            <a:schemeClr val="accent1"/>
+          </a:fillRef>
+          <a:effectRef idx="1">
+            <a:schemeClr val="accent1"/>
+          </a:effectRef>
+          <a:fontRef idx="minor">
+            <a:schemeClr val="tx1"/>
+          </a:fontRef>
+        </p:style>
+      </p:cxnSp>
+      <p:sp>
+        <p:nvSpPr>
+          <p:cNvPr id="26" name="TextBox 25"/>
+          <p:cNvSpPr txBox="1"/>
+          <p:nvPr/>
+        </p:nvSpPr>
+        <p:spPr>
+          <a:xfrm>
+            <a:off x="8426196" y="3977639"/>
+            <a:ext cx="3291839" cy="640080"/>
           </a:xfrm>
           <a:prstGeom prst="rect">
             <a:avLst/>
@@ -10401,26 +10604,26 @@
           <a:p>
             <a:pPr algn="ctr"/>
             <a:r>
-              <a:rPr sz="1500" b="1">
+              <a:rPr sz="1200" b="1">
                 <a:solidFill>
                   <a:srgbClr val="1F2A4E"/>
                 </a:solidFill>
               </a:rPr>
-              <a:t>3 sementes · IC 95 % · pareado</a:t>
-            </a:r>
-          </a:p>
-        </p:txBody>
-      </p:sp>
-      <p:sp>
-        <p:nvSpPr>
-          <p:cNvPr id="21" name="TextBox 20"/>
-          <p:cNvSpPr txBox="1"/>
-          <p:nvPr/>
-        </p:nvSpPr>
-        <p:spPr>
-          <a:xfrm>
-            <a:off x="4430268" y="5093208"/>
-            <a:ext cx="3328416" cy="932688"/>
+              <a:t>•  RFW — Racial Faces in-the-Wild (Wang 2019)</a:t>
+            </a:r>
+          </a:p>
+        </p:txBody>
+      </p:sp>
+      <p:sp>
+        <p:nvSpPr>
+          <p:cNvPr id="27" name="TextBox 26"/>
+          <p:cNvSpPr txBox="1"/>
+          <p:nvPr/>
+        </p:nvSpPr>
+        <p:spPr>
+          <a:xfrm>
+            <a:off x="8426196" y="4617720"/>
+            <a:ext cx="3291839" cy="640080"/>
           </a:xfrm>
           <a:prstGeom prst="rect">
             <a:avLst/>
@@ -10435,34 +10638,66 @@
           <a:p>
             <a:pPr algn="ctr"/>
             <a:r>
-              <a:rPr sz="1200">
-                <a:solidFill>
-                  <a:srgbClr val="3D424E"/>
-                </a:solidFill>
-              </a:rPr>
-              <a:t>Sementes (42, 1, 2); bootstrap
-não-paramétrico; comparação
-pareada entre configs.</a:t>
-            </a:r>
-          </a:p>
-        </p:txBody>
-      </p:sp>
-      <p:sp>
-        <p:nvSpPr>
-          <p:cNvPr id="22" name="Rounded Rectangle 21"/>
+              <a:rPr sz="1200" b="1">
+                <a:solidFill>
+                  <a:srgbClr val="1F2A4E"/>
+                </a:solidFill>
+              </a:rPr>
+              <a:t>•  BFW — Balanced Faces in-the-Wild (Robinson 2020)</a:t>
+            </a:r>
+          </a:p>
+        </p:txBody>
+      </p:sp>
+      <p:sp>
+        <p:nvSpPr>
+          <p:cNvPr id="28" name="TextBox 27"/>
+          <p:cNvSpPr txBox="1"/>
+          <p:nvPr/>
+        </p:nvSpPr>
+        <p:spPr>
+          <a:xfrm>
+            <a:off x="8426196" y="5394960"/>
+            <a:ext cx="3291839" cy="411480"/>
+          </a:xfrm>
+          <a:prstGeom prst="rect">
+            <a:avLst/>
+          </a:prstGeom>
+          <a:noFill/>
+        </p:spPr>
+        <p:txBody>
+          <a:bodyPr wrap="square">
+            <a:spAutoFit/>
+          </a:bodyPr>
+          <a:lstStyle/>
+          <a:p>
+            <a:pPr algn="ctr"/>
+            <a:r>
+              <a:rPr sz="1000" i="1">
+                <a:solidFill>
+                  <a:srgbClr val="707682"/>
+                </a:solidFill>
+              </a:rPr>
+              <a:t>Foco em African; transferência via feature-freeze</a:t>
+            </a:r>
+          </a:p>
+        </p:txBody>
+      </p:sp>
+      <p:sp>
+        <p:nvSpPr>
+          <p:cNvPr id="29" name="Rounded Rectangle 28"/>
           <p:cNvSpPr/>
           <p:nvPr/>
         </p:nvSpPr>
         <p:spPr>
           <a:xfrm>
-            <a:off x="8197596" y="1325880"/>
-            <a:ext cx="3657600" cy="502920"/>
+            <a:off x="457200" y="6080760"/>
+            <a:ext cx="11274552" cy="685800"/>
           </a:xfrm>
           <a:prstGeom prst="roundRect">
             <a:avLst/>
           </a:prstGeom>
           <a:solidFill>
-            <a:srgbClr val="707682"/>
+            <a:srgbClr val="1F2A4E"/>
           </a:solidFill>
           <a:ln>
             <a:noFill/>
@@ -10483,279 +10718,28 @@
           </a:fontRef>
         </p:style>
         <p:txBody>
-          <a:bodyPr rtlCol="0" anchor="ctr"/>
+          <a:bodyPr rtlCol="0" anchor="ctr" lIns="228600" rIns="228600" tIns="54864"/>
           <a:lstStyle/>
           <a:p>
             <a:pPr algn="ctr"/>
             <a:r>
-              <a:rPr sz="1400" b="1">
+              <a:rPr sz="1300" b="1">
                 <a:solidFill>
                   <a:srgbClr val="FFFFFF"/>
                 </a:solidFill>
               </a:rPr>
-              <a:t>ONDE GENERALIZA</a:t>
-            </a:r>
-          </a:p>
-        </p:txBody>
-      </p:sp>
-      <p:sp>
-        <p:nvSpPr>
-          <p:cNvPr id="23" name="Rounded Rectangle 22"/>
-          <p:cNvSpPr/>
-          <p:nvPr/>
-        </p:nvSpPr>
-        <p:spPr>
-          <a:xfrm>
-            <a:off x="8197596" y="1956816"/>
-            <a:ext cx="3657600" cy="1984248"/>
-          </a:xfrm>
-          <a:prstGeom prst="roundRect">
-            <a:avLst/>
-          </a:prstGeom>
-          <a:solidFill>
-            <a:srgbClr val="FFFFFF"/>
-          </a:solidFill>
-          <a:ln w="17780">
-            <a:solidFill>
-              <a:srgbClr val="707682"/>
-            </a:solidFill>
-          </a:ln>
-        </p:spPr>
-        <p:style>
-          <a:lnRef idx="1">
-            <a:schemeClr val="accent1"/>
-          </a:lnRef>
-          <a:fillRef idx="3">
-            <a:schemeClr val="accent1"/>
-          </a:fillRef>
-          <a:effectRef idx="2">
-            <a:schemeClr val="accent1"/>
-          </a:effectRef>
-          <a:fontRef idx="minor">
-            <a:schemeClr val="lt1"/>
-          </a:fontRef>
-        </p:style>
-        <p:txBody>
-          <a:bodyPr rtlCol="0" anchor="ctr" tIns="0"/>
-          <a:lstStyle/>
+              <a:t>Protocolo falsificável</a:t>
+            </a:r>
+          </a:p>
           <a:p>
             <a:pPr algn="ctr"/>
-          </a:p>
-        </p:txBody>
-      </p:sp>
-      <p:sp>
-        <p:nvSpPr>
-          <p:cNvPr id="24" name="TextBox 23"/>
-          <p:cNvSpPr txBox="1"/>
-          <p:nvPr/>
-        </p:nvSpPr>
-        <p:spPr>
-          <a:xfrm>
-            <a:off x="8334756" y="2048256"/>
-            <a:ext cx="3383280" cy="320040"/>
-          </a:xfrm>
-          <a:prstGeom prst="rect">
-            <a:avLst/>
-          </a:prstGeom>
-          <a:noFill/>
-        </p:spPr>
-        <p:txBody>
-          <a:bodyPr wrap="square">
-            <a:spAutoFit/>
-          </a:bodyPr>
-          <a:lstStyle/>
-          <a:p>
-            <a:pPr algn="ctr"/>
-            <a:r>
-              <a:rPr sz="1100" b="1">
-                <a:solidFill>
-                  <a:srgbClr val="707682"/>
-                </a:solidFill>
-              </a:rPr>
-              <a:t>RFW</a:t>
-            </a:r>
-          </a:p>
-        </p:txBody>
-      </p:sp>
-      <p:sp>
-        <p:nvSpPr>
-          <p:cNvPr id="25" name="TextBox 24"/>
-          <p:cNvSpPr txBox="1"/>
-          <p:nvPr/>
-        </p:nvSpPr>
-        <p:spPr>
-          <a:xfrm>
-            <a:off x="8334756" y="2414016"/>
-            <a:ext cx="3383280" cy="502920"/>
-          </a:xfrm>
-          <a:prstGeom prst="rect">
-            <a:avLst/>
-          </a:prstGeom>
-          <a:noFill/>
-        </p:spPr>
-        <p:txBody>
-          <a:bodyPr wrap="square">
-            <a:spAutoFit/>
-          </a:bodyPr>
-          <a:lstStyle/>
-          <a:p>
-            <a:pPr algn="ctr"/>
-            <a:r>
-              <a:rPr sz="1500" b="1">
-                <a:solidFill>
-                  <a:srgbClr val="1F2A4E"/>
-                </a:solidFill>
-              </a:rPr>
-              <a:t>Racial Faces in-the-Wild</a:t>
-            </a:r>
-          </a:p>
-        </p:txBody>
-      </p:sp>
-      <p:sp>
-        <p:nvSpPr>
-          <p:cNvPr id="26" name="TextBox 25"/>
-          <p:cNvSpPr txBox="1"/>
-          <p:nvPr/>
-        </p:nvSpPr>
-        <p:spPr>
-          <a:xfrm>
-            <a:off x="8362188" y="2944368"/>
-            <a:ext cx="3328416" cy="932688"/>
-          </a:xfrm>
-          <a:prstGeom prst="rect">
-            <a:avLst/>
-          </a:prstGeom>
-          <a:noFill/>
-        </p:spPr>
-        <p:txBody>
-          <a:bodyPr wrap="square">
-            <a:spAutoFit/>
-          </a:bodyPr>
-          <a:lstStyle/>
-          <a:p>
-            <a:pPr algn="ctr"/>
-            <a:r>
-              <a:rPr sz="1200">
-                <a:solidFill>
-                  <a:srgbClr val="3D424E"/>
-                </a:solidFill>
-              </a:rPr>
-              <a:t>Pares oficiais 1 : 1 de verificação
-(Wang et al., 2019). Foco em
-grupo African.</a:t>
-            </a:r>
-          </a:p>
-        </p:txBody>
-      </p:sp>
-      <p:sp>
-        <p:nvSpPr>
-          <p:cNvPr id="27" name="Rounded Rectangle 26"/>
-          <p:cNvSpPr/>
-          <p:nvPr/>
-        </p:nvSpPr>
-        <p:spPr>
-          <a:xfrm>
-            <a:off x="8197596" y="4105656"/>
-            <a:ext cx="3657600" cy="1984248"/>
-          </a:xfrm>
-          <a:prstGeom prst="roundRect">
-            <a:avLst/>
-          </a:prstGeom>
-          <a:solidFill>
-            <a:srgbClr val="FFFFFF"/>
-          </a:solidFill>
-          <a:ln w="17780">
-            <a:solidFill>
-              <a:srgbClr val="707682"/>
-            </a:solidFill>
-          </a:ln>
-        </p:spPr>
-        <p:style>
-          <a:lnRef idx="1">
-            <a:schemeClr val="accent1"/>
-          </a:lnRef>
-          <a:fillRef idx="3">
-            <a:schemeClr val="accent1"/>
-          </a:fillRef>
-          <a:effectRef idx="2">
-            <a:schemeClr val="accent1"/>
-          </a:effectRef>
-          <a:fontRef idx="minor">
-            <a:schemeClr val="lt1"/>
-          </a:fontRef>
-        </p:style>
-        <p:txBody>
-          <a:bodyPr rtlCol="0" anchor="ctr" tIns="0"/>
-          <a:lstStyle/>
-          <a:p>
-            <a:pPr algn="ctr"/>
-          </a:p>
-        </p:txBody>
-      </p:sp>
-      <p:sp>
-        <p:nvSpPr>
-          <p:cNvPr id="28" name="TextBox 27"/>
-          <p:cNvSpPr txBox="1"/>
-          <p:nvPr/>
-        </p:nvSpPr>
-        <p:spPr>
-          <a:xfrm>
-            <a:off x="8334756" y="4197096"/>
-            <a:ext cx="3383280" cy="320040"/>
-          </a:xfrm>
-          <a:prstGeom prst="rect">
-            <a:avLst/>
-          </a:prstGeom>
-          <a:noFill/>
-        </p:spPr>
-        <p:txBody>
-          <a:bodyPr wrap="square">
-            <a:spAutoFit/>
-          </a:bodyPr>
-          <a:lstStyle/>
-          <a:p>
-            <a:pPr algn="ctr"/>
-            <a:r>
-              <a:rPr sz="1100" b="1">
-                <a:solidFill>
-                  <a:srgbClr val="707682"/>
-                </a:solidFill>
-              </a:rPr>
-              <a:t>BFW</a:t>
-            </a:r>
-          </a:p>
-        </p:txBody>
-      </p:sp>
-      <p:sp>
-        <p:nvSpPr>
-          <p:cNvPr id="29" name="TextBox 28"/>
-          <p:cNvSpPr txBox="1"/>
-          <p:nvPr/>
-        </p:nvSpPr>
-        <p:spPr>
-          <a:xfrm>
-            <a:off x="8334756" y="4562856"/>
-            <a:ext cx="3383280" cy="502920"/>
-          </a:xfrm>
-          <a:prstGeom prst="rect">
-            <a:avLst/>
-          </a:prstGeom>
-          <a:noFill/>
-        </p:spPr>
-        <p:txBody>
-          <a:bodyPr wrap="square">
-            <a:spAutoFit/>
-          </a:bodyPr>
-          <a:lstStyle/>
-          <a:p>
-            <a:pPr algn="ctr"/>
-            <a:r>
-              <a:rPr sz="1500" b="1">
-                <a:solidFill>
-                  <a:srgbClr val="1F2A4E"/>
-                </a:solidFill>
-              </a:rPr>
-              <a:t>Balanced Faces in-the-Wild</a:t>
+            <a:r>
+              <a:rPr sz="1100">
+                <a:solidFill>
+                  <a:srgbClr val="B4C4E8"/>
+                </a:solidFill>
+              </a:rPr>
+              <a:t>Critérios binários pré-registrados (H1, H4, H5); nenhum ajuste de métrica pós-resultado — alinhado à metodologia popperiana e à norma biométrica.</a:t>
             </a:r>
           </a:p>
         </p:txBody>
@@ -10763,77 +10747,6 @@
       <p:sp>
         <p:nvSpPr>
           <p:cNvPr id="30" name="TextBox 29"/>
-          <p:cNvSpPr txBox="1"/>
-          <p:nvPr/>
-        </p:nvSpPr>
-        <p:spPr>
-          <a:xfrm>
-            <a:off x="8362188" y="5093208"/>
-            <a:ext cx="3328416" cy="932688"/>
-          </a:xfrm>
-          <a:prstGeom prst="rect">
-            <a:avLst/>
-          </a:prstGeom>
-          <a:noFill/>
-        </p:spPr>
-        <p:txBody>
-          <a:bodyPr wrap="square">
-            <a:spAutoFit/>
-          </a:bodyPr>
-          <a:lstStyle/>
-          <a:p>
-            <a:pPr algn="ctr"/>
-            <a:r>
-              <a:rPr sz="1200">
-                <a:solidFill>
-                  <a:srgbClr val="3D424E"/>
-                </a:solidFill>
-              </a:rPr>
-              <a:t>Protocolo balanceado por raça
-x gênero (Robinson et al.,
-2020).</a:t>
-            </a:r>
-          </a:p>
-        </p:txBody>
-      </p:sp>
-      <p:sp>
-        <p:nvSpPr>
-          <p:cNvPr id="31" name="TextBox 30"/>
-          <p:cNvSpPr txBox="1"/>
-          <p:nvPr/>
-        </p:nvSpPr>
-        <p:spPr>
-          <a:xfrm>
-            <a:off x="457200" y="6035040"/>
-            <a:ext cx="11247120" cy="365760"/>
-          </a:xfrm>
-          <a:prstGeom prst="rect">
-            <a:avLst/>
-          </a:prstGeom>
-          <a:noFill/>
-        </p:spPr>
-        <p:txBody>
-          <a:bodyPr wrap="none">
-            <a:spAutoFit/>
-          </a:bodyPr>
-          <a:lstStyle/>
-          <a:p>
-            <a:pPr algn="ctr">
-              <a:defRPr sz="1200" i="1">
-                <a:solidFill>
-                  <a:srgbClr val="707682"/>
-                </a:solidFill>
-              </a:defRPr>
-            </a:pPr>
-            <a:r>
-              <a:t>Fluxo narrativo: o que avalio (cenários A e B) → com que rigor (norma + estatística) → onde demonstro generalização (RFW, BFW).</a:t>
-            </a:r>
-          </a:p>
-        </p:txBody>
-      </p:sp>
-      <p:sp>
-        <p:nvSpPr>
-          <p:cNvPr id="32" name="TextBox 31"/>
           <p:cNvSpPr txBox="1"/>
           <p:nvPr/>
         </p:nvSpPr>
@@ -10868,7 +10781,7 @@
       </p:sp>
       <p:sp>
         <p:nvSpPr>
-          <p:cNvPr id="33" name="TextBox 32"/>
+          <p:cNvPr id="31" name="TextBox 30"/>
           <p:cNvSpPr txBox="1"/>
           <p:nvPr/>
         </p:nvSpPr>

--- a/docs/ativo/material_qualificacao_2026-10-05.pptx
+++ b/docs/ativo/material_qualificacao_2026-10-05.pptx
@@ -3518,7 +3518,7 @@
               </a:defRPr>
             </a:pPr>
             <a:r>
-              <a:t>Linha do tempo das principais respostas ao problema (2018–2026)</a:t>
+              <a:t>Linha do tempo das principais respostas ao problema (2018 – 2026)</a:t>
             </a:r>
           </a:p>
         </p:txBody>
@@ -3568,7 +3568,7 @@
       </p:sp>
       <p:pic>
         <p:nvPicPr>
-          <p:cNvPr id="4" name="Picture 3" descr="fig_timeline_mitigacoes.png"/>
+          <p:cNvPr id="4" name="Picture 3" descr="fig_timeline_fases.png"/>
           <p:cNvPicPr>
             <a:picLocks noChangeAspect="1"/>
           </p:cNvPicPr>
@@ -3582,8 +3582,8 @@
         </p:blipFill>
         <p:spPr>
           <a:xfrm>
-            <a:off x="1703880" y="1371600"/>
-            <a:ext cx="8781190" cy="4389120"/>
+            <a:off x="457200" y="1188720"/>
+            <a:ext cx="11247120" cy="2500228"/>
           </a:xfrm>
           <a:prstGeom prst="rect">
             <a:avLst/>
@@ -3592,14 +3592,794 @@
       </p:pic>
       <p:sp>
         <p:nvSpPr>
-          <p:cNvPr id="5" name="TextBox 4"/>
-          <p:cNvSpPr txBox="1"/>
-          <p:nvPr/>
-        </p:nvSpPr>
-        <p:spPr>
-          <a:xfrm>
-            <a:off x="457200" y="5989320"/>
-            <a:ext cx="11430000" cy="365760"/>
+          <p:cNvPr id="5" name="Rectangle 4"/>
+          <p:cNvSpPr/>
+          <p:nvPr/>
+        </p:nvSpPr>
+        <p:spPr>
+          <a:xfrm>
+            <a:off x="457200" y="3154680"/>
+            <a:ext cx="64008" cy="2834640"/>
+          </a:xfrm>
+          <a:prstGeom prst="rect">
+            <a:avLst/>
+          </a:prstGeom>
+          <a:solidFill>
+            <a:srgbClr val="3D68BB"/>
+          </a:solidFill>
+          <a:ln>
+            <a:noFill/>
+          </a:ln>
+        </p:spPr>
+        <p:style>
+          <a:lnRef idx="1">
+            <a:schemeClr val="accent1"/>
+          </a:lnRef>
+          <a:fillRef idx="3">
+            <a:schemeClr val="accent1"/>
+          </a:fillRef>
+          <a:effectRef idx="2">
+            <a:schemeClr val="accent1"/>
+          </a:effectRef>
+          <a:fontRef idx="minor">
+            <a:schemeClr val="lt1"/>
+          </a:fontRef>
+        </p:style>
+        <p:txBody>
+          <a:bodyPr rtlCol="0" anchor="ctr"/>
+          <a:lstStyle/>
+          <a:p>
+            <a:pPr algn="ctr"/>
+          </a:p>
+        </p:txBody>
+      </p:sp>
+      <p:sp>
+        <p:nvSpPr>
+          <p:cNvPr id="6" name="TextBox 5"/>
+          <p:cNvSpPr txBox="1"/>
+          <p:nvPr/>
+        </p:nvSpPr>
+        <p:spPr>
+          <a:xfrm>
+            <a:off x="594360" y="3154680"/>
+            <a:ext cx="2599182" cy="731520"/>
+          </a:xfrm>
+          <a:prstGeom prst="rect">
+            <a:avLst/>
+          </a:prstGeom>
+          <a:noFill/>
+        </p:spPr>
+        <p:txBody>
+          <a:bodyPr wrap="square">
+            <a:spAutoFit/>
+          </a:bodyPr>
+          <a:lstStyle/>
+          <a:p>
+            <a:r>
+              <a:rPr sz="900" b="1">
+                <a:solidFill>
+                  <a:srgbClr val="3D68BB"/>
+                </a:solidFill>
+              </a:rPr>
+              <a:t>FOCO</a:t>
+            </a:r>
+          </a:p>
+          <a:p>
+            <a:r>
+              <a:rPr sz="1100">
+                <a:solidFill>
+                  <a:srgbClr val="3D424E"/>
+                </a:solidFill>
+              </a:rPr>
+              <a:t>Rebalanceamento amostral e novos
+repositórios biométricos.</a:t>
+            </a:r>
+          </a:p>
+        </p:txBody>
+      </p:sp>
+      <p:sp>
+        <p:nvSpPr>
+          <p:cNvPr id="7" name="TextBox 6"/>
+          <p:cNvSpPr txBox="1"/>
+          <p:nvPr/>
+        </p:nvSpPr>
+        <p:spPr>
+          <a:xfrm>
+            <a:off x="594360" y="4023360"/>
+            <a:ext cx="2599182" cy="1143000"/>
+          </a:xfrm>
+          <a:prstGeom prst="rect">
+            <a:avLst/>
+          </a:prstGeom>
+          <a:noFill/>
+        </p:spPr>
+        <p:txBody>
+          <a:bodyPr wrap="square">
+            <a:spAutoFit/>
+          </a:bodyPr>
+          <a:lstStyle/>
+          <a:p>
+            <a:r>
+              <a:rPr sz="900" b="1">
+                <a:solidFill>
+                  <a:srgbClr val="3D68BB"/>
+                </a:solidFill>
+              </a:rPr>
+              <a:t>MARCOS</a:t>
+            </a:r>
+          </a:p>
+          <a:p>
+            <a:r>
+              <a:rPr sz="1050">
+                <a:solidFill>
+                  <a:srgbClr val="1F2A4E"/>
+                </a:solidFill>
+              </a:rPr>
+              <a:t>•  RFW (Wang et al., 2019)</a:t>
+            </a:r>
+          </a:p>
+          <a:p>
+            <a:r>
+              <a:rPr sz="1050">
+                <a:solidFill>
+                  <a:srgbClr val="1F2A4E"/>
+                </a:solidFill>
+              </a:rPr>
+              <a:t>•  BFW (Robinson et al., 2020)</a:t>
+            </a:r>
+          </a:p>
+          <a:p>
+            <a:r>
+              <a:rPr sz="1050">
+                <a:solidFill>
+                  <a:srgbClr val="1F2A4E"/>
+                </a:solidFill>
+              </a:rPr>
+              <a:t>•  FairFace (Kärkkäinen &amp; Joo, 2021)</a:t>
+            </a:r>
+          </a:p>
+        </p:txBody>
+      </p:sp>
+      <p:sp>
+        <p:nvSpPr>
+          <p:cNvPr id="8" name="TextBox 7"/>
+          <p:cNvSpPr txBox="1"/>
+          <p:nvPr/>
+        </p:nvSpPr>
+        <p:spPr>
+          <a:xfrm>
+            <a:off x="594360" y="5212080"/>
+            <a:ext cx="2599182" cy="777240"/>
+          </a:xfrm>
+          <a:prstGeom prst="rect">
+            <a:avLst/>
+          </a:prstGeom>
+          <a:noFill/>
+        </p:spPr>
+        <p:txBody>
+          <a:bodyPr wrap="square">
+            <a:spAutoFit/>
+          </a:bodyPr>
+          <a:lstStyle/>
+          <a:p>
+            <a:r>
+              <a:rPr sz="900" b="1">
+                <a:solidFill>
+                  <a:srgbClr val="3D68BB"/>
+                </a:solidFill>
+              </a:rPr>
+              <a:t>LIMITAÇÃO</a:t>
+            </a:r>
+          </a:p>
+          <a:p>
+            <a:r>
+              <a:rPr sz="1050" i="1">
+                <a:solidFill>
+                  <a:srgbClr val="3D424E"/>
+                </a:solidFill>
+              </a:rPr>
+              <a:t>Equilíbrio amostral é necessário mas insuficiente em
+populações heterogêneas (Latinx). Uso restrito ao
+Fitzpatrick I–VI.</a:t>
+            </a:r>
+          </a:p>
+        </p:txBody>
+      </p:sp>
+      <p:sp>
+        <p:nvSpPr>
+          <p:cNvPr id="9" name="Rectangle 8"/>
+          <p:cNvSpPr/>
+          <p:nvPr/>
+        </p:nvSpPr>
+        <p:spPr>
+          <a:xfrm>
+            <a:off x="3303270" y="3154680"/>
+            <a:ext cx="64008" cy="2834640"/>
+          </a:xfrm>
+          <a:prstGeom prst="rect">
+            <a:avLst/>
+          </a:prstGeom>
+          <a:solidFill>
+            <a:srgbClr val="3D68BB"/>
+          </a:solidFill>
+          <a:ln>
+            <a:noFill/>
+          </a:ln>
+        </p:spPr>
+        <p:style>
+          <a:lnRef idx="1">
+            <a:schemeClr val="accent1"/>
+          </a:lnRef>
+          <a:fillRef idx="3">
+            <a:schemeClr val="accent1"/>
+          </a:fillRef>
+          <a:effectRef idx="2">
+            <a:schemeClr val="accent1"/>
+          </a:effectRef>
+          <a:fontRef idx="minor">
+            <a:schemeClr val="lt1"/>
+          </a:fontRef>
+        </p:style>
+        <p:txBody>
+          <a:bodyPr rtlCol="0" anchor="ctr"/>
+          <a:lstStyle/>
+          <a:p>
+            <a:pPr algn="ctr"/>
+          </a:p>
+        </p:txBody>
+      </p:sp>
+      <p:sp>
+        <p:nvSpPr>
+          <p:cNvPr id="10" name="TextBox 9"/>
+          <p:cNvSpPr txBox="1"/>
+          <p:nvPr/>
+        </p:nvSpPr>
+        <p:spPr>
+          <a:xfrm>
+            <a:off x="3440430" y="3154680"/>
+            <a:ext cx="2599182" cy="731520"/>
+          </a:xfrm>
+          <a:prstGeom prst="rect">
+            <a:avLst/>
+          </a:prstGeom>
+          <a:noFill/>
+        </p:spPr>
+        <p:txBody>
+          <a:bodyPr wrap="square">
+            <a:spAutoFit/>
+          </a:bodyPr>
+          <a:lstStyle/>
+          <a:p>
+            <a:r>
+              <a:rPr sz="900" b="1">
+                <a:solidFill>
+                  <a:srgbClr val="3D68BB"/>
+                </a:solidFill>
+              </a:rPr>
+              <a:t>FOCO</a:t>
+            </a:r>
+          </a:p>
+          <a:p>
+            <a:r>
+              <a:rPr sz="1100">
+                <a:solidFill>
+                  <a:srgbClr val="3D424E"/>
+                </a:solidFill>
+              </a:rPr>
+              <a:t>Intervenções na otimização e nas
+funções de perda.</a:t>
+            </a:r>
+          </a:p>
+        </p:txBody>
+      </p:sp>
+      <p:sp>
+        <p:nvSpPr>
+          <p:cNvPr id="11" name="TextBox 10"/>
+          <p:cNvSpPr txBox="1"/>
+          <p:nvPr/>
+        </p:nvSpPr>
+        <p:spPr>
+          <a:xfrm>
+            <a:off x="3440430" y="4023360"/>
+            <a:ext cx="2599182" cy="1143000"/>
+          </a:xfrm>
+          <a:prstGeom prst="rect">
+            <a:avLst/>
+          </a:prstGeom>
+          <a:noFill/>
+        </p:spPr>
+        <p:txBody>
+          <a:bodyPr wrap="square">
+            <a:spAutoFit/>
+          </a:bodyPr>
+          <a:lstStyle/>
+          <a:p>
+            <a:r>
+              <a:rPr sz="900" b="1">
+                <a:solidFill>
+                  <a:srgbClr val="3D68BB"/>
+                </a:solidFill>
+              </a:rPr>
+              <a:t>MARCOS</a:t>
+            </a:r>
+          </a:p>
+          <a:p>
+            <a:r>
+              <a:rPr sz="1050">
+                <a:solidFill>
+                  <a:srgbClr val="1F2A4E"/>
+                </a:solidFill>
+              </a:rPr>
+              <a:t>•  Group DRO (Sagawa et al., 2020)</a:t>
+            </a:r>
+          </a:p>
+          <a:p>
+            <a:r>
+              <a:rPr sz="1050">
+                <a:solidFill>
+                  <a:srgbClr val="1F2A4E"/>
+                </a:solidFill>
+              </a:rPr>
+              <a:t>•  FSCL+ (Park et al., 2022)</a:t>
+            </a:r>
+          </a:p>
+          <a:p>
+            <a:r>
+              <a:rPr sz="1050">
+                <a:solidFill>
+                  <a:srgbClr val="1F2A4E"/>
+                </a:solidFill>
+              </a:rPr>
+              <a:t>•  FairGRAPE (Lin et al., 2022)</a:t>
+            </a:r>
+          </a:p>
+        </p:txBody>
+      </p:sp>
+      <p:sp>
+        <p:nvSpPr>
+          <p:cNvPr id="12" name="TextBox 11"/>
+          <p:cNvSpPr txBox="1"/>
+          <p:nvPr/>
+        </p:nvSpPr>
+        <p:spPr>
+          <a:xfrm>
+            <a:off x="3440430" y="5212080"/>
+            <a:ext cx="2599182" cy="777240"/>
+          </a:xfrm>
+          <a:prstGeom prst="rect">
+            <a:avLst/>
+          </a:prstGeom>
+          <a:noFill/>
+        </p:spPr>
+        <p:txBody>
+          <a:bodyPr wrap="square">
+            <a:spAutoFit/>
+          </a:bodyPr>
+          <a:lstStyle/>
+          <a:p>
+            <a:r>
+              <a:rPr sz="900" b="1">
+                <a:solidFill>
+                  <a:srgbClr val="3D68BB"/>
+                </a:solidFill>
+              </a:rPr>
+              <a:t>LIMITAÇÃO</a:t>
+            </a:r>
+          </a:p>
+          <a:p>
+            <a:r>
+              <a:rPr sz="1050" i="1">
+                <a:solidFill>
+                  <a:srgbClr val="3D424E"/>
+                </a:solidFill>
+              </a:rPr>
+              <a:t>Conflito severo entre acurácia global e paridade
+demográfica (Teorema da Impossibilidade,
+Kleinberg et al., 2017).</a:t>
+            </a:r>
+          </a:p>
+        </p:txBody>
+      </p:sp>
+      <p:sp>
+        <p:nvSpPr>
+          <p:cNvPr id="13" name="Rectangle 12"/>
+          <p:cNvSpPr/>
+          <p:nvPr/>
+        </p:nvSpPr>
+        <p:spPr>
+          <a:xfrm>
+            <a:off x="6149340" y="3154680"/>
+            <a:ext cx="64008" cy="2834640"/>
+          </a:xfrm>
+          <a:prstGeom prst="rect">
+            <a:avLst/>
+          </a:prstGeom>
+          <a:solidFill>
+            <a:srgbClr val="3D68BB"/>
+          </a:solidFill>
+          <a:ln>
+            <a:noFill/>
+          </a:ln>
+        </p:spPr>
+        <p:style>
+          <a:lnRef idx="1">
+            <a:schemeClr val="accent1"/>
+          </a:lnRef>
+          <a:fillRef idx="3">
+            <a:schemeClr val="accent1"/>
+          </a:fillRef>
+          <a:effectRef idx="2">
+            <a:schemeClr val="accent1"/>
+          </a:effectRef>
+          <a:fontRef idx="minor">
+            <a:schemeClr val="lt1"/>
+          </a:fontRef>
+        </p:style>
+        <p:txBody>
+          <a:bodyPr rtlCol="0" anchor="ctr"/>
+          <a:lstStyle/>
+          <a:p>
+            <a:pPr algn="ctr"/>
+          </a:p>
+        </p:txBody>
+      </p:sp>
+      <p:sp>
+        <p:nvSpPr>
+          <p:cNvPr id="14" name="TextBox 13"/>
+          <p:cNvSpPr txBox="1"/>
+          <p:nvPr/>
+        </p:nvSpPr>
+        <p:spPr>
+          <a:xfrm>
+            <a:off x="6286500" y="3154680"/>
+            <a:ext cx="2599182" cy="731520"/>
+          </a:xfrm>
+          <a:prstGeom prst="rect">
+            <a:avLst/>
+          </a:prstGeom>
+          <a:noFill/>
+        </p:spPr>
+        <p:txBody>
+          <a:bodyPr wrap="square">
+            <a:spAutoFit/>
+          </a:bodyPr>
+          <a:lstStyle/>
+          <a:p>
+            <a:r>
+              <a:rPr sz="900" b="1">
+                <a:solidFill>
+                  <a:srgbClr val="3D68BB"/>
+                </a:solidFill>
+              </a:rPr>
+              <a:t>FOCO</a:t>
+            </a:r>
+          </a:p>
+          <a:p>
+            <a:r>
+              <a:rPr sz="1100">
+                <a:solidFill>
+                  <a:srgbClr val="3D424E"/>
+                </a:solidFill>
+              </a:rPr>
+              <a:t>Modelos visão-linguagem e
+transição à escala Monk (MST).</a:t>
+            </a:r>
+          </a:p>
+        </p:txBody>
+      </p:sp>
+      <p:sp>
+        <p:nvSpPr>
+          <p:cNvPr id="15" name="TextBox 14"/>
+          <p:cNvSpPr txBox="1"/>
+          <p:nvPr/>
+        </p:nvSpPr>
+        <p:spPr>
+          <a:xfrm>
+            <a:off x="6286500" y="4023360"/>
+            <a:ext cx="2599182" cy="1143000"/>
+          </a:xfrm>
+          <a:prstGeom prst="rect">
+            <a:avLst/>
+          </a:prstGeom>
+          <a:noFill/>
+        </p:spPr>
+        <p:txBody>
+          <a:bodyPr wrap="square">
+            <a:spAutoFit/>
+          </a:bodyPr>
+          <a:lstStyle/>
+          <a:p>
+            <a:r>
+              <a:rPr sz="900" b="1">
+                <a:solidFill>
+                  <a:srgbClr val="3D68BB"/>
+                </a:solidFill>
+              </a:rPr>
+              <a:t>MARCOS</a:t>
+            </a:r>
+          </a:p>
+          <a:p>
+            <a:r>
+              <a:rPr sz="1050">
+                <a:solidFill>
+                  <a:srgbClr val="1F2A4E"/>
+                </a:solidFill>
+              </a:rPr>
+              <a:t>•  FaceScanPaliGemma (AlDahoul et al., 2024)</a:t>
+            </a:r>
+          </a:p>
+          <a:p>
+            <a:r>
+              <a:rPr sz="1050">
+                <a:solidFill>
+                  <a:srgbClr val="1F2A4E"/>
+                </a:solidFill>
+              </a:rPr>
+              <a:t>•  FairCLIP (Luo et al., 2024)</a:t>
+            </a:r>
+          </a:p>
+          <a:p>
+            <a:r>
+              <a:rPr sz="1050">
+                <a:solidFill>
+                  <a:srgbClr val="1F2A4E"/>
+                </a:solidFill>
+              </a:rPr>
+              <a:t>•  MST (Schumann et al., 2023; Pereira, 2026)</a:t>
+            </a:r>
+          </a:p>
+        </p:txBody>
+      </p:sp>
+      <p:sp>
+        <p:nvSpPr>
+          <p:cNvPr id="16" name="TextBox 15"/>
+          <p:cNvSpPr txBox="1"/>
+          <p:nvPr/>
+        </p:nvSpPr>
+        <p:spPr>
+          <a:xfrm>
+            <a:off x="6286500" y="5212080"/>
+            <a:ext cx="2599182" cy="777240"/>
+          </a:xfrm>
+          <a:prstGeom prst="rect">
+            <a:avLst/>
+          </a:prstGeom>
+          <a:noFill/>
+        </p:spPr>
+        <p:txBody>
+          <a:bodyPr wrap="square">
+            <a:spAutoFit/>
+          </a:bodyPr>
+          <a:lstStyle/>
+          <a:p>
+            <a:r>
+              <a:rPr sz="900" b="1">
+                <a:solidFill>
+                  <a:srgbClr val="3D68BB"/>
+                </a:solidFill>
+              </a:rPr>
+              <a:t>LIMITAÇÃO</a:t>
+            </a:r>
+          </a:p>
+          <a:p>
+            <a:r>
+              <a:rPr sz="1050" i="1">
+                <a:solidFill>
+                  <a:srgbClr val="3D424E"/>
+                </a:solidFill>
+              </a:rPr>
+              <a:t>Acurácia agregada sobe (75,7 %) mas persiste gap
+de ~30 pp em Latinx (F1 ≈ 60 %); vieses herdados
+da web.</a:t>
+            </a:r>
+          </a:p>
+        </p:txBody>
+      </p:sp>
+      <p:sp>
+        <p:nvSpPr>
+          <p:cNvPr id="17" name="Rectangle 16"/>
+          <p:cNvSpPr/>
+          <p:nvPr/>
+        </p:nvSpPr>
+        <p:spPr>
+          <a:xfrm>
+            <a:off x="8995410" y="3154680"/>
+            <a:ext cx="64008" cy="2834640"/>
+          </a:xfrm>
+          <a:prstGeom prst="rect">
+            <a:avLst/>
+          </a:prstGeom>
+          <a:solidFill>
+            <a:srgbClr val="1F2A4E"/>
+          </a:solidFill>
+          <a:ln>
+            <a:noFill/>
+          </a:ln>
+        </p:spPr>
+        <p:style>
+          <a:lnRef idx="1">
+            <a:schemeClr val="accent1"/>
+          </a:lnRef>
+          <a:fillRef idx="3">
+            <a:schemeClr val="accent1"/>
+          </a:fillRef>
+          <a:effectRef idx="2">
+            <a:schemeClr val="accent1"/>
+          </a:effectRef>
+          <a:fontRef idx="minor">
+            <a:schemeClr val="lt1"/>
+          </a:fontRef>
+        </p:style>
+        <p:txBody>
+          <a:bodyPr rtlCol="0" anchor="ctr"/>
+          <a:lstStyle/>
+          <a:p>
+            <a:pPr algn="ctr"/>
+          </a:p>
+        </p:txBody>
+      </p:sp>
+      <p:sp>
+        <p:nvSpPr>
+          <p:cNvPr id="18" name="TextBox 17"/>
+          <p:cNvSpPr txBox="1"/>
+          <p:nvPr/>
+        </p:nvSpPr>
+        <p:spPr>
+          <a:xfrm>
+            <a:off x="9132570" y="3154680"/>
+            <a:ext cx="2599182" cy="731520"/>
+          </a:xfrm>
+          <a:prstGeom prst="rect">
+            <a:avLst/>
+          </a:prstGeom>
+          <a:noFill/>
+        </p:spPr>
+        <p:txBody>
+          <a:bodyPr wrap="square">
+            <a:spAutoFit/>
+          </a:bodyPr>
+          <a:lstStyle/>
+          <a:p>
+            <a:r>
+              <a:rPr sz="900" b="1">
+                <a:solidFill>
+                  <a:srgbClr val="1F2A4E"/>
+                </a:solidFill>
+              </a:rPr>
+              <a:t>FOCO</a:t>
+            </a:r>
+          </a:p>
+          <a:p>
+            <a:r>
+              <a:rPr sz="1100">
+                <a:solidFill>
+                  <a:srgbClr val="3D424E"/>
+                </a:solidFill>
+              </a:rPr>
+              <a:t>Injeção de MST como sinal arquitetural
+intermediário via FiLM.</a:t>
+            </a:r>
+          </a:p>
+        </p:txBody>
+      </p:sp>
+      <p:sp>
+        <p:nvSpPr>
+          <p:cNvPr id="19" name="TextBox 18"/>
+          <p:cNvSpPr txBox="1"/>
+          <p:nvPr/>
+        </p:nvSpPr>
+        <p:spPr>
+          <a:xfrm>
+            <a:off x="9132570" y="4023360"/>
+            <a:ext cx="2599182" cy="1143000"/>
+          </a:xfrm>
+          <a:prstGeom prst="rect">
+            <a:avLst/>
+          </a:prstGeom>
+          <a:noFill/>
+        </p:spPr>
+        <p:txBody>
+          <a:bodyPr wrap="square">
+            <a:spAutoFit/>
+          </a:bodyPr>
+          <a:lstStyle/>
+          <a:p>
+            <a:r>
+              <a:rPr sz="900" b="1">
+                <a:solidFill>
+                  <a:srgbClr val="1F2A4E"/>
+                </a:solidFill>
+              </a:rPr>
+              <a:t>MARCOS</a:t>
+            </a:r>
+          </a:p>
+          <a:p>
+            <a:r>
+              <a:rPr sz="1050">
+                <a:solidFill>
+                  <a:srgbClr val="1F2A4E"/>
+                </a:solidFill>
+              </a:rPr>
+              <a:t>•  FiLM · ConvNeXt-T (Perez et al., 2018)</a:t>
+            </a:r>
+          </a:p>
+          <a:p>
+            <a:r>
+              <a:rPr sz="1050">
+                <a:solidFill>
+                  <a:srgbClr val="1F2A4E"/>
+                </a:solidFill>
+              </a:rPr>
+              <a:t>•  Triangulação ISO/IEC 19795-10:2024</a:t>
+            </a:r>
+          </a:p>
+          <a:p>
+            <a:r>
+              <a:rPr sz="1050">
+                <a:solidFill>
+                  <a:srgbClr val="1F2A4E"/>
+                </a:solidFill>
+              </a:rPr>
+              <a:t>•  Decomposição fenotípico × pixel (H6)</a:t>
+            </a:r>
+          </a:p>
+        </p:txBody>
+      </p:sp>
+      <p:sp>
+        <p:nvSpPr>
+          <p:cNvPr id="20" name="TextBox 19"/>
+          <p:cNvSpPr txBox="1"/>
+          <p:nvPr/>
+        </p:nvSpPr>
+        <p:spPr>
+          <a:xfrm>
+            <a:off x="9132570" y="5212080"/>
+            <a:ext cx="2599182" cy="777240"/>
+          </a:xfrm>
+          <a:prstGeom prst="rect">
+            <a:avLst/>
+          </a:prstGeom>
+          <a:noFill/>
+        </p:spPr>
+        <p:txBody>
+          <a:bodyPr wrap="square">
+            <a:spAutoFit/>
+          </a:bodyPr>
+          <a:lstStyle/>
+          <a:p>
+            <a:r>
+              <a:rPr sz="900" b="1">
+                <a:solidFill>
+                  <a:srgbClr val="1F2A4E"/>
+                </a:solidFill>
+              </a:rPr>
+              <a:t>DIFERENCIAL</a:t>
+            </a:r>
+          </a:p>
+          <a:p>
+            <a:r>
+              <a:rPr sz="1050" i="1">
+                <a:solidFill>
+                  <a:srgbClr val="3D424E"/>
+                </a:solidFill>
+              </a:rPr>
+              <a:t>Modulação do fluxo de features pelo tom contínuo —
+supera rótulos raciais nominais sem exigir modelos
+de bilhões de parâmetros.</a:t>
+            </a:r>
+          </a:p>
+        </p:txBody>
+      </p:sp>
+      <p:sp>
+        <p:nvSpPr>
+          <p:cNvPr id="21" name="TextBox 20"/>
+          <p:cNvSpPr txBox="1"/>
+          <p:nvPr/>
+        </p:nvSpPr>
+        <p:spPr>
+          <a:xfrm>
+            <a:off x="457200" y="6080760"/>
+            <a:ext cx="11247120" cy="320040"/>
           </a:xfrm>
           <a:prstGeom prst="rect">
             <a:avLst/>
@@ -3613,21 +4393,21 @@
           <a:lstStyle/>
           <a:p>
             <a:pPr algn="ctr">
-              <a:defRPr sz="1400" i="1">
+              <a:defRPr sz="1100" i="1">
                 <a:solidFill>
                   <a:srgbClr val="707682"/>
                 </a:solidFill>
               </a:defRPr>
             </a:pPr>
             <a:r>
-              <a:t>Frentes cronológicas: dados balanceados → funções de perda → arquiteturas Pareto-eficientes → modelos vision-language → escalas MST → heterogeneidade fenotípica.</a:t>
-            </a:r>
-          </a:p>
-        </p:txBody>
-      </p:sp>
-      <p:sp>
-        <p:nvSpPr>
-          <p:cNvPr id="6" name="TextBox 5"/>
+              <a:t>Fluxo cronológico: dados balanceados → funções de perda → modelos visão-linguagem com MST → condicionamento arquitetural.</a:t>
+            </a:r>
+          </a:p>
+        </p:txBody>
+      </p:sp>
+      <p:sp>
+        <p:nvSpPr>
+          <p:cNvPr id="22" name="TextBox 21"/>
           <p:cNvSpPr txBox="1"/>
           <p:nvPr/>
         </p:nvSpPr>
@@ -3662,7 +4442,7 @@
       </p:sp>
       <p:sp>
         <p:nvSpPr>
-          <p:cNvPr id="7" name="TextBox 6"/>
+          <p:cNvPr id="23" name="TextBox 22"/>
           <p:cNvSpPr txBox="1"/>
           <p:nvPr/>
         </p:nvSpPr>

--- a/docs/ativo/material_qualificacao_2026-10-05.pptx
+++ b/docs/ativo/material_qualificacao_2026-10-05.pptx
@@ -10683,12 +10683,12 @@
           <a:p>
             <a:pPr algn="ctr"/>
             <a:r>
-              <a:rPr sz="4600" b="1">
+              <a:rPr sz="3600" b="1">
                 <a:solidFill>
                   <a:srgbClr val="1F2A4E"/>
                 </a:solidFill>
               </a:rPr>
-              <a:t>7 + 8</a:t>
+              <a:t>A · B</a:t>
             </a:r>
           </a:p>
         </p:txBody>
@@ -10722,7 +10722,7 @@
                   <a:srgbClr val="707682"/>
                 </a:solidFill>
               </a:rPr>
-              <a:t>classes &amp; subgrupos</a:t>
+              <a:t>dois cenários estratificados</a:t>
             </a:r>
           </a:p>
         </p:txBody>
@@ -10791,7 +10791,7 @@
                   <a:srgbClr val="1F2A4E"/>
                 </a:solidFill>
               </a:rPr>
-              <a:t>•  Cenário A — 7 classes raciais do FairFace</a:t>
+              <a:t>•  Cenário A — reporte pelas 7 classes raciais do FairFace</a:t>
             </a:r>
           </a:p>
         </p:txBody>
@@ -10825,7 +10825,7 @@
                   <a:srgbClr val="1F2A4E"/>
                 </a:solidFill>
               </a:rPr>
-              <a:t>•  Cenário B — 8 subgrupos raça × gênero</a:t>
+              <a:t>•  Cenário B — reporte pelos 8 subgrupos raça × gênero</a:t>
             </a:r>
           </a:p>
         </p:txBody>
@@ -10859,7 +10859,7 @@
                   <a:srgbClr val="707682"/>
                 </a:solidFill>
               </a:rPr>
-              <a:t>Interseccional segundo Buolamwini &amp; Gebru (2018)</a:t>
+              <a:t>Protocolo interseccional (Buolamwini &amp; Gebru, 2018)</a:t>
             </a:r>
           </a:p>
         </p:txBody>
@@ -11021,7 +11021,7 @@
                   <a:srgbClr val="707682"/>
                 </a:solidFill>
               </a:rPr>
-              <a:t>sementes · bootstrap IC 95 %</a:t>
+              <a:t>sementes · IC 95 % · comparação pareada</a:t>
             </a:r>
           </a:p>
         </p:txBody>
@@ -11090,7 +11090,7 @@
                   <a:srgbClr val="1F2A4E"/>
                 </a:solidFill>
               </a:rPr>
-              <a:t>•  Sementes 42, 1, 2 · comparação pareada</a:t>
+              <a:t>•  Sementes independentes: 42, 1 e 2</a:t>
             </a:r>
           </a:p>
         </p:txBody>
@@ -11124,7 +11124,7 @@
                   <a:srgbClr val="1F2A4E"/>
                 </a:solidFill>
               </a:rPr>
-              <a:t>•  Norma ISO/IEC 19795-10:2024</a:t>
+              <a:t>•  Bootstrap não-paramétrico · norma ISO/IEC 19795-10:2024</a:t>
             </a:r>
           </a:p>
         </p:txBody>
@@ -11281,12 +11281,12 @@
           <a:p>
             <a:pPr algn="ctr"/>
             <a:r>
-              <a:rPr sz="4600" b="1">
+              <a:rPr sz="3600" b="1">
                 <a:solidFill>
                   <a:srgbClr val="1F2A4E"/>
                 </a:solidFill>
               </a:rPr>
-              <a:t>~20 K</a:t>
+              <a:t>RFW · BFW</a:t>
             </a:r>
           </a:p>
         </p:txBody>
@@ -11320,7 +11320,7 @@
                   <a:srgbClr val="707682"/>
                 </a:solidFill>
               </a:rPr>
-              <a:t>pares de verificação externos</a:t>
+              <a:t>dois datasets externos de verificação</a:t>
             </a:r>
           </a:p>
         </p:txBody>
@@ -11389,7 +11389,7 @@
                   <a:srgbClr val="1F2A4E"/>
                 </a:solidFill>
               </a:rPr>
-              <a:t>•  RFW — Racial Faces in-the-Wild (Wang 2019)</a:t>
+              <a:t>•  RFW — 4 raças, pares oficiais 1 : 1 (Wang et al., 2019)</a:t>
             </a:r>
           </a:p>
         </p:txBody>
@@ -11423,7 +11423,7 @@
                   <a:srgbClr val="1F2A4E"/>
                 </a:solidFill>
               </a:rPr>
-              <a:t>•  BFW — Balanced Faces in-the-Wild (Robinson 2020)</a:t>
+              <a:t>•  BFW — 4 raças × 2 gêneros, balanceado (Robinson et al., 2020)</a:t>
             </a:r>
           </a:p>
         </p:txBody>
@@ -11457,7 +11457,7 @@
                   <a:srgbClr val="707682"/>
                 </a:solidFill>
               </a:rPr>
-              <a:t>Foco em African; transferência via feature-freeze</a:t>
+              <a:t>Transferência arquitetural via feature-freeze</a:t>
             </a:r>
           </a:p>
         </p:txBody>

--- a/docs/ativo/material_qualificacao_2026-10-05.pptx
+++ b/docs/ativo/material_qualificacao_2026-10-05.pptx
@@ -11508,7 +11508,7 @@
                   <a:srgbClr val="FFFFFF"/>
                 </a:solidFill>
               </a:rPr>
-              <a:t>Protocolo falsificável</a:t>
+              <a:t>Critério definido antes do experimento</a:t>
             </a:r>
           </a:p>
           <a:p>
@@ -11519,7 +11519,7 @@
                   <a:srgbClr val="B4C4E8"/>
                 </a:solidFill>
               </a:rPr>
-              <a:t>Critérios binários pré-registrados (H1, H4, H5); nenhum ajuste de métrica pós-resultado — alinhado à metodologia popperiana e à norma biométrica.</a:t>
+              <a:t>Para cada hipótese da pesquisa, o valor-limite de aprovação foi fixado antes de rodar os experimentos — o resultado só pode confirmar ou refutar, sem reinterpretar a métrica depois dos dados.</a:t>
             </a:r>
           </a:p>
         </p:txBody>
@@ -12712,7 +12712,7 @@
                   <a:srgbClr val="B4C4E8"/>
                 </a:solidFill>
               </a:rPr>
-              <a:t>Teorema da Impossibilidade (Kleinberg, Mullainathan &amp; Raghavan 2017, ITCS): nenhuma métrica única de equidade satisfaz simultaneamente calibração, equal FPR e equal FNR — reportar as três é a forma honesta de comunicar trade-offs.</a:t>
+              <a:t>Teorema da Impossibilidade (Kleinberg et al., 2017): quando as prevalências diferem entre grupos, nenhuma métrica única satisfaz ao mesmo tempo (1) acertar a probabilidade predita por grupo, (2) mesma taxa de falso positivo entre grupos e (3) mesma taxa de falso negativo entre grupos. Reportar múltiplas é o único jeito honesto.</a:t>
             </a:r>
           </a:p>
         </p:txBody>
